--- a/assets/finance/D14_FI_II_Pricing_Yield_Curve.pptx
+++ b/assets/finance/D14_FI_II_Pricing_Yield_Curve.pptx
@@ -535,7 +535,12 @@
           <a:p>
             <a:r>
               <a:rPr lang="en-US" dirty="0"/>
-              <a:t/>
+              <a:t>ANGLE — Deck 13 described the instruments. This one prices them. Everything today is one equation seen from four angles.
+•  Two hours. §1 and §2 are the exam engine — do not let §1 eat more than 35 min.
+•  Warn them up front: this is the most computational deck of the course. Calculators out.
+•  Every figure here is traceable to the 2025 curriculum, printed page cited on each slide.
+•  Set the spine now: price ⇄ yield ⇄ spread ⇄ curve. Four words, four sections.
+NEXT — Straight to the agenda — the cover is not a talking point.</a:t>
             </a:r>
             <a:endParaRPr lang="en-US" dirty="0"/>
           </a:p>
@@ -623,7 +628,15 @@
           <a:p>
             <a:r>
               <a:rPr lang="en-US" dirty="0"/>
-              <a:t/>
+              <a:t>ANGLE — This is the most practically used technique in the whole module and the one students dismiss as trivial.
+•  Four steps, not three. Step 2 has two halves — solve, then average within the maturity bucket.
+•  Say why it exists: most bonds do not trade today, and a new issue has never traded.
+•  Exhibit 11 lays the comparables out as a grid — coupon down the side, maturity across. Hence "matrix".
+•  Comparables must match on CREDIT first. Same tenor, wrong rating, useless.
+•  Second use: underwriters price a new issue by matrix-pricing the spread off the issuer's own outstanding curve.
+FROM THE DESK — This is exactly how a Bloomberg BVAL price gets built for a bond nobody has traded in weeks — and why a screen price is an estimate, not a print. Ask for the trade history before you trust it.
+ASK THE ROOM — Your issuer has a 3-year and a 7-year outstanding. You are pricing their new 5-year. What could make simple interpolation wrong?
+NEXT — Run the numbers on a real CFA question.</a:t>
             </a:r>
             <a:endParaRPr lang="en-US" dirty="0"/>
           </a:p>
@@ -711,7 +724,14 @@
           <a:p>
             <a:r>
               <a:rPr lang="en-US" dirty="0"/>
-              <a:t/>
+              <a:t>ANGLE — Mechanically simple, but every step is a place to slip. Walk it slowly once and they will never need it walked again.
+•  Step 3 is a straight average only because 4 sits exactly halfway between 3 and 5. Say that — otherwise they will always average.
+•  General form: r₄ = r₃ + [(4−3)/(5−3)] × (r₅ − r₃). Write it on the board.
+•  Note the two comparables have DIFFERENT coupons — that is fine for yields, and it is precisely why we interpolate yields and not prices.
+•  Sanity check the answer: coupon 4.50% above yield 3.153%, so the price must exceed 100. It does.
+•  The exam distractors here are 103.895 and 106.125 — both come from interpolating prices instead of yields.
+FROM THE DESK — A real desk would weight by DV01 and adjust for the coupon effect rather than averaging raw yields. The CFA method is the right first approximation, and it is what the screen does.
+NEXT — Section one done. Now: the yield itself is not one number. Section two.</a:t>
             </a:r>
             <a:endParaRPr lang="en-US" dirty="0"/>
           </a:p>
@@ -799,7 +819,11 @@
           <a:p>
             <a:r>
               <a:rPr lang="en-US" dirty="0"/>
-              <a:t/>
+              <a:t>ANGLE — Section one gave them one yield. This section shows that "the yield" is a family, and that professionals mostly quote the SPREAD instead.
+•  Thirty minutes. Conventions, then callables, then the spread ladder G → I → Z → OAS.
+•  Tell them the punchline now: the spread is where the issuer-specific story lives.
+•  This section has the highest exam density in the deck.
+NEXT — Start with the vocabulary — six yield conventions on one table.</a:t>
             </a:r>
             <a:endParaRPr lang="en-US" dirty="0"/>
           </a:p>
@@ -887,7 +911,14 @@
           <a:p>
             <a:r>
               <a:rPr lang="en-US" dirty="0"/>
-              <a:t/>
+              <a:t>ANGLE — Do not teach this table row by row. Teach the two rows that change an answer: true yield and periodicity.
+•  Current yield is a crude number — no time value, no pull-to-par, no reinvestment. Say "crude" and move on.
+•  True yield ≤ street convention ALWAYS. Weekends and holidays only ever delay a payment, never accelerate it.
+•  Government-equivalent exists for one reason: you cannot subtract a 30/360 yield from an Act/Act yield honestly.
+•  The periodicity callout is the real content on this slide. 4.548% quarterly IS 4.574% semiannual — same cash flows.
+•  Exam trap: a "177 bp" yield pickup that is really 179 bp once the periodicities match.
+FROM THE DESK — In a cross-border comparison the convention gap is bigger than the credit view being expressed. A US corporate at 30/360 versus a gilt at Act/Act — restate before you form an opinion, or you are trading a day count.
+NEXT — Now add an embedded option and the yield stops being a single number at all.</a:t>
             </a:r>
             <a:endParaRPr lang="en-US" dirty="0"/>
           </a:p>
@@ -975,7 +1006,15 @@
           <a:p>
             <a:r>
               <a:rPr lang="en-US" dirty="0"/>
-              <a:t/>
+              <a:t>ANGLE — Five yields on one bond. The point is not the arithmetic — it is that the investor does not choose which one they get.
+•  Each row is the same equation with a different N and a different redemption amount. Nothing new is being taught.
+•  The bond is at a premium (106.50), so the earliest call is the worst outcome — that is the usual pattern.
+•  YTW here = yield-to-first-call = 5.15%. Circle it.
+•  Note the yields rise monotonically here; do not tell them YTW is always the first call — it is whichever is lowest.
+•  YTW is a dealer convention, not a valuation. The precise answer is an option-pricing model — say that and move on.
+FROM THE DESK — High-yield desks quote everything to worst. A screen showing "5.37%" to maturity on a bond that will obviously be called in three years is not a lie, it is just answering a question nobody asked.
+ASK THE ROOM — If VIVU were trading at 92 instead of 106.50, would the yield-to-first-call still be the worst?
+NEXT — That covered the option. Now the second component of any yield: the spread.</a:t>
             </a:r>
             <a:endParaRPr lang="en-US" dirty="0"/>
           </a:p>
@@ -1063,7 +1102,15 @@
           <a:p>
             <a:r>
               <a:rPr lang="en-US" dirty="0"/>
-              <a:t/>
+              <a:t>ANGLE — This is the single most useful idea in the section: a yield is two stories glued together, and only one of them is about the issuer.
+•  Benchmark = macro: real rate, inflation, policy, the cycle. Moves every bond in the market together.
+•  Spread = micro: credit, liquidity, tax. Moves this issuer only.
+•  That decomposition is why an analyst says "we are 20 bps wide to comps" and never "we yield 4.7%".
+•  G vs I is a choice of benchmark curve, not a different concept. USD/GBP/JPY → government. EUR corporates → swaps.
+•  Z is the step change: it stops using a single discount rate.
+FROM THE DESK — A new issue gets priced as "benchmark plus concession". The syndicate argues about the spread, then reads the yield off the screen at pricing. Nobody negotiates a yield — they negotiate basis points.
+ASK THE ROOM — Ten-year Treasuries rally 40 bp and your corporate bond rallies 40 bp. Did the issuer's credit improve?
+NEXT — G-spread with a worked case — including what to do when no matching government bond exists.</a:t>
             </a:r>
             <a:endParaRPr lang="en-US" dirty="0"/>
           </a:p>
@@ -1151,7 +1198,14 @@
           <a:p>
             <a:r>
               <a:rPr lang="en-US" dirty="0"/>
-              <a:t/>
+              <a:t>ANGLE — The whole slide exists to teach one habit: when the benchmark you need does not exist, you build it.
+•  Step 2 is the only place people slip. The 20-year gets the BIGGER weight because 24 is closer to 20.
+•  Show the check line: 0.6×20 + 0.4×30 = 24. If that does not come back to 24, the weights are flipped.
+•  The bond trades at 123.5 — well above par — because a 5.25% coupon against a 3.756% yield is rich.
+•  Spread tightened from 200 to 166. Frame it as the market's verdict on the issuer, not on rates.
+•  Note what G-spread ignores: the shape of the curve between now and year 24. That is the opening for Z-spread.
+FROM THE DESK — Interpolating a benchmark is daily work in EM and in long-dated credit, where the sovereign curve has holes. The number you interpolate onto is a modelling choice — two banks can differ by several basis points on the same bond.
+NEXT — G-spread uses one point on the curve. What if we used all of it?</a:t>
             </a:r>
             <a:endParaRPr lang="en-US" dirty="0"/>
           </a:p>
@@ -1239,7 +1293,14 @@
           <a:p>
             <a:r>
               <a:rPr lang="en-US" dirty="0"/>
-              <a:t/>
+              <a:t>ANGLE — Z-spread is the first measure on the deck that respects the shape of the curve. OAS is the first that respects optionality.
+•  One number added to every spot rate. Not a different number per period — that would be trivially solvable and meaningless.
+•  Solved numerically. Goal Seek or Solver. There is no closed form and nobody expects one.
+•  Do NOT let them memorise "Z is bigger than G". The sign depends on the coupon and the curve slope. What is true is that Z is cleaner.
+•  OAS sign rule — drill it: callable → OAS &lt; Z. Putable → OAS &gt; Z. Ask them to justify it from who owns the option.
+•  "Zero-volatility" is the giveaway: Z prices no optionality at all, which is fine for a bullet bond.
+FROM THE DESK — On a screen, Z-spread is what a credit PM actually compares across bonds with different coupons and maturities. OAS is what they compare across bonds with different call structures. Quoting G-spread on a callable is close to meaningless.
+NEXT — A worked Z-spread — running it forwards, then noting how you would run it backwards.</a:t>
             </a:r>
             <a:endParaRPr lang="en-US" dirty="0"/>
           </a:p>
@@ -1327,7 +1388,14 @@
           <a:p>
             <a:r>
               <a:rPr lang="en-US" dirty="0"/>
-              <a:t/>
+              <a:t>ANGLE — Deliberately run forwards. Once they see the same Z landing on every spot, the reverse solve stops being mysterious.
+•  Emphasise step 1: the spots differ, the Z does not. That is the entire definition.
+•  Contrast with G-spread: there you would have used ONE rate for all three cash flows.
+•  The bond is at 94.20 because 378 bps of credit spread swamps a 5.5% coupon on a ~3.5% government curve.
+•  In practice the price is the observable and Z is the unknown — Goal Seek, change cell Z, objective = quoted price.
+•  If they want a second data point: CFA Example 9 (IIF bond) gives both a G-spread and a Z-spread on the same bond.
+FROM THE DESK — A credit analyst pitches a bond as "trading 40 wide of its own curve on Z". Nobody says the price. Z-spread is the unit of relative value because it is the only one that is comparable across coupons and maturities.
+NEXT — Fixed-rate bonds done. Money-market instruments and floaters play by different rules entirely.</a:t>
             </a:r>
             <a:endParaRPr lang="en-US" dirty="0"/>
           </a:p>
@@ -1415,7 +1483,11 @@
           <a:p>
             <a:r>
               <a:rPr lang="en-US" dirty="0"/>
-              <a:t/>
+              <a:t>ANGLE — The shortest section and the one that generates the most careless errors — because everything here is a convention, not a concept.
+•  Twenty minutes. Two ideas: DR vs AOR, and quoted margin vs discount margin.
+•  Tell them plainly: nothing here is intellectually hard, and it is still where marks are lost.
+•  Frame it as translation. Every instrument speaks a slightly different dialect of "yield".
+NEXT — Money-market conventions first.</a:t>
             </a:r>
             <a:endParaRPr lang="en-US" dirty="0"/>
           </a:p>
@@ -1503,7 +1575,12 @@
           <a:p>
             <a:r>
               <a:rPr lang="en-US" dirty="0"/>
-              <a:t/>
+              <a:t>ANGLE — Show them the arc: one discount rate at the start of the deck, a whole curve by the end.
+•  §1 and §2 carry most of the exam weight — say so, it buys you attention.
+•  §3 is short but is where conventions bite. §4 is the payoff.
+•  Flag the running thread: every section is the same PV equation with a different unknown.
+•  One minute. Do not narrate the sub-bullets.
+NEXT — Objectives, then straight into pricing.</a:t>
             </a:r>
             <a:endParaRPr lang="en-US" dirty="0"/>
           </a:p>
@@ -1591,7 +1668,15 @@
           <a:p>
             <a:r>
               <a:rPr lang="en-US" dirty="0"/>
-              <a:t/>
+              <a:t>ANGLE — Land one idea: a discount rate is not an interest rate. It divides by the wrong number on purpose, for historical reasons.
+•  Interest rate = amount earned ÷ amount invested. DR divides by FV, which already includes the earnings.
+•  So DR always understates the return to the investor and the cost to the issuer. Always in the same direction.
+•  Memorise the instrument split: T-bills, CP and bankers' acceptances on DR; CDs, repos and MRR indices on AOR.
+•  Also flag: 360-day vs 365-day years vary by market. Two conventions, two year bases, four combinations.
+•  BEY is just "AOR on a 365-day year". Nothing deeper than that.
+FROM THE DESK — A treasurer comparing CP against a bank CD is comparing a DR/360 quote to an AOR/365 quote. The apparent pickup can flip sign once you translate — which is precisely why treasury policies mandate a single quoting basis.
+ASK THE ROOM — A T-bill quoted at 4.00% discount — is the investor's actual return above or below 4.00%?
+NEXT — Translate one, end to end.</a:t>
             </a:r>
             <a:endParaRPr lang="en-US" dirty="0"/>
           </a:p>
@@ -1679,7 +1764,14 @@
           <a:p>
             <a:r>
               <a:rPr lang="en-US" dirty="0"/>
-              <a:t/>
+              <a:t>ANGLE — The conclusion flips depending on whether you translate. That is the lesson — not the arithmetic.
+•  Two identical-looking 0.120% quotes. One is worth more. Ask them which BEFORE you show step 1.
+•  Step 2 has two moves at once: change the denominator from FV to PV, and change the year from 360 to 365.
+•  Both moves push the same way — so a DR quote always converts UP to its BEY.
+•  Note the CD needs no conversion because it is already an AOR on 365. That is what "bond-equivalent" means.
+•  Flag the footnote honestly — the printed setup line and the printed solution disagree. Good practice in reading sources.
+FROM THE DESK — On a short-dated desk this conversion is invisible because the systems do it, but the risk is real: a portfolio benchmarked on one basis and traded on another will show phantom outperformance of a couple of basis points forever.
+NEXT — Money-market instruments have no coupon at all. Floaters have a coupon that keeps changing.</a:t>
             </a:r>
             <a:endParaRPr lang="en-US" dirty="0"/>
           </a:p>
@@ -1767,7 +1859,14 @@
           <a:p>
             <a:r>
               <a:rPr lang="en-US" dirty="0"/>
-              <a:t/>
+              <a:t>ANGLE — The FRN is the fixed-rate bond with one substitution: coupon rate → quoted margin, YTM → discount margin. Say that and the whole slide collapses to something familiar.
+•  Point at the formula: QM is in the numerator (it sets the cash flow), DM is in the denominator (it discounts it).
+•  QM is frozen at issuance. DM moves with credit. Premium/discount is entirely a credit story.
+•  Map it back to slide 6: coupon vs YTM there, quoted margin vs required margin here. Identical logic.
+•  Rate risk is small but NOT zero — it lives in the stub between now and the next reset.
+•  CFA language check: "required margin" is the market spread; "discount margin" is our model estimate of it.
+FROM THE DESK — Loan and FRN investors quote everything in discount margin because the reference rate is a pass-through. When SOFR moves 100 bp, an FRN book barely blinks — a fixed-rate book of the same duration does not.
+NEXT — Solve one for its discount margin.</a:t>
             </a:r>
             <a:endParaRPr lang="en-US" dirty="0"/>
           </a:p>
@@ -1855,7 +1954,15 @@
           <a:p>
             <a:r>
               <a:rPr lang="en-US" dirty="0"/>
-              <a:t/>
+              <a:t>ANGLE — Same solve as a bond YTM, with one extra unwinding step at the end. Step 5 is what makes it click.
+•  Step 1 only: (MRR + QM). Quoted margin sets the cash flow. Everyone gets this right.
+•  Step 2 is just Excel RATE. Nothing conceptual — flag that PV goes in negative.
+•  Step 3 is the step people forget: r is a PERIODIC rate, so multiply by m before you subtract MRR.
+•  Sign discipline: MRR is negative here. −(−0.0055) = +0.0055. Watch them, they will drop it.
+•  Step 5 closes the loop — the 3-point discount IS the present value of a 79 bp annuity. Same idea as slide 7.
+FROM THE DESK — A negative reference rate is not an exam artefact — EUR markets lived there for years, and plenty of loan systems broke on it. Floors at zero in the loan docs are why the FRN and the swap hedging it can stop matching.
+ASK THE ROOM — If the same note traded at 102 instead of 97, would the discount margin be above or below 250 bps?
+NEXT — Everything so far used one discount rate, or one spread over one curve. Time to build the curve itself.</a:t>
             </a:r>
             <a:endParaRPr lang="en-US" dirty="0"/>
           </a:p>
@@ -1943,7 +2050,11 @@
           <a:p>
             <a:r>
               <a:rPr lang="en-US" dirty="0"/>
-              <a:t/>
+              <a:t>ANGLE — The payoff section. Three curves that look different and carry exactly the same information.
+•  Thirty-five minutes, and protect it. If you are behind, cut §1 examples, not this.
+•  Sequence: spot → price with spots → par → forward → bootstrap. Each builds on the last.
+•  Say up front that any one of the three curves determines the other two. That is the whole section.
+NEXT — Start with the cleanest rate there is: the zero-coupon yield.</a:t>
             </a:r>
             <a:endParaRPr lang="en-US" dirty="0"/>
           </a:p>
@@ -2031,7 +2142,14 @@
           <a:p>
             <a:r>
               <a:rPr lang="en-US" dirty="0"/>
-              <a:t/>
+              <a:t>ANGLE — A spot rate is a yield with no reinvestment assumption attached. That single property is why term-structure work is done on spots.
+•  Definition first: the yield on a zero-coupon bond of that maturity. One cash flow, one date, one rate.
+•  Contrast with YTM: a YTM assumes you reinvest coupons at the YTM. A spot rate assumes nothing.
+•  Read the table across, not down — both curves rise, Australia starts lower and ends higher.
+•  The footnote is worth saying aloud: a coupon bond's YTM lands just BELOW the same-maturity spot on a rising curve.
+•  Do not go deep on inversion here — one sentence, then move.
+FROM THE DESK — When the curve inverts, the first thing a DCM desk does is check the issuance window. Long money gets cheap relative to short money and every treasurer suddenly wants a 30-year. That is a real-world consequence of a slope.
+NEXT — If we have a rate for every maturity, why would we ever discount everything at one rate?</a:t>
             </a:r>
             <a:endParaRPr lang="en-US" dirty="0"/>
           </a:p>
@@ -2119,7 +2237,13 @@
           <a:p>
             <a:r>
               <a:rPr lang="en-US" dirty="0"/>
-              <a:t/>
+              <a:t>ANGLE — Two truths held together: spot pricing is correct, YTM pricing is convenient. Students want one to be wrong.
+•  The strip argument is the whole justification. Walk it once — buy bond, sell the pieces, pocket the difference.
+•  Note the parenthetical: adding a constant spread to every spot IS the Z-spread. Point back to slide 17.
+•  Both methods give the SAME price when the YTM is the one implied by the spots. That is the next slide.
+•  What differs is the PV of each individual cash flow, not the total. Preview that — it surprises people.
+FROM THE DESK — STRIPS markets exist precisely because this arbitrage is real. Where a strip market is liquid, the spot curve is an observable, not a model output — and that is where curve traders prefer to work.
+NEXT — Same bond, both methods, same answer. Watch the individual cash flows disagree.</a:t>
             </a:r>
             <a:endParaRPr lang="en-US" dirty="0"/>
           </a:p>
@@ -2207,7 +2331,14 @@
           <a:p>
             <a:r>
               <a:rPr lang="en-US" dirty="0"/>
-              <a:t/>
+              <a:t>ANGLE — The reveal is step 5. The two methods agree on the total and disagree on every single component.
+•  Do steps 1–3 briskly. They are just arithmetic and the class can follow.
+•  Slow right down on step 5. Same price, different PVs. Ask why that is not a contradiction.
+•  Answer: the YTM is the one rate that makes the errors cancel across the timeline. It over-discounts early, under-discounts late.
+•  Note where the YTM lands — 3.935%, close to but below Z₃ = 4%, because the final cash flow dominates.
+•  Tie it to §2: this is exactly why a G-spread is contaminated by the coupon and a Z-spread is not.
+ASK THE ROOM — If the coupon were 1% instead of 5%, would the YTM move closer to or further from the three-year spot?
+NEXT — Third lens on the same curve: the par rate.</a:t>
             </a:r>
             <a:endParaRPr lang="en-US" dirty="0"/>
           </a:p>
@@ -2295,7 +2426,14 @@
           <a:p>
             <a:r>
               <a:rPr lang="en-US" dirty="0"/>
-              <a:t/>
+              <a:t>ANGLE — Par rate is the least intuitive of the three curves. Anchor it as "the coupon on a hypothetical new issue" and it lands.
+•  Same equation as slide 26 with two changes: PV is fixed at 100, and PMT becomes the unknown.
+•  Because the price is par, the coupon and the YTM are equal — that is why a par rate is a yield.
+•  Why bother? The US Treasury curve you read in the press IS a par curve. So is most quoted swap curve data.
+•  Curve-shape rule, upward case: the par rate blends in the LOW early spots, so it comes out below the long spot.
+•  Do not let them confuse "par rate" with "on-the-run yield". Close cousins, not the same thing.
+FROM THE DESK — When a syndicate desk says a new ten-year would come "at par with a 4.75% coupon", they are quoting a par rate. That is the number the issuer cares about, because it is the cash coupon they will actually pay.
+NEXT — Compute two of them from a real spot curve.</a:t>
             </a:r>
             <a:endParaRPr lang="en-US" dirty="0"/>
           </a:p>
@@ -2383,7 +2521,14 @@
           <a:p>
             <a:r>
               <a:rPr lang="en-US" dirty="0"/>
-              <a:t/>
+              <a:t>ANGLE — Mechanically this is one line of algebra. The insight is that the par rate always sits inside the spot curve, never outside it.
+•  Show the factoring: PMT × (sum of all discount factors) + 100 × (last discount factor) = 100. Then rearrange. Steps 2 and 3 are one move split in two.
+•  The numerator 100 − 89.648 is "the part of par not covered by the redemption PV". The coupons must fund it.
+•  Every par rate here is below its own spot, and the gap WIDENS with maturity — 0.010 at 2y, 0.053 at 3y, 0.109 at 4y.
+•  That widening is the curve-shape rule from the previous slide, showing up numerically.
+•  Step 5 is the verification — worth doing on the board, it closes the loop.
+ASK THE ROOM — On an inverted curve, would the par rate sit above or below the spot at the same maturity — and why?
+NEXT — Two curves down. The third one is the interesting one: forwards.</a:t>
             </a:r>
             <a:endParaRPr lang="en-US" dirty="0"/>
           </a:p>
@@ -2471,7 +2616,12 @@
           <a:p>
             <a:r>
               <a:rPr lang="en-US" dirty="0"/>
-              <a:t/>
+              <a:t>ANGLE — Objective 2 is the one they will skip and the one the exam loves — the three YTM conditions.
+•  Read objectives 1 and 4 aloud; skim the rest.
+•  Tell them: if you can only master one thing today, make it the bootstrap in §4.
+•  Warn that "yield" is not one number — the deck defines at least eight of them.
+•  Ninety seconds maximum.
+NEXT — Section one. Back to first principles: what is a bond price?</a:t>
             </a:r>
             <a:endParaRPr lang="en-US" dirty="0"/>
           </a:p>
@@ -2559,7 +2709,15 @@
           <a:p>
             <a:r>
               <a:rPr lang="en-US" dirty="0"/>
-              <a:t/>
+              <a:t>ANGLE — Two things students get wrong: the notation, and believing the forward is a prediction. Fix both here.
+•  Drill the notation with two examples: 2y1y needs the 2y and 3y spots; 3y2y needs the 3y and 5y spots.
+•  Rule of thumb: A + tenor = the LONGER spot you need. If they can state that, the off-by-one error disappears.
+•  Say it plainly: the forward is not a forecast. It is the rate at which the two strategies tie.
+•  Nobody is obliged to agree with the forward — a view IS a disagreement with the forward.
+•  The two arrows on the right are the same equation read left-to-right and right-to-left. Say so.
+FROM THE DESK — Every carry-and-roll trade is a bet against the forwards. "The curve is pricing four cuts and I only see two" is literally a statement that the forwards are too low.
+ASK THE ROOM — Which two spot rates do you need to compute the 5y5y forward?
+NEXT — Compute one, exactly as the curriculum does it.</a:t>
             </a:r>
             <a:endParaRPr lang="en-US" dirty="0"/>
           </a:p>
@@ -2647,7 +2805,14 @@
           <a:p>
             <a:r>
               <a:rPr lang="en-US" dirty="0"/>
-              <a:t/>
+              <a:t>ANGLE — A 53 bp difference between two spots implies a 161 bp jump in the one-year forward. Let that land — forwards amplify.
+•  Have them predict the answer before you compute: "3.65 to 4.18, so the forward is roughly…". Most will guess ~4.7%.
+•  Then reveal 5.79%. The gap between intuition and arithmetic is the teaching moment.
+•  Why: the fourth year must pull a three-year average of 3.65% up to a four-year average of 4.18% single-handedly.
+•  Step 5 is the sanity rule — on a rising curve the forward always sits above the longer spot.
+•  The callout is the decision rule straight from the curriculum. Read it, do not paraphrase it.
+FROM THE DESK — This is the arithmetic behind "the curve is pricing a lot of hikes". A modestly steep spot curve implies dramatic forward rates, which is why forward-implied paths so often look more aggressive than any economist's forecast.
+NEXT — Three curves, one information set. Put them side by side.</a:t>
             </a:r>
             <a:endParaRPr lang="en-US" dirty="0"/>
           </a:p>
@@ -2735,7 +2900,14 @@
           <a:p>
             <a:r>
               <a:rPr lang="en-US" dirty="0"/>
-              <a:t/>
+              <a:t>ANGLE — One table to memorise for the exam, and one piece of intuition so they never have to.
+•  Give them the intuition first: forwards are marginal rates, spots are averages, par rates are averages of averages.
+•  On a rising curve: forwards on top, spots in the middle, par at the bottom. Invert everything when the curve inverts.
+•  The flat row is the giveaway — if all three are equal, there is nothing being expected.
+•  Read the numeric callout: forwards 1.88 → 4.12 produce spots 1.88 → 3.07. The spot curve is the smoothed version.
+•  Point out the spread and par curves are always CLOSE; forwards are the one that diverges materially.
+FROM THE DESK — Traders quote off forwards, issuers think in par rates, and risk systems discount off spots. Same curve, three teams, three vocabularies — and most cross-desk confusion is exactly this translation failing.
+NEXT — Last piece: build the spot curve yourself, from nothing but observed par bonds.</a:t>
             </a:r>
             <a:endParaRPr lang="en-US" dirty="0"/>
           </a:p>
@@ -2823,7 +2995,15 @@
           <a:p>
             <a:r>
               <a:rPr lang="en-US" dirty="0"/>
-              <a:t/>
+              <a:t>ANGLE — This is the single most examinable technique in §4 and the one that most rewards doing slowly once.
+•  Say the name: bootstrap, because each answer pulls the next one up by its own straps.
+•  Z₁ is free — a one-year par bond has one cash flow, so it already is a zero.
+•  For Z₂ the ONLY unknown is Z₂, because Z₁ is already solved. Emphasise that every step has exactly one unknown.
+•  Watch the substitution in the Z₃ line: 1.02 and 1.02506 are spots, not the 3% coupon. That is the classic slip.
+•  Check the answer against slide 28: rising curve, so every spot sits at or above its own par rate. It does.
+FROM THE DESK — Real curve construction bootstraps off swap rates and on-the-run governments, with interpolation and a smoothing spline between the observable nodes. The mechanic here is exactly the same — there are just more knots.
+ASK THE ROOM — If the three-year par bond had a 2.5% coupon instead of 3%, would Z₃ come out higher or lower?
+NEXT — That closes the loop. Let us pull the whole deck together.</a:t>
             </a:r>
             <a:endParaRPr lang="en-US" dirty="0"/>
           </a:p>
@@ -2911,7 +3091,13 @@
           <a:p>
             <a:r>
               <a:rPr lang="en-US" dirty="0"/>
-              <a:t/>
+              <a:t>ANGLE — Do not re-teach. Name each line, pause, move on — and close on the one sentence that ties the whole deck together.
+•  Three minutes maximum. They have the deck.
+•  If time is short, read bullets 2, 5, 6 and 8 — the highest-yield exam points in the module.
+•  The three most reliable traps: reinvestment AT the YTM, the OAS sign for putables, and the forward-rate off-by-one.
+•  Close on the spine: one cash-flow stream, one discounting equation, and every measure today is that equation solved for a different unknown.
+•  Point ahead: Deck 15 asks how much the price moves when the yield moves. Duration and convexity.
+ASK THE ROOM — Pick any bond you can see a screen price for. Which of today's eight yield measures would you quote it on, and to whom?</a:t>
             </a:r>
             <a:endParaRPr lang="en-US" dirty="0"/>
           </a:p>
@@ -2999,7 +3185,11 @@
           <a:p>
             <a:r>
               <a:rPr lang="en-US" dirty="0"/>
-              <a:t/>
+              <a:t>ANGLE — Thirty-five minutes. Five ideas: PV identity, the three regimes, YTM and what it assumes, accrued interest, matrix pricing.
+•  Say the destination: by the end of §1 they can price any plain-vanilla bond on any date.
+•  Ask for a show of hands on who has used a bond calculator — calibrates your pace.
+•  Keep the pace up here; §4 needs the time more than §1 does.
+NEXT — Start with the identity everything else is built on.</a:t>
             </a:r>
             <a:endParaRPr lang="en-US" dirty="0"/>
           </a:p>
@@ -3087,7 +3277,15 @@
           <a:p>
             <a:r>
               <a:rPr lang="en-US" dirty="0"/>
-              <a:t/>
+              <a:t>ANGLE — They already know DCF. The only new thing is that the cash flows are contractual — so all the drama sits in r.
+•  Write the equation once on the board. Say "this is the whole deck" and mean it.
+•  Stress PER PERIOD: a semiannual bond means n×2 periods at r/2. Half of all errors start here.
+•  Inverse relationship: rate up, price down. Have them say it back.
+•  Convexity: the price gain from −80 bp beats the price loss from +80 bp. Do not prove it, just plant it.
+•  Long + low coupon = most sensitive. Preview Deck 15 in one sentence, no more.
+FROM THE DESK — Nobody on a desk talks about price. They talk about yield or spread and let the calculator produce the price — because price is not comparable across coupons and maturities, and spread is.
+ASK THE ROOM — A 30-year zero and a 2-year 6% bond both yield 4%. Rates rise 50 bp. Which one hurts more, and why?
+NEXT — If price moves inversely with r, what happens when coupon and r disagree? Three regimes.</a:t>
             </a:r>
             <a:endParaRPr lang="en-US" dirty="0"/>
           </a:p>
@@ -3175,7 +3373,15 @@
           <a:p>
             <a:r>
               <a:rPr lang="en-US" dirty="0"/>
-              <a:t/>
+              <a:t>ANGLE — Students memorise the three regimes and then state them backwards under pressure. Give them the causal story instead of the rule.
+•  Do not read the table. Ask: "coupon 1.6%, market wants 2.0% — is this bond worth more or less than par?"
+•  Land the mechanism: the gap IS the present value of the coupon shortfall. −0.4 per period for 10 periods = −3.59.
+•  Pull-to-par: price converges to 100 even with the yield frozen. A premium bond loses price every year on purpose.
+•  The three YTM conditions: read them slowly. Condition 3 is the one they get wrong.
+•  Reinvestment is AT the YTM — not at the coupon rate, not at "market rates".
+FROM THE DESK — This is why a high-coupon premium bond is not a "high-yield" bond. Retail investors buy the coupon; the amortisation of the premium quietly gives it back. Total return is the only honest measure.
+ASK THE ROOM — A bond pays a 6% coupon and yields 4%. Does its price rise or fall over the next year if yields do not move?
+NEXT — Put a number on it. A real CFA discount bond, priced from scratch.</a:t>
             </a:r>
             <a:endParaRPr lang="en-US" dirty="0"/>
           </a:p>
@@ -3263,7 +3469,14 @@
           <a:p>
             <a:r>
               <a:rPr lang="en-US" dirty="0"/>
-              <a:t/>
+              <a:t>ANGLE — Two things to land: the periodicity conversion, and that the discount is not a mystery — it is an annuity you can compute.
+•  Make them do step 1 out loud before you show it. n = 10, PMT = 1.625, r = 2%. Every error today starts here.
+•  Common trap: 5 periods at 4%, or 10 periods at 4%. Both give the wrong answer and look plausible.
+•  The cross-check in step 5 is the payoff — it ties the price straight back to Exhibit 1 on the last slide.
+•  Note the answer is 96.632, NOT 96.661 — that distractor is the annual-compounding version.
+•  Excel shortcut worth showing: =-PV(0.02,10,1.625,100,0) and =PRICE(...) both return 96.632.
+FROM THE DESK — On a desk you would never build the annuity by hand — but you always sanity-check the sign. Coupon under the market rate and the model spits out a premium? The day count or the frequency is wrong.
+NEXT — That was pricing on a coupon date. Trades settle on other days — which is where accrued interest arrives.</a:t>
             </a:r>
             <a:endParaRPr lang="en-US" dirty="0"/>
           </a:p>
@@ -3351,7 +3564,15 @@
           <a:p>
             <a:r>
               <a:rPr lang="en-US" dirty="0"/>
-              <a:t/>
+              <a:t>ANGLE — This is a quotation convention, not a valuation idea. Say that first and the confusion disappears.
+•  Draw the sawtooth on the board: full price ramps up, drops on the coupon date, ramps again. Flat price is the smooth line under it.
+•  The buyer receives the WHOLE next coupon, so they must pay the seller for the part the seller earned.
+•  Say it twice: accrued interest does not depend on the yield. Only the flat price does.
+•  Second formula is the practical route — price it on the last coupon date, then grow it forward by (1+r)^(t/T).
+•  Day count: Act/Act for governments, 30/360 for corporates. It changes AI by a few cents, not by a lot.
+FROM THE DESK — Settlement fails and coupon-date disputes are almost always an accrued-interest disagreement, not a price disagreement. Two desks agree on the flat price and still argue about the wire.
+ASK THE ROOM — The bond trades flat at 99.00 and 60 of 180 days have passed on a 4% semiannual coupon. What do you actually pay?
+NEXT — Full worked version, on a real sovereign, mid-coupon-period.</a:t>
             </a:r>
             <a:endParaRPr lang="en-US" dirty="0"/>
           </a:p>
@@ -3439,7 +3660,14 @@
           <a:p>
             <a:r>
               <a:rPr lang="en-US" dirty="0"/>
-              <a:t/>
+              <a:t>ANGLE — The mechanical steps are easy. What trips people is choosing the right anchor date and the right number of coupons.
+•  Eighteen coupons, not seventeen — count from the NEXT coupon (Apr 2032) to maturity (Apr 2049) inclusive.
+•  Anchor on the last coupon date, price there, then compound forward by the fraction of the period elapsed.
+•  Point at the leap year: T = 366, not 365. Act/Act means actual.
+•  AI = 0.69945 × 4.625. No yield anywhere in that line — say it out loud.
+•  The bond is at a big premium (114.400) because a 4.625% coupon against a 3.50% yield is generous.
+FROM THE DESK — Sovereign eurobonds like this one are quoted flat and settle full across Euroclear. When a client queries "the price you showed me was 114.40, why is the invoice 117.64", this slide is the answer.
+NEXT — Both examples assumed we could see a price. Most bonds never trade. So how do you price those?</a:t>
             </a:r>
             <a:endParaRPr lang="en-US" dirty="0"/>
           </a:p>
@@ -4190,7 +4418,7 @@
                 <a:ea typeface="Trebuchet MS" pitchFamily="34" charset="-122"/>
                 <a:cs typeface="Trebuchet MS" pitchFamily="34" charset="-120"/>
               </a:rPr>
-              <a:t>Matrix pricing estimates the yield on an illiquid or new bond by interpolating across comparable traded bonds of similar credit and tenor</a:t>
+              <a:t>Matrix pricing estimates the yield of an illiquid or unissued bond from a grid of actively traded comparables — a four-step process</a:t>
             </a:r>
             <a:endParaRPr lang="en-US" sz="1600" dirty="0"/>
           </a:p>
@@ -4294,7 +4522,7 @@
                 <a:ea typeface="Calibri" pitchFamily="34" charset="-122"/>
                 <a:cs typeface="Calibri" pitchFamily="34" charset="-120"/>
               </a:rPr>
-              <a:t>Source: CFA Institute, Curriculum Vol 6, LM 6, §4 "Matrix Pricing", pp. 155–163.</a:t>
+              <a:t>Source: CFA Institute, Curriculum Vol 6, LM 6, §4 "Matrix Pricing", Exhibits 8–11, pp. 146–149.</a:t>
             </a:r>
             <a:endParaRPr lang="en-US" sz="750" dirty="0"/>
           </a:p>
@@ -4336,7 +4564,7 @@
                 <a:ea typeface="Calibri" pitchFamily="34" charset="-122"/>
                 <a:cs typeface="Calibri" pitchFamily="34" charset="-120"/>
               </a:rPr>
-              <a:t>Most bonds trade thinly. When no recent print exists, pricing teams use comparable bonds as a proxy — widely used in dealer quotes.</a:t>
+              <a:t>Unlike listed equities, most bonds are not actively traded — and a bond that has not been issued yet has no price at all. Comparables fill the gap.</a:t>
             </a:r>
             <a:endParaRPr lang="en-US" sz="1300" dirty="0"/>
           </a:p>
@@ -4350,8 +4578,8 @@
         </p:nvSpPr>
         <p:spPr>
           <a:xfrm>
-            <a:off x="320040" y="1234440"/>
-            <a:ext cx="8503920" cy="566928"/>
+            <a:off x="320040" y="1170432"/>
+            <a:ext cx="8503920" cy="457200"/>
           </a:xfrm>
           <a:prstGeom prst="rect">
             <a:avLst/>
@@ -4370,8 +4598,8 @@
         </p:nvSpPr>
         <p:spPr>
           <a:xfrm>
-            <a:off x="411480" y="1234440"/>
-            <a:ext cx="8321040" cy="566928"/>
+            <a:off x="411480" y="1170432"/>
+            <a:ext cx="8321040" cy="457200"/>
           </a:xfrm>
           <a:prstGeom prst="rect">
             <a:avLst/>
@@ -4398,7 +4626,7 @@
                 <a:ea typeface="Consolas" pitchFamily="34" charset="-122"/>
                 <a:cs typeface="Consolas" pitchFamily="34" charset="-120"/>
               </a:rPr>
-              <a:t>YTM_new  ≈  linear interpolation of YTMs of comparable bonds by time-to-maturity</a:t>
+              <a:t>YTM_target  ≈  linear interpolation of comparable YTMs by time-to-maturity</a:t>
             </a:r>
             <a:endParaRPr lang="en-US" sz="1800" dirty="0"/>
           </a:p>
@@ -4412,8 +4640,8 @@
         </p:nvSpPr>
         <p:spPr>
           <a:xfrm>
-            <a:off x="320040" y="1965960"/>
-            <a:ext cx="8503920" cy="658368"/>
+            <a:off x="320040" y="1700784"/>
+            <a:ext cx="8503920" cy="621792"/>
           </a:xfrm>
           <a:prstGeom prst="rect">
             <a:avLst/>
@@ -4432,8 +4660,8 @@
         </p:nvSpPr>
         <p:spPr>
           <a:xfrm>
-            <a:off x="320040" y="1965960"/>
-            <a:ext cx="91440" cy="658368"/>
+            <a:off x="320040" y="1700784"/>
+            <a:ext cx="91440" cy="621792"/>
           </a:xfrm>
           <a:prstGeom prst="rect">
             <a:avLst/>
@@ -4452,8 +4680,8 @@
         </p:nvSpPr>
         <p:spPr>
           <a:xfrm>
-            <a:off x="502920" y="1965960"/>
-            <a:ext cx="365760" cy="658368"/>
+            <a:off x="502920" y="1700784"/>
+            <a:ext cx="365760" cy="621792"/>
           </a:xfrm>
           <a:prstGeom prst="rect">
             <a:avLst/>
@@ -4494,8 +4722,8 @@
         </p:nvSpPr>
         <p:spPr>
           <a:xfrm>
-            <a:off x="868680" y="2002536"/>
-            <a:ext cx="7863840" cy="296266"/>
+            <a:off x="868680" y="1737360"/>
+            <a:ext cx="7863840" cy="279806"/>
           </a:xfrm>
           <a:prstGeom prst="rect">
             <a:avLst/>
@@ -4522,7 +4750,7 @@
                 <a:ea typeface="Trebuchet MS" pitchFamily="34" charset="-122"/>
                 <a:cs typeface="Trebuchet MS" pitchFamily="34" charset="-120"/>
               </a:rPr>
-              <a:t>STEP 1 — Identify comparables</a:t>
+              <a:t>IDENTIFY COMPARABLES</a:t>
             </a:r>
             <a:endParaRPr lang="en-US" sz="1200" dirty="0"/>
           </a:p>
@@ -4536,8 +4764,8 @@
         </p:nvSpPr>
         <p:spPr>
           <a:xfrm>
-            <a:off x="868680" y="2262226"/>
-            <a:ext cx="7863840" cy="362102"/>
+            <a:off x="868680" y="1980590"/>
+            <a:ext cx="7863840" cy="341986"/>
           </a:xfrm>
           <a:prstGeom prst="rect">
             <a:avLst/>
@@ -4564,7 +4792,7 @@
                 <a:ea typeface="Calibri" pitchFamily="34" charset="-122"/>
                 <a:cs typeface="Calibri" pitchFamily="34" charset="-120"/>
               </a:rPr>
-              <a:t>Select bonds with similar credit quality, coupon rate, seniority, and (ideally) currency. Recent prints required.</a:t>
+              <a:t>Similar time-to-maturity, coupon rate and credit quality. Recent prints only.</a:t>
             </a:r>
             <a:endParaRPr lang="en-US" sz="1200" dirty="0"/>
           </a:p>
@@ -4578,8 +4806,8 @@
         </p:nvSpPr>
         <p:spPr>
           <a:xfrm>
-            <a:off x="320040" y="2697480"/>
-            <a:ext cx="8503920" cy="658368"/>
+            <a:off x="320040" y="2377440"/>
+            <a:ext cx="8503920" cy="621792"/>
           </a:xfrm>
           <a:prstGeom prst="rect">
             <a:avLst/>
@@ -4598,8 +4826,8 @@
         </p:nvSpPr>
         <p:spPr>
           <a:xfrm>
-            <a:off x="320040" y="2697480"/>
-            <a:ext cx="91440" cy="658368"/>
+            <a:off x="320040" y="2377440"/>
+            <a:ext cx="91440" cy="621792"/>
           </a:xfrm>
           <a:prstGeom prst="rect">
             <a:avLst/>
@@ -4618,8 +4846,8 @@
         </p:nvSpPr>
         <p:spPr>
           <a:xfrm>
-            <a:off x="502920" y="2697480"/>
-            <a:ext cx="365760" cy="658368"/>
+            <a:off x="502920" y="2377440"/>
+            <a:ext cx="365760" cy="621792"/>
           </a:xfrm>
           <a:prstGeom prst="rect">
             <a:avLst/>
@@ -4660,8 +4888,8 @@
         </p:nvSpPr>
         <p:spPr>
           <a:xfrm>
-            <a:off x="868680" y="2734056"/>
-            <a:ext cx="7863840" cy="296266"/>
+            <a:off x="868680" y="2414016"/>
+            <a:ext cx="7863840" cy="279806"/>
           </a:xfrm>
           <a:prstGeom prst="rect">
             <a:avLst/>
@@ -4688,7 +4916,7 @@
                 <a:ea typeface="Trebuchet MS" pitchFamily="34" charset="-122"/>
                 <a:cs typeface="Trebuchet MS" pitchFamily="34" charset="-120"/>
               </a:rPr>
-              <a:t>STEP 2 — Compute each comparable YTM</a:t>
+              <a:t>BACK OUT EACH YTM, THEN AVERAGE</a:t>
             </a:r>
             <a:endParaRPr lang="en-US" sz="1200" dirty="0"/>
           </a:p>
@@ -4702,8 +4930,8 @@
         </p:nvSpPr>
         <p:spPr>
           <a:xfrm>
-            <a:off x="868680" y="2993746"/>
-            <a:ext cx="7863840" cy="362102"/>
+            <a:off x="868680" y="2657246"/>
+            <a:ext cx="7863840" cy="341986"/>
           </a:xfrm>
           <a:prstGeom prst="rect">
             <a:avLst/>
@@ -4730,7 +4958,7 @@
                 <a:ea typeface="Calibri" pitchFamily="34" charset="-122"/>
                 <a:cs typeface="Calibri" pitchFamily="34" charset="-120"/>
               </a:rPr>
-              <a:t>Back out YTM for each from observed flat prices using the standard PV equation. Confirm day-count conventions match.</a:t>
+              <a:t>Solve each comparable price for its yield, then average the yields within each maturity bucket.</a:t>
             </a:r>
             <a:endParaRPr lang="en-US" sz="1200" dirty="0"/>
           </a:p>
@@ -4744,8 +4972,8 @@
         </p:nvSpPr>
         <p:spPr>
           <a:xfrm>
-            <a:off x="320040" y="3429000"/>
-            <a:ext cx="8503920" cy="658368"/>
+            <a:off x="320040" y="3054096"/>
+            <a:ext cx="8503920" cy="621792"/>
           </a:xfrm>
           <a:prstGeom prst="rect">
             <a:avLst/>
@@ -4764,8 +4992,8 @@
         </p:nvSpPr>
         <p:spPr>
           <a:xfrm>
-            <a:off x="320040" y="3429000"/>
-            <a:ext cx="91440" cy="658368"/>
+            <a:off x="320040" y="3054096"/>
+            <a:ext cx="91440" cy="621792"/>
           </a:xfrm>
           <a:prstGeom prst="rect">
             <a:avLst/>
@@ -4784,8 +5012,8 @@
         </p:nvSpPr>
         <p:spPr>
           <a:xfrm>
-            <a:off x="502920" y="3429000"/>
-            <a:ext cx="365760" cy="658368"/>
+            <a:off x="502920" y="3054096"/>
+            <a:ext cx="365760" cy="621792"/>
           </a:xfrm>
           <a:prstGeom prst="rect">
             <a:avLst/>
@@ -4826,8 +5054,8 @@
         </p:nvSpPr>
         <p:spPr>
           <a:xfrm>
-            <a:off x="868680" y="3465576"/>
-            <a:ext cx="7863840" cy="296266"/>
+            <a:off x="868680" y="3090672"/>
+            <a:ext cx="7863840" cy="279806"/>
           </a:xfrm>
           <a:prstGeom prst="rect">
             <a:avLst/>
@@ -4854,7 +5082,7 @@
                 <a:ea typeface="Trebuchet MS" pitchFamily="34" charset="-122"/>
                 <a:cs typeface="Trebuchet MS" pitchFamily="34" charset="-120"/>
               </a:rPr>
-              <a:t>STEP 3 — Interpolate to target tenor</a:t>
+              <a:t>INTERPOLATE TO THE TARGET TENOR</a:t>
             </a:r>
             <a:endParaRPr lang="en-US" sz="1200" dirty="0"/>
           </a:p>
@@ -4868,8 +5096,8 @@
         </p:nvSpPr>
         <p:spPr>
           <a:xfrm>
-            <a:off x="868680" y="3725266"/>
-            <a:ext cx="7863840" cy="362102"/>
+            <a:off x="868680" y="3333902"/>
+            <a:ext cx="7863840" cy="341986"/>
           </a:xfrm>
           <a:prstGeom prst="rect">
             <a:avLst/>
@@ -4896,7 +5124,173 @@
                 <a:ea typeface="Calibri" pitchFamily="34" charset="-122"/>
                 <a:cs typeface="Calibri" pitchFamily="34" charset="-120"/>
               </a:rPr>
-              <a:t>Linearly weight the comparable YTMs by maturity distance from the target bond. Apply to target's cash flows to get price.</a:t>
+              <a:t>Linear interpolation between the bracketing buckets gives the target bond's estimated yield.</a:t>
+            </a:r>
+            <a:endParaRPr lang="en-US" sz="1200" dirty="0"/>
+          </a:p>
+        </p:txBody>
+      </p:sp>
+      <p:sp>
+        <p:nvSpPr>
+          <p:cNvPr id="26" name="Shape 24"/>
+          <p:cNvSpPr/>
+          <p:nvPr/>
+        </p:nvSpPr>
+        <p:spPr>
+          <a:xfrm>
+            <a:off x="320040" y="3730752"/>
+            <a:ext cx="8503920" cy="621792"/>
+          </a:xfrm>
+          <a:prstGeom prst="rect">
+            <a:avLst/>
+          </a:prstGeom>
+          <a:solidFill>
+            <a:srgbClr val="F5F7FA"/>
+          </a:solidFill>
+          <a:ln/>
+        </p:spPr>
+      </p:sp>
+      <p:sp>
+        <p:nvSpPr>
+          <p:cNvPr id="27" name="Shape 25"/>
+          <p:cNvSpPr/>
+          <p:nvPr/>
+        </p:nvSpPr>
+        <p:spPr>
+          <a:xfrm>
+            <a:off x="320040" y="3730752"/>
+            <a:ext cx="91440" cy="621792"/>
+          </a:xfrm>
+          <a:prstGeom prst="rect">
+            <a:avLst/>
+          </a:prstGeom>
+          <a:solidFill>
+            <a:srgbClr val="E8600A"/>
+          </a:solidFill>
+          <a:ln/>
+        </p:spPr>
+      </p:sp>
+      <p:sp>
+        <p:nvSpPr>
+          <p:cNvPr id="28" name="Text 26"/>
+          <p:cNvSpPr txBox="1"/>
+          <p:nvPr/>
+        </p:nvSpPr>
+        <p:spPr>
+          <a:xfrm>
+            <a:off x="502920" y="3730752"/>
+            <a:ext cx="365760" cy="621792"/>
+          </a:xfrm>
+          <a:prstGeom prst="rect">
+            <a:avLst/>
+          </a:prstGeom>
+          <a:noFill/>
+          <a:ln/>
+        </p:spPr>
+        <p:txBody>
+          <a:bodyPr wrap="square" lIns="508" tIns="508" rIns="508" bIns="508" rtlCol="0" anchor="ctr">
+            <a:normAutofit/>
+            <a:spAutoFit/>
+          </a:bodyPr>
+          <a:lstStyle/>
+          <a:p>
+            <a:pPr algn="l" indent="0" marL="0">
+              <a:buNone/>
+            </a:pPr>
+            <a:r>
+              <a:rPr lang="en-US" sz="1300" b="1" dirty="0">
+                <a:solidFill>
+                  <a:srgbClr val="1B2A4A"/>
+                </a:solidFill>
+                <a:latin typeface="Trebuchet MS" pitchFamily="34" charset="0"/>
+                <a:ea typeface="Trebuchet MS" pitchFamily="34" charset="-122"/>
+                <a:cs typeface="Trebuchet MS" pitchFamily="34" charset="-120"/>
+              </a:rPr>
+              <a:t>4</a:t>
+            </a:r>
+            <a:endParaRPr lang="en-US" sz="1300" dirty="0"/>
+          </a:p>
+        </p:txBody>
+      </p:sp>
+      <p:sp>
+        <p:nvSpPr>
+          <p:cNvPr id="29" name="Text 27"/>
+          <p:cNvSpPr txBox="1"/>
+          <p:nvPr/>
+        </p:nvSpPr>
+        <p:spPr>
+          <a:xfrm>
+            <a:off x="868680" y="3767328"/>
+            <a:ext cx="7863840" cy="279806"/>
+          </a:xfrm>
+          <a:prstGeom prst="rect">
+            <a:avLst/>
+          </a:prstGeom>
+          <a:noFill/>
+          <a:ln/>
+        </p:spPr>
+        <p:txBody>
+          <a:bodyPr wrap="square" lIns="508" tIns="508" rIns="508" bIns="508" rtlCol="0" anchor="ctr">
+            <a:normAutofit/>
+            <a:spAutoFit/>
+          </a:bodyPr>
+          <a:lstStyle/>
+          <a:p>
+            <a:pPr algn="l" indent="0" marL="0">
+              <a:buNone/>
+            </a:pPr>
+            <a:r>
+              <a:rPr lang="en-US" sz="1200" b="1" dirty="0">
+                <a:solidFill>
+                  <a:srgbClr val="1B2A4A"/>
+                </a:solidFill>
+                <a:latin typeface="Trebuchet MS" pitchFamily="34" charset="0"/>
+                <a:ea typeface="Trebuchet MS" pitchFamily="34" charset="-122"/>
+                <a:cs typeface="Trebuchet MS" pitchFamily="34" charset="-120"/>
+              </a:rPr>
+              <a:t>PRICE THE TARGET BOND</a:t>
+            </a:r>
+            <a:endParaRPr lang="en-US" sz="1200" dirty="0"/>
+          </a:p>
+        </p:txBody>
+      </p:sp>
+      <p:sp>
+        <p:nvSpPr>
+          <p:cNvPr id="30" name="Text 28"/>
+          <p:cNvSpPr txBox="1"/>
+          <p:nvPr/>
+        </p:nvSpPr>
+        <p:spPr>
+          <a:xfrm>
+            <a:off x="868680" y="4010558"/>
+            <a:ext cx="7863840" cy="341986"/>
+          </a:xfrm>
+          <a:prstGeom prst="rect">
+            <a:avLst/>
+          </a:prstGeom>
+          <a:noFill/>
+          <a:ln/>
+        </p:spPr>
+        <p:txBody>
+          <a:bodyPr wrap="square" lIns="508" tIns="508" rIns="508" bIns="508" rtlCol="0" anchor="t">
+            <a:normAutofit/>
+            <a:spAutoFit/>
+          </a:bodyPr>
+          <a:lstStyle/>
+          <a:p>
+            <a:pPr algn="l" indent="0" marL="0">
+              <a:buNone/>
+            </a:pPr>
+            <a:r>
+              <a:rPr lang="en-US" sz="1200" dirty="0">
+                <a:solidFill>
+                  <a:srgbClr val="334155"/>
+                </a:solidFill>
+                <a:latin typeface="Calibri" pitchFamily="34" charset="0"/>
+                <a:ea typeface="Calibri" pitchFamily="34" charset="-122"/>
+                <a:cs typeface="Calibri" pitchFamily="34" charset="-120"/>
+              </a:rPr>
+              <a:t>Discount the target bond's own coupons and principal at that estimated yield.</a:t>
             </a:r>
             <a:endParaRPr lang="en-US" sz="1200" dirty="0"/>
           </a:p>
@@ -5003,7 +5397,7 @@
                 <a:ea typeface="Trebuchet MS" pitchFamily="34" charset="-122"/>
                 <a:cs typeface="Trebuchet MS" pitchFamily="34" charset="-120"/>
               </a:rPr>
-              <a:t>Worked — price a new 4-year 4.5% annual corporate bond from a 3-year 5.5% at 107.5 and a 5-year 4.5% at 104.75</a:t>
+              <a:t>Worked — an illiquid four-year 4.50% bond prices at 104.99 off a three-year 5.50% at 107.500 and a five-year 4.50% at 104.750</a:t>
             </a:r>
             <a:endParaRPr lang="en-US" sz="1700" dirty="0"/>
           </a:p>
@@ -5107,7 +5501,7 @@
                 <a:ea typeface="Calibri" pitchFamily="34" charset="-122"/>
                 <a:cs typeface="Calibri" pitchFamily="34" charset="-120"/>
               </a:rPr>
-              <a:t>Source: CFA Institute, Curriculum Vol 6, LM 6, §4 matrix-pricing examples, pp. 160–163.</a:t>
+              <a:t>Source: CFA Institute, Curriculum Vol 6, LM 6, §4 Question Set Q2, pp. 149–150.</a:t>
             </a:r>
             <a:endParaRPr lang="en-US" sz="750" dirty="0"/>
           </a:p>
@@ -5149,7 +5543,7 @@
                 <a:ea typeface="Calibri" pitchFamily="34" charset="-122"/>
                 <a:cs typeface="Calibri" pitchFamily="34" charset="-120"/>
               </a:rPr>
-              <a:t>Comparables must have similar credit — here, the corporate has just issued two bonds at 3y and 5y, giving a clean ladder for interpolation.</a:t>
+              <a:t>Two traded comparables of similar credit quality bracket the target maturity — a clean two-point ladder to interpolate across.</a:t>
             </a:r>
             <a:endParaRPr lang="en-US" sz="1300" dirty="0"/>
           </a:p>
@@ -5164,7 +5558,7 @@
         <p:spPr>
           <a:xfrm>
             <a:off x="320040" y="1143000"/>
-            <a:ext cx="8503920" cy="3154680"/>
+            <a:ext cx="8503920" cy="2377440"/>
           </a:xfrm>
           <a:prstGeom prst="rect">
             <a:avLst/>
@@ -5216,7 +5610,7 @@
                 <a:ea typeface="Trebuchet MS" pitchFamily="34" charset="-122"/>
                 <a:cs typeface="Trebuchet MS" pitchFamily="34" charset="-120"/>
               </a:rPr>
-              <a:t>MATRIX PRICING A NEW 4-YEAR 4.5% ANNUAL COUPON BOND</a:t>
+              <a:t>MATRIX-PRICING AN ILLIQUID 4-YEAR 4.50% CORPORATE BOND</a:t>
             </a:r>
             <a:endParaRPr lang="en-US" sz="1100" dirty="0"/>
           </a:p>
@@ -5258,7 +5652,7 @@
                 <a:ea typeface="Calibri" pitchFamily="34" charset="-122"/>
                 <a:cs typeface="Calibri" pitchFamily="34" charset="-120"/>
               </a:rPr>
-              <a:t>3-year 5.50% comparable: price 107.500 → solve YTM. 5-year 4.50% comparable: price 104.750 → solve YTM. Target: 4-year 4.5%.</a:t>
+              <a:t>Comparable A: 3-year, 5.50% annual, priced 107.500. Comparable B: 5-year, 4.50% annual, priced 104.750. All annual compounding.</a:t>
             </a:r>
             <a:endParaRPr lang="en-US" sz="1200" dirty="0"/>
           </a:p>
@@ -5273,7 +5667,7 @@
         <p:spPr>
           <a:xfrm>
             <a:off x="457200" y="1993392"/>
-            <a:ext cx="8229600" cy="1792224"/>
+            <a:ext cx="8229600" cy="1014984"/>
           </a:xfrm>
           <a:prstGeom prst="rect">
             <a:avLst/>
@@ -5295,7 +5689,7 @@
               <a:buNone/>
             </a:pPr>
             <a:r>
-              <a:rPr lang="en-US" sz="1200" b="1" dirty="0">
+              <a:rPr lang="en-US" sz="1150" b="1" dirty="0">
                 <a:solidFill>
                   <a:srgbClr val="1B2A4A"/>
                 </a:solidFill>
@@ -5312,7 +5706,7 @@
               <a:buNone/>
             </a:pPr>
             <a:r>
-              <a:rPr lang="en-US" sz="1200" dirty="0">
+              <a:rPr lang="en-US" sz="1150" dirty="0">
                 <a:solidFill>
                   <a:srgbClr val="334155"/>
                 </a:solidFill>
@@ -5320,7 +5714,7 @@
                 <a:ea typeface="Calibri" pitchFamily="34" charset="-122"/>
                 <a:cs typeface="Calibri" pitchFamily="34" charset="-120"/>
               </a:rPr>
-              <a:t>Step 1 — 3-year YTM: 107.5 = 5.5/(1+r) + 5.5/(1+r)² + 105.5/(1+r)³  →  r₃ = 2.608%
+              <a:t>3-year yield: 107.500 = 5.50/(1+r) + 5.50/(1+r)² + 105.50/(1+r)³  →  r₃ = 2.856%
 </a:t>
             </a:r>
             <a:pPr indent="0" marL="0">
@@ -5330,7 +5724,7 @@
               <a:buNone/>
             </a:pPr>
             <a:r>
-              <a:rPr lang="en-US" sz="1200" b="1" dirty="0">
+              <a:rPr lang="en-US" sz="1150" b="1" dirty="0">
                 <a:solidFill>
                   <a:srgbClr val="1B2A4A"/>
                 </a:solidFill>
@@ -5347,7 +5741,7 @@
               <a:buNone/>
             </a:pPr>
             <a:r>
-              <a:rPr lang="en-US" sz="1200" dirty="0">
+              <a:rPr lang="en-US" sz="1150" dirty="0">
                 <a:solidFill>
                   <a:srgbClr val="334155"/>
                 </a:solidFill>
@@ -5355,7 +5749,7 @@
                 <a:ea typeface="Calibri" pitchFamily="34" charset="-122"/>
                 <a:cs typeface="Calibri" pitchFamily="34" charset="-120"/>
               </a:rPr>
-              <a:t>Step 2 — 5-year YTM: 104.75 = 4.5/(1+r) + 4.5/(1+r)² + 4.5/(1+r)³ + 4.5/(1+r)⁴ + 104.5/(1+r)⁵  →  r₅ = 3.378%
+              <a:t>5-year yield: 104.750 = 4.50/(1+r) + … + 104.50/(1+r)⁵  →  r₅ = 3.449%
 </a:t>
             </a:r>
             <a:pPr indent="0" marL="0">
@@ -5365,7 +5759,7 @@
               <a:buNone/>
             </a:pPr>
             <a:r>
-              <a:rPr lang="en-US" sz="1200" b="1" dirty="0">
+              <a:rPr lang="en-US" sz="1150" b="1" dirty="0">
                 <a:solidFill>
                   <a:srgbClr val="1B2A4A"/>
                 </a:solidFill>
@@ -5382,7 +5776,7 @@
               <a:buNone/>
             </a:pPr>
             <a:r>
-              <a:rPr lang="en-US" sz="1200" dirty="0">
+              <a:rPr lang="en-US" sz="1150" dirty="0">
                 <a:solidFill>
                   <a:srgbClr val="334155"/>
                 </a:solidFill>
@@ -5390,7 +5784,7 @@
                 <a:ea typeface="Calibri" pitchFamily="34" charset="-122"/>
                 <a:cs typeface="Calibri" pitchFamily="34" charset="-120"/>
               </a:rPr>
-              <a:t>Step 3 — Interpolate to 4y: r₄ = (r₃ + r₅) / 2 = (2.608% + 3.378%) / 2 = 2.993%
+              <a:t>Interpolate to 4 years: r₄ = (0.02856 + 0.03449) / 2 = 0.031525 = 3.153%
 </a:t>
             </a:r>
             <a:pPr indent="0" marL="0">
@@ -5400,7 +5794,7 @@
               <a:buNone/>
             </a:pPr>
             <a:r>
-              <a:rPr lang="en-US" sz="1200" b="1" dirty="0">
+              <a:rPr lang="en-US" sz="1150" b="1" dirty="0">
                 <a:solidFill>
                   <a:srgbClr val="1B2A4A"/>
                 </a:solidFill>
@@ -5417,7 +5811,7 @@
               <a:buNone/>
             </a:pPr>
             <a:r>
-              <a:rPr lang="en-US" sz="1200" dirty="0">
+              <a:rPr lang="en-US" sz="1150" dirty="0">
                 <a:solidFill>
                   <a:srgbClr val="334155"/>
                 </a:solidFill>
@@ -5425,7 +5819,7 @@
                 <a:ea typeface="Calibri" pitchFamily="34" charset="-122"/>
                 <a:cs typeface="Calibri" pitchFamily="34" charset="-120"/>
               </a:rPr>
-              <a:t>Step 4 — Price target: 4.5/(1.02993) + 4.5/(1.02993)² + 4.5/(1.02993)³ + 104.5/(1.02993)⁴
+              <a:t>Price the target at 3.1525%: 4.50/(1.031525) + 4.50/(1.031525)² + 4.50/(1.031525)³ + 104.50/(1.031525)⁴
 </a:t>
             </a:r>
             <a:pPr indent="0" marL="0">
@@ -5435,7 +5829,7 @@
               <a:buNone/>
             </a:pPr>
             <a:r>
-              <a:rPr lang="en-US" sz="1200" b="1" dirty="0">
+              <a:rPr lang="en-US" sz="1150" b="1" dirty="0">
                 <a:solidFill>
                   <a:srgbClr val="1B2A4A"/>
                 </a:solidFill>
@@ -5452,7 +5846,7 @@
               <a:buNone/>
             </a:pPr>
             <a:r>
-              <a:rPr lang="en-US" sz="1200" dirty="0">
+              <a:rPr lang="en-US" sz="1150" dirty="0">
                 <a:solidFill>
                   <a:srgbClr val="334155"/>
                 </a:solidFill>
@@ -5460,9 +5854,9 @@
                 <a:ea typeface="Calibri" pitchFamily="34" charset="-122"/>
                 <a:cs typeface="Calibri" pitchFamily="34" charset="-120"/>
               </a:rPr>
-              <a:t>Step 5 — Sum PVs: 4.370 + 4.244 + 4.121 + 92.815 = 105.55</a:t>
-            </a:r>
-            <a:endParaRPr lang="en-US" sz="1200" dirty="0"/>
+              <a:t>Sum the four PVs: 4.362 + 4.229 + 4.100 + 92.299 = 104.991</a:t>
+            </a:r>
+            <a:endParaRPr lang="en-US" sz="1150" dirty="0"/>
           </a:p>
         </p:txBody>
       </p:sp>
@@ -5474,7 +5868,7 @@
         </p:nvSpPr>
         <p:spPr>
           <a:xfrm>
-            <a:off x="411480" y="3858768"/>
+            <a:off x="411480" y="3081528"/>
             <a:ext cx="8321040" cy="365760"/>
           </a:xfrm>
           <a:prstGeom prst="rect">
@@ -5494,7 +5888,7 @@
         </p:nvSpPr>
         <p:spPr>
           <a:xfrm>
-            <a:off x="457200" y="3858768"/>
+            <a:off x="457200" y="3081528"/>
             <a:ext cx="8229600" cy="365760"/>
           </a:xfrm>
           <a:prstGeom prst="rect">
@@ -5522,9 +5916,133 @@
                 <a:ea typeface="Consolas" pitchFamily="34" charset="-122"/>
                 <a:cs typeface="Consolas" pitchFamily="34" charset="-120"/>
               </a:rPr>
-              <a:t>Estimated price  ≈  EUR 105.55 per 100 face  (YTM ≈ 2.99%, implied spread over government benchmark tracked separately)</a:t>
+              <a:t>Estimated price = 104.991 per 100 of par   ·   estimated yield 3.153%   ·   a premium</a:t>
             </a:r>
             <a:endParaRPr lang="en-US" sz="1150" dirty="0"/>
+          </a:p>
+        </p:txBody>
+      </p:sp>
+      <p:sp>
+        <p:nvSpPr>
+          <p:cNvPr id="15" name="Shape 13"/>
+          <p:cNvSpPr/>
+          <p:nvPr/>
+        </p:nvSpPr>
+        <p:spPr>
+          <a:xfrm>
+            <a:off x="320040" y="3611880"/>
+            <a:ext cx="8503920" cy="685800"/>
+          </a:xfrm>
+          <a:prstGeom prst="rect">
+            <a:avLst/>
+          </a:prstGeom>
+          <a:solidFill>
+            <a:srgbClr val="FEF0E7"/>
+          </a:solidFill>
+          <a:ln/>
+        </p:spPr>
+      </p:sp>
+      <p:sp>
+        <p:nvSpPr>
+          <p:cNvPr id="16" name="Shape 14"/>
+          <p:cNvSpPr/>
+          <p:nvPr/>
+        </p:nvSpPr>
+        <p:spPr>
+          <a:xfrm>
+            <a:off x="320040" y="3611880"/>
+            <a:ext cx="73152" cy="685800"/>
+          </a:xfrm>
+          <a:prstGeom prst="rect">
+            <a:avLst/>
+          </a:prstGeom>
+          <a:solidFill>
+            <a:srgbClr val="E8600A"/>
+          </a:solidFill>
+          <a:ln/>
+        </p:spPr>
+      </p:sp>
+      <p:sp>
+        <p:nvSpPr>
+          <p:cNvPr id="17" name="Text 15"/>
+          <p:cNvSpPr txBox="1"/>
+          <p:nvPr/>
+        </p:nvSpPr>
+        <p:spPr>
+          <a:xfrm>
+            <a:off x="457200" y="3657600"/>
+            <a:ext cx="8275320" cy="256032"/>
+          </a:xfrm>
+          <a:prstGeom prst="rect">
+            <a:avLst/>
+          </a:prstGeom>
+          <a:noFill/>
+          <a:ln/>
+        </p:spPr>
+        <p:txBody>
+          <a:bodyPr wrap="square" lIns="508" tIns="508" rIns="508" bIns="508" rtlCol="0" anchor="ctr">
+            <a:normAutofit/>
+            <a:spAutoFit/>
+          </a:bodyPr>
+          <a:lstStyle/>
+          <a:p>
+            <a:pPr algn="l" indent="0" marL="0">
+              <a:buNone/>
+            </a:pPr>
+            <a:r>
+              <a:rPr lang="en-US" sz="1100" b="1" spc="400" kern="0" dirty="0">
+                <a:solidFill>
+                  <a:srgbClr val="E8600A"/>
+                </a:solidFill>
+                <a:latin typeface="Trebuchet MS" pitchFamily="34" charset="0"/>
+                <a:ea typeface="Trebuchet MS" pitchFamily="34" charset="-122"/>
+                <a:cs typeface="Trebuchet MS" pitchFamily="34" charset="-120"/>
+              </a:rPr>
+              <a:t>INTERPOLATE YIELDS, NEVER PRICES</a:t>
+            </a:r>
+            <a:endParaRPr lang="en-US" sz="1100" dirty="0"/>
+          </a:p>
+        </p:txBody>
+      </p:sp>
+      <p:sp>
+        <p:nvSpPr>
+          <p:cNvPr id="18" name="Text 16"/>
+          <p:cNvSpPr txBox="1"/>
+          <p:nvPr/>
+        </p:nvSpPr>
+        <p:spPr>
+          <a:xfrm>
+            <a:off x="457200" y="3931920"/>
+            <a:ext cx="8275320" cy="320040"/>
+          </a:xfrm>
+          <a:prstGeom prst="rect">
+            <a:avLst/>
+          </a:prstGeom>
+          <a:noFill/>
+          <a:ln/>
+        </p:spPr>
+        <p:txBody>
+          <a:bodyPr wrap="square" lIns="508" tIns="508" rIns="508" bIns="508" rtlCol="0" anchor="t">
+            <a:normAutofit/>
+            <a:spAutoFit/>
+          </a:bodyPr>
+          <a:lstStyle/>
+          <a:p>
+            <a:pPr algn="l" indent="0" marL="0">
+              <a:buNone/>
+            </a:pPr>
+            <a:r>
+              <a:rPr lang="en-US" sz="1200" dirty="0">
+                <a:solidFill>
+                  <a:srgbClr val="334155"/>
+                </a:solidFill>
+                <a:latin typeface="Calibri" pitchFamily="34" charset="0"/>
+                <a:ea typeface="Calibri" pitchFamily="34" charset="-122"/>
+                <a:cs typeface="Calibri" pitchFamily="34" charset="-120"/>
+              </a:rPr>
+              <a:t>The two comparables carry different coupons, so their prices are not comparable — only their yields are. Averaging the two prices gives 106.125, which is exactly one of the exam distractors.</a:t>
+            </a:r>
+            <a:endParaRPr lang="en-US" sz="1200" dirty="0"/>
           </a:p>
         </p:txBody>
       </p:sp>
@@ -5857,7 +6375,7 @@
                 <a:ea typeface="Trebuchet MS" pitchFamily="34" charset="-122"/>
                 <a:cs typeface="Trebuchet MS" pitchFamily="34" charset="-120"/>
               </a:rPr>
-              <a:t>Current yield, street-convention YTM, true yield and government-equivalent yield are variations on one theme — what we discount and over what day count</a:t>
+              <a:t>Current yield, day counts, street convention, true yield and government-equivalent yield are all one theme — what we discount and over what calendar</a:t>
             </a:r>
             <a:endParaRPr lang="en-US" sz="1600" dirty="0"/>
           </a:p>
@@ -5961,7 +6479,7 @@
                 <a:ea typeface="Calibri" pitchFamily="34" charset="-122"/>
                 <a:cs typeface="Calibri" pitchFamily="34" charset="-120"/>
               </a:rPr>
-              <a:t>Source: CFA Institute, Curriculum Vol 6, LM 7, §3 Other yield measures and conventions, pp. 163–168.</a:t>
+              <a:t>Source: CFA Institute, Curriculum Vol 6, LM 7, §3 "Other Yield Measures and Conventions", Exhibit 3, Example 4 and Example 5, pp. 163–167.</a:t>
             </a:r>
             <a:endParaRPr lang="en-US" sz="750" dirty="0"/>
           </a:p>
@@ -6003,7 +6521,7 @@
                 <a:ea typeface="Calibri" pitchFamily="34" charset="-122"/>
                 <a:cs typeface="Calibri" pitchFamily="34" charset="-120"/>
               </a:rPr>
-              <a:t>Differences typically measure only a basis point or two — but always material when comparing bonds issued under different conventions.</a:t>
+              <a:t>Most of these differ by a basis point or two — but the difference is always material the moment you subtract one bond's yield from another's.</a:t>
             </a:r>
             <a:endParaRPr lang="en-US" sz="1300" dirty="0"/>
           </a:p>
@@ -6033,8 +6551,8 @@
               <a:tblPr/>
               <a:tblGrid>
                 <a:gridCol w="2103120"/>
-                <a:gridCol w="5120640"/>
-                <a:gridCol w="1280160"/>
+                <a:gridCol w="4937760"/>
+                <a:gridCol w="1463040"/>
               </a:tblGrid>
               <a:tr h="274320">
                 <a:tc>
@@ -6054,7 +6572,7 @@
                           <a:ea typeface="Trebuchet MS" pitchFamily="34" charset="-122"/>
                           <a:cs typeface="Trebuchet MS" pitchFamily="34" charset="-120"/>
                         </a:rPr>
-                        <a:t>Measure</a:t>
+                        <a:t>Measure / convention</a:t>
                       </a:r>
                       <a:endParaRPr lang="en-US" sz="1100" dirty="0">
                         <a:latin typeface="Trebuchet MS" charset="0"/>
@@ -6104,7 +6622,7 @@
                           <a:ea typeface="Trebuchet MS" pitchFamily="34" charset="-122"/>
                           <a:cs typeface="Trebuchet MS" pitchFamily="34" charset="-120"/>
                         </a:rPr>
-                        <a:t>Definition</a:t>
+                        <a:t>What it means</a:t>
                       </a:r>
                       <a:endParaRPr lang="en-US" sz="1100" dirty="0">
                         <a:latin typeface="Trebuchet MS" charset="0"/>
@@ -6154,7 +6672,7 @@
                           <a:ea typeface="Trebuchet MS" pitchFamily="34" charset="-122"/>
                           <a:cs typeface="Trebuchet MS" pitchFamily="34" charset="-120"/>
                         </a:rPr>
-                        <a:t>Typical use</a:t>
+                        <a:t>Where used</a:t>
                       </a:r>
                       <a:endParaRPr lang="en-US" sz="1100" dirty="0">
                         <a:latin typeface="Trebuchet MS" charset="0"/>
@@ -6256,7 +6774,7 @@
                           <a:ea typeface="Consolas" pitchFamily="34" charset="-122"/>
                           <a:cs typeface="Consolas" pitchFamily="34" charset="-120"/>
                         </a:rPr>
-                        <a:t>Annual coupon / flat price — ignores time value, amortization of discount/premium, and reinvestment.</a:t>
+                        <a:t>Annual coupon / flat price — ignores time value</a:t>
                       </a:r>
                       <a:endParaRPr lang="en-US" sz="1100" dirty="0">
                         <a:latin typeface="Consolas" charset="0"/>
@@ -6358,7 +6876,7 @@
                           <a:ea typeface="Calibri" pitchFamily="34" charset="-122"/>
                           <a:cs typeface="Calibri" pitchFamily="34" charset="-120"/>
                         </a:rPr>
-                        <a:t>Street-convention YTM</a:t>
+                        <a:t>Act/Act day count</a:t>
                       </a:r>
                       <a:endParaRPr lang="en-US" sz="1100" dirty="0">
                         <a:latin typeface="Calibri" charset="0"/>
@@ -6408,7 +6926,311 @@
                           <a:ea typeface="Consolas" pitchFamily="34" charset="-122"/>
                           <a:cs typeface="Consolas" pitchFamily="34" charset="-120"/>
                         </a:rPr>
-                        <a:t>Standard YTM assuming cash flows occur on scheduled dates, ignoring weekends &amp; holidays.</a:t>
+                        <a:t>Actual days / actual days in the period</a:t>
+                      </a:r>
+                      <a:endParaRPr lang="en-US" sz="1100" dirty="0">
+                        <a:latin typeface="Consolas" charset="0"/>
+                        <a:ea typeface="Consolas" charset="0"/>
+                        <a:cs typeface="Consolas" charset="0"/>
+                      </a:endParaRPr>
+                    </a:p>
+                  </a:txBody>
+                  <a:tcPr marL="91440" marR="91440" marT="45720" marB="45720" anchor="ctr">
+                    <a:lnL w="0" cap="flat" cmpd="sng" algn="ctr">
+                      <a:noFill/>
+                    </a:lnL>
+                    <a:lnR w="0" cap="flat" cmpd="sng" algn="ctr">
+                      <a:noFill/>
+                    </a:lnR>
+                    <a:lnT w="0" cap="flat" cmpd="sng" algn="ctr">
+                      <a:noFill/>
+                    </a:lnT>
+                    <a:lnB w="3175" cap="flat" cmpd="sng" algn="ctr">
+                      <a:solidFill>
+                        <a:srgbClr val="D0D8E8"/>
+                      </a:solidFill>
+                      <a:prstDash val="solid"/>
+                      <a:round/>
+                      <a:headEnd type="none" w="med" len="med"/>
+                      <a:tailEnd type="none" w="med" len="med"/>
+                    </a:lnB>
+                    <a:solidFill>
+                      <a:srgbClr val="F5F7FA"/>
+                    </a:solidFill>
+                  </a:tcPr>
+                </a:tc>
+                <a:tc>
+                  <a:txBody>
+                    <a:bodyPr/>
+                    <a:lstStyle/>
+                    <a:p>
+                      <a:pPr algn="ctr" indent="0" marL="0">
+                        <a:buNone/>
+                      </a:pPr>
+                      <a:r>
+                        <a:rPr lang="en-US" sz="1100" dirty="0">
+                          <a:solidFill>
+                            <a:srgbClr val="334155"/>
+                          </a:solidFill>
+                          <a:latin typeface="Consolas" pitchFamily="34" charset="0"/>
+                          <a:ea typeface="Consolas" pitchFamily="34" charset="-122"/>
+                          <a:cs typeface="Consolas" pitchFamily="34" charset="-120"/>
+                        </a:rPr>
+                        <a:t>Governments</a:t>
+                      </a:r>
+                      <a:endParaRPr lang="en-US" sz="1100" dirty="0">
+                        <a:latin typeface="Consolas" charset="0"/>
+                        <a:ea typeface="Consolas" charset="0"/>
+                        <a:cs typeface="Consolas" charset="0"/>
+                      </a:endParaRPr>
+                    </a:p>
+                  </a:txBody>
+                  <a:tcPr marL="91440" marR="91440" marT="45720" marB="45720" anchor="ctr">
+                    <a:lnL w="0" cap="flat" cmpd="sng" algn="ctr">
+                      <a:noFill/>
+                    </a:lnL>
+                    <a:lnR w="0" cap="flat" cmpd="sng" algn="ctr">
+                      <a:noFill/>
+                    </a:lnR>
+                    <a:lnT w="0" cap="flat" cmpd="sng" algn="ctr">
+                      <a:noFill/>
+                    </a:lnT>
+                    <a:lnB w="3175" cap="flat" cmpd="sng" algn="ctr">
+                      <a:solidFill>
+                        <a:srgbClr val="D0D8E8"/>
+                      </a:solidFill>
+                      <a:prstDash val="solid"/>
+                      <a:round/>
+                      <a:headEnd type="none" w="med" len="med"/>
+                      <a:tailEnd type="none" w="med" len="med"/>
+                    </a:lnB>
+                    <a:solidFill>
+                      <a:srgbClr val="F5F7FA"/>
+                    </a:solidFill>
+                  </a:tcPr>
+                </a:tc>
+              </a:tr>
+              <a:tr h="274320">
+                <a:tc>
+                  <a:txBody>
+                    <a:bodyPr/>
+                    <a:lstStyle/>
+                    <a:p>
+                      <a:pPr algn="l" indent="0" marL="0">
+                        <a:buNone/>
+                      </a:pPr>
+                      <a:r>
+                        <a:rPr lang="en-US" sz="1100" dirty="0">
+                          <a:solidFill>
+                            <a:srgbClr val="334155"/>
+                          </a:solidFill>
+                          <a:latin typeface="Calibri" pitchFamily="34" charset="0"/>
+                          <a:ea typeface="Calibri" pitchFamily="34" charset="-122"/>
+                          <a:cs typeface="Calibri" pitchFamily="34" charset="-120"/>
+                        </a:rPr>
+                        <a:t>30/360 day count</a:t>
+                      </a:r>
+                      <a:endParaRPr lang="en-US" sz="1100" dirty="0">
+                        <a:latin typeface="Calibri" charset="0"/>
+                        <a:ea typeface="Calibri" charset="0"/>
+                        <a:cs typeface="Calibri" charset="0"/>
+                      </a:endParaRPr>
+                    </a:p>
+                  </a:txBody>
+                  <a:tcPr marL="91440" marR="91440" marT="45720" marB="45720" anchor="ctr">
+                    <a:lnL w="0" cap="flat" cmpd="sng" algn="ctr">
+                      <a:noFill/>
+                    </a:lnL>
+                    <a:lnR w="0" cap="flat" cmpd="sng" algn="ctr">
+                      <a:noFill/>
+                    </a:lnR>
+                    <a:lnT w="0" cap="flat" cmpd="sng" algn="ctr">
+                      <a:noFill/>
+                    </a:lnT>
+                    <a:lnB w="3175" cap="flat" cmpd="sng" algn="ctr">
+                      <a:solidFill>
+                        <a:srgbClr val="D0D8E8"/>
+                      </a:solidFill>
+                      <a:prstDash val="solid"/>
+                      <a:round/>
+                      <a:headEnd type="none" w="med" len="med"/>
+                      <a:tailEnd type="none" w="med" len="med"/>
+                    </a:lnB>
+                    <a:solidFill>
+                      <a:srgbClr val="FFFFFF"/>
+                    </a:solidFill>
+                  </a:tcPr>
+                </a:tc>
+                <a:tc>
+                  <a:txBody>
+                    <a:bodyPr/>
+                    <a:lstStyle/>
+                    <a:p>
+                      <a:pPr algn="ctr" indent="0" marL="0">
+                        <a:buNone/>
+                      </a:pPr>
+                      <a:r>
+                        <a:rPr lang="en-US" sz="1100" dirty="0">
+                          <a:solidFill>
+                            <a:srgbClr val="334155"/>
+                          </a:solidFill>
+                          <a:latin typeface="Consolas" pitchFamily="34" charset="0"/>
+                          <a:ea typeface="Consolas" pitchFamily="34" charset="-122"/>
+                          <a:cs typeface="Consolas" pitchFamily="34" charset="-120"/>
+                        </a:rPr>
+                        <a:t>30-day months, 360-day year</a:t>
+                      </a:r>
+                      <a:endParaRPr lang="en-US" sz="1100" dirty="0">
+                        <a:latin typeface="Consolas" charset="0"/>
+                        <a:ea typeface="Consolas" charset="0"/>
+                        <a:cs typeface="Consolas" charset="0"/>
+                      </a:endParaRPr>
+                    </a:p>
+                  </a:txBody>
+                  <a:tcPr marL="91440" marR="91440" marT="45720" marB="45720" anchor="ctr">
+                    <a:lnL w="0" cap="flat" cmpd="sng" algn="ctr">
+                      <a:noFill/>
+                    </a:lnL>
+                    <a:lnR w="0" cap="flat" cmpd="sng" algn="ctr">
+                      <a:noFill/>
+                    </a:lnR>
+                    <a:lnT w="0" cap="flat" cmpd="sng" algn="ctr">
+                      <a:noFill/>
+                    </a:lnT>
+                    <a:lnB w="3175" cap="flat" cmpd="sng" algn="ctr">
+                      <a:solidFill>
+                        <a:srgbClr val="D0D8E8"/>
+                      </a:solidFill>
+                      <a:prstDash val="solid"/>
+                      <a:round/>
+                      <a:headEnd type="none" w="med" len="med"/>
+                      <a:tailEnd type="none" w="med" len="med"/>
+                    </a:lnB>
+                    <a:solidFill>
+                      <a:srgbClr val="FFFFFF"/>
+                    </a:solidFill>
+                  </a:tcPr>
+                </a:tc>
+                <a:tc>
+                  <a:txBody>
+                    <a:bodyPr/>
+                    <a:lstStyle/>
+                    <a:p>
+                      <a:pPr algn="ctr" indent="0" marL="0">
+                        <a:buNone/>
+                      </a:pPr>
+                      <a:r>
+                        <a:rPr lang="en-US" sz="1100" dirty="0">
+                          <a:solidFill>
+                            <a:srgbClr val="334155"/>
+                          </a:solidFill>
+                          <a:latin typeface="Consolas" pitchFamily="34" charset="0"/>
+                          <a:ea typeface="Consolas" pitchFamily="34" charset="-122"/>
+                          <a:cs typeface="Consolas" pitchFamily="34" charset="-120"/>
+                        </a:rPr>
+                        <a:t>Corporates</a:t>
+                      </a:r>
+                      <a:endParaRPr lang="en-US" sz="1100" dirty="0">
+                        <a:latin typeface="Consolas" charset="0"/>
+                        <a:ea typeface="Consolas" charset="0"/>
+                        <a:cs typeface="Consolas" charset="0"/>
+                      </a:endParaRPr>
+                    </a:p>
+                  </a:txBody>
+                  <a:tcPr marL="91440" marR="91440" marT="45720" marB="45720" anchor="ctr">
+                    <a:lnL w="0" cap="flat" cmpd="sng" algn="ctr">
+                      <a:noFill/>
+                    </a:lnL>
+                    <a:lnR w="0" cap="flat" cmpd="sng" algn="ctr">
+                      <a:noFill/>
+                    </a:lnR>
+                    <a:lnT w="0" cap="flat" cmpd="sng" algn="ctr">
+                      <a:noFill/>
+                    </a:lnT>
+                    <a:lnB w="3175" cap="flat" cmpd="sng" algn="ctr">
+                      <a:solidFill>
+                        <a:srgbClr val="D0D8E8"/>
+                      </a:solidFill>
+                      <a:prstDash val="solid"/>
+                      <a:round/>
+                      <a:headEnd type="none" w="med" len="med"/>
+                      <a:tailEnd type="none" w="med" len="med"/>
+                    </a:lnB>
+                    <a:solidFill>
+                      <a:srgbClr val="FFFFFF"/>
+                    </a:solidFill>
+                  </a:tcPr>
+                </a:tc>
+              </a:tr>
+              <a:tr h="274320">
+                <a:tc>
+                  <a:txBody>
+                    <a:bodyPr/>
+                    <a:lstStyle/>
+                    <a:p>
+                      <a:pPr algn="l" indent="0" marL="0">
+                        <a:buNone/>
+                      </a:pPr>
+                      <a:r>
+                        <a:rPr lang="en-US" sz="1100" dirty="0">
+                          <a:solidFill>
+                            <a:srgbClr val="334155"/>
+                          </a:solidFill>
+                          <a:latin typeface="Calibri" pitchFamily="34" charset="0"/>
+                          <a:ea typeface="Calibri" pitchFamily="34" charset="-122"/>
+                          <a:cs typeface="Calibri" pitchFamily="34" charset="-120"/>
+                        </a:rPr>
+                        <a:t>Street convention</a:t>
+                      </a:r>
+                      <a:endParaRPr lang="en-US" sz="1100" dirty="0">
+                        <a:latin typeface="Calibri" charset="0"/>
+                        <a:ea typeface="Calibri" charset="0"/>
+                        <a:cs typeface="Calibri" charset="0"/>
+                      </a:endParaRPr>
+                    </a:p>
+                  </a:txBody>
+                  <a:tcPr marL="91440" marR="91440" marT="45720" marB="45720" anchor="ctr">
+                    <a:lnL w="0" cap="flat" cmpd="sng" algn="ctr">
+                      <a:noFill/>
+                    </a:lnL>
+                    <a:lnR w="0" cap="flat" cmpd="sng" algn="ctr">
+                      <a:noFill/>
+                    </a:lnR>
+                    <a:lnT w="0" cap="flat" cmpd="sng" algn="ctr">
+                      <a:noFill/>
+                    </a:lnT>
+                    <a:lnB w="3175" cap="flat" cmpd="sng" algn="ctr">
+                      <a:solidFill>
+                        <a:srgbClr val="D0D8E8"/>
+                      </a:solidFill>
+                      <a:prstDash val="solid"/>
+                      <a:round/>
+                      <a:headEnd type="none" w="med" len="med"/>
+                      <a:tailEnd type="none" w="med" len="med"/>
+                    </a:lnB>
+                    <a:solidFill>
+                      <a:srgbClr val="F5F7FA"/>
+                    </a:solidFill>
+                  </a:tcPr>
+                </a:tc>
+                <a:tc>
+                  <a:txBody>
+                    <a:bodyPr/>
+                    <a:lstStyle/>
+                    <a:p>
+                      <a:pPr algn="ctr" indent="0" marL="0">
+                        <a:buNone/>
+                      </a:pPr>
+                      <a:r>
+                        <a:rPr lang="en-US" sz="1100" dirty="0">
+                          <a:solidFill>
+                            <a:srgbClr val="334155"/>
+                          </a:solidFill>
+                          <a:latin typeface="Consolas" pitchFamily="34" charset="0"/>
+                          <a:ea typeface="Consolas" pitchFamily="34" charset="-122"/>
+                          <a:cs typeface="Consolas" pitchFamily="34" charset="-120"/>
+                        </a:rPr>
+                        <a:t>Cash flows assumed on scheduled dates</a:t>
                       </a:r>
                       <a:endParaRPr lang="en-US" sz="1100" dirty="0">
                         <a:latin typeface="Consolas" charset="0"/>
@@ -6560,7 +7382,7 @@
                           <a:ea typeface="Consolas" pitchFamily="34" charset="-122"/>
                           <a:cs typeface="Consolas" pitchFamily="34" charset="-120"/>
                         </a:rPr>
-                        <a:t>YTM using actual payment dates, accounting for weekends/holidays. Always ≤ street-convention yield.</a:t>
+                        <a:t>Actual pay dates — never above street yield</a:t>
                       </a:r>
                       <a:endParaRPr lang="en-US" sz="1100" dirty="0">
                         <a:latin typeface="Consolas" charset="0"/>
@@ -6610,7 +7432,7 @@
                           <a:ea typeface="Consolas" pitchFamily="34" charset="-122"/>
                           <a:cs typeface="Consolas" pitchFamily="34" charset="-120"/>
                         </a:rPr>
-                        <a:t>Accounting</a:t>
+                        <a:t>Rarely quoted</a:t>
                       </a:r>
                       <a:endParaRPr lang="en-US" sz="1100" dirty="0">
                         <a:latin typeface="Consolas" charset="0"/>
@@ -6662,7 +7484,7 @@
                           <a:ea typeface="Calibri" pitchFamily="34" charset="-122"/>
                           <a:cs typeface="Calibri" pitchFamily="34" charset="-120"/>
                         </a:rPr>
-                        <a:t>Government-equivalent yield</a:t>
+                        <a:t>Government-equivalent</a:t>
                       </a:r>
                       <a:endParaRPr lang="en-US" sz="1100" dirty="0">
                         <a:latin typeface="Calibri" charset="0"/>
@@ -6712,7 +7534,7 @@
                           <a:ea typeface="Consolas" pitchFamily="34" charset="-122"/>
                           <a:cs typeface="Consolas" pitchFamily="34" charset="-120"/>
                         </a:rPr>
-                        <a:t>Corporate 30/360 yield re-stated on Act/Act to compare with a Treasury benchmark.</a:t>
+                        <a:t>30/360 corporate YTM restated on Act/Act</a:t>
                       </a:r>
                       <a:endParaRPr lang="en-US" sz="1100" dirty="0">
                         <a:latin typeface="Consolas" charset="0"/>
@@ -6864,7 +7686,7 @@
                           <a:ea typeface="Consolas" pitchFamily="34" charset="-122"/>
                           <a:cs typeface="Consolas" pitchFamily="34" charset="-120"/>
                         </a:rPr>
-                        <a:t>Coupon + straight-line amortization of price-to-par / flat price. Used mainly for JGBs.</a:t>
+                        <a:t>Coupon + straight-line amortisation / flat price</a:t>
                       </a:r>
                       <a:endParaRPr lang="en-US" sz="1100" dirty="0">
                         <a:latin typeface="Consolas" charset="0"/>
@@ -6960,8 +7782,8 @@
         </p:nvSpPr>
         <p:spPr>
           <a:xfrm>
-            <a:off x="320040" y="3291840"/>
-            <a:ext cx="8503920" cy="1005840"/>
+            <a:off x="320040" y="3429000"/>
+            <a:ext cx="8503920" cy="868680"/>
           </a:xfrm>
           <a:prstGeom prst="rect">
             <a:avLst/>
@@ -6980,8 +7802,8 @@
         </p:nvSpPr>
         <p:spPr>
           <a:xfrm>
-            <a:off x="320040" y="3291840"/>
-            <a:ext cx="73152" cy="1005840"/>
+            <a:off x="320040" y="3429000"/>
+            <a:ext cx="73152" cy="868680"/>
           </a:xfrm>
           <a:prstGeom prst="rect">
             <a:avLst/>
@@ -7000,7 +7822,7 @@
         </p:nvSpPr>
         <p:spPr>
           <a:xfrm>
-            <a:off x="457200" y="3337560"/>
+            <a:off x="457200" y="3474720"/>
             <a:ext cx="8275320" cy="256032"/>
           </a:xfrm>
           <a:prstGeom prst="rect">
@@ -7028,7 +7850,7 @@
                 <a:ea typeface="Trebuchet MS" pitchFamily="34" charset="-122"/>
                 <a:cs typeface="Trebuchet MS" pitchFamily="34" charset="-120"/>
               </a:rPr>
-              <a:t>PERIODICITY CONVERSION — NEVER SKIP</a:t>
+              <a:t>PERIODICITY CONVERSION — NEVER SKIP IT</a:t>
             </a:r>
             <a:endParaRPr lang="en-US" sz="1100" dirty="0"/>
           </a:p>
@@ -7042,8 +7864,8 @@
         </p:nvSpPr>
         <p:spPr>
           <a:xfrm>
-            <a:off x="457200" y="3611880"/>
-            <a:ext cx="8275320" cy="640080"/>
+            <a:off x="457200" y="3749040"/>
+            <a:ext cx="8275320" cy="502920"/>
           </a:xfrm>
           <a:prstGeom prst="rect">
             <a:avLst/>
@@ -7070,7 +7892,7 @@
                 <a:ea typeface="Calibri" pitchFamily="34" charset="-122"/>
                 <a:cs typeface="Calibri" pitchFamily="34" charset="-120"/>
               </a:rPr>
-              <a:t>(1 + APR_m / m)^m = (1 + APR_n / n)^n  —  two bonds with identical cash flows but different compounding conventions produce different YTMs. Align periodicities before computing a spread.</a:t>
+              <a:t>(1 + APRₘ/m)ᵐ = (1 + APRₙ/n)ⁿ.  CFA Example 5: the Antelas AG quarterly-pay bond yields 4.548% at periodicity 4, which is 4.574% at periodicity 2. Align periodicities before you difference two yields.</a:t>
             </a:r>
             <a:endParaRPr lang="en-US" sz="1200" dirty="0"/>
           </a:p>
@@ -7177,7 +7999,7 @@
                 <a:ea typeface="Trebuchet MS" pitchFamily="34" charset="-122"/>
                 <a:cs typeface="Trebuchet MS" pitchFamily="34" charset="-120"/>
               </a:rPr>
-              <a:t>The yield-to-worst on a callable bond is the minimum of YTM and every yield-to-call — the floor buyers assume when they can't control the option</a:t>
+              <a:t>Yield-to-worst on a callable bond is the lowest of the yield-to-maturity and every yield-to-call — the conservative yield a buyer should assume</a:t>
             </a:r>
             <a:endParaRPr lang="en-US" sz="1600" dirty="0"/>
           </a:p>
@@ -7281,7 +8103,7 @@
                 <a:ea typeface="Calibri" pitchFamily="34" charset="-122"/>
                 <a:cs typeface="Calibri" pitchFamily="34" charset="-120"/>
               </a:rPr>
-              <a:t>Source: CFA Institute, Curriculum Vol 6, LM 7, §3 Example 6 VIVU callable notes, pp. 168–171.</a:t>
+              <a:t>Source: CFA Institute, Curriculum Vol 6, LM 7, §3 Example 6 (VIVU seven-year callable notes) and Exhibit 4, pp. 167–169.</a:t>
             </a:r>
             <a:endParaRPr lang="en-US" sz="750" dirty="0"/>
           </a:p>
@@ -7323,7 +8145,7 @@
                 <a:ea typeface="Calibri" pitchFamily="34" charset="-122"/>
                 <a:cs typeface="Calibri" pitchFamily="34" charset="-120"/>
               </a:rPr>
-              <a:t>6.5% VIVU 7y callable notes at 106.50, semi-annual coupons. Call schedule declines from 103.25 in yr 3-4 to 101.00 in yr 6-7.</a:t>
+              <a:t>VIVU 6.5% seven-year callable notes priced at 106.50, semiannual coupons of 3.25. Call protection for three years, then a step-down call schedule.</a:t>
             </a:r>
             <a:endParaRPr lang="en-US" sz="1300" dirty="0"/>
           </a:p>
@@ -7385,7 +8207,24 @@
                 <a:ea typeface="Consolas" pitchFamily="34" charset="-122"/>
                 <a:cs typeface="Consolas" pitchFamily="34" charset="-120"/>
               </a:rPr>
-              <a:t>P  =  Σ PMT / (1+r)ᵗ  +  Call price / (1+r)ᴺ              YTW  =  min { YTC₁, YTC₂, …, YTM }</a:t>
+              <a:t>PV  =  Σ PMT / (1+r)ᵗ  +  (PMT + Call price) / (1+r)ᴺ</a:t>
+            </a:r>
+            <a:endParaRPr lang="en-US" sz="1800" dirty="0"/>
+          </a:p>
+          <a:p>
+            <a:pPr algn="ctr" indent="0" marL="0">
+              <a:buNone/>
+            </a:pPr>
+            <a:r>
+              <a:rPr lang="en-US" sz="1800" b="1" dirty="0">
+                <a:solidFill>
+                  <a:srgbClr val="FFFFFF"/>
+                </a:solidFill>
+                <a:latin typeface="Consolas" pitchFamily="34" charset="0"/>
+                <a:ea typeface="Consolas" pitchFamily="34" charset="-122"/>
+                <a:cs typeface="Consolas" pitchFamily="34" charset="-120"/>
+              </a:rPr>
+              <a:t>YTW  =  min { YTC₁ ,  YTC₂ ,  … ,  YTM }</a:t>
             </a:r>
             <a:endParaRPr lang="en-US" sz="1800" dirty="0"/>
           </a:p>
@@ -7427,7 +8266,7 @@
                 <a:ea typeface="Calibri" pitchFamily="34" charset="-122"/>
                 <a:cs typeface="Calibri" pitchFamily="34" charset="-120"/>
               </a:rPr>
-              <a:t>where: Issuer will only call when advantageous to them (= disadvantageous to investor), so YTW is the right conservative assumption.</a:t>
+              <a:t>where: The issuer calls only when it suits the issuer — which is when it hurts the investor. So assume the worst outcome, not the best.</a:t>
             </a:r>
             <a:endParaRPr lang="en-US" sz="1100" dirty="0"/>
           </a:p>
@@ -7448,7 +8287,7 @@
           </p:nvPr>
         </p:nvGraphicFramePr>
         <p:xfrm>
-          <a:off x="320040" y="1920240"/>
+          <a:off x="320040" y="2212848"/>
           <a:ext cx="8503920" cy="914400"/>
         </p:xfrm>
         <a:graphic>
@@ -7456,11 +8295,12 @@
             <a:tbl>
               <a:tblPr/>
               <a:tblGrid>
-                <a:gridCol w="2651760"/>
-                <a:gridCol w="1463040"/>
-                <a:gridCol w="1463040"/>
-                <a:gridCol w="1645920"/>
+                <a:gridCol w="2103120"/>
                 <a:gridCol w="1280160"/>
+                <a:gridCol w="1097280"/>
+                <a:gridCol w="1554480"/>
+                <a:gridCol w="1280160"/>
+                <a:gridCol w="1188720"/>
               </a:tblGrid>
               <a:tr h="274320">
                 <a:tc>
@@ -7480,7 +8320,7 @@
                           <a:ea typeface="Trebuchet MS" pitchFamily="34" charset="-122"/>
                           <a:cs typeface="Trebuchet MS" pitchFamily="34" charset="-120"/>
                         </a:rPr>
-                        <a:t>Call scenario</a:t>
+                        <a:t>Scenario</a:t>
                       </a:r>
                       <a:endParaRPr lang="en-US" sz="1100" dirty="0">
                         <a:latin typeface="Trebuchet MS" charset="0"/>
@@ -7530,7 +8370,7 @@
                           <a:ea typeface="Trebuchet MS" pitchFamily="34" charset="-122"/>
                           <a:cs typeface="Trebuchet MS" pitchFamily="34" charset="-120"/>
                         </a:rPr>
-                        <a:t>Call year</a:t>
+                        <a:t>Redeemed</a:t>
                       </a:r>
                       <a:endParaRPr lang="en-US" sz="1100" dirty="0">
                         <a:latin typeface="Trebuchet MS" charset="0"/>
@@ -7580,7 +8420,7 @@
                           <a:ea typeface="Trebuchet MS" pitchFamily="34" charset="-122"/>
                           <a:cs typeface="Trebuchet MS" pitchFamily="34" charset="-120"/>
                         </a:rPr>
-                        <a:t>Call price</a:t>
+                        <a:t>Periods</a:t>
                       </a:r>
                       <a:endParaRPr lang="en-US" sz="1100" dirty="0">
                         <a:latin typeface="Trebuchet MS" charset="0"/>
@@ -7630,7 +8470,7 @@
                           <a:ea typeface="Trebuchet MS" pitchFamily="34" charset="-122"/>
                           <a:cs typeface="Trebuchet MS" pitchFamily="34" charset="-120"/>
                         </a:rPr>
-                        <a:t>Semi-annual r</a:t>
+                        <a:t>Redemption</a:t>
                       </a:r>
                       <a:endParaRPr lang="en-US" sz="1100" dirty="0">
                         <a:latin typeface="Trebuchet MS" charset="0"/>
@@ -7680,7 +8520,57 @@
                           <a:ea typeface="Trebuchet MS" pitchFamily="34" charset="-122"/>
                           <a:cs typeface="Trebuchet MS" pitchFamily="34" charset="-120"/>
                         </a:rPr>
-                        <a:t>Annualized yield</a:t>
+                        <a:t>Semi r</a:t>
+                      </a:r>
+                      <a:endParaRPr lang="en-US" sz="1100" dirty="0">
+                        <a:latin typeface="Trebuchet MS" charset="0"/>
+                        <a:ea typeface="Trebuchet MS" charset="0"/>
+                        <a:cs typeface="Trebuchet MS" charset="0"/>
+                      </a:endParaRPr>
+                    </a:p>
+                  </a:txBody>
+                  <a:tcPr marL="91440" marR="91440" marT="45720" marB="45720" anchor="ctr">
+                    <a:lnL w="0" cap="flat" cmpd="sng" algn="ctr">
+                      <a:noFill/>
+                    </a:lnL>
+                    <a:lnR w="0" cap="flat" cmpd="sng" algn="ctr">
+                      <a:noFill/>
+                    </a:lnR>
+                    <a:lnT w="6350" cap="flat" cmpd="sng" algn="ctr">
+                      <a:solidFill>
+                        <a:srgbClr val="1B2A4A"/>
+                      </a:solidFill>
+                      <a:prstDash val="solid"/>
+                      <a:round/>
+                      <a:headEnd type="none" w="med" len="med"/>
+                      <a:tailEnd type="none" w="med" len="med"/>
+                    </a:lnT>
+                    <a:lnB w="0" cap="flat" cmpd="sng" algn="ctr">
+                      <a:noFill/>
+                    </a:lnB>
+                    <a:solidFill>
+                      <a:srgbClr val="1B2A4A"/>
+                    </a:solidFill>
+                  </a:tcPr>
+                </a:tc>
+                <a:tc>
+                  <a:txBody>
+                    <a:bodyPr/>
+                    <a:lstStyle/>
+                    <a:p>
+                      <a:pPr algn="ctr" indent="0" marL="0">
+                        <a:buNone/>
+                      </a:pPr>
+                      <a:r>
+                        <a:rPr lang="en-US" sz="1100" b="1" dirty="0">
+                          <a:solidFill>
+                            <a:srgbClr val="FFFFFF"/>
+                          </a:solidFill>
+                          <a:latin typeface="Trebuchet MS" pitchFamily="34" charset="0"/>
+                          <a:ea typeface="Trebuchet MS" pitchFamily="34" charset="-122"/>
+                          <a:cs typeface="Trebuchet MS" pitchFamily="34" charset="-120"/>
+                        </a:rPr>
+                        <a:t>Annualized</a:t>
                       </a:r>
                       <a:endParaRPr lang="en-US" sz="1100" dirty="0">
                         <a:latin typeface="Trebuchet MS" charset="0"/>
@@ -7732,7 +8622,7 @@
                           <a:ea typeface="Calibri" pitchFamily="34" charset="-122"/>
                           <a:cs typeface="Calibri" pitchFamily="34" charset="-120"/>
                         </a:rPr>
-                        <a:t>Yield-to-first-call</a:t>
+                        <a:t>Yield-to-first call</a:t>
                       </a:r>
                       <a:endParaRPr lang="en-US" sz="1100" dirty="0">
                         <a:latin typeface="Calibri" charset="0"/>
@@ -7782,7 +8672,57 @@
                           <a:ea typeface="Consolas" pitchFamily="34" charset="-122"/>
                           <a:cs typeface="Consolas" pitchFamily="34" charset="-120"/>
                         </a:rPr>
-                        <a:t>End of 3</a:t>
+                        <a:t>End yr 3</a:t>
+                      </a:r>
+                      <a:endParaRPr lang="en-US" sz="1100" dirty="0">
+                        <a:latin typeface="Consolas" charset="0"/>
+                        <a:ea typeface="Consolas" charset="0"/>
+                        <a:cs typeface="Consolas" charset="0"/>
+                      </a:endParaRPr>
+                    </a:p>
+                  </a:txBody>
+                  <a:tcPr marL="91440" marR="91440" marT="45720" marB="45720" anchor="ctr">
+                    <a:lnL w="0" cap="flat" cmpd="sng" algn="ctr">
+                      <a:noFill/>
+                    </a:lnL>
+                    <a:lnR w="0" cap="flat" cmpd="sng" algn="ctr">
+                      <a:noFill/>
+                    </a:lnR>
+                    <a:lnT w="0" cap="flat" cmpd="sng" algn="ctr">
+                      <a:noFill/>
+                    </a:lnT>
+                    <a:lnB w="3175" cap="flat" cmpd="sng" algn="ctr">
+                      <a:solidFill>
+                        <a:srgbClr val="D0D8E8"/>
+                      </a:solidFill>
+                      <a:prstDash val="solid"/>
+                      <a:round/>
+                      <a:headEnd type="none" w="med" len="med"/>
+                      <a:tailEnd type="none" w="med" len="med"/>
+                    </a:lnB>
+                    <a:solidFill>
+                      <a:srgbClr val="FFFFFF"/>
+                    </a:solidFill>
+                  </a:tcPr>
+                </a:tc>
+                <a:tc>
+                  <a:txBody>
+                    <a:bodyPr/>
+                    <a:lstStyle/>
+                    <a:p>
+                      <a:pPr algn="r" indent="0" marL="0">
+                        <a:buNone/>
+                      </a:pPr>
+                      <a:r>
+                        <a:rPr lang="en-US" sz="1100" dirty="0">
+                          <a:solidFill>
+                            <a:srgbClr val="334155"/>
+                          </a:solidFill>
+                          <a:latin typeface="Consolas" pitchFamily="34" charset="0"/>
+                          <a:ea typeface="Consolas" pitchFamily="34" charset="-122"/>
+                          <a:cs typeface="Consolas" pitchFamily="34" charset="-120"/>
+                        </a:rPr>
+                        <a:t>6</a:t>
                       </a:r>
                       <a:endParaRPr lang="en-US" sz="1100" dirty="0">
                         <a:latin typeface="Consolas" charset="0"/>
@@ -7882,7 +8822,7 @@
                           <a:ea typeface="Consolas" pitchFamily="34" charset="-122"/>
                           <a:cs typeface="Consolas" pitchFamily="34" charset="-120"/>
                         </a:rPr>
-                        <a:t>2.575%</a:t>
+                        <a:t>2.5748%</a:t>
                       </a:r>
                       <a:endParaRPr lang="en-US" sz="1100" dirty="0">
                         <a:latin typeface="Consolas" charset="0"/>
@@ -7984,7 +8924,7 @@
                           <a:ea typeface="Calibri" pitchFamily="34" charset="-122"/>
                           <a:cs typeface="Calibri" pitchFamily="34" charset="-120"/>
                         </a:rPr>
-                        <a:t>Yield-to-second-call</a:t>
+                        <a:t>Yield-to-second call</a:t>
                       </a:r>
                       <a:endParaRPr lang="en-US" sz="1100" dirty="0">
                         <a:latin typeface="Calibri" charset="0"/>
@@ -8034,7 +8974,57 @@
                           <a:ea typeface="Consolas" pitchFamily="34" charset="-122"/>
                           <a:cs typeface="Consolas" pitchFamily="34" charset="-120"/>
                         </a:rPr>
-                        <a:t>End of 4</a:t>
+                        <a:t>End yr 4</a:t>
+                      </a:r>
+                      <a:endParaRPr lang="en-US" sz="1100" dirty="0">
+                        <a:latin typeface="Consolas" charset="0"/>
+                        <a:ea typeface="Consolas" charset="0"/>
+                        <a:cs typeface="Consolas" charset="0"/>
+                      </a:endParaRPr>
+                    </a:p>
+                  </a:txBody>
+                  <a:tcPr marL="91440" marR="91440" marT="45720" marB="45720" anchor="ctr">
+                    <a:lnL w="0" cap="flat" cmpd="sng" algn="ctr">
+                      <a:noFill/>
+                    </a:lnL>
+                    <a:lnR w="0" cap="flat" cmpd="sng" algn="ctr">
+                      <a:noFill/>
+                    </a:lnR>
+                    <a:lnT w="0" cap="flat" cmpd="sng" algn="ctr">
+                      <a:noFill/>
+                    </a:lnT>
+                    <a:lnB w="3175" cap="flat" cmpd="sng" algn="ctr">
+                      <a:solidFill>
+                        <a:srgbClr val="D0D8E8"/>
+                      </a:solidFill>
+                      <a:prstDash val="solid"/>
+                      <a:round/>
+                      <a:headEnd type="none" w="med" len="med"/>
+                      <a:tailEnd type="none" w="med" len="med"/>
+                    </a:lnB>
+                    <a:solidFill>
+                      <a:srgbClr val="F5F7FA"/>
+                    </a:solidFill>
+                  </a:tcPr>
+                </a:tc>
+                <a:tc>
+                  <a:txBody>
+                    <a:bodyPr/>
+                    <a:lstStyle/>
+                    <a:p>
+                      <a:pPr algn="r" indent="0" marL="0">
+                        <a:buNone/>
+                      </a:pPr>
+                      <a:r>
+                        <a:rPr lang="en-US" sz="1100" dirty="0">
+                          <a:solidFill>
+                            <a:srgbClr val="334155"/>
+                          </a:solidFill>
+                          <a:latin typeface="Consolas" pitchFamily="34" charset="0"/>
+                          <a:ea typeface="Consolas" pitchFamily="34" charset="-122"/>
+                          <a:cs typeface="Consolas" pitchFamily="34" charset="-120"/>
+                        </a:rPr>
+                        <a:t>8</a:t>
                       </a:r>
                       <a:endParaRPr lang="en-US" sz="1100" dirty="0">
                         <a:latin typeface="Consolas" charset="0"/>
@@ -8134,7 +9124,7 @@
                           <a:ea typeface="Consolas" pitchFamily="34" charset="-122"/>
                           <a:cs typeface="Consolas" pitchFamily="34" charset="-120"/>
                         </a:rPr>
-                        <a:t>2.624%</a:t>
+                        <a:t>2.6237%</a:t>
                       </a:r>
                       <a:endParaRPr lang="en-US" sz="1100" dirty="0">
                         <a:latin typeface="Consolas" charset="0"/>
@@ -8236,7 +9226,7 @@
                           <a:ea typeface="Calibri" pitchFamily="34" charset="-122"/>
                           <a:cs typeface="Calibri" pitchFamily="34" charset="-120"/>
                         </a:rPr>
-                        <a:t>Yield-to-third-call</a:t>
+                        <a:t>Yield-to-third call</a:t>
                       </a:r>
                       <a:endParaRPr lang="en-US" sz="1100" dirty="0">
                         <a:latin typeface="Calibri" charset="0"/>
@@ -8286,7 +9276,57 @@
                           <a:ea typeface="Consolas" pitchFamily="34" charset="-122"/>
                           <a:cs typeface="Consolas" pitchFamily="34" charset="-120"/>
                         </a:rPr>
-                        <a:t>End of 5</a:t>
+                        <a:t>End yr 5</a:t>
+                      </a:r>
+                      <a:endParaRPr lang="en-US" sz="1100" dirty="0">
+                        <a:latin typeface="Consolas" charset="0"/>
+                        <a:ea typeface="Consolas" charset="0"/>
+                        <a:cs typeface="Consolas" charset="0"/>
+                      </a:endParaRPr>
+                    </a:p>
+                  </a:txBody>
+                  <a:tcPr marL="91440" marR="91440" marT="45720" marB="45720" anchor="ctr">
+                    <a:lnL w="0" cap="flat" cmpd="sng" algn="ctr">
+                      <a:noFill/>
+                    </a:lnL>
+                    <a:lnR w="0" cap="flat" cmpd="sng" algn="ctr">
+                      <a:noFill/>
+                    </a:lnR>
+                    <a:lnT w="0" cap="flat" cmpd="sng" algn="ctr">
+                      <a:noFill/>
+                    </a:lnT>
+                    <a:lnB w="3175" cap="flat" cmpd="sng" algn="ctr">
+                      <a:solidFill>
+                        <a:srgbClr val="D0D8E8"/>
+                      </a:solidFill>
+                      <a:prstDash val="solid"/>
+                      <a:round/>
+                      <a:headEnd type="none" w="med" len="med"/>
+                      <a:tailEnd type="none" w="med" len="med"/>
+                    </a:lnB>
+                    <a:solidFill>
+                      <a:srgbClr val="FFFFFF"/>
+                    </a:solidFill>
+                  </a:tcPr>
+                </a:tc>
+                <a:tc>
+                  <a:txBody>
+                    <a:bodyPr/>
+                    <a:lstStyle/>
+                    <a:p>
+                      <a:pPr algn="r" indent="0" marL="0">
+                        <a:buNone/>
+                      </a:pPr>
+                      <a:r>
+                        <a:rPr lang="en-US" sz="1100" dirty="0">
+                          <a:solidFill>
+                            <a:srgbClr val="334155"/>
+                          </a:solidFill>
+                          <a:latin typeface="Consolas" pitchFamily="34" charset="0"/>
+                          <a:ea typeface="Consolas" pitchFamily="34" charset="-122"/>
+                          <a:cs typeface="Consolas" pitchFamily="34" charset="-120"/>
+                        </a:rPr>
+                        <a:t>10</a:t>
                       </a:r>
                       <a:endParaRPr lang="en-US" sz="1100" dirty="0">
                         <a:latin typeface="Consolas" charset="0"/>
@@ -8386,7 +9426,7 @@
                           <a:ea typeface="Consolas" pitchFamily="34" charset="-122"/>
                           <a:cs typeface="Consolas" pitchFamily="34" charset="-120"/>
                         </a:rPr>
-                        <a:t>2.653%</a:t>
+                        <a:t>2.6530%</a:t>
                       </a:r>
                       <a:endParaRPr lang="en-US" sz="1100" dirty="0">
                         <a:latin typeface="Consolas" charset="0"/>
@@ -8488,7 +9528,7 @@
                           <a:ea typeface="Calibri" pitchFamily="34" charset="-122"/>
                           <a:cs typeface="Calibri" pitchFamily="34" charset="-120"/>
                         </a:rPr>
-                        <a:t>Yield-to-fourth-call</a:t>
+                        <a:t>Yield-to-fourth call</a:t>
                       </a:r>
                       <a:endParaRPr lang="en-US" sz="1100" dirty="0">
                         <a:latin typeface="Calibri" charset="0"/>
@@ -8538,7 +9578,57 @@
                           <a:ea typeface="Consolas" pitchFamily="34" charset="-122"/>
                           <a:cs typeface="Consolas" pitchFamily="34" charset="-120"/>
                         </a:rPr>
-                        <a:t>End of 6</a:t>
+                        <a:t>End yr 6</a:t>
+                      </a:r>
+                      <a:endParaRPr lang="en-US" sz="1100" dirty="0">
+                        <a:latin typeface="Consolas" charset="0"/>
+                        <a:ea typeface="Consolas" charset="0"/>
+                        <a:cs typeface="Consolas" charset="0"/>
+                      </a:endParaRPr>
+                    </a:p>
+                  </a:txBody>
+                  <a:tcPr marL="91440" marR="91440" marT="45720" marB="45720" anchor="ctr">
+                    <a:lnL w="0" cap="flat" cmpd="sng" algn="ctr">
+                      <a:noFill/>
+                    </a:lnL>
+                    <a:lnR w="0" cap="flat" cmpd="sng" algn="ctr">
+                      <a:noFill/>
+                    </a:lnR>
+                    <a:lnT w="0" cap="flat" cmpd="sng" algn="ctr">
+                      <a:noFill/>
+                    </a:lnT>
+                    <a:lnB w="3175" cap="flat" cmpd="sng" algn="ctr">
+                      <a:solidFill>
+                        <a:srgbClr val="D0D8E8"/>
+                      </a:solidFill>
+                      <a:prstDash val="solid"/>
+                      <a:round/>
+                      <a:headEnd type="none" w="med" len="med"/>
+                      <a:tailEnd type="none" w="med" len="med"/>
+                    </a:lnB>
+                    <a:solidFill>
+                      <a:srgbClr val="F5F7FA"/>
+                    </a:solidFill>
+                  </a:tcPr>
+                </a:tc>
+                <a:tc>
+                  <a:txBody>
+                    <a:bodyPr/>
+                    <a:lstStyle/>
+                    <a:p>
+                      <a:pPr algn="r" indent="0" marL="0">
+                        <a:buNone/>
+                      </a:pPr>
+                      <a:r>
+                        <a:rPr lang="en-US" sz="1100" dirty="0">
+                          <a:solidFill>
+                            <a:srgbClr val="334155"/>
+                          </a:solidFill>
+                          <a:latin typeface="Consolas" pitchFamily="34" charset="0"/>
+                          <a:ea typeface="Consolas" pitchFamily="34" charset="-122"/>
+                          <a:cs typeface="Consolas" pitchFamily="34" charset="-120"/>
+                        </a:rPr>
+                        <a:t>12</a:t>
                       </a:r>
                       <a:endParaRPr lang="en-US" sz="1100" dirty="0">
                         <a:latin typeface="Consolas" charset="0"/>
@@ -8638,7 +9728,7 @@
                           <a:ea typeface="Consolas" pitchFamily="34" charset="-122"/>
                           <a:cs typeface="Consolas" pitchFamily="34" charset="-120"/>
                         </a:rPr>
-                        <a:t>2.681%</a:t>
+                        <a:t>2.6811%</a:t>
                       </a:r>
                       <a:endParaRPr lang="en-US" sz="1100" dirty="0">
                         <a:latin typeface="Consolas" charset="0"/>
@@ -8740,7 +9830,7 @@
                           <a:ea typeface="Calibri" pitchFamily="34" charset="-122"/>
                           <a:cs typeface="Calibri" pitchFamily="34" charset="-120"/>
                         </a:rPr>
-                        <a:t>Yield-to-maturity (not called)</a:t>
+                        <a:t>Yield-to-maturity</a:t>
                       </a:r>
                       <a:endParaRPr lang="en-US" sz="1100" dirty="0">
                         <a:latin typeface="Calibri" charset="0"/>
@@ -8790,7 +9880,57 @@
                           <a:ea typeface="Consolas" pitchFamily="34" charset="-122"/>
                           <a:cs typeface="Consolas" pitchFamily="34" charset="-120"/>
                         </a:rPr>
-                        <a:t>End of 7</a:t>
+                        <a:t>End yr 7</a:t>
+                      </a:r>
+                      <a:endParaRPr lang="en-US" sz="1100" dirty="0">
+                        <a:latin typeface="Consolas" charset="0"/>
+                        <a:ea typeface="Consolas" charset="0"/>
+                        <a:cs typeface="Consolas" charset="0"/>
+                      </a:endParaRPr>
+                    </a:p>
+                  </a:txBody>
+                  <a:tcPr marL="91440" marR="91440" marT="45720" marB="45720" anchor="ctr">
+                    <a:lnL w="0" cap="flat" cmpd="sng" algn="ctr">
+                      <a:noFill/>
+                    </a:lnL>
+                    <a:lnR w="0" cap="flat" cmpd="sng" algn="ctr">
+                      <a:noFill/>
+                    </a:lnR>
+                    <a:lnT w="0" cap="flat" cmpd="sng" algn="ctr">
+                      <a:noFill/>
+                    </a:lnT>
+                    <a:lnB w="3175" cap="flat" cmpd="sng" algn="ctr">
+                      <a:solidFill>
+                        <a:srgbClr val="D0D8E8"/>
+                      </a:solidFill>
+                      <a:prstDash val="solid"/>
+                      <a:round/>
+                      <a:headEnd type="none" w="med" len="med"/>
+                      <a:tailEnd type="none" w="med" len="med"/>
+                    </a:lnB>
+                    <a:solidFill>
+                      <a:srgbClr val="FFFFFF"/>
+                    </a:solidFill>
+                  </a:tcPr>
+                </a:tc>
+                <a:tc>
+                  <a:txBody>
+                    <a:bodyPr/>
+                    <a:lstStyle/>
+                    <a:p>
+                      <a:pPr algn="r" indent="0" marL="0">
+                        <a:buNone/>
+                      </a:pPr>
+                      <a:r>
+                        <a:rPr lang="en-US" sz="1100" dirty="0">
+                          <a:solidFill>
+                            <a:srgbClr val="334155"/>
+                          </a:solidFill>
+                          <a:latin typeface="Consolas" pitchFamily="34" charset="0"/>
+                          <a:ea typeface="Consolas" pitchFamily="34" charset="-122"/>
+                          <a:cs typeface="Consolas" pitchFamily="34" charset="-120"/>
+                        </a:rPr>
+                        <a:t>14</a:t>
                       </a:r>
                       <a:endParaRPr lang="en-US" sz="1100" dirty="0">
                         <a:latin typeface="Consolas" charset="0"/>
@@ -8890,7 +10030,7 @@
                           <a:ea typeface="Consolas" pitchFamily="34" charset="-122"/>
                           <a:cs typeface="Consolas" pitchFamily="34" charset="-120"/>
                         </a:rPr>
-                        <a:t>2.705%</a:t>
+                        <a:t>2.6868%</a:t>
                       </a:r>
                       <a:endParaRPr lang="en-US" sz="1100" dirty="0">
                         <a:latin typeface="Consolas" charset="0"/>
@@ -8940,7 +10080,7 @@
                           <a:ea typeface="Consolas" pitchFamily="34" charset="-122"/>
                           <a:cs typeface="Consolas" pitchFamily="34" charset="-120"/>
                         </a:rPr>
-                        <a:t>5.41%</a:t>
+                        <a:t>5.37%</a:t>
                       </a:r>
                       <a:endParaRPr lang="en-US" sz="1100" dirty="0">
                         <a:latin typeface="Consolas" charset="0"/>
@@ -9216,7 +10356,63 @@
                           <a:ea typeface="Consolas" pitchFamily="34" charset="-122"/>
                           <a:cs typeface="Consolas" pitchFamily="34" charset="-120"/>
                         </a:rPr>
-                        <a:t>5.15% (YTC₁)</a:t>
+                        <a:t>—</a:t>
+                      </a:r>
+                      <a:endParaRPr lang="en-US" sz="1100" dirty="0">
+                        <a:latin typeface="Consolas" charset="0"/>
+                        <a:ea typeface="Consolas" charset="0"/>
+                        <a:cs typeface="Consolas" charset="0"/>
+                      </a:endParaRPr>
+                    </a:p>
+                  </a:txBody>
+                  <a:tcPr marL="91440" marR="91440" marT="45720" marB="45720" anchor="ctr">
+                    <a:lnL w="0" cap="flat" cmpd="sng" algn="ctr">
+                      <a:noFill/>
+                    </a:lnL>
+                    <a:lnR w="0" cap="flat" cmpd="sng" algn="ctr">
+                      <a:noFill/>
+                    </a:lnR>
+                    <a:lnT w="12700" cap="flat" cmpd="sng" algn="ctr">
+                      <a:solidFill>
+                        <a:srgbClr val="1B2A4A"/>
+                      </a:solidFill>
+                      <a:prstDash val="solid"/>
+                      <a:round/>
+                      <a:headEnd type="none" w="med" len="med"/>
+                      <a:tailEnd type="none" w="med" len="med"/>
+                    </a:lnT>
+                    <a:lnB w="12700" cap="flat" cmpd="sng" algn="ctr">
+                      <a:solidFill>
+                        <a:srgbClr val="1B2A4A"/>
+                      </a:solidFill>
+                      <a:prstDash val="solid"/>
+                      <a:round/>
+                      <a:headEnd type="none" w="med" len="med"/>
+                      <a:tailEnd type="none" w="med" len="med"/>
+                    </a:lnB>
+                    <a:solidFill>
+                      <a:srgbClr val="E8ECF0"/>
+                    </a:solidFill>
+                  </a:tcPr>
+                </a:tc>
+                <a:tc>
+                  <a:txBody>
+                    <a:bodyPr/>
+                    <a:lstStyle/>
+                    <a:p>
+                      <a:pPr algn="r" indent="0" marL="0">
+                        <a:buNone/>
+                      </a:pPr>
+                      <a:r>
+                        <a:rPr lang="en-US" sz="1100" b="1" dirty="0">
+                          <a:solidFill>
+                            <a:srgbClr val="1B2A4A"/>
+                          </a:solidFill>
+                          <a:latin typeface="Consolas" pitchFamily="34" charset="0"/>
+                          <a:ea typeface="Consolas" pitchFamily="34" charset="-122"/>
+                          <a:cs typeface="Consolas" pitchFamily="34" charset="-120"/>
+                        </a:rPr>
+                        <a:t>5.15%</a:t>
                       </a:r>
                       <a:endParaRPr lang="en-US" sz="1100" dirty="0">
                         <a:latin typeface="Consolas" charset="0"/>
@@ -9353,7 +10549,7 @@
               <a:buNone/>
             </a:pPr>
             <a:r>
-              <a:rPr lang="en-US" sz="1600" b="1" dirty="0">
+              <a:rPr lang="en-US" sz="1700" b="1" dirty="0">
                 <a:solidFill>
                   <a:srgbClr val="FFFFFF"/>
                 </a:solidFill>
@@ -9361,9 +10557,9 @@
                 <a:ea typeface="Trebuchet MS" pitchFamily="34" charset="-122"/>
                 <a:cs typeface="Trebuchet MS" pitchFamily="34" charset="-120"/>
               </a:rPr>
-              <a:t>A bond's YTM decomposes into a benchmark rate plus an issuer-specific yield spread — macro captured by the benchmark, micro in the spread</a:t>
-            </a:r>
-            <a:endParaRPr lang="en-US" sz="1600" dirty="0"/>
+              <a:t>Every YTM decomposes into a benchmark rate plus an issuer-specific spread — macro sits in the benchmark, micro sits in the spread</a:t>
+            </a:r>
+            <a:endParaRPr lang="en-US" sz="1700" dirty="0"/>
           </a:p>
         </p:txBody>
       </p:sp>
@@ -9465,7 +10661,7 @@
                 <a:ea typeface="Calibri" pitchFamily="34" charset="-122"/>
                 <a:cs typeface="Calibri" pitchFamily="34" charset="-120"/>
               </a:rPr>
-              <a:t>Source: CFA Institute, Curriculum Vol 6, LM 7, §4 "Yield Spreads over Benchmark Rates", pp. 171–176.</a:t>
+              <a:t>Source: CFA Institute, Curriculum Vol 6, LM 7, §4 "Yield Spreads over Benchmark Rates", Exhibit 5 and Exhibit 8, pp. 171–177.</a:t>
             </a:r>
             <a:endParaRPr lang="en-US" sz="750" dirty="0"/>
           </a:p>
@@ -9507,7 +10703,7 @@
                 <a:ea typeface="Calibri" pitchFamily="34" charset="-122"/>
                 <a:cs typeface="Calibri" pitchFamily="34" charset="-120"/>
               </a:rPr>
-              <a:t>Spread isolates issuer-specific risks (credit, liquidity, tax) from market-wide rate moves. Analysts monitor spreads vs history, not absolute yields.</a:t>
+              <a:t>Benchmark = expected real rate + expected inflation. Spread = credit + liquidity + taxation. Analysts track the spread against its own history, not the absolute yield.</a:t>
             </a:r>
             <a:endParaRPr lang="en-US" sz="1300" dirty="0"/>
           </a:p>
@@ -9569,7 +10765,24 @@
                 <a:ea typeface="Consolas" pitchFamily="34" charset="-122"/>
                 <a:cs typeface="Consolas" pitchFamily="34" charset="-120"/>
               </a:rPr>
-              <a:t>YTM_bond  =  Benchmark_YTM  +  Yield spread           G-spread  =  YTM_bond  −  interpolated government YTM</a:t>
+              <a:t>YTM_bond  =  Benchmark yield  +  Yield spread</a:t>
+            </a:r>
+            <a:endParaRPr lang="en-US" sz="1800" dirty="0"/>
+          </a:p>
+          <a:p>
+            <a:pPr algn="ctr" indent="0" marL="0">
+              <a:buNone/>
+            </a:pPr>
+            <a:r>
+              <a:rPr lang="en-US" sz="1800" b="1" dirty="0">
+                <a:solidFill>
+                  <a:srgbClr val="FFFFFF"/>
+                </a:solidFill>
+                <a:latin typeface="Consolas" pitchFamily="34" charset="0"/>
+                <a:ea typeface="Consolas" pitchFamily="34" charset="-122"/>
+                <a:cs typeface="Consolas" pitchFamily="34" charset="-120"/>
+              </a:rPr>
+              <a:t>G-spread  =  YTM_bond  −  government YTM</a:t>
             </a:r>
             <a:endParaRPr lang="en-US" sz="1800" dirty="0"/>
           </a:p>
@@ -9611,7 +10824,7 @@
                 <a:ea typeface="Calibri" pitchFamily="34" charset="-122"/>
                 <a:cs typeface="Calibri" pitchFamily="34" charset="-120"/>
               </a:rPr>
-              <a:t>where: Benchmark = on-the-run sovereign of similar maturity (or interest-rate swap for I-spread). Spread often in bps.</a:t>
+              <a:t>where: Benchmark = the on-the-run sovereign of matching maturity, interpolated when no matching bond exists. Spreads are quoted in basis points.</a:t>
             </a:r>
             <a:endParaRPr lang="en-US" sz="1100" dirty="0"/>
           </a:p>
@@ -9735,7 +10948,7 @@
                 <a:ea typeface="Calibri" pitchFamily="34" charset="-122"/>
                 <a:cs typeface="Calibri" pitchFamily="34" charset="-120"/>
               </a:rPr>
-              <a:t>Difference vs (interpolated) government YTM of matching maturity. Cleanest cross-issuer credit gauge. Single-number.</a:t>
+              <a:t>Over an actual or interpolated government bond of the same maturity. The default in the US, UK and Japan. One number minus one number.</a:t>
             </a:r>
             <a:endParaRPr lang="en-US" sz="1200" dirty="0"/>
           </a:p>
@@ -9859,7 +11072,7 @@
                 <a:ea typeface="Calibri" pitchFamily="34" charset="-122"/>
                 <a:cs typeface="Calibri" pitchFamily="34" charset="-120"/>
               </a:rPr>
-              <a:t>Difference vs matched-maturity interest-rate swap rate. Common for EUR corporates — swap curve is deeper than the sovereign curve.</a:t>
+              <a:t>Over the matched-tenor interest-rate swap rate. The convention for euro-denominated corporates, quoted as "mid-swaps plus X".</a:t>
             </a:r>
             <a:endParaRPr lang="en-US" sz="1200" dirty="0"/>
           </a:p>
@@ -9983,7 +11196,7 @@
                 <a:ea typeface="Calibri" pitchFamily="34" charset="-122"/>
                 <a:cs typeface="Calibri" pitchFamily="34" charset="-120"/>
               </a:rPr>
-              <a:t>Constant spread added to EVERY benchmark spot rate so PV of cash flows = price. More accurate when the curve is steep.</a:t>
+              <a:t>A constant add-on to EVERY benchmark spot rate such that the PV of the cash flows equals the price. Uses the whole curve, not one point.</a:t>
             </a:r>
             <a:endParaRPr lang="en-US" sz="1200" dirty="0"/>
           </a:p>
@@ -10082,7 +11295,7 @@
               <a:buNone/>
             </a:pPr>
             <a:r>
-              <a:rPr lang="en-US" sz="1700" b="1" dirty="0">
+              <a:rPr lang="en-US" sz="1600" b="1" dirty="0">
                 <a:solidFill>
                   <a:srgbClr val="FFFFFF"/>
                 </a:solidFill>
@@ -10090,9 +11303,9 @@
                 <a:ea typeface="Trebuchet MS" pitchFamily="34" charset="-122"/>
                 <a:cs typeface="Trebuchet MS" pitchFamily="34" charset="-120"/>
               </a:rPr>
-              <a:t>Worked — Russian Federation 5.25% 30y bond at 123.5 six years in has a G-spread of 166 bps over an interpolated 24y Treasury</a:t>
-            </a:r>
-            <a:endParaRPr lang="en-US" sz="1700" dirty="0"/>
+              <a:t>Worked — the Russian Federation 5.25% 30-year bond at 123.5 with 24 years left has a G-spread of 166 bps over an interpolated 24-year Treasury</a:t>
+            </a:r>
+            <a:endParaRPr lang="en-US" sz="1600" dirty="0"/>
           </a:p>
         </p:txBody>
       </p:sp>
@@ -10194,7 +11407,7 @@
                 <a:ea typeface="Calibri" pitchFamily="34" charset="-122"/>
                 <a:cs typeface="Calibri" pitchFamily="34" charset="-120"/>
               </a:rPr>
-              <a:t>Source: CFA Institute, Curriculum Vol 6, LM 7, §4 Example 7 Russian Federation bond, pp. 174–176.</a:t>
+              <a:t>Source: CFA Institute, Curriculum Vol 6, LM 7, §4 Example 7 "Calculating G-Spread without a Comparable Benchmark Bond", pp. 174–175.</a:t>
             </a:r>
             <a:endParaRPr lang="en-US" sz="750" dirty="0"/>
           </a:p>
@@ -10236,7 +11449,7 @@
                 <a:ea typeface="Calibri" pitchFamily="34" charset="-122"/>
                 <a:cs typeface="Calibri" pitchFamily="34" charset="-120"/>
               </a:rPr>
-              <a:t>At issuance in 2020 the bond priced at 99.625 with a 200-bp spread over the 30y UST. Six years later we compute the current spread.</a:t>
+              <a:t>Issued at 99.625 at 200 bps over the 30-year Treasury. Six years on, no 24-year Treasury exists — so we build one by interpolation.</a:t>
             </a:r>
             <a:endParaRPr lang="en-US" sz="1300" dirty="0"/>
           </a:p>
@@ -10251,7 +11464,7 @@
         <p:spPr>
           <a:xfrm>
             <a:off x="320040" y="1143000"/>
-            <a:ext cx="8503920" cy="3154680"/>
+            <a:ext cx="8503920" cy="2377440"/>
           </a:xfrm>
           <a:prstGeom prst="rect">
             <a:avLst/>
@@ -10303,7 +11516,7 @@
                 <a:ea typeface="Trebuchet MS" pitchFamily="34" charset="-122"/>
                 <a:cs typeface="Trebuchet MS" pitchFamily="34" charset="-120"/>
               </a:rPr>
-              <a:t>RUSSIA 5.25% USD · SEMI · 30Y ORIGINAL · 24Y REMAINING</a:t>
+              <a:t>RUSSIAN FEDERATION 5.25% USD · SEMIANNUAL · 24 YEARS LEFT</a:t>
             </a:r>
             <a:endParaRPr lang="en-US" sz="1100" dirty="0"/>
           </a:p>
@@ -10345,7 +11558,7 @@
                 <a:ea typeface="Calibri" pitchFamily="34" charset="-122"/>
                 <a:cs typeface="Calibri" pitchFamily="34" charset="-120"/>
               </a:rPr>
-              <a:t>15 Mar 2026 price = 123.5. 20-year UST yields 2.00%; 30-year UST yields 2.25%. Compute current G-spread.</a:t>
+              <a:t>On 15 Mar 2026 the bond trades at 123.5. The 20-year US Treasury yields 2.00% and the 30-year yields 2.25%. Find the current G-spread.</a:t>
             </a:r>
             <a:endParaRPr lang="en-US" sz="1200" dirty="0"/>
           </a:p>
@@ -10360,7 +11573,7 @@
         <p:spPr>
           <a:xfrm>
             <a:off x="457200" y="1993392"/>
-            <a:ext cx="8229600" cy="1792224"/>
+            <a:ext cx="8229600" cy="1014984"/>
           </a:xfrm>
           <a:prstGeom prst="rect">
             <a:avLst/>
@@ -10382,7 +11595,7 @@
               <a:buNone/>
             </a:pPr>
             <a:r>
-              <a:rPr lang="en-US" sz="1200" b="1" dirty="0">
+              <a:rPr lang="en-US" sz="1150" b="1" dirty="0">
                 <a:solidFill>
                   <a:srgbClr val="1B2A4A"/>
                 </a:solidFill>
@@ -10399,7 +11612,7 @@
               <a:buNone/>
             </a:pPr>
             <a:r>
-              <a:rPr lang="en-US" sz="1200" dirty="0">
+              <a:rPr lang="en-US" sz="1150" dirty="0">
                 <a:solidFill>
                   <a:srgbClr val="334155"/>
                 </a:solidFill>
@@ -10407,7 +11620,7 @@
                 <a:ea typeface="Calibri" pitchFamily="34" charset="-122"/>
                 <a:cs typeface="Calibri" pitchFamily="34" charset="-120"/>
               </a:rPr>
-              <a:t>Step 1 — Current YTM: solve 123.5 = Σ 2.625/(1+r/2)ᵗ + 100/(1+r/2)⁴⁸  →  YTM ≈ 3.756%
+              <a:t>Current YTM: solve 123.5 = Σ 2.625/(1+r)ᵗ + 100/(1+r)⁴⁸ over 48 semiannual periods  →  YTM = 3.756%
 </a:t>
             </a:r>
             <a:pPr indent="0" marL="0">
@@ -10417,7 +11630,7 @@
               <a:buNone/>
             </a:pPr>
             <a:r>
-              <a:rPr lang="en-US" sz="1200" b="1" dirty="0">
+              <a:rPr lang="en-US" sz="1150" b="1" dirty="0">
                 <a:solidFill>
                   <a:srgbClr val="1B2A4A"/>
                 </a:solidFill>
@@ -10434,7 +11647,7 @@
               <a:buNone/>
             </a:pPr>
             <a:r>
-              <a:rPr lang="en-US" sz="1200" dirty="0">
+              <a:rPr lang="en-US" sz="1150" dirty="0">
                 <a:solidFill>
                   <a:srgbClr val="334155"/>
                 </a:solidFill>
@@ -10442,7 +11655,7 @@
                 <a:ea typeface="Calibri" pitchFamily="34" charset="-122"/>
                 <a:cs typeface="Calibri" pitchFamily="34" charset="-120"/>
               </a:rPr>
-              <a:t>Step 2 — Weights for linear interpolation to 24-year tenor:
+              <a:t>Interpolation weights: w₂₀ = (30 − 24)/(30 − 20) = 60%,  w₃₀ = 40%   [check: 0.6×20 + 0.4×30 = 24]
 </a:t>
             </a:r>
             <a:pPr indent="0" marL="0">
@@ -10452,7 +11665,7 @@
               <a:buNone/>
             </a:pPr>
             <a:r>
-              <a:rPr lang="en-US" sz="1200" b="1" dirty="0">
+              <a:rPr lang="en-US" sz="1150" b="1" dirty="0">
                 <a:solidFill>
                   <a:srgbClr val="1B2A4A"/>
                 </a:solidFill>
@@ -10469,7 +11682,7 @@
               <a:buNone/>
             </a:pPr>
             <a:r>
-              <a:rPr lang="en-US" sz="1200" dirty="0">
+              <a:rPr lang="en-US" sz="1150" dirty="0">
                 <a:solidFill>
                   <a:srgbClr val="334155"/>
                 </a:solidFill>
@@ -10477,7 +11690,7 @@
                 <a:ea typeface="Calibri" pitchFamily="34" charset="-122"/>
                 <a:cs typeface="Calibri" pitchFamily="34" charset="-120"/>
               </a:rPr>
-              <a:t>          w₂₀ = (30 − 24)/(30 − 20) = 60%;  w₃₀ = 40%
+              <a:t>Synthetic 24-year benchmark: r₂₄ = (60% × 2.00%) + (40% × 2.25%) = 2.10%
 </a:t>
             </a:r>
             <a:pPr indent="0" marL="0">
@@ -10487,7 +11700,7 @@
               <a:buNone/>
             </a:pPr>
             <a:r>
-              <a:rPr lang="en-US" sz="1200" b="1" dirty="0">
+              <a:rPr lang="en-US" sz="1150" b="1" dirty="0">
                 <a:solidFill>
                   <a:srgbClr val="1B2A4A"/>
                 </a:solidFill>
@@ -10504,7 +11717,7 @@
               <a:buNone/>
             </a:pPr>
             <a:r>
-              <a:rPr lang="en-US" sz="1200" dirty="0">
+              <a:rPr lang="en-US" sz="1150" dirty="0">
                 <a:solidFill>
                   <a:srgbClr val="334155"/>
                 </a:solidFill>
@@ -10512,7 +11725,7 @@
                 <a:ea typeface="Calibri" pitchFamily="34" charset="-122"/>
                 <a:cs typeface="Calibri" pitchFamily="34" charset="-120"/>
               </a:rPr>
-              <a:t>Step 3 — Interpolated 24-year Treasury: r₂₄ = 0.6 × 2.00% + 0.4 × 2.25% = 2.10%
+              <a:t>G-spread = 3.756% − 2.10% = 1.656% = 166 bps
 </a:t>
             </a:r>
             <a:pPr indent="0" marL="0">
@@ -10522,7 +11735,7 @@
               <a:buNone/>
             </a:pPr>
             <a:r>
-              <a:rPr lang="en-US" sz="1200" b="1" dirty="0">
+              <a:rPr lang="en-US" sz="1150" b="1" dirty="0">
                 <a:solidFill>
                   <a:srgbClr val="1B2A4A"/>
                 </a:solidFill>
@@ -10539,7 +11752,7 @@
               <a:buNone/>
             </a:pPr>
             <a:r>
-              <a:rPr lang="en-US" sz="1200" dirty="0">
+              <a:rPr lang="en-US" sz="1150" dirty="0">
                 <a:solidFill>
                   <a:srgbClr val="334155"/>
                 </a:solidFill>
@@ -10547,9 +11760,9 @@
                 <a:ea typeface="Calibri" pitchFamily="34" charset="-122"/>
                 <a:cs typeface="Calibri" pitchFamily="34" charset="-120"/>
               </a:rPr>
-              <a:t>Step 4 — G-spread = YTM_bond − r₂₄ = 3.756% − 2.10% = 1.656%</a:t>
-            </a:r>
-            <a:endParaRPr lang="en-US" sz="1200" dirty="0"/>
+              <a:t>166 bps today against 200 bps at issuance → the market charges this issuer less than it did</a:t>
+            </a:r>
+            <a:endParaRPr lang="en-US" sz="1150" dirty="0"/>
           </a:p>
         </p:txBody>
       </p:sp>
@@ -10561,7 +11774,7 @@
         </p:nvSpPr>
         <p:spPr>
           <a:xfrm>
-            <a:off x="411480" y="3858768"/>
+            <a:off x="411480" y="3081528"/>
             <a:ext cx="8321040" cy="365760"/>
           </a:xfrm>
           <a:prstGeom prst="rect">
@@ -10581,7 +11794,7 @@
         </p:nvSpPr>
         <p:spPr>
           <a:xfrm>
-            <a:off x="457200" y="3858768"/>
+            <a:off x="457200" y="3081528"/>
             <a:ext cx="8229600" cy="365760"/>
           </a:xfrm>
           <a:prstGeom prst="rect">
@@ -10609,9 +11822,133 @@
                 <a:ea typeface="Consolas" pitchFamily="34" charset="-122"/>
                 <a:cs typeface="Consolas" pitchFamily="34" charset="-120"/>
               </a:rPr>
-              <a:t>G-spread  =  166 bps   (vs issuance spread of 200 bps → modest credit improvement)</a:t>
+              <a:t>G-spread  =  166 bps   ·   34 bps tighter than the 200 bp issuance spread</a:t>
             </a:r>
             <a:endParaRPr lang="en-US" sz="1150" dirty="0"/>
+          </a:p>
+        </p:txBody>
+      </p:sp>
+      <p:sp>
+        <p:nvSpPr>
+          <p:cNvPr id="15" name="Shape 13"/>
+          <p:cNvSpPr/>
+          <p:nvPr/>
+        </p:nvSpPr>
+        <p:spPr>
+          <a:xfrm>
+            <a:off x="320040" y="3611880"/>
+            <a:ext cx="8503920" cy="685800"/>
+          </a:xfrm>
+          <a:prstGeom prst="rect">
+            <a:avLst/>
+          </a:prstGeom>
+          <a:solidFill>
+            <a:srgbClr val="FEF0E7"/>
+          </a:solidFill>
+          <a:ln/>
+        </p:spPr>
+      </p:sp>
+      <p:sp>
+        <p:nvSpPr>
+          <p:cNvPr id="16" name="Shape 14"/>
+          <p:cNvSpPr/>
+          <p:nvPr/>
+        </p:nvSpPr>
+        <p:spPr>
+          <a:xfrm>
+            <a:off x="320040" y="3611880"/>
+            <a:ext cx="73152" cy="685800"/>
+          </a:xfrm>
+          <a:prstGeom prst="rect">
+            <a:avLst/>
+          </a:prstGeom>
+          <a:solidFill>
+            <a:srgbClr val="E8600A"/>
+          </a:solidFill>
+          <a:ln/>
+        </p:spPr>
+      </p:sp>
+      <p:sp>
+        <p:nvSpPr>
+          <p:cNvPr id="17" name="Text 15"/>
+          <p:cNvSpPr txBox="1"/>
+          <p:nvPr/>
+        </p:nvSpPr>
+        <p:spPr>
+          <a:xfrm>
+            <a:off x="457200" y="3657600"/>
+            <a:ext cx="8275320" cy="256032"/>
+          </a:xfrm>
+          <a:prstGeom prst="rect">
+            <a:avLst/>
+          </a:prstGeom>
+          <a:noFill/>
+          <a:ln/>
+        </p:spPr>
+        <p:txBody>
+          <a:bodyPr wrap="square" lIns="508" tIns="508" rIns="508" bIns="508" rtlCol="0" anchor="ctr">
+            <a:normAutofit/>
+            <a:spAutoFit/>
+          </a:bodyPr>
+          <a:lstStyle/>
+          <a:p>
+            <a:pPr algn="l" indent="0" marL="0">
+              <a:buNone/>
+            </a:pPr>
+            <a:r>
+              <a:rPr lang="en-US" sz="1100" b="1" spc="400" kern="0" dirty="0">
+                <a:solidFill>
+                  <a:srgbClr val="E8600A"/>
+                </a:solidFill>
+                <a:latin typeface="Trebuchet MS" pitchFamily="34" charset="0"/>
+                <a:ea typeface="Trebuchet MS" pitchFamily="34" charset="-122"/>
+                <a:cs typeface="Trebuchet MS" pitchFamily="34" charset="-120"/>
+              </a:rPr>
+              <a:t>WHAT A G-SPREAD CANNOT SEE</a:t>
+            </a:r>
+            <a:endParaRPr lang="en-US" sz="1100" dirty="0"/>
+          </a:p>
+        </p:txBody>
+      </p:sp>
+      <p:sp>
+        <p:nvSpPr>
+          <p:cNvPr id="18" name="Text 16"/>
+          <p:cNvSpPr txBox="1"/>
+          <p:nvPr/>
+        </p:nvSpPr>
+        <p:spPr>
+          <a:xfrm>
+            <a:off x="457200" y="3931920"/>
+            <a:ext cx="8275320" cy="320040"/>
+          </a:xfrm>
+          <a:prstGeom prst="rect">
+            <a:avLst/>
+          </a:prstGeom>
+          <a:noFill/>
+          <a:ln/>
+        </p:spPr>
+        <p:txBody>
+          <a:bodyPr wrap="square" lIns="508" tIns="508" rIns="508" bIns="508" rtlCol="0" anchor="t">
+            <a:normAutofit/>
+            <a:spAutoFit/>
+          </a:bodyPr>
+          <a:lstStyle/>
+          <a:p>
+            <a:pPr algn="l" indent="0" marL="0">
+              <a:buNone/>
+            </a:pPr>
+            <a:r>
+              <a:rPr lang="en-US" sz="1200" dirty="0">
+                <a:solidFill>
+                  <a:srgbClr val="334155"/>
+                </a:solidFill>
+                <a:latin typeface="Calibri" pitchFamily="34" charset="0"/>
+                <a:ea typeface="Calibri" pitchFamily="34" charset="-122"/>
+                <a:cs typeface="Calibri" pitchFamily="34" charset="-120"/>
+              </a:rPr>
+              <a:t>It uses one point on the government curve and one yield on the bond, so it says nothing about the shape of the curve in between. On a steep curve, that blind spot is exactly what the Z-spread closes.</a:t>
+            </a:r>
+            <a:endParaRPr lang="en-US" sz="1200" dirty="0"/>
           </a:p>
         </p:txBody>
       </p:sp>
@@ -10716,7 +12053,7 @@
                 <a:ea typeface="Trebuchet MS" pitchFamily="34" charset="-122"/>
                 <a:cs typeface="Trebuchet MS" pitchFamily="34" charset="-120"/>
               </a:rPr>
-              <a:t>The Z-spread is the constant add-on to every benchmark spot rate that makes PV of the bond's cash flows equal its price — more accurate than G-spread when the curve is steep</a:t>
+              <a:t>The Z-spread is the constant add-on to every benchmark spot rate that makes the PV of the bond's cash flows equal its price — and OAS strips the option out of it</a:t>
             </a:r>
             <a:endParaRPr lang="en-US" sz="1600" dirty="0"/>
           </a:p>
@@ -10820,7 +12157,7 @@
                 <a:ea typeface="Calibri" pitchFamily="34" charset="-122"/>
                 <a:cs typeface="Calibri" pitchFamily="34" charset="-120"/>
               </a:rPr>
-              <a:t>Source: CFA Institute, Curriculum Vol 6, LM 7, §4 Z-spread and OAS, Equations 4–5, pp. 176–178.</a:t>
+              <a:t>Source: CFA Institute, Curriculum Vol 6, LM 7, §4 "Yield Spreads over the Benchmark Yield Curve", Equations 4–5 and Exhibit 8, pp. 176–177.</a:t>
             </a:r>
             <a:endParaRPr lang="en-US" sz="750" dirty="0"/>
           </a:p>
@@ -10862,7 +12199,7 @@
                 <a:ea typeface="Calibri" pitchFamily="34" charset="-122"/>
                 <a:cs typeface="Calibri" pitchFamily="34" charset="-120"/>
               </a:rPr>
-              <a:t>G-spread uses ONE discount rate (the YTM). Z-spread uses the whole spot curve plus a constant — the spread an investor "earns at every point".</a:t>
+              <a:t>G-spread differences two single yields. Z-spread never averages the curve — it adds the same number to every point on it, then solves.</a:t>
             </a:r>
             <a:endParaRPr lang="en-US" sz="1300" dirty="0"/>
           </a:p>
@@ -10924,7 +12261,24 @@
                 <a:ea typeface="Consolas" pitchFamily="34" charset="-122"/>
                 <a:cs typeface="Consolas" pitchFamily="34" charset="-120"/>
               </a:rPr>
-              <a:t>Price  =  Σₜ  PMTₜ / (1 + zₜ + Z)ᵗ   +   FV / (1 + zₙ + Z)ⁿ       OAS  =  Z-spread  −  option value (bps)</a:t>
+              <a:t>Price  =  Σₜ PMT / (1 + zₜ + Z)ᵗ  +  (PMT + FV) / (1 + zₙ + Z)ⁿ</a:t>
+            </a:r>
+            <a:endParaRPr lang="en-US" sz="1800" dirty="0"/>
+          </a:p>
+          <a:p>
+            <a:pPr algn="ctr" indent="0" marL="0">
+              <a:buNone/>
+            </a:pPr>
+            <a:r>
+              <a:rPr lang="en-US" sz="1800" b="1" dirty="0">
+                <a:solidFill>
+                  <a:srgbClr val="FFFFFF"/>
+                </a:solidFill>
+                <a:latin typeface="Consolas" pitchFamily="34" charset="0"/>
+                <a:ea typeface="Consolas" pitchFamily="34" charset="-122"/>
+                <a:cs typeface="Consolas" pitchFamily="34" charset="-120"/>
+              </a:rPr>
+              <a:t>OAS  =  Z-spread  −  option value (bps)</a:t>
             </a:r>
             <a:endParaRPr lang="en-US" sz="1800" dirty="0"/>
           </a:p>
@@ -10966,7 +12320,7 @@
                 <a:ea typeface="Calibri" pitchFamily="34" charset="-122"/>
                 <a:cs typeface="Calibri" pitchFamily="34" charset="-120"/>
               </a:rPr>
-              <a:t>where: zₜ = benchmark spot rate for period t; Z = Z-spread (solve numerically). OAS strips out the value of an embedded call / put option.</a:t>
+              <a:t>where: zₜ = benchmark spot rate for period t; Z = the Z-spread, identical in every period, solved numerically. Also called the static or zero-volatility spread.</a:t>
             </a:r>
             <a:endParaRPr lang="en-US" sz="1100" dirty="0"/>
           </a:p>
@@ -11048,7 +12402,7 @@
                 <a:ea typeface="Trebuchet MS" pitchFamily="34" charset="-122"/>
                 <a:cs typeface="Trebuchet MS" pitchFamily="34" charset="-120"/>
               </a:rPr>
-              <a:t>WHY Z &gt; G ON A STEEP CURVE</a:t>
+              <a:t>G USES ONE RATE</a:t>
             </a:r>
             <a:endParaRPr lang="en-US" sz="1100" dirty="0"/>
           </a:p>
@@ -11090,7 +12444,7 @@
                 <a:ea typeface="Calibri" pitchFamily="34" charset="-122"/>
                 <a:cs typeface="Calibri" pitchFamily="34" charset="-120"/>
               </a:rPr>
-              <a:t>Early cash flows get a lower discount when using the full curve vs a single 30y YTM — raising their PV, forcing Z &gt; G to re-match the quoted price.</a:t>
+              <a:t>A YTM is one PV-weighted average of the curve, and the weights depend on the coupon. So G compares two slightly different averages. Z adds a constant to every spot and averages nothing.</a:t>
             </a:r>
             <a:endParaRPr lang="en-US" sz="1200" dirty="0"/>
           </a:p>
@@ -11172,7 +12526,7 @@
                 <a:ea typeface="Trebuchet MS" pitchFamily="34" charset="-122"/>
                 <a:cs typeface="Trebuchet MS" pitchFamily="34" charset="-120"/>
               </a:rPr>
-              <a:t>STATIC / ZERO-VOLATILITY</a:t>
+              <a:t>ZERO-VOLATILITY</a:t>
             </a:r>
             <a:endParaRPr lang="en-US" sz="1100" dirty="0"/>
           </a:p>
@@ -11214,7 +12568,7 @@
                 <a:ea typeface="Calibri" pitchFamily="34" charset="-122"/>
                 <a:cs typeface="Calibri" pitchFamily="34" charset="-120"/>
               </a:rPr>
-              <a:t>Z-spread assumes a single deterministic path for rates — no option value. That's why callable-bond analysts pair it with OAS.</a:t>
+              <a:t>Z assumes one deterministic path for rates — no volatility, so no option value. That is exactly why a bond with an embedded option needs a further adjustment.</a:t>
             </a:r>
             <a:endParaRPr lang="en-US" sz="1200" dirty="0"/>
           </a:p>
@@ -11296,7 +12650,7 @@
                 <a:ea typeface="Trebuchet MS" pitchFamily="34" charset="-122"/>
                 <a:cs typeface="Trebuchet MS" pitchFamily="34" charset="-120"/>
               </a:rPr>
-              <a:t>OAS INTUITION</a:t>
+              <a:t>OAS SIGN RULE</a:t>
             </a:r>
             <a:endParaRPr lang="en-US" sz="1100" dirty="0"/>
           </a:p>
@@ -11338,7 +12692,7 @@
                 <a:ea typeface="Calibri" pitchFamily="34" charset="-122"/>
                 <a:cs typeface="Calibri" pitchFamily="34" charset="-120"/>
               </a:rPr>
-              <a:t>For a callable: Z-spread overstates the credit spread because part of it compensates for the call. OAS = Z − option value = clean credit spread.</a:t>
+              <a:t>Callable: you SOLD the option, part of the Z-spread pays you for it → OAS &lt; Z. Putable: you OWN the option → OAS &gt; Z. OAS is the like-for-like credit spread.</a:t>
             </a:r>
             <a:endParaRPr lang="en-US" sz="1200" dirty="0"/>
           </a:p>
@@ -11445,7 +12799,7 @@
                 <a:ea typeface="Trebuchet MS" pitchFamily="34" charset="-122"/>
                 <a:cs typeface="Trebuchet MS" pitchFamily="34" charset="-120"/>
               </a:rPr>
-              <a:t>Worked — Z-spread on a 3-year 5% annual corporate bond priced at 98.50 given spot rates 3.0% / 3.5% / 4.0% is ≈ 160 bps</a:t>
+              <a:t>Worked — a three-year 5.5% corporate bond at a 378 bp Z-spread over government spots of 2.98 / 3.48 / 4.00% prices at 94.20</a:t>
             </a:r>
             <a:endParaRPr lang="en-US" sz="1700" dirty="0"/>
           </a:p>
@@ -11549,7 +12903,7 @@
                 <a:ea typeface="Calibri" pitchFamily="34" charset="-122"/>
                 <a:cs typeface="Calibri" pitchFamily="34" charset="-120"/>
               </a:rPr>
-              <a:t>Source: CFA Institute, Curriculum Vol 6, LM 7, §4 Z-spread example paraphrased, pp. 176–178.</a:t>
+              <a:t>Source: CFA Institute, Curriculum Vol 6, LM 7, §4 Question Set Q2 (Mexican corporate bond), Equation 4, p. 179.</a:t>
             </a:r>
             <a:endParaRPr lang="en-US" sz="750" dirty="0"/>
           </a:p>
@@ -11591,7 +12945,7 @@
                 <a:ea typeface="Calibri" pitchFamily="34" charset="-122"/>
                 <a:cs typeface="Calibri" pitchFamily="34" charset="-120"/>
               </a:rPr>
-              <a:t>Solve by iteration (Excel Goal Seek or bisection). Each cash flow is discounted at its own spot rate plus Z.</a:t>
+              <a:t>Each cash flow is discounted at its OWN government spot rate plus the SAME Z. On the desk you run this backwards: quote the price, solve for Z.</a:t>
             </a:r>
             <a:endParaRPr lang="en-US" sz="1300" dirty="0"/>
           </a:p>
@@ -11606,7 +12960,7 @@
         <p:spPr>
           <a:xfrm>
             <a:off x="320040" y="1143000"/>
-            <a:ext cx="8503920" cy="3154680"/>
+            <a:ext cx="8503920" cy="2377440"/>
           </a:xfrm>
           <a:prstGeom prst="rect">
             <a:avLst/>
@@ -11658,7 +13012,7 @@
                 <a:ea typeface="Trebuchet MS" pitchFamily="34" charset="-122"/>
                 <a:cs typeface="Trebuchet MS" pitchFamily="34" charset="-120"/>
               </a:rPr>
-              <a:t>SOLVE FOR Z SO THAT SUM OF DISCOUNTED CASH FLOWS = 98.50</a:t>
+              <a:t>3-YEAR 5.5% CORPORATE BOND · Z-SPREAD 378 BPS</a:t>
             </a:r>
             <a:endParaRPr lang="en-US" sz="1100" dirty="0"/>
           </a:p>
@@ -11700,7 +13054,7 @@
                 <a:ea typeface="Calibri" pitchFamily="34" charset="-122"/>
                 <a:cs typeface="Calibri" pitchFamily="34" charset="-120"/>
               </a:rPr>
-              <a:t>Coupons 5, 5, 105 at end of years 1, 2, 3. Spot curve: z₁ = 3.0%, z₂ = 3.5%, z₃ = 4.0%. Quoted price = 98.50.</a:t>
+              <a:t>Government spot curve (effective annual): z₁ = 2.98%, z₂ = 3.48%, z₃ = 4.00%. Cash flows 5.5, 5.5, 105.5. Find the price.</a:t>
             </a:r>
             <a:endParaRPr lang="en-US" sz="1200" dirty="0"/>
           </a:p>
@@ -11715,7 +13069,7 @@
         <p:spPr>
           <a:xfrm>
             <a:off x="457200" y="1993392"/>
-            <a:ext cx="8229600" cy="1792224"/>
+            <a:ext cx="8229600" cy="1014984"/>
           </a:xfrm>
           <a:prstGeom prst="rect">
             <a:avLst/>
@@ -11737,7 +13091,7 @@
               <a:buNone/>
             </a:pPr>
             <a:r>
-              <a:rPr lang="en-US" sz="1200" b="1" dirty="0">
+              <a:rPr lang="en-US" sz="1150" b="1" dirty="0">
                 <a:solidFill>
                   <a:srgbClr val="1B2A4A"/>
                 </a:solidFill>
@@ -11754,7 +13108,7 @@
               <a:buNone/>
             </a:pPr>
             <a:r>
-              <a:rPr lang="en-US" sz="1200" dirty="0">
+              <a:rPr lang="en-US" sz="1150" dirty="0">
                 <a:solidFill>
                   <a:srgbClr val="334155"/>
                 </a:solidFill>
@@ -11762,7 +13116,7 @@
                 <a:ea typeface="Calibri" pitchFamily="34" charset="-122"/>
                 <a:cs typeface="Calibri" pitchFamily="34" charset="-120"/>
               </a:rPr>
-              <a:t>Set up: 98.50 = 5 / (1.03 + Z)¹  +  5 / (1.035 + Z)²  +  105 / (1.04 + Z)³
+              <a:t>Build each discount rate: z₁ + Z = 6.76% · z₂ + Z = 7.26% · z₃ + Z = 7.78%  (same 3.78% added to each)
 </a:t>
             </a:r>
             <a:pPr indent="0" marL="0">
@@ -11772,7 +13126,7 @@
               <a:buNone/>
             </a:pPr>
             <a:r>
-              <a:rPr lang="en-US" sz="1200" b="1" dirty="0">
+              <a:rPr lang="en-US" sz="1150" b="1" dirty="0">
                 <a:solidFill>
                   <a:srgbClr val="1B2A4A"/>
                 </a:solidFill>
@@ -11789,7 +13143,7 @@
               <a:buNone/>
             </a:pPr>
             <a:r>
-              <a:rPr lang="en-US" sz="1200" dirty="0">
+              <a:rPr lang="en-US" sz="1150" dirty="0">
                 <a:solidFill>
                   <a:srgbClr val="334155"/>
                 </a:solidFill>
@@ -11797,7 +13151,7 @@
                 <a:ea typeface="Calibri" pitchFamily="34" charset="-122"/>
                 <a:cs typeface="Calibri" pitchFamily="34" charset="-120"/>
               </a:rPr>
-              <a:t>Trial Z = 1.00%:  5/1.040 + 5/1.045² + 105/1.050³ = 4.808 + 4.580 + 90.702  =  100.09  (too high)
+              <a:t>Year 1: 5.5 / (1.0676)¹ = 5.152
 </a:t>
             </a:r>
             <a:pPr indent="0" marL="0">
@@ -11807,7 +13161,7 @@
               <a:buNone/>
             </a:pPr>
             <a:r>
-              <a:rPr lang="en-US" sz="1200" b="1" dirty="0">
+              <a:rPr lang="en-US" sz="1150" b="1" dirty="0">
                 <a:solidFill>
                   <a:srgbClr val="1B2A4A"/>
                 </a:solidFill>
@@ -11824,7 +13178,7 @@
               <a:buNone/>
             </a:pPr>
             <a:r>
-              <a:rPr lang="en-US" sz="1200" dirty="0">
+              <a:rPr lang="en-US" sz="1150" dirty="0">
                 <a:solidFill>
                   <a:srgbClr val="334155"/>
                 </a:solidFill>
@@ -11832,7 +13186,7 @@
                 <a:ea typeface="Calibri" pitchFamily="34" charset="-122"/>
                 <a:cs typeface="Calibri" pitchFamily="34" charset="-120"/>
               </a:rPr>
-              <a:t>Trial Z = 2.00%:  5/1.050 + 5/1.055² + 105/1.060³ = 4.762 + 4.494 + 88.164  =  97.42   (too low)
+              <a:t>Year 2: 5.5 / (1.0726)² = 5.5 / 1.15047 = 4.781
 </a:t>
             </a:r>
             <a:pPr indent="0" marL="0">
@@ -11842,7 +13196,7 @@
               <a:buNone/>
             </a:pPr>
             <a:r>
-              <a:rPr lang="en-US" sz="1200" b="1" dirty="0">
+              <a:rPr lang="en-US" sz="1150" b="1" dirty="0">
                 <a:solidFill>
                   <a:srgbClr val="1B2A4A"/>
                 </a:solidFill>
@@ -11859,7 +13213,7 @@
               <a:buNone/>
             </a:pPr>
             <a:r>
-              <a:rPr lang="en-US" sz="1200" dirty="0">
+              <a:rPr lang="en-US" sz="1150" dirty="0">
                 <a:solidFill>
                   <a:srgbClr val="334155"/>
                 </a:solidFill>
@@ -11867,7 +13221,7 @@
                 <a:ea typeface="Calibri" pitchFamily="34" charset="-122"/>
                 <a:cs typeface="Calibri" pitchFamily="34" charset="-120"/>
               </a:rPr>
-              <a:t>Bisect to Z = 1.60%:  5/1.046 + 5/1.051² + 105/1.056³ = 4.780 + 4.526 + 89.158 = 98.46
+              <a:t>Year 3: 105.5 / (1.0778)³ = 105.5 / 1.25203 = 84.263
 </a:t>
             </a:r>
             <a:pPr indent="0" marL="0">
@@ -11877,7 +13231,7 @@
               <a:buNone/>
             </a:pPr>
             <a:r>
-              <a:rPr lang="en-US" sz="1200" b="1" dirty="0">
+              <a:rPr lang="en-US" sz="1150" b="1" dirty="0">
                 <a:solidFill>
                   <a:srgbClr val="1B2A4A"/>
                 </a:solidFill>
@@ -11894,7 +13248,7 @@
               <a:buNone/>
             </a:pPr>
             <a:r>
-              <a:rPr lang="en-US" sz="1200" dirty="0">
+              <a:rPr lang="en-US" sz="1150" dirty="0">
                 <a:solidFill>
                   <a:srgbClr val="334155"/>
                 </a:solidFill>
@@ -11902,9 +13256,9 @@
                 <a:ea typeface="Calibri" pitchFamily="34" charset="-122"/>
                 <a:cs typeface="Calibri" pitchFamily="34" charset="-120"/>
               </a:rPr>
-              <a:t>Refine (Goal Seek): Z ≈ 1.599% so that PV = 98.500 exactly</a:t>
-            </a:r>
-            <a:endParaRPr lang="en-US" sz="1200" dirty="0"/>
+              <a:t>Price = 5.152 + 4.781 + 84.263 = 94.20 — a deep discount, since 5.5% coupon vs 6.8–7.8% discount rates</a:t>
+            </a:r>
+            <a:endParaRPr lang="en-US" sz="1150" dirty="0"/>
           </a:p>
         </p:txBody>
       </p:sp>
@@ -11916,7 +13270,7 @@
         </p:nvSpPr>
         <p:spPr>
           <a:xfrm>
-            <a:off x="411480" y="3858768"/>
+            <a:off x="411480" y="3081528"/>
             <a:ext cx="8321040" cy="365760"/>
           </a:xfrm>
           <a:prstGeom prst="rect">
@@ -11936,7 +13290,7 @@
         </p:nvSpPr>
         <p:spPr>
           <a:xfrm>
-            <a:off x="457200" y="3858768"/>
+            <a:off x="457200" y="3081528"/>
             <a:ext cx="8229600" cy="365760"/>
           </a:xfrm>
           <a:prstGeom prst="rect">
@@ -11964,9 +13318,133 @@
                 <a:ea typeface="Consolas" pitchFamily="34" charset="-122"/>
                 <a:cs typeface="Consolas" pitchFamily="34" charset="-120"/>
               </a:rPr>
-              <a:t>Z-spread  ≈  160 bps   (constant add-on applied to every spot rate along the curve)</a:t>
+              <a:t>Price = 94.20 per 100 of par   ·   run it in reverse and 94.20 returns Z = 378 bps</a:t>
             </a:r>
             <a:endParaRPr lang="en-US" sz="1150" dirty="0"/>
+          </a:p>
+        </p:txBody>
+      </p:sp>
+      <p:sp>
+        <p:nvSpPr>
+          <p:cNvPr id="15" name="Shape 13"/>
+          <p:cNvSpPr/>
+          <p:nvPr/>
+        </p:nvSpPr>
+        <p:spPr>
+          <a:xfrm>
+            <a:off x="320040" y="3611880"/>
+            <a:ext cx="8503920" cy="685800"/>
+          </a:xfrm>
+          <a:prstGeom prst="rect">
+            <a:avLst/>
+          </a:prstGeom>
+          <a:solidFill>
+            <a:srgbClr val="FEF0E7"/>
+          </a:solidFill>
+          <a:ln/>
+        </p:spPr>
+      </p:sp>
+      <p:sp>
+        <p:nvSpPr>
+          <p:cNvPr id="16" name="Shape 14"/>
+          <p:cNvSpPr/>
+          <p:nvPr/>
+        </p:nvSpPr>
+        <p:spPr>
+          <a:xfrm>
+            <a:off x="320040" y="3611880"/>
+            <a:ext cx="73152" cy="685800"/>
+          </a:xfrm>
+          <a:prstGeom prst="rect">
+            <a:avLst/>
+          </a:prstGeom>
+          <a:solidFill>
+            <a:srgbClr val="E8600A"/>
+          </a:solidFill>
+          <a:ln/>
+        </p:spPr>
+      </p:sp>
+      <p:sp>
+        <p:nvSpPr>
+          <p:cNvPr id="17" name="Text 15"/>
+          <p:cNvSpPr txBox="1"/>
+          <p:nvPr/>
+        </p:nvSpPr>
+        <p:spPr>
+          <a:xfrm>
+            <a:off x="457200" y="3657600"/>
+            <a:ext cx="8275320" cy="256032"/>
+          </a:xfrm>
+          <a:prstGeom prst="rect">
+            <a:avLst/>
+          </a:prstGeom>
+          <a:noFill/>
+          <a:ln/>
+        </p:spPr>
+        <p:txBody>
+          <a:bodyPr wrap="square" lIns="508" tIns="508" rIns="508" bIns="508" rtlCol="0" anchor="ctr">
+            <a:normAutofit/>
+            <a:spAutoFit/>
+          </a:bodyPr>
+          <a:lstStyle/>
+          <a:p>
+            <a:pPr algn="l" indent="0" marL="0">
+              <a:buNone/>
+            </a:pPr>
+            <a:r>
+              <a:rPr lang="en-US" sz="1100" b="1" spc="400" kern="0" dirty="0">
+                <a:solidFill>
+                  <a:srgbClr val="E8600A"/>
+                </a:solidFill>
+                <a:latin typeface="Trebuchet MS" pitchFamily="34" charset="0"/>
+                <a:ea typeface="Trebuchet MS" pitchFamily="34" charset="-122"/>
+                <a:cs typeface="Trebuchet MS" pitchFamily="34" charset="-120"/>
+              </a:rPr>
+              <a:t>ON A SCREEN IT RUNS THE OTHER WAY</a:t>
+            </a:r>
+            <a:endParaRPr lang="en-US" sz="1100" dirty="0"/>
+          </a:p>
+        </p:txBody>
+      </p:sp>
+      <p:sp>
+        <p:nvSpPr>
+          <p:cNvPr id="18" name="Text 16"/>
+          <p:cNvSpPr txBox="1"/>
+          <p:nvPr/>
+        </p:nvSpPr>
+        <p:spPr>
+          <a:xfrm>
+            <a:off x="457200" y="3931920"/>
+            <a:ext cx="8275320" cy="320040"/>
+          </a:xfrm>
+          <a:prstGeom prst="rect">
+            <a:avLst/>
+          </a:prstGeom>
+          <a:noFill/>
+          <a:ln/>
+        </p:spPr>
+        <p:txBody>
+          <a:bodyPr wrap="square" lIns="508" tIns="508" rIns="508" bIns="508" rtlCol="0" anchor="t">
+            <a:normAutofit/>
+            <a:spAutoFit/>
+          </a:bodyPr>
+          <a:lstStyle/>
+          <a:p>
+            <a:pPr algn="l" indent="0" marL="0">
+              <a:buNone/>
+            </a:pPr>
+            <a:r>
+              <a:rPr lang="en-US" sz="1200" dirty="0">
+                <a:solidFill>
+                  <a:srgbClr val="334155"/>
+                </a:solidFill>
+                <a:latin typeface="Calibri" pitchFamily="34" charset="0"/>
+                <a:ea typeface="Calibri" pitchFamily="34" charset="-122"/>
+                <a:cs typeface="Calibri" pitchFamily="34" charset="-120"/>
+              </a:rPr>
+              <a:t>The price is the observable and Z is the unknown: Solver or Goal Seek, objective = the quoted price, change cell = Z. That is why credit is compared in Z-spread — it is the only measure comparable across coupons and maturities.</a:t>
+            </a:r>
+            <a:endParaRPr lang="en-US" sz="1200" dirty="0"/>
           </a:p>
         </p:txBody>
       </p:sp>
@@ -12569,7 +14047,7 @@
                 <a:ea typeface="Calibri" pitchFamily="34" charset="-122"/>
                 <a:cs typeface="Calibri" pitchFamily="34" charset="-120"/>
               </a:rPr>
-              <a:t>PV of cash flows · discount/par/premium · Greece bond · flat vs full price · matrix pricing</a:t>
+              <a:t>PV of cash flows · discount/par/premium · flat vs full price · accrued interest · matrix pricing</a:t>
             </a:r>
             <a:endParaRPr lang="en-US" sz="1100" dirty="0"/>
           </a:p>
@@ -12735,7 +14213,7 @@
                 <a:ea typeface="Calibri" pitchFamily="34" charset="-122"/>
                 <a:cs typeface="Calibri" pitchFamily="34" charset="-120"/>
               </a:rPr>
-              <a:t>current yield · street convention · yield-to-worst · G-spread · Z-spread · OAS intuition</a:t>
+              <a:t>current yield · street convention · yield-to-worst · G-spread · I-spread · Z-spread · OAS</a:t>
             </a:r>
             <a:endParaRPr lang="en-US" sz="1100" dirty="0"/>
           </a:p>
@@ -12901,7 +14379,7 @@
                 <a:ea typeface="Calibri" pitchFamily="34" charset="-122"/>
                 <a:cs typeface="Calibri" pitchFamily="34" charset="-120"/>
               </a:rPr>
-              <a:t>discount rate vs add-on rate · bond-equivalent yield conversion · FRN discount margin</a:t>
+              <a:t>discount rate vs add-on rate · bond-equivalent yield · FRN pricing · discount margin</a:t>
             </a:r>
             <a:endParaRPr lang="en-US" sz="1100" dirty="0"/>
           </a:p>
@@ -13067,7 +14545,7 @@
                 <a:ea typeface="Calibri" pitchFamily="34" charset="-122"/>
                 <a:cs typeface="Calibri" pitchFamily="34" charset="-120"/>
               </a:rPr>
-              <a:t>spot curve · par rate · implied forwards · bootstrapping · curve-shape relationships</a:t>
+              <a:t>spot curve · par rates · implied forwards · bootstrapping · curve-shape relationships</a:t>
             </a:r>
             <a:endParaRPr lang="en-US" sz="1100" dirty="0"/>
           </a:p>
@@ -13174,7 +14652,7 @@
                 <a:ea typeface="Trebuchet MS" pitchFamily="34" charset="-122"/>
                 <a:cs typeface="Trebuchet MS" pitchFamily="34" charset="-120"/>
               </a:rPr>
-              <a:t>Money-market rates are annualized but not compounded — and come in two mutually inconsistent flavours: discount rate (on FV) and add-on rate (on PV)</a:t>
+              <a:t>Money-market rates are annualized but NOT compounded — and come in two mutually inconsistent flavours: discount rates on FV and add-on rates on PV</a:t>
             </a:r>
             <a:endParaRPr lang="en-US" sz="1600" dirty="0"/>
           </a:p>
@@ -13275,7 +14753,7 @@
                 <a:ea typeface="Calibri" pitchFamily="34" charset="-122"/>
                 <a:cs typeface="Calibri" pitchFamily="34" charset="-120"/>
               </a:rPr>
-              <a:t>¹ Convention alone separates these: a Treasury bill and a CD with the same cash flows will quote different numbers.
+              <a:t>¹ A discount rate divides the interest earned by the maturity value, not by the amount invested — so by design it understates the true return.
 </a:t>
             </a:r>
             <a:pPr indent="0" marL="0">
@@ -13290,7 +14768,7 @@
                 <a:ea typeface="Calibri" pitchFamily="34" charset="-122"/>
                 <a:cs typeface="Calibri" pitchFamily="34" charset="-120"/>
               </a:rPr>
-              <a:t>² Always convert to a common basis (usually 365-day add-on = bond-equivalent yield) before comparing.
+              <a:t>² Convert everything to a 365-day add-on rate (the bond-equivalent yield) before comparing any two money-market instruments.
 </a:t>
             </a:r>
             <a:endParaRPr lang="en-US" sz="1000" dirty="0"/>
@@ -13333,7 +14811,7 @@
                 <a:ea typeface="Calibri" pitchFamily="34" charset="-122"/>
                 <a:cs typeface="Calibri" pitchFamily="34" charset="-120"/>
               </a:rPr>
-              <a:t>Source: CFA Institute, Curriculum Vol 6, LM 8, §3 Money Market Yield Measures, pp. 194–200.</a:t>
+              <a:t>Source: CFA Institute, Curriculum Vol 6, LM 8, §3 "Yield Measures for Money Market Instruments", Equations 2–5, Exhibits 2–3 and Example 4, pp. 194–199.</a:t>
             </a:r>
             <a:endParaRPr lang="en-US" sz="750" dirty="0"/>
           </a:p>
@@ -13375,7 +14853,7 @@
                 <a:ea typeface="Calibri" pitchFamily="34" charset="-122"/>
                 <a:cs typeface="Calibri" pitchFamily="34" charset="-120"/>
               </a:rPr>
-              <a:t>Money-market discount rate UNDERSTATES the true return because it divides earned interest by FV, not PV — a legacy convention.</a:t>
+              <a:t>Bond yields are annualized AND compounded. Money-market yields are simple interest — and two instruments with identical cash flows will quote different numbers.</a:t>
             </a:r>
             <a:endParaRPr lang="en-US" sz="1300" dirty="0"/>
           </a:p>
@@ -13437,7 +14915,24 @@
                 <a:ea typeface="Consolas" pitchFamily="34" charset="-122"/>
                 <a:cs typeface="Consolas" pitchFamily="34" charset="-120"/>
               </a:rPr>
-              <a:t>PV_DR  =  FV × [1 − (Days/Year) × DR]        PV_AOR  =  FV / [1 + (Days/Year) × AOR]</a:t>
+              <a:t>PV_DR   =  FV × [1 − (Days/Year) × DR]</a:t>
+            </a:r>
+            <a:endParaRPr lang="en-US" sz="1800" dirty="0"/>
+          </a:p>
+          <a:p>
+            <a:pPr algn="ctr" indent="0" marL="0">
+              <a:buNone/>
+            </a:pPr>
+            <a:r>
+              <a:rPr lang="en-US" sz="1800" b="1" dirty="0">
+                <a:solidFill>
+                  <a:srgbClr val="FFFFFF"/>
+                </a:solidFill>
+                <a:latin typeface="Consolas" pitchFamily="34" charset="0"/>
+                <a:ea typeface="Consolas" pitchFamily="34" charset="-122"/>
+                <a:cs typeface="Consolas" pitchFamily="34" charset="-120"/>
+              </a:rPr>
+              <a:t>PV_AOR  =  FV / [1 + (Days/Year) × AOR]</a:t>
             </a:r>
             <a:endParaRPr lang="en-US" sz="1800" dirty="0"/>
           </a:p>
@@ -13479,7 +14974,7 @@
                 <a:ea typeface="Calibri" pitchFamily="34" charset="-122"/>
                 <a:cs typeface="Calibri" pitchFamily="34" charset="-120"/>
               </a:rPr>
-              <a:t>where: DR quoted on face, AOR quoted on principal. Day-count: T-bills usually 360; CDs 360 or 365 depending on jurisdiction.</a:t>
+              <a:t>where: DR is quoted on the face value paid at maturity; AOR is quoted on the price at issuance. The year is 360 or 365 depending on instrument and jurisdiction.</a:t>
             </a:r>
             <a:endParaRPr lang="en-US" sz="1100" dirty="0"/>
           </a:p>
@@ -13782,7 +15277,7 @@
                           <a:ea typeface="Consolas" pitchFamily="34" charset="-122"/>
                           <a:cs typeface="Consolas" pitchFamily="34" charset="-120"/>
                         </a:rPr>
-                        <a:t>T-bills · commercial paper · bankers' acceptances</a:t>
+                        <a:t>T-bills · CP · BAs</a:t>
                       </a:r>
                       <a:endParaRPr lang="en-US" sz="1100" dirty="0">
                         <a:latin typeface="Consolas" charset="0"/>
@@ -13934,7 +15429,7 @@
                           <a:ea typeface="Consolas" pitchFamily="34" charset="-122"/>
                           <a:cs typeface="Consolas" pitchFamily="34" charset="-120"/>
                         </a:rPr>
-                        <a:t>Bank CDs · repos · MRR indices</a:t>
+                        <a:t>CDs · repos · MRRs</a:t>
                       </a:r>
                       <a:endParaRPr lang="en-US" sz="1100" dirty="0">
                         <a:latin typeface="Consolas" charset="0"/>
@@ -14086,7 +15581,7 @@
                           <a:ea typeface="Consolas" pitchFamily="34" charset="-122"/>
                           <a:cs typeface="Consolas" pitchFamily="34" charset="-120"/>
                         </a:rPr>
-                        <a:t>Standard common basis for comparison</a:t>
+                        <a:t>Common basis</a:t>
                       </a:r>
                       <a:endParaRPr lang="en-US" sz="1100" dirty="0">
                         <a:latin typeface="Consolas" charset="0"/>
@@ -14124,6 +15619,130 @@
           </a:graphicData>
         </a:graphic>
       </p:graphicFrame>
+      <p:sp>
+        <p:nvSpPr>
+          <p:cNvPr id="14" name="Shape 11"/>
+          <p:cNvSpPr/>
+          <p:nvPr/>
+        </p:nvSpPr>
+        <p:spPr>
+          <a:xfrm>
+            <a:off x="320040" y="3547872"/>
+            <a:ext cx="8503920" cy="685800"/>
+          </a:xfrm>
+          <a:prstGeom prst="rect">
+            <a:avLst/>
+          </a:prstGeom>
+          <a:solidFill>
+            <a:srgbClr val="FEF0E7"/>
+          </a:solidFill>
+          <a:ln/>
+        </p:spPr>
+      </p:sp>
+      <p:sp>
+        <p:nvSpPr>
+          <p:cNvPr id="15" name="Shape 12"/>
+          <p:cNvSpPr/>
+          <p:nvPr/>
+        </p:nvSpPr>
+        <p:spPr>
+          <a:xfrm>
+            <a:off x="320040" y="3547872"/>
+            <a:ext cx="73152" cy="685800"/>
+          </a:xfrm>
+          <a:prstGeom prst="rect">
+            <a:avLst/>
+          </a:prstGeom>
+          <a:solidFill>
+            <a:srgbClr val="E8600A"/>
+          </a:solidFill>
+          <a:ln/>
+        </p:spPr>
+      </p:sp>
+      <p:sp>
+        <p:nvSpPr>
+          <p:cNvPr id="16" name="Text 13"/>
+          <p:cNvSpPr txBox="1"/>
+          <p:nvPr/>
+        </p:nvSpPr>
+        <p:spPr>
+          <a:xfrm>
+            <a:off x="457200" y="3593592"/>
+            <a:ext cx="8275320" cy="256032"/>
+          </a:xfrm>
+          <a:prstGeom prst="rect">
+            <a:avLst/>
+          </a:prstGeom>
+          <a:noFill/>
+          <a:ln/>
+        </p:spPr>
+        <p:txBody>
+          <a:bodyPr wrap="square" lIns="508" tIns="508" rIns="508" bIns="508" rtlCol="0" anchor="ctr">
+            <a:normAutofit/>
+            <a:spAutoFit/>
+          </a:bodyPr>
+          <a:lstStyle/>
+          <a:p>
+            <a:pPr algn="l" indent="0" marL="0">
+              <a:buNone/>
+            </a:pPr>
+            <a:r>
+              <a:rPr lang="en-US" sz="1100" b="1" spc="400" kern="0" dirty="0">
+                <a:solidFill>
+                  <a:srgbClr val="E8600A"/>
+                </a:solidFill>
+                <a:latin typeface="Trebuchet MS" pitchFamily="34" charset="0"/>
+                <a:ea typeface="Trebuchet MS" pitchFamily="34" charset="-122"/>
+                <a:cs typeface="Trebuchet MS" pitchFamily="34" charset="-120"/>
+              </a:rPr>
+              <a:t>FOUR WAYS TO SAY THE SAME THING</a:t>
+            </a:r>
+            <a:endParaRPr lang="en-US" sz="1100" dirty="0"/>
+          </a:p>
+        </p:txBody>
+      </p:sp>
+      <p:sp>
+        <p:nvSpPr>
+          <p:cNvPr id="17" name="Text 14"/>
+          <p:cNvSpPr txBox="1"/>
+          <p:nvPr/>
+        </p:nvSpPr>
+        <p:spPr>
+          <a:xfrm>
+            <a:off x="457200" y="3867912"/>
+            <a:ext cx="8275320" cy="320040"/>
+          </a:xfrm>
+          <a:prstGeom prst="rect">
+            <a:avLst/>
+          </a:prstGeom>
+          <a:noFill/>
+          <a:ln/>
+        </p:spPr>
+        <p:txBody>
+          <a:bodyPr wrap="square" lIns="508" tIns="508" rIns="508" bIns="508" rtlCol="0" anchor="t">
+            <a:normAutofit/>
+            <a:spAutoFit/>
+          </a:bodyPr>
+          <a:lstStyle/>
+          <a:p>
+            <a:pPr algn="l" indent="0" marL="0">
+              <a:buNone/>
+            </a:pPr>
+            <a:r>
+              <a:rPr lang="en-US" sz="1200" dirty="0">
+                <a:solidFill>
+                  <a:srgbClr val="334155"/>
+                </a:solidFill>
+                <a:latin typeface="Calibri" pitchFamily="34" charset="0"/>
+                <a:ea typeface="Calibri" pitchFamily="34" charset="-122"/>
+                <a:cs typeface="Calibri" pitchFamily="34" charset="-120"/>
+              </a:rPr>
+              <a:t>Quote basis (DR or AOR) × year basis (360 or 365) = four dialects for identical cash flows. In CFA Example 4 the 180-day instrument with the LOWEST quoted rate, 4.33%, turns out to have the HIGHEST bond-equivalent yield at 4.487%.</a:t>
+            </a:r>
+            <a:endParaRPr lang="en-US" sz="1200" dirty="0"/>
+          </a:p>
+        </p:txBody>
+      </p:sp>
     </p:spTree>
   </p:cSld>
   <p:clrMapOvr>
@@ -14225,7 +15844,7 @@
                 <a:ea typeface="Trebuchet MS" pitchFamily="34" charset="-122"/>
                 <a:cs typeface="Trebuchet MS" pitchFamily="34" charset="-120"/>
               </a:rPr>
-              <a:t>Worked — a 90-day CP quoted at 0.100% discount rate on a 360-day year converts to a BEY of 0.102% once re-expressed on a 365-day add-on basis</a:t>
+              <a:t>Worked — a 90-day CP quoted at a 0.120% discount rate on a 360-day year is a 0.122% bond-equivalent yield, which beats a CD quoting 0.120% add-on</a:t>
             </a:r>
             <a:endParaRPr lang="en-US" sz="1600" dirty="0"/>
           </a:p>
@@ -14301,6 +15920,46 @@
         </p:nvSpPr>
         <p:spPr>
           <a:xfrm>
+            <a:off x="320040" y="4471416"/>
+            <a:ext cx="8503920" cy="192024"/>
+          </a:xfrm>
+          <a:prstGeom prst="rect">
+            <a:avLst/>
+          </a:prstGeom>
+          <a:noFill/>
+          <a:ln/>
+        </p:spPr>
+        <p:txBody>
+          <a:bodyPr wrap="square" lIns="254" tIns="254" rIns="254" bIns="254" rtlCol="0" anchor="t"/>
+          <a:lstStyle/>
+          <a:p>
+            <a:pPr indent="0" marL="0">
+              <a:buNone/>
+            </a:pPr>
+            <a:r>
+              <a:rPr lang="en-US" sz="1000" dirty="0">
+                <a:solidFill>
+                  <a:srgbClr val="6B7A8D"/>
+                </a:solidFill>
+                <a:latin typeface="Calibri" pitchFamily="34" charset="0"/>
+                <a:ea typeface="Calibri" pitchFamily="34" charset="-122"/>
+                <a:cs typeface="Calibri" pitchFamily="34" charset="-120"/>
+              </a:rPr>
+              <a:t>¹ The printed setup line reads 0.100%, but the curriculum's own solution and its 0.2 bps conclusion both use DR = 0.120%. We follow the calculation.
+</a:t>
+            </a:r>
+            <a:endParaRPr lang="en-US" sz="1000" dirty="0"/>
+          </a:p>
+        </p:txBody>
+      </p:sp>
+      <p:sp>
+        <p:nvSpPr>
+          <p:cNvPr id="8" name="Text 6"/>
+          <p:cNvSpPr txBox="1"/>
+          <p:nvPr/>
+        </p:nvSpPr>
+        <p:spPr>
+          <a:xfrm>
             <a:off x="320040" y="4663440"/>
             <a:ext cx="8503920" cy="201168"/>
           </a:xfrm>
@@ -14329,7 +15988,7 @@
                 <a:ea typeface="Calibri" pitchFamily="34" charset="-122"/>
                 <a:cs typeface="Calibri" pitchFamily="34" charset="-120"/>
               </a:rPr>
-              <a:t>Source: CFA Institute, Curriculum Vol 6, LM 8, §3 Example 3 and Exhibit 3, pp. 197–200.</a:t>
+              <a:t>Source: CFA Institute, Curriculum Vol 6, LM 8, §3 Example 3 and Exhibit 3, pp. 197–198.</a:t>
             </a:r>
             <a:endParaRPr lang="en-US" sz="750" dirty="0"/>
           </a:p>
@@ -14337,7 +15996,7 @@
       </p:sp>
       <p:sp>
         <p:nvSpPr>
-          <p:cNvPr id="8" name="Text 6"/>
+          <p:cNvPr id="9" name="Text 7"/>
           <p:cNvSpPr txBox="1"/>
           <p:nvPr/>
         </p:nvSpPr>
@@ -14371,7 +16030,7 @@
                 <a:ea typeface="Calibri" pitchFamily="34" charset="-122"/>
                 <a:cs typeface="Calibri" pitchFamily="34" charset="-120"/>
               </a:rPr>
-              <a:t>Three-step conversion: (1) price from DR; (2) compute AOR on 365-day year; (3) that AOR = BEY.</a:t>
+              <a:t>Same credit, same 90-day tenor, two quoting conventions. Until they are translated, the two numbers cannot be compared at all.</a:t>
             </a:r>
             <a:endParaRPr lang="en-US" sz="1300" dirty="0"/>
           </a:p>
@@ -14379,14 +16038,14 @@
       </p:sp>
       <p:sp>
         <p:nvSpPr>
-          <p:cNvPr id="9" name="Shape 7"/>
+          <p:cNvPr id="10" name="Shape 8"/>
           <p:cNvSpPr/>
           <p:nvPr/>
         </p:nvSpPr>
         <p:spPr>
           <a:xfrm>
             <a:off x="320040" y="1143000"/>
-            <a:ext cx="8503920" cy="3154680"/>
+            <a:ext cx="8503920" cy="2377440"/>
           </a:xfrm>
           <a:prstGeom prst="rect">
             <a:avLst/>
@@ -14404,7 +16063,7 @@
       </p:sp>
       <p:sp>
         <p:nvSpPr>
-          <p:cNvPr id="10" name="Text 8"/>
+          <p:cNvPr id="11" name="Text 9"/>
           <p:cNvSpPr txBox="1"/>
           <p:nvPr/>
         </p:nvSpPr>
@@ -14438,7 +16097,7 @@
                 <a:ea typeface="Trebuchet MS" pitchFamily="34" charset="-122"/>
                 <a:cs typeface="Trebuchet MS" pitchFamily="34" charset="-120"/>
               </a:rPr>
-              <a:t>BRWA 90-DAY COMMERCIAL PAPER · DISCOUNT RATE 0.100% · 360-DAY YEAR</a:t>
+              <a:t>BRWA 90-DAY COMMERCIAL PAPER vs CFP BANK 90-DAY CD</a:t>
             </a:r>
             <a:endParaRPr lang="en-US" sz="1100" dirty="0"/>
           </a:p>
@@ -14446,7 +16105,7 @@
       </p:sp>
       <p:sp>
         <p:nvSpPr>
-          <p:cNvPr id="11" name="Text 9"/>
+          <p:cNvPr id="12" name="Text 10"/>
           <p:cNvSpPr txBox="1"/>
           <p:nvPr/>
         </p:nvSpPr>
@@ -14480,7 +16139,7 @@
                 <a:ea typeface="Calibri" pitchFamily="34" charset="-122"/>
                 <a:cs typeface="Calibri" pitchFamily="34" charset="-120"/>
               </a:rPr>
-              <a:t>Compute the price, then the BEY, then compare to a 90-day CD quoted at 0.120% AOR on a 365-day year (same credit).</a:t>
+              <a:t>CP: 0.120% discount rate, 360-day year. CD: 0.120% add-on rate, 365-day year. Which offers the higher return?</a:t>
             </a:r>
             <a:endParaRPr lang="en-US" sz="1200" dirty="0"/>
           </a:p>
@@ -14488,14 +16147,14 @@
       </p:sp>
       <p:sp>
         <p:nvSpPr>
-          <p:cNvPr id="12" name="Text 10"/>
+          <p:cNvPr id="13" name="Text 11"/>
           <p:cNvSpPr txBox="1"/>
           <p:nvPr/>
         </p:nvSpPr>
         <p:spPr>
           <a:xfrm>
             <a:off x="457200" y="1993392"/>
-            <a:ext cx="8229600" cy="1792224"/>
+            <a:ext cx="8229600" cy="1014984"/>
           </a:xfrm>
           <a:prstGeom prst="rect">
             <a:avLst/>
@@ -14517,7 +16176,7 @@
               <a:buNone/>
             </a:pPr>
             <a:r>
-              <a:rPr lang="en-US" sz="1200" b="1" dirty="0">
+              <a:rPr lang="en-US" sz="1150" b="1" dirty="0">
                 <a:solidFill>
                   <a:srgbClr val="1B2A4A"/>
                 </a:solidFill>
@@ -14534,7 +16193,7 @@
               <a:buNone/>
             </a:pPr>
             <a:r>
-              <a:rPr lang="en-US" sz="1200" dirty="0">
+              <a:rPr lang="en-US" sz="1150" dirty="0">
                 <a:solidFill>
                   <a:srgbClr val="334155"/>
                 </a:solidFill>
@@ -14542,7 +16201,7 @@
                 <a:ea typeface="Calibri" pitchFamily="34" charset="-122"/>
                 <a:cs typeface="Calibri" pitchFamily="34" charset="-120"/>
               </a:rPr>
-              <a:t>Step 1 — Price from DR: PV = 100 × [1 − (90/360) × 0.00100] = 100 × 0.99975 = 99.975
+              <a:t>Price the CP from its discount rate: PV = 100 × [1 − (90/360) × 0.00120] = 99.970
 </a:t>
             </a:r>
             <a:pPr indent="0" marL="0">
@@ -14552,7 +16211,7 @@
               <a:buNone/>
             </a:pPr>
             <a:r>
-              <a:rPr lang="en-US" sz="1200" b="1" dirty="0">
+              <a:rPr lang="en-US" sz="1150" b="1" dirty="0">
                 <a:solidFill>
                   <a:srgbClr val="1B2A4A"/>
                 </a:solidFill>
@@ -14569,7 +16228,7 @@
               <a:buNone/>
             </a:pPr>
             <a:r>
-              <a:rPr lang="en-US" sz="1200" dirty="0">
+              <a:rPr lang="en-US" sz="1150" dirty="0">
                 <a:solidFill>
                   <a:srgbClr val="334155"/>
                 </a:solidFill>
@@ -14577,7 +16236,7 @@
                 <a:ea typeface="Calibri" pitchFamily="34" charset="-122"/>
                 <a:cs typeface="Calibri" pitchFamily="34" charset="-120"/>
               </a:rPr>
-              <a:t>Step 2 — AOR on 365-day year: AOR = (365/90) × (100 − 99.975) / 99.975 = 4.0555 × 0.0002501 = 0.001014
+              <a:t>Restate on a 365-day add-on basis (Equation 5): AOR = (365/90) × (100 − 99.970) / 99.970
 </a:t>
             </a:r>
             <a:pPr indent="0" marL="0">
@@ -14587,7 +16246,7 @@
               <a:buNone/>
             </a:pPr>
             <a:r>
-              <a:rPr lang="en-US" sz="1200" b="1" dirty="0">
+              <a:rPr lang="en-US" sz="1150" b="1" dirty="0">
                 <a:solidFill>
                   <a:srgbClr val="1B2A4A"/>
                 </a:solidFill>
@@ -14604,7 +16263,7 @@
               <a:buNone/>
             </a:pPr>
             <a:r>
-              <a:rPr lang="en-US" sz="1200" dirty="0">
+              <a:rPr lang="en-US" sz="1150" dirty="0">
                 <a:solidFill>
                   <a:srgbClr val="334155"/>
                 </a:solidFill>
@@ -14612,7 +16271,7 @@
                 <a:ea typeface="Calibri" pitchFamily="34" charset="-122"/>
                 <a:cs typeface="Calibri" pitchFamily="34" charset="-120"/>
               </a:rPr>
-              <a:t>Step 3 — Express as BEY: BEY = AOR = 0.1014% ≈ 0.102% (365-day basis)
+              <a:t>AOR = 4.05556 × 0.00030009 = 0.00122 — and that add-on rate IS the bond-equivalent yield
 </a:t>
             </a:r>
             <a:pPr indent="0" marL="0">
@@ -14622,7 +16281,7 @@
               <a:buNone/>
             </a:pPr>
             <a:r>
-              <a:rPr lang="en-US" sz="1200" b="1" dirty="0">
+              <a:rPr lang="en-US" sz="1150" b="1" dirty="0">
                 <a:solidFill>
                   <a:srgbClr val="1B2A4A"/>
                 </a:solidFill>
@@ -14639,7 +16298,7 @@
               <a:buNone/>
             </a:pPr>
             <a:r>
-              <a:rPr lang="en-US" sz="1200" dirty="0">
+              <a:rPr lang="en-US" sz="1150" dirty="0">
                 <a:solidFill>
                   <a:srgbClr val="334155"/>
                 </a:solidFill>
@@ -14647,7 +16306,7 @@
                 <a:ea typeface="Calibri" pitchFamily="34" charset="-122"/>
                 <a:cs typeface="Calibri" pitchFamily="34" charset="-120"/>
               </a:rPr>
-              <a:t>Compare vs CD: CFP Bank 90-day CD AOR on 365-day = 0.120%. BRWA CP at BEY 0.101% → CD is higher-yielding.
+              <a:t>The CD is already an add-on rate on a 365-day year, so its 0.120% needs no conversion
 </a:t>
             </a:r>
             <a:pPr indent="0" marL="0">
@@ -14657,7 +16316,7 @@
               <a:buNone/>
             </a:pPr>
             <a:r>
-              <a:rPr lang="en-US" sz="1200" b="1" dirty="0">
+              <a:rPr lang="en-US" sz="1150" b="1" dirty="0">
                 <a:solidFill>
                   <a:srgbClr val="1B2A4A"/>
                 </a:solidFill>
@@ -14674,7 +16333,7 @@
               <a:buNone/>
             </a:pPr>
             <a:r>
-              <a:rPr lang="en-US" sz="1200" dirty="0">
+              <a:rPr lang="en-US" sz="1150" dirty="0">
                 <a:solidFill>
                   <a:srgbClr val="334155"/>
                 </a:solidFill>
@@ -14682,21 +16341,21 @@
                 <a:ea typeface="Calibri" pitchFamily="34" charset="-122"/>
                 <a:cs typeface="Calibri" pitchFamily="34" charset="-120"/>
               </a:rPr>
-              <a:t>Interpretation: BRWA appears cheaper at 0.100% DR but only because of the 360-day convention masking 1.4% annualization uplift.</a:t>
-            </a:r>
-            <a:endParaRPr lang="en-US" sz="1200" dirty="0"/>
-          </a:p>
-        </p:txBody>
-      </p:sp>
-      <p:sp>
-        <p:nvSpPr>
-          <p:cNvPr id="13" name="Shape 11"/>
+              <a:t>Both adjustments — FV→PV in the denominator, 360→365 in the year — push the same way, so a DR always converts UP</a:t>
+            </a:r>
+            <a:endParaRPr lang="en-US" sz="1150" dirty="0"/>
+          </a:p>
+        </p:txBody>
+      </p:sp>
+      <p:sp>
+        <p:nvSpPr>
+          <p:cNvPr id="14" name="Shape 12"/>
           <p:cNvSpPr/>
           <p:nvPr/>
         </p:nvSpPr>
         <p:spPr>
           <a:xfrm>
-            <a:off x="411480" y="3858768"/>
+            <a:off x="411480" y="3081528"/>
             <a:ext cx="8321040" cy="365760"/>
           </a:xfrm>
           <a:prstGeom prst="rect">
@@ -14710,13 +16369,13 @@
       </p:sp>
       <p:sp>
         <p:nvSpPr>
-          <p:cNvPr id="14" name="Text 12"/>
+          <p:cNvPr id="15" name="Text 13"/>
           <p:cNvSpPr txBox="1"/>
           <p:nvPr/>
         </p:nvSpPr>
         <p:spPr>
           <a:xfrm>
-            <a:off x="457200" y="3858768"/>
+            <a:off x="457200" y="3081528"/>
             <a:ext cx="8229600" cy="365760"/>
           </a:xfrm>
           <a:prstGeom prst="rect">
@@ -14744,9 +16403,133 @@
                 <a:ea typeface="Consolas" pitchFamily="34" charset="-122"/>
                 <a:cs typeface="Consolas" pitchFamily="34" charset="-120"/>
               </a:rPr>
-              <a:t>BRWA BEY  =  0.102%   vs   CFP Bank CD  =  0.120%   →   CD offers the higher return on an apples-to-apples basis</a:t>
+              <a:t>CP BEY 0.122%   vs   CD 0.120%   →   the CP wins by ~0.2 bps once conventions match</a:t>
             </a:r>
             <a:endParaRPr lang="en-US" sz="1150" dirty="0"/>
+          </a:p>
+        </p:txBody>
+      </p:sp>
+      <p:sp>
+        <p:nvSpPr>
+          <p:cNvPr id="16" name="Shape 14"/>
+          <p:cNvSpPr/>
+          <p:nvPr/>
+        </p:nvSpPr>
+        <p:spPr>
+          <a:xfrm>
+            <a:off x="320040" y="3611880"/>
+            <a:ext cx="8503920" cy="640080"/>
+          </a:xfrm>
+          <a:prstGeom prst="rect">
+            <a:avLst/>
+          </a:prstGeom>
+          <a:solidFill>
+            <a:srgbClr val="FEF0E7"/>
+          </a:solidFill>
+          <a:ln/>
+        </p:spPr>
+      </p:sp>
+      <p:sp>
+        <p:nvSpPr>
+          <p:cNvPr id="17" name="Shape 15"/>
+          <p:cNvSpPr/>
+          <p:nvPr/>
+        </p:nvSpPr>
+        <p:spPr>
+          <a:xfrm>
+            <a:off x="320040" y="3611880"/>
+            <a:ext cx="73152" cy="640080"/>
+          </a:xfrm>
+          <a:prstGeom prst="rect">
+            <a:avLst/>
+          </a:prstGeom>
+          <a:solidFill>
+            <a:srgbClr val="E8600A"/>
+          </a:solidFill>
+          <a:ln/>
+        </p:spPr>
+      </p:sp>
+      <p:sp>
+        <p:nvSpPr>
+          <p:cNvPr id="18" name="Text 16"/>
+          <p:cNvSpPr txBox="1"/>
+          <p:nvPr/>
+        </p:nvSpPr>
+        <p:spPr>
+          <a:xfrm>
+            <a:off x="457200" y="3657600"/>
+            <a:ext cx="8275320" cy="256032"/>
+          </a:xfrm>
+          <a:prstGeom prst="rect">
+            <a:avLst/>
+          </a:prstGeom>
+          <a:noFill/>
+          <a:ln/>
+        </p:spPr>
+        <p:txBody>
+          <a:bodyPr wrap="square" lIns="508" tIns="508" rIns="508" bIns="508" rtlCol="0" anchor="ctr">
+            <a:normAutofit/>
+            <a:spAutoFit/>
+          </a:bodyPr>
+          <a:lstStyle/>
+          <a:p>
+            <a:pPr algn="l" indent="0" marL="0">
+              <a:buNone/>
+            </a:pPr>
+            <a:r>
+              <a:rPr lang="en-US" sz="1100" b="1" spc="400" kern="0" dirty="0">
+                <a:solidFill>
+                  <a:srgbClr val="E8600A"/>
+                </a:solidFill>
+                <a:latin typeface="Trebuchet MS" pitchFamily="34" charset="0"/>
+                <a:ea typeface="Trebuchet MS" pitchFamily="34" charset="-122"/>
+                <a:cs typeface="Trebuchet MS" pitchFamily="34" charset="-120"/>
+              </a:rPr>
+              <a:t>THE QUOTED NUMBER IS NOT THE RETURN</a:t>
+            </a:r>
+            <a:endParaRPr lang="en-US" sz="1100" dirty="0"/>
+          </a:p>
+        </p:txBody>
+      </p:sp>
+      <p:sp>
+        <p:nvSpPr>
+          <p:cNvPr id="19" name="Text 17"/>
+          <p:cNvSpPr txBox="1"/>
+          <p:nvPr/>
+        </p:nvSpPr>
+        <p:spPr>
+          <a:xfrm>
+            <a:off x="457200" y="3931920"/>
+            <a:ext cx="8275320" cy="274320"/>
+          </a:xfrm>
+          <a:prstGeom prst="rect">
+            <a:avLst/>
+          </a:prstGeom>
+          <a:noFill/>
+          <a:ln/>
+        </p:spPr>
+        <p:txBody>
+          <a:bodyPr wrap="square" lIns="508" tIns="508" rIns="508" bIns="508" rtlCol="0" anchor="t">
+            <a:normAutofit/>
+            <a:spAutoFit/>
+          </a:bodyPr>
+          <a:lstStyle/>
+          <a:p>
+            <a:pPr algn="l" indent="0" marL="0">
+              <a:buNone/>
+            </a:pPr>
+            <a:r>
+              <a:rPr lang="en-US" sz="1200" dirty="0">
+                <a:solidFill>
+                  <a:srgbClr val="334155"/>
+                </a:solidFill>
+                <a:latin typeface="Calibri" pitchFamily="34" charset="0"/>
+                <a:ea typeface="Calibri" pitchFamily="34" charset="-122"/>
+                <a:cs typeface="Calibri" pitchFamily="34" charset="-120"/>
+              </a:rPr>
+              <a:t>Two quotes that both read "0.120%" are not the same return. Until both are expressed as 365-day add-on rates, the comparison is meaningless — and the ranking can flip.</a:t>
+            </a:r>
+            <a:endParaRPr lang="en-US" sz="1200" dirty="0"/>
           </a:p>
         </p:txBody>
       </p:sp>
@@ -14851,7 +16634,7 @@
                 <a:ea typeface="Trebuchet MS" pitchFamily="34" charset="-122"/>
                 <a:cs typeface="Trebuchet MS" pitchFamily="34" charset="-120"/>
               </a:rPr>
-              <a:t>A floating-rate note resets its coupon each period to MRR + quoted margin — so it trades at par only when the required margin equals the quoted margin</a:t>
+              <a:t>A floating-rate note resets its coupon each period to MRR + quoted margin — so it prices at par on a reset date only when the required margin equals the quoted margin</a:t>
             </a:r>
             <a:endParaRPr lang="en-US" sz="1600" dirty="0"/>
           </a:p>
@@ -14955,7 +16738,7 @@
                 <a:ea typeface="Calibri" pitchFamily="34" charset="-122"/>
                 <a:cs typeface="Calibri" pitchFamily="34" charset="-120"/>
               </a:rPr>
-              <a:t>Source: CFA Institute, Curriculum Vol 6, LM 8, §2 FRN Pricing, Equation 1, pp. 188–193.</a:t>
+              <a:t>Source: CFA Institute, Curriculum Vol 6, LM 8, §2 "Yield and Yield Spread Measures for Floating-Rate Notes", Equation 1 and Exhibit 1, pp. 188–190.</a:t>
             </a:r>
             <a:endParaRPr lang="en-US" sz="750" dirty="0"/>
           </a:p>
@@ -14997,7 +16780,7 @@
                 <a:ea typeface="Calibri" pitchFamily="34" charset="-122"/>
                 <a:cs typeface="Calibri" pitchFamily="34" charset="-120"/>
               </a:rPr>
-              <a:t>At every reset date cash flows "snap" back to market rates, so interest-rate risk is reduced. Residual price risk is driven by CREDIT — the discount margin.</a:t>
+              <a:t>The coupon snaps back to market every reset, so interest-rate risk is small. What is left is CREDIT risk — and that is what the discount margin measures.</a:t>
             </a:r>
             <a:endParaRPr lang="en-US" sz="1300" dirty="0"/>
           </a:p>
@@ -15059,7 +16842,24 @@
                 <a:ea typeface="Consolas" pitchFamily="34" charset="-122"/>
                 <a:cs typeface="Consolas" pitchFamily="34" charset="-120"/>
               </a:rPr>
-              <a:t>PV  =  Σ  [ (MRR + QM)/m × FV ]  /  [1 + (MRR + DM)/m ]ᵗ   +   FV / [1 + (MRR + DM)/m ]ⁿ</a:t>
+              <a:t>PV  =  Σ  [(MRR + QM) × FV / m]  /  [1 + (MRR + DM)/m]ᵗ</a:t>
+            </a:r>
+            <a:endParaRPr lang="en-US" sz="1800" dirty="0"/>
+          </a:p>
+          <a:p>
+            <a:pPr algn="ctr" indent="0" marL="0">
+              <a:buNone/>
+            </a:pPr>
+            <a:r>
+              <a:rPr lang="en-US" sz="1800" b="1" dirty="0">
+                <a:solidFill>
+                  <a:srgbClr val="FFFFFF"/>
+                </a:solidFill>
+                <a:latin typeface="Consolas" pitchFamily="34" charset="0"/>
+                <a:ea typeface="Consolas" pitchFamily="34" charset="-122"/>
+                <a:cs typeface="Consolas" pitchFamily="34" charset="-120"/>
+              </a:rPr>
+              <a:t>+   FV / [1 + (MRR + DM)/m]ᴺ</a:t>
             </a:r>
             <a:endParaRPr lang="en-US" sz="1800" dirty="0"/>
           </a:p>
@@ -15101,7 +16901,7 @@
                 <a:ea typeface="Calibri" pitchFamily="34" charset="-122"/>
                 <a:cs typeface="Calibri" pitchFamily="34" charset="-120"/>
               </a:rPr>
-              <a:t>where: QM = quoted margin (locked at issuance); DM = discount margin (market-determined, reflects current credit). Par if QM = DM.</a:t>
+              <a:t>where: QM = quoted margin, fixed at issuance, sits in the NUMERATOR. DM = discount margin, set by the market today, sits in the DENOMINATOR. Par when they are equal.</a:t>
             </a:r>
             <a:endParaRPr lang="en-US" sz="1100" dirty="0"/>
           </a:p>
@@ -15183,7 +16983,7 @@
                 <a:ea typeface="Trebuchet MS" pitchFamily="34" charset="-122"/>
                 <a:cs typeface="Trebuchet MS" pitchFamily="34" charset="-120"/>
               </a:rPr>
-              <a:t>QM &lt; DM  →  DISCOUNT</a:t>
+              <a:t>DM &gt; QM  →  DISCOUNT</a:t>
             </a:r>
             <a:endParaRPr lang="en-US" sz="1100" dirty="0"/>
           </a:p>
@@ -15225,7 +17025,7 @@
                 <a:ea typeface="Calibri" pitchFamily="34" charset="-122"/>
                 <a:cs typeface="Calibri" pitchFamily="34" charset="-120"/>
               </a:rPr>
-              <a:t>Issuer paying "deficient" margin vs what market now demands — bond falls below par. Credit has deteriorated.</a:t>
+              <a:t>Credit has deteriorated. The issuer now pays a "deficient" margin versus what the market demands, so the note falls below par by the PV of that shortfall.</a:t>
             </a:r>
             <a:endParaRPr lang="en-US" sz="1200" dirty="0"/>
           </a:p>
@@ -15307,7 +17107,7 @@
                 <a:ea typeface="Trebuchet MS" pitchFamily="34" charset="-122"/>
                 <a:cs typeface="Trebuchet MS" pitchFamily="34" charset="-120"/>
               </a:rPr>
-              <a:t>QM = DM  →  PAR</a:t>
+              <a:t>DM = QM  →  PAR</a:t>
             </a:r>
             <a:endParaRPr lang="en-US" sz="1100" dirty="0"/>
           </a:p>
@@ -15349,7 +17149,7 @@
                 <a:ea typeface="Calibri" pitchFamily="34" charset="-122"/>
                 <a:cs typeface="Calibri" pitchFamily="34" charset="-120"/>
               </a:rPr>
-              <a:t>Market-required margin = locked quoted margin. Bond prices exactly at 100 on each reset date.</a:t>
+              <a:t>Nothing has changed since issuance. The note prices exactly at 100 on every reset date, and is pulled back to par between them.</a:t>
             </a:r>
             <a:endParaRPr lang="en-US" sz="1200" dirty="0"/>
           </a:p>
@@ -15431,7 +17231,7 @@
                 <a:ea typeface="Trebuchet MS" pitchFamily="34" charset="-122"/>
                 <a:cs typeface="Trebuchet MS" pitchFamily="34" charset="-120"/>
               </a:rPr>
-              <a:t>QM &gt; DM  →  PREMIUM</a:t>
+              <a:t>DM &lt; QM  →  PREMIUM</a:t>
             </a:r>
             <a:endParaRPr lang="en-US" sz="1100" dirty="0"/>
           </a:p>
@@ -15473,7 +17273,7 @@
                 <a:ea typeface="Calibri" pitchFamily="34" charset="-122"/>
                 <a:cs typeface="Calibri" pitchFamily="34" charset="-120"/>
               </a:rPr>
-              <a:t>Issuer "overpaying" vs current market. Credit improved since issuance — bond trades above par.</a:t>
+              <a:t>Credit has improved. The issuer is now "overpaying" versus the market, so the note trades above par by the PV of that excess margin.</a:t>
             </a:r>
             <a:endParaRPr lang="en-US" sz="1200" dirty="0"/>
           </a:p>
@@ -15580,7 +17380,7 @@
                 <a:ea typeface="Trebuchet MS" pitchFamily="34" charset="-122"/>
                 <a:cs typeface="Trebuchet MS" pitchFamily="34" charset="-120"/>
               </a:rPr>
-              <a:t>Worked — Antelas AG 4y FRN paying 3m MRR of −0.55% + 250 bps priced at 97 implies a discount margin of 329 bps — a clear credit downgrade</a:t>
+              <a:t>Worked — the Antelas AG four-year FRN paying 3-month MRR of −0.55% plus 250 bps, priced at 97, implies a discount margin of 329 bps</a:t>
             </a:r>
             <a:endParaRPr lang="en-US" sz="1600" dirty="0"/>
           </a:p>
@@ -15684,7 +17484,7 @@
                 <a:ea typeface="Calibri" pitchFamily="34" charset="-122"/>
                 <a:cs typeface="Calibri" pitchFamily="34" charset="-120"/>
               </a:rPr>
-              <a:t>Source: CFA Institute, Curriculum Vol 6, LM 8, §2 Example 1 Antelas AG FRN, pp. 191–194.</a:t>
+              <a:t>Source: CFA Institute, Curriculum Vol 6, LM 8, §2 Example 1 "Calculating the Discount Margin for a Floating-Rate Note", pp. 191–192.</a:t>
             </a:r>
             <a:endParaRPr lang="en-US" sz="750" dirty="0"/>
           </a:p>
@@ -15726,7 +17526,7 @@
                 <a:ea typeface="Calibri" pitchFamily="34" charset="-122"/>
                 <a:cs typeface="Calibri" pitchFamily="34" charset="-120"/>
               </a:rPr>
-              <a:t>Discount is 3 pts below par → market requires more compensation than the 250-bp locked QM. Solve for the required margin implied by price.</a:t>
+              <a:t>The note sits 3 points below par, so the market must be demanding more than the 250 bp locked in at issuance. Solve the pricing model for the margin that produces 97.</a:t>
             </a:r>
             <a:endParaRPr lang="en-US" sz="1300" dirty="0"/>
           </a:p>
@@ -15741,7 +17541,7 @@
         <p:spPr>
           <a:xfrm>
             <a:off x="320040" y="1143000"/>
-            <a:ext cx="8503920" cy="3154680"/>
+            <a:ext cx="8503920" cy="2377440"/>
           </a:xfrm>
           <a:prstGeom prst="rect">
             <a:avLst/>
@@ -15793,7 +17593,7 @@
                 <a:ea typeface="Trebuchet MS" pitchFamily="34" charset="-122"/>
                 <a:cs typeface="Trebuchet MS" pitchFamily="34" charset="-120"/>
               </a:rPr>
-              <a:t>ANTELAS AG FRN · EUR · QUARTERLY · 4-YEAR · 30/360</a:t>
+              <a:t>ANTELAS AG FRN · EUR · QUARTERLY · 4 YEARS · 30/360</a:t>
             </a:r>
             <a:endParaRPr lang="en-US" sz="1100" dirty="0"/>
           </a:p>
@@ -15835,7 +17635,7 @@
                 <a:ea typeface="Calibri" pitchFamily="34" charset="-122"/>
                 <a:cs typeface="Calibri" pitchFamily="34" charset="-120"/>
               </a:rPr>
-              <a:t>QM = 250 bps; MRR (3m) = −0.55%; Price = 97 per 100 par; N = 16 remaining periods. Face = 100.</a:t>
+              <a:t>QM = 250 bps. Three-month MRR held constant at −0.55%. Price 97 per 100 of par. m = 4, N = 16 periods, FV = 100.</a:t>
             </a:r>
             <a:endParaRPr lang="en-US" sz="1200" dirty="0"/>
           </a:p>
@@ -15850,7 +17650,7 @@
         <p:spPr>
           <a:xfrm>
             <a:off x="457200" y="1993392"/>
-            <a:ext cx="8229600" cy="1792224"/>
+            <a:ext cx="8229600" cy="1014984"/>
           </a:xfrm>
           <a:prstGeom prst="rect">
             <a:avLst/>
@@ -15872,7 +17672,7 @@
               <a:buNone/>
             </a:pPr>
             <a:r>
-              <a:rPr lang="en-US" sz="1200" b="1" dirty="0">
+              <a:rPr lang="en-US" sz="1150" b="1" dirty="0">
                 <a:solidFill>
                   <a:srgbClr val="1B2A4A"/>
                 </a:solidFill>
@@ -15889,7 +17689,7 @@
               <a:buNone/>
             </a:pPr>
             <a:r>
-              <a:rPr lang="en-US" sz="1200" dirty="0">
+              <a:rPr lang="en-US" sz="1150" dirty="0">
                 <a:solidFill>
                   <a:srgbClr val="334155"/>
                 </a:solidFill>
@@ -15897,7 +17697,7 @@
                 <a:ea typeface="Calibri" pitchFamily="34" charset="-122"/>
                 <a:cs typeface="Calibri" pitchFamily="34" charset="-120"/>
               </a:rPr>
-              <a:t>Step 1 — Periodic coupon: PMT = (MRR + QM) / m × FV = (−0.0055 + 0.025) / 4 × 100 = 0.4875
+              <a:t>Periodic coupon: PMT = (MRR + QM) × FV / m = (−0.0055 + 0.0250) × 100 / 4 = 0.4875
 </a:t>
             </a:r>
             <a:pPr indent="0" marL="0">
@@ -15907,7 +17707,7 @@
               <a:buNone/>
             </a:pPr>
             <a:r>
-              <a:rPr lang="en-US" sz="1200" b="1" dirty="0">
+              <a:rPr lang="en-US" sz="1150" b="1" dirty="0">
                 <a:solidFill>
                   <a:srgbClr val="1B2A4A"/>
                 </a:solidFill>
@@ -15924,7 +17724,7 @@
               <a:buNone/>
             </a:pPr>
             <a:r>
-              <a:rPr lang="en-US" sz="1200" dirty="0">
+              <a:rPr lang="en-US" sz="1150" dirty="0">
                 <a:solidFill>
                   <a:srgbClr val="334155"/>
                 </a:solidFill>
@@ -15932,7 +17732,7 @@
                 <a:ea typeface="Calibri" pitchFamily="34" charset="-122"/>
                 <a:cs typeface="Calibri" pitchFamily="34" charset="-120"/>
               </a:rPr>
-              <a:t>Step 2 — Solve for periodic rate r using PV = −97, FV = 100, PMT = 0.4875, N = 16 (Excel RATE)
+              <a:t>Solve for the periodic discount rate: PV = −97, FV = 100, PMT = 0.4875, N = 16  →  r = 0.686122%
 </a:t>
             </a:r>
             <a:pPr indent="0" marL="0">
@@ -15942,7 +17742,7 @@
               <a:buNone/>
             </a:pPr>
             <a:r>
-              <a:rPr lang="en-US" sz="1200" b="1" dirty="0">
+              <a:rPr lang="en-US" sz="1150" b="1" dirty="0">
                 <a:solidFill>
                   <a:srgbClr val="1B2A4A"/>
                 </a:solidFill>
@@ -15959,7 +17759,7 @@
               <a:buNone/>
             </a:pPr>
             <a:r>
-              <a:rPr lang="en-US" sz="1200" dirty="0">
+              <a:rPr lang="en-US" sz="1150" dirty="0">
                 <a:solidFill>
                   <a:srgbClr val="334155"/>
                 </a:solidFill>
@@ -15967,7 +17767,7 @@
                 <a:ea typeface="Calibri" pitchFamily="34" charset="-122"/>
                 <a:cs typeface="Calibri" pitchFamily="34" charset="-120"/>
               </a:rPr>
-              <a:t>          r = 0.006861 per period
+              <a:t>Unwind r into the margin: r = (MRR + DM) / m  →  0.00686122 = (−0.0055 + DM) / 4
 </a:t>
             </a:r>
             <a:pPr indent="0" marL="0">
@@ -15977,7 +17777,7 @@
               <a:buNone/>
             </a:pPr>
             <a:r>
-              <a:rPr lang="en-US" sz="1200" b="1" dirty="0">
+              <a:rPr lang="en-US" sz="1150" b="1" dirty="0">
                 <a:solidFill>
                   <a:srgbClr val="1B2A4A"/>
                 </a:solidFill>
@@ -15994,7 +17794,7 @@
               <a:buNone/>
             </a:pPr>
             <a:r>
-              <a:rPr lang="en-US" sz="1200" dirty="0">
+              <a:rPr lang="en-US" sz="1150" dirty="0">
                 <a:solidFill>
                   <a:srgbClr val="334155"/>
                 </a:solidFill>
@@ -16002,7 +17802,7 @@
                 <a:ea typeface="Calibri" pitchFamily="34" charset="-122"/>
                 <a:cs typeface="Calibri" pitchFamily="34" charset="-120"/>
               </a:rPr>
-              <a:t>Step 3 — Back out DM: r = (MRR + DM) / m → 0.006861 = (−0.0055 + DM) / 4
+              <a:t>DM = 4 × 0.00686122 + 0.0055 = 0.03294 = 329 bps
 </a:t>
             </a:r>
             <a:pPr indent="0" marL="0">
@@ -16012,7 +17812,7 @@
               <a:buNone/>
             </a:pPr>
             <a:r>
-              <a:rPr lang="en-US" sz="1200" b="1" dirty="0">
+              <a:rPr lang="en-US" sz="1150" b="1" dirty="0">
                 <a:solidFill>
                   <a:srgbClr val="1B2A4A"/>
                 </a:solidFill>
@@ -16029,7 +17829,7 @@
               <a:buNone/>
             </a:pPr>
             <a:r>
-              <a:rPr lang="en-US" sz="1200" dirty="0">
+              <a:rPr lang="en-US" sz="1150" dirty="0">
                 <a:solidFill>
                   <a:srgbClr val="334155"/>
                 </a:solidFill>
@@ -16037,9 +17837,9 @@
                 <a:ea typeface="Calibri" pitchFamily="34" charset="-122"/>
                 <a:cs typeface="Calibri" pitchFamily="34" charset="-120"/>
               </a:rPr>
-              <a:t>          DM = 4 × 0.006861 + 0.0055 = 0.0329</a:t>
-            </a:r>
-            <a:endParaRPr lang="en-US" sz="1200" dirty="0"/>
+              <a:t>Check: the 79 bp shortfall is 0.1975 a quarter; × the 16-period annuity factor 15.10 = 2.98 ≈ the 3-point discount ✓</a:t>
+            </a:r>
+            <a:endParaRPr lang="en-US" sz="1150" dirty="0"/>
           </a:p>
         </p:txBody>
       </p:sp>
@@ -16051,7 +17851,7 @@
         </p:nvSpPr>
         <p:spPr>
           <a:xfrm>
-            <a:off x="411480" y="3858768"/>
+            <a:off x="411480" y="3081528"/>
             <a:ext cx="8321040" cy="365760"/>
           </a:xfrm>
           <a:prstGeom prst="rect">
@@ -16071,7 +17871,7 @@
         </p:nvSpPr>
         <p:spPr>
           <a:xfrm>
-            <a:off x="457200" y="3858768"/>
+            <a:off x="457200" y="3081528"/>
             <a:ext cx="8229600" cy="365760"/>
           </a:xfrm>
           <a:prstGeom prst="rect">
@@ -16099,9 +17899,133 @@
                 <a:ea typeface="Consolas" pitchFamily="34" charset="-122"/>
                 <a:cs typeface="Consolas" pitchFamily="34" charset="-120"/>
               </a:rPr>
-              <a:t>DM  =  329 bps   vs QM of 250 bps   →   market demands 79 bps MORE than at issuance (credit deterioration)</a:t>
+              <a:t>DM = 329 bps  vs  QM 250 bps   →   the 79 bp shortfall IS the 3-point discount</a:t>
             </a:r>
             <a:endParaRPr lang="en-US" sz="1150" dirty="0"/>
+          </a:p>
+        </p:txBody>
+      </p:sp>
+      <p:sp>
+        <p:nvSpPr>
+          <p:cNvPr id="15" name="Shape 13"/>
+          <p:cNvSpPr/>
+          <p:nvPr/>
+        </p:nvSpPr>
+        <p:spPr>
+          <a:xfrm>
+            <a:off x="320040" y="3611880"/>
+            <a:ext cx="8503920" cy="685800"/>
+          </a:xfrm>
+          <a:prstGeom prst="rect">
+            <a:avLst/>
+          </a:prstGeom>
+          <a:solidFill>
+            <a:srgbClr val="FEF0E7"/>
+          </a:solidFill>
+          <a:ln/>
+        </p:spPr>
+      </p:sp>
+      <p:sp>
+        <p:nvSpPr>
+          <p:cNvPr id="16" name="Shape 14"/>
+          <p:cNvSpPr/>
+          <p:nvPr/>
+        </p:nvSpPr>
+        <p:spPr>
+          <a:xfrm>
+            <a:off x="320040" y="3611880"/>
+            <a:ext cx="73152" cy="685800"/>
+          </a:xfrm>
+          <a:prstGeom prst="rect">
+            <a:avLst/>
+          </a:prstGeom>
+          <a:solidFill>
+            <a:srgbClr val="E8600A"/>
+          </a:solidFill>
+          <a:ln/>
+        </p:spPr>
+      </p:sp>
+      <p:sp>
+        <p:nvSpPr>
+          <p:cNvPr id="17" name="Text 15"/>
+          <p:cNvSpPr txBox="1"/>
+          <p:nvPr/>
+        </p:nvSpPr>
+        <p:spPr>
+          <a:xfrm>
+            <a:off x="457200" y="3657600"/>
+            <a:ext cx="8275320" cy="256032"/>
+          </a:xfrm>
+          <a:prstGeom prst="rect">
+            <a:avLst/>
+          </a:prstGeom>
+          <a:noFill/>
+          <a:ln/>
+        </p:spPr>
+        <p:txBody>
+          <a:bodyPr wrap="square" lIns="508" tIns="508" rIns="508" bIns="508" rtlCol="0" anchor="ctr">
+            <a:normAutofit/>
+            <a:spAutoFit/>
+          </a:bodyPr>
+          <a:lstStyle/>
+          <a:p>
+            <a:pPr algn="l" indent="0" marL="0">
+              <a:buNone/>
+            </a:pPr>
+            <a:r>
+              <a:rPr lang="en-US" sz="1100" b="1" spc="400" kern="0" dirty="0">
+                <a:solidFill>
+                  <a:srgbClr val="E8600A"/>
+                </a:solidFill>
+                <a:latin typeface="Trebuchet MS" pitchFamily="34" charset="0"/>
+                <a:ea typeface="Trebuchet MS" pitchFamily="34" charset="-122"/>
+                <a:cs typeface="Trebuchet MS" pitchFamily="34" charset="-120"/>
+              </a:rPr>
+              <a:t>WATCH THE SIGNS AND THE PERIODICITY</a:t>
+            </a:r>
+            <a:endParaRPr lang="en-US" sz="1100" dirty="0"/>
+          </a:p>
+        </p:txBody>
+      </p:sp>
+      <p:sp>
+        <p:nvSpPr>
+          <p:cNvPr id="18" name="Text 16"/>
+          <p:cNvSpPr txBox="1"/>
+          <p:nvPr/>
+        </p:nvSpPr>
+        <p:spPr>
+          <a:xfrm>
+            <a:off x="457200" y="3931920"/>
+            <a:ext cx="8275320" cy="320040"/>
+          </a:xfrm>
+          <a:prstGeom prst="rect">
+            <a:avLst/>
+          </a:prstGeom>
+          <a:noFill/>
+          <a:ln/>
+        </p:spPr>
+        <p:txBody>
+          <a:bodyPr wrap="square" lIns="508" tIns="508" rIns="508" bIns="508" rtlCol="0" anchor="t">
+            <a:normAutofit/>
+            <a:spAutoFit/>
+          </a:bodyPr>
+          <a:lstStyle/>
+          <a:p>
+            <a:pPr algn="l" indent="0" marL="0">
+              <a:buNone/>
+            </a:pPr>
+            <a:r>
+              <a:rPr lang="en-US" sz="1200" dirty="0">
+                <a:solidFill>
+                  <a:srgbClr val="334155"/>
+                </a:solidFill>
+                <a:latin typeface="Calibri" pitchFamily="34" charset="0"/>
+                <a:ea typeface="Calibri" pitchFamily="34" charset="-122"/>
+                <a:cs typeface="Calibri" pitchFamily="34" charset="-120"/>
+              </a:rPr>
+              <a:t>MRR is negative here, so −(−0.0055) adds back. And r is a PERIODIC rate — multiply by m = 4 before subtracting MRR. Dropping either step is the standard way this calculation goes wrong.</a:t>
+            </a:r>
+            <a:endParaRPr lang="en-US" sz="1200" dirty="0"/>
           </a:p>
         </p:txBody>
       </p:sp>
@@ -16434,7 +18358,7 @@
                 <a:ea typeface="Trebuchet MS" pitchFamily="34" charset="-122"/>
                 <a:cs typeface="Trebuchet MS" pitchFamily="34" charset="-120"/>
               </a:rPr>
-              <a:t>Spot rates are zero-coupon yields — one rate per maturity — and form the ideal dataset because they carry no coupon reinvestment risk</a:t>
+              <a:t>Spot rates are zero-coupon yields — one rate per maturity — and they are the ideal term-structure dataset because there is nothing to reinvest</a:t>
             </a:r>
             <a:endParaRPr lang="en-US" sz="1600" dirty="0"/>
           </a:p>
@@ -16510,6 +18434,46 @@
         </p:nvSpPr>
         <p:spPr>
           <a:xfrm>
+            <a:off x="320040" y="4471416"/>
+            <a:ext cx="8503920" cy="192024"/>
+          </a:xfrm>
+          <a:prstGeom prst="rect">
+            <a:avLst/>
+          </a:prstGeom>
+          <a:noFill/>
+          <a:ln/>
+        </p:spPr>
+        <p:txBody>
+          <a:bodyPr wrap="square" lIns="254" tIns="254" rIns="254" bIns="254" rtlCol="0" anchor="t"/>
+          <a:lstStyle/>
+          <a:p>
+            <a:pPr indent="0" marL="0">
+              <a:buNone/>
+            </a:pPr>
+            <a:r>
+              <a:rPr lang="en-US" sz="1000" dirty="0">
+                <a:solidFill>
+                  <a:srgbClr val="6B7A8D"/>
+                </a:solidFill>
+                <a:latin typeface="Calibri" pitchFamily="34" charset="0"/>
+                <a:ea typeface="Calibri" pitchFamily="34" charset="-122"/>
+                <a:cs typeface="Calibri" pitchFamily="34" charset="-120"/>
+              </a:rPr>
+              <a:t>¹ CFA Example 1: a five-year Canadian 1.00% bond priced on these spots is 99.50, and its YTM is 1.104% — just under the 1.11% five-year spot.
+</a:t>
+            </a:r>
+            <a:endParaRPr lang="en-US" sz="1000" dirty="0"/>
+          </a:p>
+        </p:txBody>
+      </p:sp>
+      <p:sp>
+        <p:nvSpPr>
+          <p:cNvPr id="8" name="Text 6"/>
+          <p:cNvSpPr txBox="1"/>
+          <p:nvPr/>
+        </p:nvSpPr>
+        <p:spPr>
+          <a:xfrm>
             <a:off x="320040" y="4663440"/>
             <a:ext cx="8503920" cy="201168"/>
           </a:xfrm>
@@ -16538,7 +18502,7 @@
                 <a:ea typeface="Calibri" pitchFamily="34" charset="-122"/>
                 <a:cs typeface="Calibri" pitchFamily="34" charset="-120"/>
               </a:rPr>
-              <a:t>Source: CFA Institute, Curriculum Vol 6, LM 9, §2 "Maturity Structure and Spot Rates", pp. 209–216.</a:t>
+              <a:t>Source: CFA Institute, Curriculum Vol 6, LM 9, §2 "Maturity Structure of Interest Rates and Spot Rates", Exhibit 3 and Example 1, pp. 209–215.</a:t>
             </a:r>
             <a:endParaRPr lang="en-US" sz="750" dirty="0"/>
           </a:p>
@@ -16546,7 +18510,7 @@
       </p:sp>
       <p:sp>
         <p:nvSpPr>
-          <p:cNvPr id="8" name="Text 6"/>
+          <p:cNvPr id="9" name="Text 7"/>
           <p:cNvSpPr txBox="1"/>
           <p:nvPr/>
         </p:nvSpPr>
@@ -16580,7 +18544,7 @@
                 <a:ea typeface="Calibri" pitchFamily="34" charset="-122"/>
                 <a:cs typeface="Calibri" pitchFamily="34" charset="-120"/>
               </a:rPr>
-              <a:t>In practice, strips (stripped coupon bonds) supply direct spot observations. Elsewhere, analysts bootstrap spots from coupon bonds.</a:t>
+              <a:t>Where zero-coupon strips trade, spot rates are observed directly. Everywhere else, analysts bootstrap them out of coupon bonds.</a:t>
             </a:r>
             <a:endParaRPr lang="en-US" sz="1300" dirty="0"/>
           </a:p>
@@ -16609,15 +18573,16 @@
             <a:tbl>
               <a:tblPr/>
               <a:tblGrid>
-                <a:gridCol w="1371600"/>
-                <a:gridCol w="896112"/>
-                <a:gridCol w="896112"/>
-                <a:gridCol w="896112"/>
-                <a:gridCol w="896112"/>
-                <a:gridCol w="886968"/>
-                <a:gridCol w="886968"/>
-                <a:gridCol w="886968"/>
-                <a:gridCol w="886968"/>
+                <a:gridCol w="1280160"/>
+                <a:gridCol w="804672"/>
+                <a:gridCol w="804672"/>
+                <a:gridCol w="804672"/>
+                <a:gridCol w="804672"/>
+                <a:gridCol w="804672"/>
+                <a:gridCol w="804672"/>
+                <a:gridCol w="804672"/>
+                <a:gridCol w="804672"/>
+                <a:gridCol w="786384"/>
               </a:tblGrid>
               <a:tr h="274320">
                 <a:tc>
@@ -16788,6 +18753,56 @@
                           <a:cs typeface="Trebuchet MS" pitchFamily="34" charset="-120"/>
                         </a:rPr>
                         <a:t>3y</a:t>
+                      </a:r>
+                      <a:endParaRPr lang="en-US" sz="1100" dirty="0">
+                        <a:latin typeface="Trebuchet MS" charset="0"/>
+                        <a:ea typeface="Trebuchet MS" charset="0"/>
+                        <a:cs typeface="Trebuchet MS" charset="0"/>
+                      </a:endParaRPr>
+                    </a:p>
+                  </a:txBody>
+                  <a:tcPr marL="91440" marR="91440" marT="45720" marB="45720" anchor="ctr">
+                    <a:lnL w="0" cap="flat" cmpd="sng" algn="ctr">
+                      <a:noFill/>
+                    </a:lnL>
+                    <a:lnR w="0" cap="flat" cmpd="sng" algn="ctr">
+                      <a:noFill/>
+                    </a:lnR>
+                    <a:lnT w="6350" cap="flat" cmpd="sng" algn="ctr">
+                      <a:solidFill>
+                        <a:srgbClr val="1B2A4A"/>
+                      </a:solidFill>
+                      <a:prstDash val="solid"/>
+                      <a:round/>
+                      <a:headEnd type="none" w="med" len="med"/>
+                      <a:tailEnd type="none" w="med" len="med"/>
+                    </a:lnT>
+                    <a:lnB w="0" cap="flat" cmpd="sng" algn="ctr">
+                      <a:noFill/>
+                    </a:lnB>
+                    <a:solidFill>
+                      <a:srgbClr val="1B2A4A"/>
+                    </a:solidFill>
+                  </a:tcPr>
+                </a:tc>
+                <a:tc>
+                  <a:txBody>
+                    <a:bodyPr/>
+                    <a:lstStyle/>
+                    <a:p>
+                      <a:pPr algn="ctr" indent="0" marL="0">
+                        <a:buNone/>
+                      </a:pPr>
+                      <a:r>
+                        <a:rPr lang="en-US" sz="1100" b="1" dirty="0">
+                          <a:solidFill>
+                            <a:srgbClr val="FFFFFF"/>
+                          </a:solidFill>
+                          <a:latin typeface="Trebuchet MS" pitchFamily="34" charset="0"/>
+                          <a:ea typeface="Trebuchet MS" pitchFamily="34" charset="-122"/>
+                          <a:cs typeface="Trebuchet MS" pitchFamily="34" charset="-120"/>
+                        </a:rPr>
+                        <a:t>4y</a:t>
                       </a:r>
                       <a:endParaRPr lang="en-US" sz="1100" dirty="0">
                         <a:latin typeface="Trebuchet MS" charset="0"/>
@@ -17240,6 +19255,56 @@
                           <a:cs typeface="Consolas" pitchFamily="34" charset="-120"/>
                         </a:rPr>
                         <a:t>0.80</a:t>
+                      </a:r>
+                      <a:endParaRPr lang="en-US" sz="1100" dirty="0">
+                        <a:latin typeface="Consolas" charset="0"/>
+                        <a:ea typeface="Consolas" charset="0"/>
+                        <a:cs typeface="Consolas" charset="0"/>
+                      </a:endParaRPr>
+                    </a:p>
+                  </a:txBody>
+                  <a:tcPr marL="91440" marR="91440" marT="45720" marB="45720" anchor="ctr">
+                    <a:lnL w="0" cap="flat" cmpd="sng" algn="ctr">
+                      <a:noFill/>
+                    </a:lnL>
+                    <a:lnR w="0" cap="flat" cmpd="sng" algn="ctr">
+                      <a:noFill/>
+                    </a:lnR>
+                    <a:lnT w="0" cap="flat" cmpd="sng" algn="ctr">
+                      <a:noFill/>
+                    </a:lnT>
+                    <a:lnB w="3175" cap="flat" cmpd="sng" algn="ctr">
+                      <a:solidFill>
+                        <a:srgbClr val="D0D8E8"/>
+                      </a:solidFill>
+                      <a:prstDash val="solid"/>
+                      <a:round/>
+                      <a:headEnd type="none" w="med" len="med"/>
+                      <a:tailEnd type="none" w="med" len="med"/>
+                    </a:lnB>
+                    <a:solidFill>
+                      <a:srgbClr val="FFFFFF"/>
+                    </a:solidFill>
+                  </a:tcPr>
+                </a:tc>
+                <a:tc>
+                  <a:txBody>
+                    <a:bodyPr/>
+                    <a:lstStyle/>
+                    <a:p>
+                      <a:pPr algn="r" indent="0" marL="0">
+                        <a:buNone/>
+                      </a:pPr>
+                      <a:r>
+                        <a:rPr lang="en-US" sz="1100" dirty="0">
+                          <a:solidFill>
+                            <a:srgbClr val="334155"/>
+                          </a:solidFill>
+                          <a:latin typeface="Consolas" pitchFamily="34" charset="0"/>
+                          <a:ea typeface="Consolas" pitchFamily="34" charset="-122"/>
+                          <a:cs typeface="Consolas" pitchFamily="34" charset="-120"/>
+                        </a:rPr>
+                        <a:t>0.96</a:t>
                       </a:r>
                       <a:endParaRPr lang="en-US" sz="1100" dirty="0">
                         <a:latin typeface="Consolas" charset="0"/>
@@ -17741,6 +19806,56 @@
                           <a:ea typeface="Consolas" pitchFamily="34" charset="-122"/>
                           <a:cs typeface="Consolas" pitchFamily="34" charset="-120"/>
                         </a:rPr>
+                        <a:t>0.59</a:t>
+                      </a:r>
+                      <a:endParaRPr lang="en-US" sz="1100" dirty="0">
+                        <a:latin typeface="Consolas" charset="0"/>
+                        <a:ea typeface="Consolas" charset="0"/>
+                        <a:cs typeface="Consolas" charset="0"/>
+                      </a:endParaRPr>
+                    </a:p>
+                  </a:txBody>
+                  <a:tcPr marL="91440" marR="91440" marT="45720" marB="45720" anchor="ctr">
+                    <a:lnL w="0" cap="flat" cmpd="sng" algn="ctr">
+                      <a:noFill/>
+                    </a:lnL>
+                    <a:lnR w="0" cap="flat" cmpd="sng" algn="ctr">
+                      <a:noFill/>
+                    </a:lnR>
+                    <a:lnT w="0" cap="flat" cmpd="sng" algn="ctr">
+                      <a:noFill/>
+                    </a:lnT>
+                    <a:lnB w="3175" cap="flat" cmpd="sng" algn="ctr">
+                      <a:solidFill>
+                        <a:srgbClr val="D0D8E8"/>
+                      </a:solidFill>
+                      <a:prstDash val="solid"/>
+                      <a:round/>
+                      <a:headEnd type="none" w="med" len="med"/>
+                      <a:tailEnd type="none" w="med" len="med"/>
+                    </a:lnB>
+                    <a:solidFill>
+                      <a:srgbClr val="F5F7FA"/>
+                    </a:solidFill>
+                  </a:tcPr>
+                </a:tc>
+                <a:tc>
+                  <a:txBody>
+                    <a:bodyPr/>
+                    <a:lstStyle/>
+                    <a:p>
+                      <a:pPr algn="r" indent="0" marL="0">
+                        <a:buNone/>
+                      </a:pPr>
+                      <a:r>
+                        <a:rPr lang="en-US" sz="1100" dirty="0">
+                          <a:solidFill>
+                            <a:srgbClr val="334155"/>
+                          </a:solidFill>
+                          <a:latin typeface="Consolas" pitchFamily="34" charset="0"/>
+                          <a:ea typeface="Consolas" pitchFamily="34" charset="-122"/>
+                          <a:cs typeface="Consolas" pitchFamily="34" charset="-120"/>
+                        </a:rPr>
                         <a:t>0.81</a:t>
                       </a:r>
                       <a:endParaRPr lang="en-US" sz="1100" dirty="0">
@@ -17993,7 +20108,7 @@
                           <a:ea typeface="Calibri" pitchFamily="34" charset="-122"/>
                           <a:cs typeface="Calibri" pitchFamily="34" charset="-120"/>
                         </a:rPr>
-                        <a:t>Shape</a:t>
+                        <a:t>Slope</a:t>
                       </a:r>
                       <a:endParaRPr lang="en-US" sz="1100" dirty="0">
                         <a:latin typeface="Calibri" charset="0"/>
@@ -18393,7 +20508,57 @@
                           <a:ea typeface="Consolas" pitchFamily="34" charset="-122"/>
                           <a:cs typeface="Consolas" pitchFamily="34" charset="-120"/>
                         </a:rPr>
-                        <a:t>→</a:t>
+                        <a:t>↗</a:t>
+                      </a:r>
+                      <a:endParaRPr lang="en-US" sz="1100" dirty="0">
+                        <a:latin typeface="Consolas" charset="0"/>
+                        <a:ea typeface="Consolas" charset="0"/>
+                        <a:cs typeface="Consolas" charset="0"/>
+                      </a:endParaRPr>
+                    </a:p>
+                  </a:txBody>
+                  <a:tcPr marL="91440" marR="91440" marT="45720" marB="45720" anchor="ctr">
+                    <a:lnL w="0" cap="flat" cmpd="sng" algn="ctr">
+                      <a:noFill/>
+                    </a:lnL>
+                    <a:lnR w="0" cap="flat" cmpd="sng" algn="ctr">
+                      <a:noFill/>
+                    </a:lnR>
+                    <a:lnT w="0" cap="flat" cmpd="sng" algn="ctr">
+                      <a:noFill/>
+                    </a:lnT>
+                    <a:lnB w="3175" cap="flat" cmpd="sng" algn="ctr">
+                      <a:solidFill>
+                        <a:srgbClr val="D0D8E8"/>
+                      </a:solidFill>
+                      <a:prstDash val="solid"/>
+                      <a:round/>
+                      <a:headEnd type="none" w="med" len="med"/>
+                      <a:tailEnd type="none" w="med" len="med"/>
+                    </a:lnB>
+                    <a:solidFill>
+                      <a:srgbClr val="FFFFFF"/>
+                    </a:solidFill>
+                  </a:tcPr>
+                </a:tc>
+                <a:tc>
+                  <a:txBody>
+                    <a:bodyPr/>
+                    <a:lstStyle/>
+                    <a:p>
+                      <a:pPr algn="ctr" indent="0" marL="0">
+                        <a:buNone/>
+                      </a:pPr>
+                      <a:r>
+                        <a:rPr lang="en-US" sz="1100" dirty="0">
+                          <a:solidFill>
+                            <a:srgbClr val="334155"/>
+                          </a:solidFill>
+                          <a:latin typeface="Consolas" pitchFamily="34" charset="0"/>
+                          <a:ea typeface="Consolas" pitchFamily="34" charset="-122"/>
+                          <a:cs typeface="Consolas" pitchFamily="34" charset="-120"/>
+                        </a:rPr>
+                        <a:t>↗</a:t>
                       </a:r>
                       <a:endParaRPr lang="en-US" sz="1100" dirty="0">
                         <a:latin typeface="Consolas" charset="0"/>
@@ -18433,14 +20598,14 @@
       </p:graphicFrame>
       <p:sp>
         <p:nvSpPr>
-          <p:cNvPr id="10" name="Shape 7"/>
+          <p:cNvPr id="11" name="Shape 8"/>
           <p:cNvSpPr/>
           <p:nvPr/>
         </p:nvSpPr>
         <p:spPr>
           <a:xfrm>
-            <a:off x="320040" y="2606040"/>
-            <a:ext cx="4160520" cy="1691640"/>
+            <a:off x="320040" y="2395728"/>
+            <a:ext cx="2743200" cy="1508760"/>
           </a:xfrm>
           <a:prstGeom prst="rect">
             <a:avLst/>
@@ -18453,14 +20618,14 @@
       </p:sp>
       <p:sp>
         <p:nvSpPr>
-          <p:cNvPr id="11" name="Shape 8"/>
+          <p:cNvPr id="12" name="Shape 9"/>
           <p:cNvSpPr/>
           <p:nvPr/>
         </p:nvSpPr>
         <p:spPr>
           <a:xfrm>
-            <a:off x="320040" y="2606040"/>
-            <a:ext cx="73152" cy="1691640"/>
+            <a:off x="320040" y="2395728"/>
+            <a:ext cx="73152" cy="1508760"/>
           </a:xfrm>
           <a:prstGeom prst="rect">
             <a:avLst/>
@@ -18473,14 +20638,14 @@
       </p:sp>
       <p:sp>
         <p:nvSpPr>
-          <p:cNvPr id="12" name="Text 9"/>
+          <p:cNvPr id="13" name="Text 10"/>
           <p:cNvSpPr txBox="1"/>
           <p:nvPr/>
         </p:nvSpPr>
         <p:spPr>
           <a:xfrm>
-            <a:off x="457200" y="2651760"/>
-            <a:ext cx="3931920" cy="256032"/>
+            <a:off x="457200" y="2441448"/>
+            <a:ext cx="2514600" cy="256032"/>
           </a:xfrm>
           <a:prstGeom prst="rect">
             <a:avLst/>
@@ -18507,7 +20672,7 @@
                 <a:ea typeface="Trebuchet MS" pitchFamily="34" charset="-122"/>
                 <a:cs typeface="Trebuchet MS" pitchFamily="34" charset="-120"/>
               </a:rPr>
-              <a:t>UPWARD-SLOPING (NORMAL)</a:t>
+              <a:t>UPWARD-SLOPING</a:t>
             </a:r>
             <a:endParaRPr lang="en-US" sz="1100" dirty="0"/>
           </a:p>
@@ -18515,14 +20680,14 @@
       </p:sp>
       <p:sp>
         <p:nvSpPr>
-          <p:cNvPr id="13" name="Text 10"/>
+          <p:cNvPr id="14" name="Text 11"/>
           <p:cNvSpPr txBox="1"/>
           <p:nvPr/>
         </p:nvSpPr>
         <p:spPr>
           <a:xfrm>
-            <a:off x="457200" y="2926080"/>
-            <a:ext cx="3931920" cy="1325880"/>
+            <a:off x="457200" y="2715768"/>
+            <a:ext cx="2514600" cy="1143000"/>
           </a:xfrm>
           <a:prstGeom prst="rect">
             <a:avLst/>
@@ -18549,7 +20714,7 @@
                 <a:ea typeface="Calibri" pitchFamily="34" charset="-122"/>
                 <a:cs typeface="Calibri" pitchFamily="34" charset="-120"/>
               </a:rPr>
-              <a:t>Long rates &gt; short rates. Positive maturity premium. Typical in risk-on, moderate-inflation regimes.</a:t>
+              <a:t>Long rates above short rates. A positive maturity premium and no expectation of falling short rates. The usual shape — both curves above.</a:t>
             </a:r>
             <a:endParaRPr lang="en-US" sz="1200" dirty="0"/>
           </a:p>
@@ -18557,14 +20722,14 @@
       </p:sp>
       <p:sp>
         <p:nvSpPr>
-          <p:cNvPr id="14" name="Shape 11"/>
+          <p:cNvPr id="15" name="Shape 12"/>
           <p:cNvSpPr/>
           <p:nvPr/>
         </p:nvSpPr>
         <p:spPr>
           <a:xfrm>
-            <a:off x="4663440" y="2606040"/>
-            <a:ext cx="4160520" cy="1691640"/>
+            <a:off x="3200400" y="2395728"/>
+            <a:ext cx="2743200" cy="1508760"/>
           </a:xfrm>
           <a:prstGeom prst="rect">
             <a:avLst/>
@@ -18577,14 +20742,14 @@
       </p:sp>
       <p:sp>
         <p:nvSpPr>
-          <p:cNvPr id="15" name="Shape 12"/>
+          <p:cNvPr id="16" name="Shape 13"/>
           <p:cNvSpPr/>
           <p:nvPr/>
         </p:nvSpPr>
         <p:spPr>
           <a:xfrm>
-            <a:off x="4663440" y="2606040"/>
-            <a:ext cx="73152" cy="1691640"/>
+            <a:off x="3200400" y="2395728"/>
+            <a:ext cx="73152" cy="1508760"/>
           </a:xfrm>
           <a:prstGeom prst="rect">
             <a:avLst/>
@@ -18597,14 +20762,14 @@
       </p:sp>
       <p:sp>
         <p:nvSpPr>
-          <p:cNvPr id="16" name="Text 13"/>
+          <p:cNvPr id="17" name="Text 14"/>
           <p:cNvSpPr txBox="1"/>
           <p:nvPr/>
         </p:nvSpPr>
         <p:spPr>
           <a:xfrm>
-            <a:off x="4800600" y="2651760"/>
-            <a:ext cx="3931920" cy="256032"/>
+            <a:off x="3337560" y="2441448"/>
+            <a:ext cx="2514600" cy="256032"/>
           </a:xfrm>
           <a:prstGeom prst="rect">
             <a:avLst/>
@@ -18631,7 +20796,7 @@
                 <a:ea typeface="Trebuchet MS" pitchFamily="34" charset="-122"/>
                 <a:cs typeface="Trebuchet MS" pitchFamily="34" charset="-120"/>
               </a:rPr>
-              <a:t>DOWNWARD-SLOPING (INVERTED)</a:t>
+              <a:t>FLAT</a:t>
             </a:r>
             <a:endParaRPr lang="en-US" sz="1100" dirty="0"/>
           </a:p>
@@ -18639,14 +20804,14 @@
       </p:sp>
       <p:sp>
         <p:nvSpPr>
-          <p:cNvPr id="17" name="Text 14"/>
+          <p:cNvPr id="18" name="Text 15"/>
           <p:cNvSpPr txBox="1"/>
           <p:nvPr/>
         </p:nvSpPr>
         <p:spPr>
           <a:xfrm>
-            <a:off x="4800600" y="2926080"/>
-            <a:ext cx="3931920" cy="1325880"/>
+            <a:off x="3337560" y="2715768"/>
+            <a:ext cx="2514600" cy="1143000"/>
           </a:xfrm>
           <a:prstGeom prst="rect">
             <a:avLst/>
@@ -18673,7 +20838,131 @@
                 <a:ea typeface="Calibri" pitchFamily="34" charset="-122"/>
                 <a:cs typeface="Calibri" pitchFamily="34" charset="-120"/>
               </a:rPr>
-              <a:t>Long rates &lt; short rates. Usually precedes recession — market expects rate cuts ahead.</a:t>
+              <a:t>Every maturity at the same rate. Nothing is being expected — and the par and forward curves collapse onto the spot curve.</a:t>
+            </a:r>
+            <a:endParaRPr lang="en-US" sz="1200" dirty="0"/>
+          </a:p>
+        </p:txBody>
+      </p:sp>
+      <p:sp>
+        <p:nvSpPr>
+          <p:cNvPr id="19" name="Shape 16"/>
+          <p:cNvSpPr/>
+          <p:nvPr/>
+        </p:nvSpPr>
+        <p:spPr>
+          <a:xfrm>
+            <a:off x="6080760" y="2395728"/>
+            <a:ext cx="2743200" cy="1508760"/>
+          </a:xfrm>
+          <a:prstGeom prst="rect">
+            <a:avLst/>
+          </a:prstGeom>
+          <a:solidFill>
+            <a:srgbClr val="FEF0E7"/>
+          </a:solidFill>
+          <a:ln/>
+        </p:spPr>
+      </p:sp>
+      <p:sp>
+        <p:nvSpPr>
+          <p:cNvPr id="20" name="Shape 17"/>
+          <p:cNvSpPr/>
+          <p:nvPr/>
+        </p:nvSpPr>
+        <p:spPr>
+          <a:xfrm>
+            <a:off x="6080760" y="2395728"/>
+            <a:ext cx="73152" cy="1508760"/>
+          </a:xfrm>
+          <a:prstGeom prst="rect">
+            <a:avLst/>
+          </a:prstGeom>
+          <a:solidFill>
+            <a:srgbClr val="E8600A"/>
+          </a:solidFill>
+          <a:ln/>
+        </p:spPr>
+      </p:sp>
+      <p:sp>
+        <p:nvSpPr>
+          <p:cNvPr id="21" name="Text 18"/>
+          <p:cNvSpPr txBox="1"/>
+          <p:nvPr/>
+        </p:nvSpPr>
+        <p:spPr>
+          <a:xfrm>
+            <a:off x="6217920" y="2441448"/>
+            <a:ext cx="2514600" cy="256032"/>
+          </a:xfrm>
+          <a:prstGeom prst="rect">
+            <a:avLst/>
+          </a:prstGeom>
+          <a:noFill/>
+          <a:ln/>
+        </p:spPr>
+        <p:txBody>
+          <a:bodyPr wrap="square" lIns="508" tIns="508" rIns="508" bIns="508" rtlCol="0" anchor="ctr">
+            <a:normAutofit/>
+            <a:spAutoFit/>
+          </a:bodyPr>
+          <a:lstStyle/>
+          <a:p>
+            <a:pPr algn="l" indent="0" marL="0">
+              <a:buNone/>
+            </a:pPr>
+            <a:r>
+              <a:rPr lang="en-US" sz="1100" b="1" spc="400" kern="0" dirty="0">
+                <a:solidFill>
+                  <a:srgbClr val="E8600A"/>
+                </a:solidFill>
+                <a:latin typeface="Trebuchet MS" pitchFamily="34" charset="0"/>
+                <a:ea typeface="Trebuchet MS" pitchFamily="34" charset="-122"/>
+                <a:cs typeface="Trebuchet MS" pitchFamily="34" charset="-120"/>
+              </a:rPr>
+              <a:t>INVERTED</a:t>
+            </a:r>
+            <a:endParaRPr lang="en-US" sz="1100" dirty="0"/>
+          </a:p>
+        </p:txBody>
+      </p:sp>
+      <p:sp>
+        <p:nvSpPr>
+          <p:cNvPr id="22" name="Text 19"/>
+          <p:cNvSpPr txBox="1"/>
+          <p:nvPr/>
+        </p:nvSpPr>
+        <p:spPr>
+          <a:xfrm>
+            <a:off x="6217920" y="2715768"/>
+            <a:ext cx="2514600" cy="1143000"/>
+          </a:xfrm>
+          <a:prstGeom prst="rect">
+            <a:avLst/>
+          </a:prstGeom>
+          <a:noFill/>
+          <a:ln/>
+        </p:spPr>
+        <p:txBody>
+          <a:bodyPr wrap="square" lIns="508" tIns="508" rIns="508" bIns="508" rtlCol="0" anchor="t">
+            <a:normAutofit/>
+            <a:spAutoFit/>
+          </a:bodyPr>
+          <a:lstStyle/>
+          <a:p>
+            <a:pPr algn="l" indent="0" marL="0">
+              <a:buNone/>
+            </a:pPr>
+            <a:r>
+              <a:rPr lang="en-US" sz="1200" dirty="0">
+                <a:solidFill>
+                  <a:srgbClr val="334155"/>
+                </a:solidFill>
+                <a:latin typeface="Calibri" pitchFamily="34" charset="0"/>
+                <a:ea typeface="Calibri" pitchFamily="34" charset="-122"/>
+                <a:cs typeface="Calibri" pitchFamily="34" charset="-120"/>
+              </a:rPr>
+              <a:t>Long rates below short rates. The market is pricing cuts — historically a recession signal, always a financing-window signal.</a:t>
             </a:r>
             <a:endParaRPr lang="en-US" sz="1200" dirty="0"/>
           </a:p>
@@ -18780,7 +21069,7 @@
                 <a:ea typeface="Trebuchet MS" pitchFamily="34" charset="-122"/>
                 <a:cs typeface="Trebuchet MS" pitchFamily="34" charset="-120"/>
               </a:rPr>
-              <a:t>A bond's no-arbitrage price is the sum of each cash flow discounted at its OWN spot rate — not at a single YTM</a:t>
+              <a:t>A bond's no-arbitrage price is each cash flow discounted at its OWN spot rate — not all of them at a single YTM</a:t>
             </a:r>
             <a:endParaRPr lang="en-US" sz="1700" dirty="0"/>
           </a:p>
@@ -18884,7 +21173,7 @@
                 <a:ea typeface="Calibri" pitchFamily="34" charset="-122"/>
                 <a:cs typeface="Calibri" pitchFamily="34" charset="-120"/>
               </a:rPr>
-              <a:t>Source: CFA Institute, Curriculum Vol 6, LM 9, §2 Bond Pricing with Spot Rates, pp. 213–216.</a:t>
+              <a:t>Source: CFA Institute, Curriculum Vol 6, LM 9, §2 "Bond Pricing Using Spot Rates", Equation 1, pp. 212–213.</a:t>
             </a:r>
             <a:endParaRPr lang="en-US" sz="750" dirty="0"/>
           </a:p>
@@ -18926,7 +21215,7 @@
                 <a:ea typeface="Calibri" pitchFamily="34" charset="-122"/>
                 <a:cs typeface="Calibri" pitchFamily="34" charset="-120"/>
               </a:rPr>
-              <a:t>Using a flat YTM mis-allocates the discount factor across the timeline. Arbitrage arguments force prices to equal the spot-rate PV.</a:t>
+              <a:t>A one-year cash flow and a ten-year cash flow are different assets. Pricing them at the same rate is a convenience, not a valuation.</a:t>
             </a:r>
             <a:endParaRPr lang="en-US" sz="1300" dirty="0"/>
           </a:p>
@@ -18988,7 +21277,24 @@
                 <a:ea typeface="Consolas" pitchFamily="34" charset="-122"/>
                 <a:cs typeface="Consolas" pitchFamily="34" charset="-120"/>
               </a:rPr>
-              <a:t>P  =  PMT₁ / (1 + Z₁)¹  +  PMT₂ / (1 + Z₂)²  +  …  +  (PMTₙ + FV) / (1 + Zₙ)ⁿ</a:t>
+              <a:t>PV  =  PMT / (1 + Z₁)¹  +  PMT / (1 + Z₂)²  +  …</a:t>
+            </a:r>
+            <a:endParaRPr lang="en-US" sz="1800" dirty="0"/>
+          </a:p>
+          <a:p>
+            <a:pPr algn="ctr" indent="0" marL="0">
+              <a:buNone/>
+            </a:pPr>
+            <a:r>
+              <a:rPr lang="en-US" sz="1800" b="1" dirty="0">
+                <a:solidFill>
+                  <a:srgbClr val="FFFFFF"/>
+                </a:solidFill>
+                <a:latin typeface="Consolas" pitchFamily="34" charset="0"/>
+                <a:ea typeface="Consolas" pitchFamily="34" charset="-122"/>
+                <a:cs typeface="Consolas" pitchFamily="34" charset="-120"/>
+              </a:rPr>
+              <a:t>+  (PMT + FV) / (1 + Zₙ)ⁿ</a:t>
             </a:r>
             <a:endParaRPr lang="en-US" sz="1800" dirty="0"/>
           </a:p>
@@ -19030,7 +21336,7 @@
                 <a:ea typeface="Calibri" pitchFamily="34" charset="-122"/>
                 <a:cs typeface="Calibri" pitchFamily="34" charset="-120"/>
               </a:rPr>
-              <a:t>where: Zₜ = spot rate for maturity t. For corporate issuers, add a credit spread (Z-spread) uniformly to every spot.</a:t>
+              <a:t>where: Zₜ = the spot rate for maturity t. For an issuer with credit risk, add a spread to every spot — which is precisely the Z-spread from §2.</a:t>
             </a:r>
             <a:endParaRPr lang="en-US" sz="1100" dirty="0"/>
           </a:p>
@@ -19112,7 +21418,7 @@
                 <a:ea typeface="Trebuchet MS" pitchFamily="34" charset="-122"/>
                 <a:cs typeface="Trebuchet MS" pitchFamily="34" charset="-120"/>
               </a:rPr>
-              <a:t>SPOT-PRICING WINS</a:t>
+              <a:t>WHY NO-ARBITRAGE</a:t>
             </a:r>
             <a:endParaRPr lang="en-US" sz="1100" dirty="0"/>
           </a:p>
@@ -19154,7 +21460,7 @@
                 <a:ea typeface="Calibri" pitchFamily="34" charset="-122"/>
                 <a:cs typeface="Calibri" pitchFamily="34" charset="-120"/>
               </a:rPr>
-              <a:t>No-arbitrage. A dealer stripping coupons and pricing each at its own spot must equal whole-bond price — else a riskless profit exists.</a:t>
+              <a:t>A dealer can strip the coupons and sell each as a separate zero. If the whole bond is worth less than the sum of its stripped parts, you buy the bond, strip it, and bank a riskless profit.</a:t>
             </a:r>
             <a:endParaRPr lang="en-US" sz="1200" dirty="0"/>
           </a:p>
@@ -19236,7 +21542,7 @@
                 <a:ea typeface="Trebuchet MS" pitchFamily="34" charset="-122"/>
                 <a:cs typeface="Trebuchet MS" pitchFamily="34" charset="-120"/>
               </a:rPr>
-              <a:t>YTM STILL USEFUL</a:t>
+              <a:t>YTM IS STILL USEFUL</a:t>
             </a:r>
             <a:endParaRPr lang="en-US" sz="1100" dirty="0"/>
           </a:p>
@@ -19278,7 +21584,7 @@
                 <a:ea typeface="Calibri" pitchFamily="34" charset="-122"/>
                 <a:cs typeface="Calibri" pitchFamily="34" charset="-120"/>
               </a:rPr>
-              <a:t>YTM compresses the curve into one number — convenient for quoting, benchmarking, and spread measures. Just know that behind it lives the spot curve.</a:t>
+              <a:t>It compresses the whole curve into one quotable number, which is what makes bonds comparable and spreads computable. Just remember a curve is hiding behind it.</a:t>
             </a:r>
             <a:endParaRPr lang="en-US" sz="1200" dirty="0"/>
           </a:p>
@@ -19377,7 +21683,7 @@
               <a:buNone/>
             </a:pPr>
             <a:r>
-              <a:rPr lang="en-US" sz="1700" b="1" dirty="0">
+              <a:rPr lang="en-US" sz="1600" b="1" dirty="0">
                 <a:solidFill>
                   <a:srgbClr val="FFFFFF"/>
                 </a:solidFill>
@@ -19385,9 +21691,9 @@
                 <a:ea typeface="Trebuchet MS" pitchFamily="34" charset="-122"/>
                 <a:cs typeface="Trebuchet MS" pitchFamily="34" charset="-120"/>
               </a:rPr>
-              <a:t>Worked — a 3-year 5% annual bond priced against spot rates 2% / 3% / 4% trades at 102.96 with an implied YTM of 3.94%</a:t>
-            </a:r>
-            <a:endParaRPr lang="en-US" sz="1700" dirty="0"/>
+              <a:t>Worked — a three-year 5% bond priced against spots of 2% / 3% / 4% is 102.960, and the single YTM that reproduces that price is 3.935%</a:t>
+            </a:r>
+            <a:endParaRPr lang="en-US" sz="1600" dirty="0"/>
           </a:p>
         </p:txBody>
       </p:sp>
@@ -19489,7 +21795,7 @@
                 <a:ea typeface="Calibri" pitchFamily="34" charset="-122"/>
                 <a:cs typeface="Calibri" pitchFamily="34" charset="-120"/>
               </a:rPr>
-              <a:t>Source: CFA Institute, Curriculum Vol 6, LM 9, §2 numerical illustration, pp. 213–214.</a:t>
+              <a:t>Source: CFA Institute, Curriculum Vol 6, LM 9, §2 "Bond Pricing Using Spot Rates", numerical illustration, p. 213.</a:t>
             </a:r>
             <a:endParaRPr lang="en-US" sz="750" dirty="0"/>
           </a:p>
@@ -19531,7 +21837,7 @@
                 <a:ea typeface="Calibri" pitchFamily="34" charset="-122"/>
                 <a:cs typeface="Calibri" pitchFamily="34" charset="-120"/>
               </a:rPr>
-              <a:t>YTM ≠ 5-year spot. It is a weighted mix of all three spots — mostly driven by the 3-year because that's where most of the PV sits.</a:t>
+              <a:t>The YTM is not an average of 2, 3 and 4. It is the PV-weighted blend — dominated by year three, where 91% of the present value sits.</a:t>
             </a:r>
             <a:endParaRPr lang="en-US" sz="1300" dirty="0"/>
           </a:p>
@@ -19546,7 +21852,7 @@
         <p:spPr>
           <a:xfrm>
             <a:off x="320040" y="1143000"/>
-            <a:ext cx="8503920" cy="3154680"/>
+            <a:ext cx="8503920" cy="2697480"/>
           </a:xfrm>
           <a:prstGeom prst="rect">
             <a:avLst/>
@@ -19598,7 +21904,7 @@
                 <a:ea typeface="Trebuchet MS" pitchFamily="34" charset="-122"/>
                 <a:cs typeface="Trebuchet MS" pitchFamily="34" charset="-120"/>
               </a:rPr>
-              <a:t>3-YEAR 5% ANNUAL COUPON BOND · PAR 100</a:t>
+              <a:t>THREE-YEAR 5% ANNUAL-COUPON BOND · PAR 100 · ANNUAL COMPOUNDING</a:t>
             </a:r>
             <a:endParaRPr lang="en-US" sz="1100" dirty="0"/>
           </a:p>
@@ -19640,7 +21946,7 @@
                 <a:ea typeface="Calibri" pitchFamily="34" charset="-122"/>
                 <a:cs typeface="Calibri" pitchFamily="34" charset="-120"/>
               </a:rPr>
-              <a:t>Spot curve: Z₁ = 2%, Z₂ = 3%, Z₃ = 4%. Coupons: 5, 5, 105 at end of years 1-3. Compute price and YTM.</a:t>
+              <a:t>Spot curve: Z₁ = 2%, Z₂ = 3%, Z₃ = 4%. Cash flows 5, 5, 105. Price it on the spots, then back out the equivalent YTM.</a:t>
             </a:r>
             <a:endParaRPr lang="en-US" sz="1200" dirty="0"/>
           </a:p>
@@ -19655,7 +21961,7 @@
         <p:spPr>
           <a:xfrm>
             <a:off x="457200" y="1993392"/>
-            <a:ext cx="8229600" cy="1792224"/>
+            <a:ext cx="8229600" cy="1335024"/>
           </a:xfrm>
           <a:prstGeom prst="rect">
             <a:avLst/>
@@ -19702,7 +22008,7 @@
                 <a:ea typeface="Calibri" pitchFamily="34" charset="-122"/>
                 <a:cs typeface="Calibri" pitchFamily="34" charset="-120"/>
               </a:rPr>
-              <a:t>PV of C₁: 5 / (1.02)¹  =  4.902
+              <a:t>Spot pricing:   5/(1.02)¹ = 4.902  ·  5/(1.03)² = 4.713  ·  105/(1.04)³ = 93.345   →   Price = 102.960
 </a:t>
             </a:r>
             <a:pPr indent="0" marL="0">
@@ -19737,7 +22043,7 @@
                 <a:ea typeface="Calibri" pitchFamily="34" charset="-122"/>
                 <a:cs typeface="Calibri" pitchFamily="34" charset="-120"/>
               </a:rPr>
-              <a:t>PV of C₂: 5 / (1.03)²  =  4.713
+              <a:t>The bond is at a premium: the 5% coupon beats every spot rate on the curve
 </a:t>
             </a:r>
             <a:pPr indent="0" marL="0">
@@ -19772,7 +22078,7 @@
                 <a:ea typeface="Calibri" pitchFamily="34" charset="-122"/>
                 <a:cs typeface="Calibri" pitchFamily="34" charset="-120"/>
               </a:rPr>
-              <a:t>PV of C₃+Face: 105 / (1.04)³  =  93.345
+              <a:t>Now solve one rate: 102.960 = 5/(1+r)¹ + 5/(1+r)² + 105/(1+r)³   →   r = 3.935%
 </a:t>
             </a:r>
             <a:pPr indent="0" marL="0">
@@ -19807,7 +22113,7 @@
                 <a:ea typeface="Calibri" pitchFamily="34" charset="-122"/>
                 <a:cs typeface="Calibri" pitchFamily="34" charset="-120"/>
               </a:rPr>
-              <a:t>Price = 4.902 + 4.713 + 93.345 = 102.960  (premium — coupon 5% beats every spot)
+              <a:t>Re-price at that single YTM: 4.811 + 4.629 + 93.520 = 102.960 — the same total
 </a:t>
             </a:r>
             <a:pPr indent="0" marL="0">
@@ -19842,7 +22148,7 @@
                 <a:ea typeface="Calibri" pitchFamily="34" charset="-122"/>
                 <a:cs typeface="Calibri" pitchFamily="34" charset="-120"/>
               </a:rPr>
-              <a:t>Solve for YTM: 102.96 = 5/(1+r) + 5/(1+r)² + 105/(1+r)³  →  r = 3.935%</a:t>
+              <a:t>But look at the pieces: year 1 is 4.902 on spots vs 4.811 on YTM; year 3 is 93.345 vs 93.520</a:t>
             </a:r>
             <a:endParaRPr lang="en-US" sz="1200" dirty="0"/>
           </a:p>
@@ -19856,7 +22162,7 @@
         </p:nvSpPr>
         <p:spPr>
           <a:xfrm>
-            <a:off x="411480" y="3858768"/>
+            <a:off x="411480" y="3401568"/>
             <a:ext cx="8321040" cy="365760"/>
           </a:xfrm>
           <a:prstGeom prst="rect">
@@ -19876,7 +22182,7 @@
         </p:nvSpPr>
         <p:spPr>
           <a:xfrm>
-            <a:off x="457200" y="3858768"/>
+            <a:off x="457200" y="3401568"/>
             <a:ext cx="8229600" cy="365760"/>
           </a:xfrm>
           <a:prstGeom prst="rect">
@@ -19904,7 +22210,7 @@
                 <a:ea typeface="Consolas" pitchFamily="34" charset="-122"/>
                 <a:cs typeface="Consolas" pitchFamily="34" charset="-120"/>
               </a:rPr>
-              <a:t>Price  =  102.96   ·   Implied YTM  =  3.935%   (between Z₁ 2% and Z₃ 4%, closest to 3-year spot because the final CF dominates)</a:t>
+              <a:t>Price 102.960 either way   ·   YTM 3.935%   ·   same total, different cash-flow PVs</a:t>
             </a:r>
             <a:endParaRPr lang="en-US" sz="1150" dirty="0"/>
           </a:p>
@@ -20003,7 +22309,7 @@
               <a:buNone/>
             </a:pPr>
             <a:r>
-              <a:rPr lang="en-US" sz="1700" b="1" dirty="0">
+              <a:rPr lang="en-US" sz="1600" b="1" dirty="0">
                 <a:solidFill>
                   <a:srgbClr val="FFFFFF"/>
                 </a:solidFill>
@@ -20011,9 +22317,9 @@
                 <a:ea typeface="Trebuchet MS" pitchFamily="34" charset="-122"/>
                 <a:cs typeface="Trebuchet MS" pitchFamily="34" charset="-120"/>
               </a:rPr>
-              <a:t>A par rate is the coupon that makes a bond price at 100 against the spot curve — the core of the published Treasury yield curve</a:t>
-            </a:r>
-            <a:endParaRPr lang="en-US" sz="1700" dirty="0"/>
+              <a:t>A par rate is the coupon that makes a bond price at exactly 100 against the spot curve — and it is what the published Treasury curve actually shows</a:t>
+            </a:r>
+            <a:endParaRPr lang="en-US" sz="1600" dirty="0"/>
           </a:p>
         </p:txBody>
       </p:sp>
@@ -20115,7 +22421,7 @@
                 <a:ea typeface="Calibri" pitchFamily="34" charset="-122"/>
                 <a:cs typeface="Calibri" pitchFamily="34" charset="-120"/>
               </a:rPr>
-              <a:t>Source: CFA Institute, Curriculum Vol 6, LM 9, §3 "Par Rates from Spot Rates", pp. 217–218.</a:t>
+              <a:t>Source: CFA Institute, Curriculum Vol 6, LM 9, §3 "Par Rates from Spot Rates", Equation 2, pp. 217–218.</a:t>
             </a:r>
             <a:endParaRPr lang="en-US" sz="750" dirty="0"/>
           </a:p>
@@ -20157,7 +22463,7 @@
                 <a:ea typeface="Calibri" pitchFamily="34" charset="-122"/>
                 <a:cs typeface="Calibri" pitchFamily="34" charset="-120"/>
               </a:rPr>
-              <a:t>US Treasury publishes par rates each day because actual on-the-run bonds rarely price exactly at par — par rates are the clean hypothetical.</a:t>
+              <a:t>Par rates are used for term-structure work because they neutralise the tax, coupon and trading distortions that come with bonds priced away from 100.</a:t>
             </a:r>
             <a:endParaRPr lang="en-US" sz="1300" dirty="0"/>
           </a:p>
@@ -20219,7 +22525,24 @@
                 <a:ea typeface="Consolas" pitchFamily="34" charset="-122"/>
                 <a:cs typeface="Consolas" pitchFamily="34" charset="-120"/>
               </a:rPr>
-              <a:t>100  =  Σₜ  PMT / (1 + Zₜ)ᵗ   +   (PMT + 100) / (1 + Zₙ)ⁿ      →   solve for PMT</a:t>
+              <a:t>100  =  PMT / (1 + z₁)¹  +  …  +  (PMT + 100) / (1 + zₙ)ⁿ</a:t>
+            </a:r>
+            <a:endParaRPr lang="en-US" sz="1800" dirty="0"/>
+          </a:p>
+          <a:p>
+            <a:pPr algn="ctr" indent="0" marL="0">
+              <a:buNone/>
+            </a:pPr>
+            <a:r>
+              <a:rPr lang="en-US" sz="1800" b="1" dirty="0">
+                <a:solidFill>
+                  <a:srgbClr val="FFFFFF"/>
+                </a:solidFill>
+                <a:latin typeface="Consolas" pitchFamily="34" charset="0"/>
+                <a:ea typeface="Consolas" pitchFamily="34" charset="-122"/>
+                <a:cs typeface="Consolas" pitchFamily="34" charset="-120"/>
+              </a:rPr>
+              <a:t>→   solve for PMT</a:t>
             </a:r>
             <a:endParaRPr lang="en-US" sz="1800" dirty="0"/>
           </a:p>
@@ -20261,7 +22584,7 @@
                 <a:ea typeface="Calibri" pitchFamily="34" charset="-122"/>
                 <a:cs typeface="Calibri" pitchFamily="34" charset="-120"/>
               </a:rPr>
-              <a:t>where: Solve the PV equation for PMT given the spot curve. The resulting PMT / 100 is the par rate per period.</a:t>
+              <a:t>where: Set price = face = 100 and solve for the coupon. That PMT divided by 100 is the par rate — and it is also that hypothetical bond's YTM.</a:t>
             </a:r>
             <a:endParaRPr lang="en-US" sz="1100" dirty="0"/>
           </a:p>
@@ -20385,7 +22708,7 @@
                 <a:ea typeface="Calibri" pitchFamily="34" charset="-122"/>
                 <a:cs typeface="Calibri" pitchFamily="34" charset="-120"/>
               </a:rPr>
-              <a:t>YTM depends on a specific bond's coupon; par rate is the SINGLE coupon that produces a par-priced bond. Par rate is purely about the curve.</a:t>
+              <a:t>A YTM belongs to a specific bond with a specific coupon. A par rate belongs to the CURVE — it is the coupon a new bond would have to carry to price at 100 today. On-the-run yields are close to par rates but not equal to them.</a:t>
             </a:r>
             <a:endParaRPr lang="en-US" sz="1200" dirty="0"/>
           </a:p>
@@ -20509,7 +22832,7 @@
                 <a:ea typeface="Calibri" pitchFamily="34" charset="-122"/>
                 <a:cs typeface="Calibri" pitchFamily="34" charset="-120"/>
               </a:rPr>
-              <a:t>Upward curve: par rate &lt; spot rate (averaging across earlier, lower spots).</a:t>
+              <a:t>Upward-sloping spot curve → par curve sits BELOW it.</a:t>
             </a:r>
             <a:endParaRPr lang="en-US" sz="1200" dirty="0"/>
           </a:p>
@@ -20526,7 +22849,7 @@
                 <a:ea typeface="Calibri" pitchFamily="34" charset="-122"/>
                 <a:cs typeface="Calibri" pitchFamily="34" charset="-120"/>
               </a:rPr>
-              <a:t>Downward curve: par rate &gt; spot rate.</a:t>
+              <a:t>Flat spot curve → par curve equals it.</a:t>
             </a:r>
             <a:endParaRPr lang="en-US" sz="1200" dirty="0"/>
           </a:p>
@@ -20543,7 +22866,24 @@
                 <a:ea typeface="Calibri" pitchFamily="34" charset="-122"/>
                 <a:cs typeface="Calibri" pitchFamily="34" charset="-120"/>
               </a:rPr>
-              <a:t>Flat curve: par rate = spot rate.</a:t>
+              <a:t>Downward-sloping spot curve → par curve sits ABOVE it.</a:t>
+            </a:r>
+            <a:endParaRPr lang="en-US" sz="1200" dirty="0"/>
+          </a:p>
+          <a:p>
+            <a:pPr algn="l" indent="0" marL="0">
+              <a:buNone/>
+            </a:pPr>
+            <a:r>
+              <a:rPr lang="en-US" sz="1200" dirty="0">
+                <a:solidFill>
+                  <a:srgbClr val="334155"/>
+                </a:solidFill>
+                <a:latin typeface="Calibri" pitchFamily="34" charset="0"/>
+                <a:ea typeface="Calibri" pitchFamily="34" charset="-122"/>
+                <a:cs typeface="Calibri" pitchFamily="34" charset="-120"/>
+              </a:rPr>
+              <a:t>(CFA Exhibit 8, p. 227.)</a:t>
             </a:r>
             <a:endParaRPr lang="en-US" sz="1200" dirty="0"/>
           </a:p>
@@ -20642,7 +22982,7 @@
               <a:buNone/>
             </a:pPr>
             <a:r>
-              <a:rPr lang="en-US" sz="1800" b="1" dirty="0">
+              <a:rPr lang="en-US" sz="1700" b="1" dirty="0">
                 <a:solidFill>
                   <a:srgbClr val="FFFFFF"/>
                 </a:solidFill>
@@ -20650,9 +22990,9 @@
                 <a:ea typeface="Trebuchet MS" pitchFamily="34" charset="-122"/>
                 <a:cs typeface="Trebuchet MS" pitchFamily="34" charset="-120"/>
               </a:rPr>
-              <a:t>Worked — bootstrap 2-year and 3-year par rates from spot rates 5.263% / 5.616% / 6.359%</a:t>
-            </a:r>
-            <a:endParaRPr lang="en-US" sz="1800" dirty="0"/>
+              <a:t>Worked — spots of 5.263 / 5.616 / 6.359 / 7.008% give par rates of 5.263 / 5.606 / 6.306 / 6.899%, each at or below its own spot</a:t>
+            </a:r>
+            <a:endParaRPr lang="en-US" sz="1700" dirty="0"/>
           </a:p>
         </p:txBody>
       </p:sp>
@@ -20754,7 +23094,7 @@
                 <a:ea typeface="Calibri" pitchFamily="34" charset="-122"/>
                 <a:cs typeface="Calibri" pitchFamily="34" charset="-120"/>
               </a:rPr>
-              <a:t>Source: CFA Institute, Curriculum Vol 6, LM 9, §3 par-rate illustration, pp. 217–218.</a:t>
+              <a:t>Source: CFA Institute, Curriculum Vol 6, LM 9, §3 "Par Rates from Spot Rates", worked illustration, pp. 217–218.</a:t>
             </a:r>
             <a:endParaRPr lang="en-US" sz="750" dirty="0"/>
           </a:p>
@@ -20796,7 +23136,7 @@
                 <a:ea typeface="Calibri" pitchFamily="34" charset="-122"/>
                 <a:cs typeface="Calibri" pitchFamily="34" charset="-120"/>
               </a:rPr>
-              <a:t>One year: par rate trivially equals Z₁. For longer tenors, solve a polynomial in PMT against 100. Shown for 2y and 3y.</a:t>
+              <a:t>The one-year par rate is trivially the one-year spot. Beyond that, factor PMT out of the PV equation and divide — no iteration needed.</a:t>
             </a:r>
             <a:endParaRPr lang="en-US" sz="1300" dirty="0"/>
           </a:p>
@@ -20811,7 +23151,7 @@
         <p:spPr>
           <a:xfrm>
             <a:off x="320040" y="1143000"/>
-            <a:ext cx="8503920" cy="3154680"/>
+            <a:ext cx="8503920" cy="2697480"/>
           </a:xfrm>
           <a:prstGeom prst="rect">
             <a:avLst/>
@@ -20863,7 +23203,7 @@
                 <a:ea typeface="Trebuchet MS" pitchFamily="34" charset="-122"/>
                 <a:cs typeface="Trebuchet MS" pitchFamily="34" charset="-120"/>
               </a:rPr>
-              <a:t>SPOT RATES GIVEN: Z₁ = 5.263%, Z₂ = 5.616%, Z₃ = 6.359%</a:t>
+              <a:t>PAR RATES FROM A GIVEN SPOT CURVE · EFFECTIVE ANNUAL RATES</a:t>
             </a:r>
             <a:endParaRPr lang="en-US" sz="1100" dirty="0"/>
           </a:p>
@@ -20905,7 +23245,7 @@
                 <a:ea typeface="Calibri" pitchFamily="34" charset="-122"/>
                 <a:cs typeface="Calibri" pitchFamily="34" charset="-120"/>
               </a:rPr>
-              <a:t>Find the annual coupon PMT that makes each bond price at 100. (Annual compounding, periodicity = 1.)</a:t>
+              <a:t>Spot curve: Z₁ = 5.263%, Z₂ = 5.616%, Z₃ = 6.359%, Z₄ = 7.008%. Find the coupon PMT that prices each bond at exactly 100.</a:t>
             </a:r>
             <a:endParaRPr lang="en-US" sz="1200" dirty="0"/>
           </a:p>
@@ -20920,7 +23260,7 @@
         <p:spPr>
           <a:xfrm>
             <a:off x="457200" y="1993392"/>
-            <a:ext cx="8229600" cy="1792224"/>
+            <a:ext cx="8229600" cy="1335024"/>
           </a:xfrm>
           <a:prstGeom prst="rect">
             <a:avLst/>
@@ -20967,7 +23307,7 @@
                 <a:ea typeface="Calibri" pitchFamily="34" charset="-122"/>
                 <a:cs typeface="Calibri" pitchFamily="34" charset="-120"/>
               </a:rPr>
-              <a:t>1-year par: 100 = (PMT + 100) / 1.05263  →  PMT = 5.263  →  par rate = 5.263%
+              <a:t>1-year: 100 = (PMT + 100)/1.05263  →  PMT = 5.263. The one-year par rate IS Z₁.
 </a:t>
             </a:r>
             <a:pPr indent="0" marL="0">
@@ -21002,7 +23342,7 @@
                 <a:ea typeface="Calibri" pitchFamily="34" charset="-122"/>
                 <a:cs typeface="Calibri" pitchFamily="34" charset="-120"/>
               </a:rPr>
-              <a:t>2-year par: 100 = PMT/1.05263 + (PMT + 100)/1.05616²
+              <a:t>Two-year discount factors: 1/1.05263 = 0.95000  ·  1/(1.05616)² = 0.89648
 </a:t>
             </a:r>
             <a:pPr indent="0" marL="0">
@@ -21037,7 +23377,7 @@
                 <a:ea typeface="Calibri" pitchFamily="34" charset="-122"/>
                 <a:cs typeface="Calibri" pitchFamily="34" charset="-120"/>
               </a:rPr>
-              <a:t>            PMT × [1/1.05263 + 1/1.05616²] + 100/1.05616² = 100
+              <a:t>2-year: PMT × (0.95000 + 0.89648) = 100 − 89.648 = 10.352  →  PMT = 10.352 / 1.84648 = 5.606
 </a:t>
             </a:r>
             <a:pPr indent="0" marL="0">
@@ -21072,7 +23412,7 @@
                 <a:ea typeface="Calibri" pitchFamily="34" charset="-122"/>
                 <a:cs typeface="Calibri" pitchFamily="34" charset="-120"/>
               </a:rPr>
-              <a:t>            PMT × [0.95000 + 0.89635] + 89.635 = 100  →  PMT × 1.84635 = 10.365  →  PMT = 5.614 ≈ 5.61%
+              <a:t>3-year: add 1/(1.06359)³ = 0.83115  →  PMT × 2.67763 = 100 − 83.115 = 16.885  →  PMT = 6.306
 </a:t>
             </a:r>
             <a:pPr indent="0" marL="0">
@@ -21107,7 +23447,7 @@
                 <a:ea typeface="Calibri" pitchFamily="34" charset="-122"/>
                 <a:cs typeface="Calibri" pitchFamily="34" charset="-120"/>
               </a:rPr>
-              <a:t>3-year par: 100 = PMT/1.05263 + PMT/1.05616² + (PMT+100)/1.06359³  →  PMT = 6.306%</a:t>
+              <a:t>Verify: 5.606/1.05606 + 105.606/(1.05606)² = 100 ✓  the par bond really does price at par</a:t>
             </a:r>
             <a:endParaRPr lang="en-US" sz="1200" dirty="0"/>
           </a:p>
@@ -21121,7 +23461,7 @@
         </p:nvSpPr>
         <p:spPr>
           <a:xfrm>
-            <a:off x="411480" y="3858768"/>
+            <a:off x="411480" y="3401568"/>
             <a:ext cx="8321040" cy="365760"/>
           </a:xfrm>
           <a:prstGeom prst="rect">
@@ -21141,7 +23481,7 @@
         </p:nvSpPr>
         <p:spPr>
           <a:xfrm>
-            <a:off x="457200" y="3858768"/>
+            <a:off x="457200" y="3401568"/>
             <a:ext cx="8229600" cy="365760"/>
           </a:xfrm>
           <a:prstGeom prst="rect">
@@ -21169,7 +23509,7 @@
                 <a:ea typeface="Consolas" pitchFamily="34" charset="-122"/>
                 <a:cs typeface="Consolas" pitchFamily="34" charset="-120"/>
               </a:rPr>
-              <a:t>1y par = 5.263%   ·   2y par = 5.606%   ·   3y par = 6.306%    (each below the corresponding spot, curve is upward-sloping)</a:t>
+              <a:t>Par rates  5.263%  ·  5.606%  ·  6.306%  ·  6.899%   —   each at or below its own spot rate</a:t>
             </a:r>
             <a:endParaRPr lang="en-US" sz="1150" dirty="0"/>
           </a:p>
@@ -21433,7 +23773,7 @@
                 <a:ea typeface="Calibri" pitchFamily="34" charset="-122"/>
                 <a:cs typeface="Calibri" pitchFamily="34" charset="-120"/>
               </a:rPr>
-              <a:t>Price a fixed-coupon bond on and between coupon dates, including accrued interest, and classify it as discount, par, or premium.
+              <a:t>Price a fixed-coupon bond on and between coupon dates, split full price into flat price and accrued interest, and classify it as discount, par or premium.
 </a:t>
             </a:r>
             <a:pPr indent="0" marL="0">
@@ -21462,7 +23802,7 @@
                 <a:ea typeface="Calibri" pitchFamily="34" charset="-122"/>
                 <a:cs typeface="Calibri" pitchFamily="34" charset="-120"/>
               </a:rPr>
-              <a:t>Estimate the price or yield of an illiquid bond using matrix pricing from a ladder of comparable traded bonds.
+              <a:t>State the three conditions under which an investor actually earns the quoted yield-to-maturity, and estimate the price of an illiquid bond by matrix pricing.
 </a:t>
             </a:r>
             <a:pPr indent="0" marL="0">
@@ -21491,7 +23831,7 @@
                 <a:ea typeface="Calibri" pitchFamily="34" charset="-122"/>
                 <a:cs typeface="Calibri" pitchFamily="34" charset="-120"/>
               </a:rPr>
-              <a:t>Compute current yield, street-convention YTM, yield-to-call and yield-to-worst on a callable bond, and reconcile rates of different periodicities.
+              <a:t>Compute current yield, street-convention YTM, yield-to-call and yield-to-worst on a callable bond, and reconcile yields quoted at different periodicities.
 </a:t>
             </a:r>
             <a:pPr indent="0" marL="0">
@@ -21520,7 +23860,7 @@
                 <a:ea typeface="Calibri" pitchFamily="34" charset="-122"/>
                 <a:cs typeface="Calibri" pitchFamily="34" charset="-120"/>
               </a:rPr>
-              <a:t>Decompose a bond's yield into a benchmark plus G-spread or Z-spread, and sketch how an OAS further adjusts for an embedded option.
+              <a:t>Decompose a yield into benchmark plus G-spread, I-spread or Z-spread, and explain how an OAS adjusts the Z-spread for an embedded option.
 </a:t>
             </a:r>
             <a:pPr indent="0" marL="0">
@@ -21549,7 +23889,7 @@
                 <a:ea typeface="Calibri" pitchFamily="34" charset="-122"/>
                 <a:cs typeface="Calibri" pitchFamily="34" charset="-120"/>
               </a:rPr>
-              <a:t>Convert money-market discount rates to bond-equivalent yields; price a floating-rate note; bootstrap a spot curve from par bond prices and derive par &amp; forward rates.
+              <a:t>Convert money-market discount rates to bond-equivalent yields, solve an FRN for its discount margin, and move between spot, par and forward curves.
 </a:t>
             </a:r>
             <a:endParaRPr lang="en-US" sz="1200" dirty="0"/>
@@ -21657,7 +23997,7 @@
                 <a:ea typeface="Trebuchet MS" pitchFamily="34" charset="-122"/>
                 <a:cs typeface="Trebuchet MS" pitchFamily="34" charset="-120"/>
               </a:rPr>
-              <a:t>An implied forward rate is the breakeven reinvestment rate that makes a short-then-reinvest strategy equivalent to holding a longer zero</a:t>
+              <a:t>An implied forward rate is the breakeven reinvestment rate that makes rolling a shorter zero exactly as good as holding a longer one</a:t>
             </a:r>
             <a:endParaRPr lang="en-US" sz="1600" dirty="0"/>
           </a:p>
@@ -21761,7 +24101,7 @@
                 <a:ea typeface="Calibri" pitchFamily="34" charset="-122"/>
                 <a:cs typeface="Calibri" pitchFamily="34" charset="-120"/>
               </a:rPr>
-              <a:t>Source: CFA Institute, Curriculum Vol 6, LM 9, §3 "Forward Rates from Spot Rates", pp. 218–220.</a:t>
+              <a:t>Source: CFA Institute, Curriculum Vol 6, LM 9, §3 "Forward Rates from Spot Rates", Equation 3 and Exhibits 4–5, pp. 218–220.</a:t>
             </a:r>
             <a:endParaRPr lang="en-US" sz="750" dirty="0"/>
           </a:p>
@@ -21803,7 +24143,7 @@
                 <a:ea typeface="Calibri" pitchFamily="34" charset="-122"/>
                 <a:cs typeface="Calibri" pitchFamily="34" charset="-120"/>
               </a:rPr>
-              <a:t>Naming: "AyBy" = B-year rate starting A years from today. So "3y1y" is the 1-year rate, 3 years from now.</a:t>
+              <a:t>Naming: in "AyBy", A is how many years forward the period starts and B is the tenor of the rate. So 3y1y is the one-year rate, three years from today.</a:t>
             </a:r>
             <a:endParaRPr lang="en-US" sz="1300" dirty="0"/>
           </a:p>
@@ -21865,7 +24205,7 @@
                 <a:ea typeface="Consolas" pitchFamily="34" charset="-122"/>
                 <a:cs typeface="Consolas" pitchFamily="34" charset="-120"/>
               </a:rPr>
-              <a:t>(1 + Z_A)^A  ×  (1 + IFR_{A,B−A})^{B−A}   =   (1 + Z_B)^B</a:t>
+              <a:t>(1 + Z_A)^A  ×  (1 + IFR_A,B−A)^(B−A)   =   (1 + Z_B)^B</a:t>
             </a:r>
             <a:endParaRPr lang="en-US" sz="1800" dirty="0"/>
           </a:p>
@@ -21907,7 +24247,7 @@
                 <a:ea typeface="Calibri" pitchFamily="34" charset="-122"/>
                 <a:cs typeface="Calibri" pitchFamily="34" charset="-120"/>
               </a:rPr>
-              <a:t>where: Z_A = shorter-tenor spot; Z_B = longer-tenor spot; IFR = the implied (B − A)-year forward rate starting at time A.</a:t>
+              <a:t>where: Z_A = the shorter spot, Z_B = the longer spot, IFR = the implied (B − A)-year rate starting at year A. Money markets state the same thing in months.</a:t>
             </a:r>
             <a:endParaRPr lang="en-US" sz="1100" dirty="0"/>
           </a:p>
@@ -21989,7 +24329,7 @@
                 <a:ea typeface="Trebuchet MS" pitchFamily="34" charset="-122"/>
                 <a:cs typeface="Trebuchet MS" pitchFamily="34" charset="-120"/>
               </a:rPr>
-              <a:t>BREAKEVEN INTUITION</a:t>
+              <a:t>NOT A FORECAST</a:t>
             </a:r>
             <a:endParaRPr lang="en-US" sz="1100" dirty="0"/>
           </a:p>
@@ -22031,7 +24371,7 @@
                 <a:ea typeface="Calibri" pitchFamily="34" charset="-122"/>
                 <a:cs typeface="Calibri" pitchFamily="34" charset="-120"/>
               </a:rPr>
-              <a:t>If you expect rates HIGHER than IFR, go short (roll). If LOWER, go long (lock). IFR is the indifference point.</a:t>
+              <a:t>Expect the future rate ABOVE the forward → go short and roll. Expect it BELOW → go long and lock. The forward is the point where you do not care.</a:t>
             </a:r>
             <a:endParaRPr lang="en-US" sz="1200" dirty="0"/>
           </a:p>
@@ -22113,7 +24453,7 @@
                 <a:ea typeface="Trebuchet MS" pitchFamily="34" charset="-122"/>
                 <a:cs typeface="Trebuchet MS" pitchFamily="34" charset="-120"/>
               </a:rPr>
-              <a:t>SPOT CURVE → FORWARD CURVE</a:t>
+              <a:t>SPOT  →  FORWARD</a:t>
             </a:r>
             <a:endParaRPr lang="en-US" sz="1100" dirty="0"/>
           </a:p>
@@ -22155,7 +24495,7 @@
                 <a:ea typeface="Calibri" pitchFamily="34" charset="-122"/>
                 <a:cs typeface="Calibri" pitchFamily="34" charset="-120"/>
               </a:rPr>
-              <a:t>Each forward rate is a ratio of adjacent spots. (1+Z_B)^B / (1+Z_A)^A, then take the (B−A)-th root.</a:t>
+              <a:t>Divide the longer compounded spot by the shorter one, then take the (B − A)-th root. Every forward is a ratio of two adjacent points on the spot curve.</a:t>
             </a:r>
             <a:endParaRPr lang="en-US" sz="1200" dirty="0"/>
           </a:p>
@@ -22237,7 +24577,7 @@
                 <a:ea typeface="Trebuchet MS" pitchFamily="34" charset="-122"/>
                 <a:cs typeface="Trebuchet MS" pitchFamily="34" charset="-120"/>
               </a:rPr>
-              <a:t>FORWARD CURVE → SPOT CURVE</a:t>
+              <a:t>FORWARD  →  SPOT</a:t>
             </a:r>
             <a:endParaRPr lang="en-US" sz="1100" dirty="0"/>
           </a:p>
@@ -22279,7 +24619,7 @@
                 <a:ea typeface="Calibri" pitchFamily="34" charset="-122"/>
                 <a:cs typeface="Calibri" pitchFamily="34" charset="-120"/>
               </a:rPr>
-              <a:t>Spot = geometric average of forwards: (1+Z_n)^n = (1+0y1y)(1+1y1y)…(1+(n−1)y1y). Three curves, one information set.</a:t>
+              <a:t>Run it the other way: (1 + Zₙ)ⁿ = (1 + 0y1y)(1 + 1y1y) … (1 + (n−1)y1y). The spot rate is the geometric average of the one-year forwards.</a:t>
             </a:r>
             <a:endParaRPr lang="en-US" sz="1200" dirty="0"/>
           </a:p>
@@ -22386,7 +24726,7 @@
                 <a:ea typeface="Trebuchet MS" pitchFamily="34" charset="-122"/>
                 <a:cs typeface="Trebuchet MS" pitchFamily="34" charset="-120"/>
               </a:rPr>
-              <a:t>Worked — the 2y1y implied forward rate from 2y and 3y spots of 3.0% and 4.0% is 6.03% — the breakeven for year 3 reinvestment</a:t>
+              <a:t>Worked — with a three-year zero at 3.65% and a four-year zero at 4.18%, the 3y1y implied forward rate is 5.79%</a:t>
             </a:r>
             <a:endParaRPr lang="en-US" sz="1700" dirty="0"/>
           </a:p>
@@ -22490,7 +24830,7 @@
                 <a:ea typeface="Calibri" pitchFamily="34" charset="-122"/>
                 <a:cs typeface="Calibri" pitchFamily="34" charset="-120"/>
               </a:rPr>
-              <a:t>Source: CFA Institute, Curriculum Vol 6, LM 9, §3 Example 3, pp. 219–220.</a:t>
+              <a:t>Source: CFA Institute, Curriculum Vol 6, LM 9, §3 "Forward Rates from Spot Rates", Exhibit 4 illustration, pp. 218–220.</a:t>
             </a:r>
             <a:endParaRPr lang="en-US" sz="750" dirty="0"/>
           </a:p>
@@ -22532,7 +24872,7 @@
                 <a:ea typeface="Calibri" pitchFamily="34" charset="-122"/>
                 <a:cs typeface="Calibri" pitchFamily="34" charset="-120"/>
               </a:rPr>
-              <a:t>Investing at Z₃ = 4% for 3y must equal investing at Z₂ = 3% for 2y and then rolling at the 2y1y — solve for the rolled rate.</a:t>
+              <a:t>Question being answered: what extra return does the fourth year have to deliver to justify going out one year further? That number is the 3y1y.</a:t>
             </a:r>
             <a:endParaRPr lang="en-US" sz="1300" dirty="0"/>
           </a:p>
@@ -22547,7 +24887,7 @@
         <p:spPr>
           <a:xfrm>
             <a:off x="320040" y="1143000"/>
-            <a:ext cx="8503920" cy="2011680"/>
+            <a:ext cx="8503920" cy="2240280"/>
           </a:xfrm>
           <a:prstGeom prst="rect">
             <a:avLst/>
@@ -22599,7 +24939,7 @@
                 <a:ea typeface="Trebuchet MS" pitchFamily="34" charset="-122"/>
                 <a:cs typeface="Trebuchet MS" pitchFamily="34" charset="-120"/>
               </a:rPr>
-              <a:t>COMPUTE THE 2Y1Y FORWARD RATE</a:t>
+              <a:t>COMPUTE THE 3Y1Y IMPLIED FORWARD RATE · ANNUAL COMPOUNDING</a:t>
             </a:r>
             <a:endParaRPr lang="en-US" sz="1100" dirty="0"/>
           </a:p>
@@ -22641,7 +24981,7 @@
                 <a:ea typeface="Calibri" pitchFamily="34" charset="-122"/>
                 <a:cs typeface="Calibri" pitchFamily="34" charset="-120"/>
               </a:rPr>
-              <a:t>Spot curve: Z₂ = 3.0%, Z₃ = 4.0%. Annual compounding. Find IFR_{2,1}.</a:t>
+              <a:t>Three-year zero yields Z₃ = 3.65%; four-year zero yields Z₄ = 4.18%. Solve Equation 3 for IFR₃,₁.</a:t>
             </a:r>
             <a:endParaRPr lang="en-US" sz="1200" dirty="0"/>
           </a:p>
@@ -22656,7 +24996,7 @@
         <p:spPr>
           <a:xfrm>
             <a:off x="457200" y="1993392"/>
-            <a:ext cx="8229600" cy="649224"/>
+            <a:ext cx="8229600" cy="877824"/>
           </a:xfrm>
           <a:prstGeom prst="rect">
             <a:avLst/>
@@ -22678,7 +25018,7 @@
               <a:buNone/>
             </a:pPr>
             <a:r>
-              <a:rPr lang="en-US" sz="1050" b="1" dirty="0">
+              <a:rPr lang="en-US" sz="1100" b="1" dirty="0">
                 <a:solidFill>
                   <a:srgbClr val="1B2A4A"/>
                 </a:solidFill>
@@ -22695,7 +25035,7 @@
               <a:buNone/>
             </a:pPr>
             <a:r>
-              <a:rPr lang="en-US" sz="1050" dirty="0">
+              <a:rPr lang="en-US" sz="1100" dirty="0">
                 <a:solidFill>
                   <a:srgbClr val="334155"/>
                 </a:solidFill>
@@ -22703,7 +25043,7 @@
                 <a:ea typeface="Calibri" pitchFamily="34" charset="-122"/>
                 <a:cs typeface="Calibri" pitchFamily="34" charset="-120"/>
               </a:rPr>
-              <a:t>Start: (1 + Z₂)² × (1 + IFR_{2,1})¹ = (1 + Z₃)³
+              <a:t>Set up: (1 + Z₃)³ × (1 + IFR₃,₁)¹ = (1 + Z₄)⁴
 </a:t>
             </a:r>
             <a:pPr indent="0" marL="0">
@@ -22713,7 +25053,7 @@
               <a:buNone/>
             </a:pPr>
             <a:r>
-              <a:rPr lang="en-US" sz="1050" b="1" dirty="0">
+              <a:rPr lang="en-US" sz="1100" b="1" dirty="0">
                 <a:solidFill>
                   <a:srgbClr val="1B2A4A"/>
                 </a:solidFill>
@@ -22730,7 +25070,7 @@
               <a:buNone/>
             </a:pPr>
             <a:r>
-              <a:rPr lang="en-US" sz="1050" dirty="0">
+              <a:rPr lang="en-US" sz="1100" dirty="0">
                 <a:solidFill>
                   <a:srgbClr val="334155"/>
                 </a:solidFill>
@@ -22738,7 +25078,7 @@
                 <a:ea typeface="Calibri" pitchFamily="34" charset="-122"/>
                 <a:cs typeface="Calibri" pitchFamily="34" charset="-120"/>
               </a:rPr>
-              <a:t>(1.03)² × (1 + IFR_{2,1}) = (1.04)³
+              <a:t>Compound each side: (1.0365)³ = 1.113545   and   (1.0418)⁴ = 1.177979
 </a:t>
             </a:r>
             <a:pPr indent="0" marL="0">
@@ -22748,7 +25088,7 @@
               <a:buNone/>
             </a:pPr>
             <a:r>
-              <a:rPr lang="en-US" sz="1050" b="1" dirty="0">
+              <a:rPr lang="en-US" sz="1100" b="1" dirty="0">
                 <a:solidFill>
                   <a:srgbClr val="1B2A4A"/>
                 </a:solidFill>
@@ -22765,7 +25105,7 @@
               <a:buNone/>
             </a:pPr>
             <a:r>
-              <a:rPr lang="en-US" sz="1050" dirty="0">
+              <a:rPr lang="en-US" sz="1100" dirty="0">
                 <a:solidFill>
                   <a:srgbClr val="334155"/>
                 </a:solidFill>
@@ -22773,7 +25113,7 @@
                 <a:ea typeface="Calibri" pitchFamily="34" charset="-122"/>
                 <a:cs typeface="Calibri" pitchFamily="34" charset="-120"/>
               </a:rPr>
-              <a:t>1.0609  × (1 + IFR_{2,1}) = 1.124864
+              <a:t>1 + IFR₃,₁ = 1.177979 / 1.113545 = 1.057860
 </a:t>
             </a:r>
             <a:pPr indent="0" marL="0">
@@ -22783,7 +25123,7 @@
               <a:buNone/>
             </a:pPr>
             <a:r>
-              <a:rPr lang="en-US" sz="1050" b="1" dirty="0">
+              <a:rPr lang="en-US" sz="1100" b="1" dirty="0">
                 <a:solidFill>
                   <a:srgbClr val="1B2A4A"/>
                 </a:solidFill>
@@ -22800,7 +25140,7 @@
               <a:buNone/>
             </a:pPr>
             <a:r>
-              <a:rPr lang="en-US" sz="1050" dirty="0">
+              <a:rPr lang="en-US" sz="1100" dirty="0">
                 <a:solidFill>
                   <a:srgbClr val="334155"/>
                 </a:solidFill>
@@ -22808,9 +25148,44 @@
                 <a:ea typeface="Calibri" pitchFamily="34" charset="-122"/>
                 <a:cs typeface="Calibri" pitchFamily="34" charset="-120"/>
               </a:rPr>
-              <a:t>(1 + IFR_{2,1}) = 1.124864 / 1.0609 = 1.06032  →  IFR_{2,1} = 6.03%</a:t>
-            </a:r>
-            <a:endParaRPr lang="en-US" sz="1050" dirty="0"/>
+              <a:t>IFR₃,₁ = 5.786% ≈ 5.79% — well above the 4.18% four-year spot
+</a:t>
+            </a:r>
+            <a:pPr indent="0" marL="0">
+              <a:spcAft>
+                <a:spcPts val="200"/>
+              </a:spcAft>
+              <a:buNone/>
+            </a:pPr>
+            <a:r>
+              <a:rPr lang="en-US" sz="1100" b="1" dirty="0">
+                <a:solidFill>
+                  <a:srgbClr val="1B2A4A"/>
+                </a:solidFill>
+                <a:latin typeface="Calibri" pitchFamily="34" charset="0"/>
+                <a:ea typeface="Calibri" pitchFamily="34" charset="-122"/>
+                <a:cs typeface="Calibri" pitchFamily="34" charset="-120"/>
+              </a:rPr>
+              <a:t>5. </a:t>
+            </a:r>
+            <a:pPr indent="0" marL="0">
+              <a:spcAft>
+                <a:spcPts val="200"/>
+              </a:spcAft>
+              <a:buNone/>
+            </a:pPr>
+            <a:r>
+              <a:rPr lang="en-US" sz="1100" dirty="0">
+                <a:solidFill>
+                  <a:srgbClr val="334155"/>
+                </a:solidFill>
+                <a:latin typeface="Calibri" pitchFamily="34" charset="0"/>
+                <a:ea typeface="Calibri" pitchFamily="34" charset="-122"/>
+                <a:cs typeface="Calibri" pitchFamily="34" charset="-120"/>
+              </a:rPr>
+              <a:t>Sense check: the forward MUST exceed Z₄ whenever the spot curve is rising, or the average could not climb</a:t>
+            </a:r>
+            <a:endParaRPr lang="en-US" sz="1100" dirty="0"/>
           </a:p>
         </p:txBody>
       </p:sp>
@@ -22822,7 +25197,7 @@
         </p:nvSpPr>
         <p:spPr>
           <a:xfrm>
-            <a:off x="411480" y="2715768"/>
+            <a:off x="411480" y="2944368"/>
             <a:ext cx="8321040" cy="365760"/>
           </a:xfrm>
           <a:prstGeom prst="rect">
@@ -22842,7 +25217,7 @@
         </p:nvSpPr>
         <p:spPr>
           <a:xfrm>
-            <a:off x="457200" y="2715768"/>
+            <a:off x="457200" y="2944368"/>
             <a:ext cx="8229600" cy="365760"/>
           </a:xfrm>
           <a:prstGeom prst="rect">
@@ -22870,7 +25245,7 @@
                 <a:ea typeface="Consolas" pitchFamily="34" charset="-122"/>
                 <a:cs typeface="Consolas" pitchFamily="34" charset="-120"/>
               </a:rPr>
-              <a:t>2y1y  =  6.03%   (much higher than 4% 3y-spot: market priced into forwards a year-3 rate well above today's level)</a:t>
+              <a:t>3y1y  =  5.79%   —   the year-4 rate at which rolling the 3-year zero ties buying the 4-year</a:t>
             </a:r>
             <a:endParaRPr lang="en-US" sz="1150" dirty="0"/>
           </a:p>
@@ -22884,8 +25259,8 @@
         </p:nvSpPr>
         <p:spPr>
           <a:xfrm>
-            <a:off x="320040" y="3337560"/>
-            <a:ext cx="8503920" cy="960120"/>
+            <a:off x="320040" y="3474720"/>
+            <a:ext cx="8503920" cy="822960"/>
           </a:xfrm>
           <a:prstGeom prst="rect">
             <a:avLst/>
@@ -22904,8 +25279,8 @@
         </p:nvSpPr>
         <p:spPr>
           <a:xfrm>
-            <a:off x="320040" y="3337560"/>
-            <a:ext cx="73152" cy="960120"/>
+            <a:off x="320040" y="3474720"/>
+            <a:ext cx="73152" cy="822960"/>
           </a:xfrm>
           <a:prstGeom prst="rect">
             <a:avLst/>
@@ -22924,7 +25299,7 @@
         </p:nvSpPr>
         <p:spPr>
           <a:xfrm>
-            <a:off x="457200" y="3383280"/>
+            <a:off x="457200" y="3520440"/>
             <a:ext cx="8275320" cy="256032"/>
           </a:xfrm>
           <a:prstGeom prst="rect">
@@ -22952,7 +25327,7 @@
                 <a:ea typeface="Trebuchet MS" pitchFamily="34" charset="-122"/>
                 <a:cs typeface="Trebuchet MS" pitchFamily="34" charset="-120"/>
               </a:rPr>
-              <a:t>TRADER TAKE</a:t>
+              <a:t>HOW TO TRADE IT</a:t>
             </a:r>
             <a:endParaRPr lang="en-US" sz="1100" dirty="0"/>
           </a:p>
@@ -22966,8 +25341,8 @@
         </p:nvSpPr>
         <p:spPr>
           <a:xfrm>
-            <a:off x="457200" y="3657600"/>
-            <a:ext cx="8275320" cy="594360"/>
+            <a:off x="457200" y="3794760"/>
+            <a:ext cx="8275320" cy="457200"/>
           </a:xfrm>
           <a:prstGeom prst="rect">
             <a:avLst/>
@@ -22994,7 +25369,7 @@
                 <a:ea typeface="Calibri" pitchFamily="34" charset="-122"/>
                 <a:cs typeface="Calibri" pitchFamily="34" charset="-120"/>
               </a:rPr>
-              <a:t>If your view is the 1-year rate two years from now will be 4.5% (below 6.03%), LOCK-IN: buy the 3-year zero now. If you think it will be 7% (above 6.03%), ROLL: buy the 2-year zero and reinvest at the expected higher rate.</a:t>
+              <a:t>Think the one-year rate three years out will be ABOVE 5.79%? Buy the three-year zero and roll — you beat the four-year. Think BELOW? Buy the four-year and lock it in. The forward is the indifference point, not a prediction.</a:t>
             </a:r>
             <a:endParaRPr lang="en-US" sz="1200" dirty="0"/>
           </a:p>
@@ -23093,7 +25468,7 @@
               <a:buNone/>
             </a:pPr>
             <a:r>
-              <a:rPr lang="en-US" sz="1600" b="1" dirty="0">
+              <a:rPr lang="en-US" sz="1700" b="1" dirty="0">
                 <a:solidFill>
                   <a:srgbClr val="FFFFFF"/>
                 </a:solidFill>
@@ -23101,9 +25476,9 @@
                 <a:ea typeface="Trebuchet MS" pitchFamily="34" charset="-122"/>
                 <a:cs typeface="Trebuchet MS" pitchFamily="34" charset="-120"/>
               </a:rPr>
-              <a:t>Spot, par, and forward curves carry identical information — three lenses, one curve; their ordering depends only on the spot curve's slope</a:t>
-            </a:r>
-            <a:endParaRPr lang="en-US" sz="1600" dirty="0"/>
+              <a:t>Spot, par and forward curves carry identical information — three lenses on one curve, and their ordering depends only on the slope</a:t>
+            </a:r>
+            <a:endParaRPr lang="en-US" sz="1700" dirty="0"/>
           </a:p>
         </p:txBody>
       </p:sp>
@@ -23205,7 +25580,7 @@
                 <a:ea typeface="Calibri" pitchFamily="34" charset="-122"/>
                 <a:cs typeface="Calibri" pitchFamily="34" charset="-120"/>
               </a:rPr>
-              <a:t>Source: CFA Institute, Curriculum Vol 6, LM 9, §4 "Spot, Par, Forward Yield Curves", pp. 225–229.</a:t>
+              <a:t>Source: CFA Institute, Curriculum Vol 6, LM 9, §4 "Spot, Par, and Forward Yield Curves", Exhibits 6–8, pp. 225–227.</a:t>
             </a:r>
             <a:endParaRPr lang="en-US" sz="750" dirty="0"/>
           </a:p>
@@ -23247,7 +25622,7 @@
                 <a:ea typeface="Calibri" pitchFamily="34" charset="-122"/>
                 <a:cs typeface="Calibri" pitchFamily="34" charset="-120"/>
               </a:rPr>
-              <a:t>Knowing the spot curve mechanically determines the par and forward curves; knowing any one lets you reconstruct the other two.</a:t>
+              <a:t>Know any one of the three and the other two are determined. There is no extra information in the forward curve — only a different view of the same data.</a:t>
             </a:r>
             <a:endParaRPr lang="en-US" sz="1300" dirty="0"/>
           </a:p>
@@ -23276,10 +25651,10 @@
             <a:tbl>
               <a:tblPr/>
               <a:tblGrid>
-                <a:gridCol w="2103120"/>
-                <a:gridCol w="2011680"/>
-                <a:gridCol w="1828800"/>
-                <a:gridCol w="2560320"/>
+                <a:gridCol w="2194560"/>
+                <a:gridCol w="1920240"/>
+                <a:gridCol w="1737360"/>
+                <a:gridCol w="2651760"/>
               </a:tblGrid>
               <a:tr h="274320">
                 <a:tc>
@@ -23299,7 +25674,7 @@
                           <a:ea typeface="Trebuchet MS" pitchFamily="34" charset="-122"/>
                           <a:cs typeface="Trebuchet MS" pitchFamily="34" charset="-120"/>
                         </a:rPr>
-                        <a:t>Curve slope</a:t>
+                        <a:t>Spot curve shape</a:t>
                       </a:r>
                       <a:endParaRPr lang="en-US" sz="1100" dirty="0">
                         <a:latin typeface="Trebuchet MS" charset="0"/>
@@ -23349,7 +25724,7 @@
                           <a:ea typeface="Trebuchet MS" pitchFamily="34" charset="-122"/>
                           <a:cs typeface="Trebuchet MS" pitchFamily="34" charset="-120"/>
                         </a:rPr>
-                        <a:t>Forward vs spot</a:t>
+                        <a:t>Forward curve</a:t>
                       </a:r>
                       <a:endParaRPr lang="en-US" sz="1100" dirty="0">
                         <a:latin typeface="Trebuchet MS" charset="0"/>
@@ -23399,7 +25774,7 @@
                           <a:ea typeface="Trebuchet MS" pitchFamily="34" charset="-122"/>
                           <a:cs typeface="Trebuchet MS" pitchFamily="34" charset="-120"/>
                         </a:rPr>
-                        <a:t>Par vs spot</a:t>
+                        <a:t>Par curve</a:t>
                       </a:r>
                       <a:endParaRPr lang="en-US" sz="1100" dirty="0">
                         <a:latin typeface="Trebuchet MS" charset="0"/>
@@ -23449,7 +25824,7 @@
                           <a:ea typeface="Trebuchet MS" pitchFamily="34" charset="-122"/>
                           <a:cs typeface="Trebuchet MS" pitchFamily="34" charset="-120"/>
                         </a:rPr>
-                        <a:t>Economic interpretation</a:t>
+                        <a:t>What it is saying</a:t>
                       </a:r>
                       <a:endParaRPr lang="en-US" sz="1100" dirty="0">
                         <a:latin typeface="Trebuchet MS" charset="0"/>
@@ -23551,7 +25926,7 @@
                           <a:ea typeface="Consolas" pitchFamily="34" charset="-122"/>
                           <a:cs typeface="Consolas" pitchFamily="34" charset="-120"/>
                         </a:rPr>
-                        <a:t>Forward &gt; spot</a:t>
+                        <a:t>Above spot</a:t>
                       </a:r>
                       <a:endParaRPr lang="en-US" sz="1100" dirty="0">
                         <a:latin typeface="Consolas" charset="0"/>
@@ -23601,7 +25976,7 @@
                           <a:ea typeface="Consolas" pitchFamily="34" charset="-122"/>
                           <a:cs typeface="Consolas" pitchFamily="34" charset="-120"/>
                         </a:rPr>
-                        <a:t>Par &lt; spot</a:t>
+                        <a:t>Below spot</a:t>
                       </a:r>
                       <a:endParaRPr lang="en-US" sz="1100" dirty="0">
                         <a:latin typeface="Consolas" charset="0"/>
@@ -23651,7 +26026,7 @@
                           <a:ea typeface="Consolas" pitchFamily="34" charset="-122"/>
                           <a:cs typeface="Consolas" pitchFamily="34" charset="-120"/>
                         </a:rPr>
-                        <a:t>Market expects higher future rates</a:t>
+                        <a:t>Higher future short rates</a:t>
                       </a:r>
                       <a:endParaRPr lang="en-US" sz="1100" dirty="0">
                         <a:latin typeface="Consolas" charset="0"/>
@@ -23753,7 +26128,7 @@
                           <a:ea typeface="Consolas" pitchFamily="34" charset="-122"/>
                           <a:cs typeface="Consolas" pitchFamily="34" charset="-120"/>
                         </a:rPr>
-                        <a:t>Forward = spot</a:t>
+                        <a:t>Equal</a:t>
                       </a:r>
                       <a:endParaRPr lang="en-US" sz="1100" dirty="0">
                         <a:latin typeface="Consolas" charset="0"/>
@@ -23803,7 +26178,7 @@
                           <a:ea typeface="Consolas" pitchFamily="34" charset="-122"/>
                           <a:cs typeface="Consolas" pitchFamily="34" charset="-120"/>
                         </a:rPr>
-                        <a:t>Par = spot</a:t>
+                        <a:t>Equal</a:t>
                       </a:r>
                       <a:endParaRPr lang="en-US" sz="1100" dirty="0">
                         <a:latin typeface="Consolas" charset="0"/>
@@ -23853,7 +26228,7 @@
                           <a:ea typeface="Consolas" pitchFamily="34" charset="-122"/>
                           <a:cs typeface="Consolas" pitchFamily="34" charset="-120"/>
                         </a:rPr>
-                        <a:t>Expectations: rates stay constant</a:t>
+                        <a:t>Rates expected unchanged</a:t>
                       </a:r>
                       <a:endParaRPr lang="en-US" sz="1100" dirty="0">
                         <a:latin typeface="Consolas" charset="0"/>
@@ -23955,7 +26330,7 @@
                           <a:ea typeface="Consolas" pitchFamily="34" charset="-122"/>
                           <a:cs typeface="Consolas" pitchFamily="34" charset="-120"/>
                         </a:rPr>
-                        <a:t>Forward &lt; spot</a:t>
+                        <a:t>Below spot</a:t>
                       </a:r>
                       <a:endParaRPr lang="en-US" sz="1100" dirty="0">
                         <a:latin typeface="Consolas" charset="0"/>
@@ -24005,7 +26380,7 @@
                           <a:ea typeface="Consolas" pitchFamily="34" charset="-122"/>
                           <a:cs typeface="Consolas" pitchFamily="34" charset="-120"/>
                         </a:rPr>
-                        <a:t>Par &gt; spot</a:t>
+                        <a:t>Above spot</a:t>
                       </a:r>
                       <a:endParaRPr lang="en-US" sz="1100" dirty="0">
                         <a:latin typeface="Consolas" charset="0"/>
@@ -24055,7 +26430,7 @@
                           <a:ea typeface="Consolas" pitchFamily="34" charset="-122"/>
                           <a:cs typeface="Consolas" pitchFamily="34" charset="-120"/>
                         </a:rPr>
-                        <a:t>Market expects lower future rates / recession</a:t>
+                        <a:t>Lower future rates / cuts</a:t>
                       </a:r>
                       <a:endParaRPr lang="en-US" sz="1100" dirty="0">
                         <a:latin typeface="Consolas" charset="0"/>
@@ -24102,7 +26477,7 @@
         <p:spPr>
           <a:xfrm>
             <a:off x="320040" y="2697480"/>
-            <a:ext cx="8503920" cy="960120"/>
+            <a:ext cx="8503920" cy="914400"/>
           </a:xfrm>
           <a:prstGeom prst="rect">
             <a:avLst/>
@@ -24122,7 +26497,7 @@
         <p:spPr>
           <a:xfrm>
             <a:off x="320040" y="2697480"/>
-            <a:ext cx="73152" cy="960120"/>
+            <a:ext cx="73152" cy="914400"/>
           </a:xfrm>
           <a:prstGeom prst="rect">
             <a:avLst/>
@@ -24169,7 +26544,7 @@
                 <a:ea typeface="Trebuchet MS" pitchFamily="34" charset="-122"/>
                 <a:cs typeface="Trebuchet MS" pitchFamily="34" charset="-120"/>
               </a:rPr>
-              <a:t>WHY FORWARDS SIT ABOVE SPOT ON AN UPWARD CURVE</a:t>
+              <a:t>WHY FORWARDS OVERSHOOT WHEN THE CURVE RISES</a:t>
             </a:r>
             <a:endParaRPr lang="en-US" sz="1100" dirty="0"/>
           </a:p>
@@ -24184,7 +26559,7 @@
         <p:spPr>
           <a:xfrm>
             <a:off x="457200" y="3017520"/>
-            <a:ext cx="8275320" cy="594360"/>
+            <a:ext cx="8275320" cy="548640"/>
           </a:xfrm>
           <a:prstGeom prst="rect">
             <a:avLst/>
@@ -24211,7 +26586,7 @@
                 <a:ea typeface="Calibri" pitchFamily="34" charset="-122"/>
                 <a:cs typeface="Calibri" pitchFamily="34" charset="-120"/>
               </a:rPr>
-              <a:t>Long spot = geometric average of shorter spot and forwards. If Z₃ &gt; Z₂, then 2y1y must exceed Z₃ to drag the average UP. So forwards overshoot the spot curve when it rises.</a:t>
+              <a:t>A long spot is the geometric average of the shorter spot and the forwards in between. If Z₃ exceeds Z₂, the 2y1y forward must exceed Z₃ to drag that average up. Averages always lag the marginal input.</a:t>
             </a:r>
             <a:endParaRPr lang="en-US" sz="1200" dirty="0"/>
           </a:p>
@@ -24225,8 +26600,8 @@
         </p:nvSpPr>
         <p:spPr>
           <a:xfrm>
-            <a:off x="320040" y="3749040"/>
-            <a:ext cx="8503920" cy="548640"/>
+            <a:off x="320040" y="3703320"/>
+            <a:ext cx="8503920" cy="594360"/>
           </a:xfrm>
           <a:prstGeom prst="rect">
             <a:avLst/>
@@ -24245,8 +26620,8 @@
         </p:nvSpPr>
         <p:spPr>
           <a:xfrm>
-            <a:off x="320040" y="3749040"/>
-            <a:ext cx="73152" cy="548640"/>
+            <a:off x="320040" y="3703320"/>
+            <a:ext cx="73152" cy="594360"/>
           </a:xfrm>
           <a:prstGeom prst="rect">
             <a:avLst/>
@@ -24265,7 +26640,7 @@
         </p:nvSpPr>
         <p:spPr>
           <a:xfrm>
-            <a:off x="457200" y="3794760"/>
+            <a:off x="457200" y="3749040"/>
             <a:ext cx="8275320" cy="256032"/>
           </a:xfrm>
           <a:prstGeom prst="rect">
@@ -24293,7 +26668,7 @@
                 <a:ea typeface="Trebuchet MS" pitchFamily="34" charset="-122"/>
                 <a:cs typeface="Trebuchet MS" pitchFamily="34" charset="-120"/>
               </a:rPr>
-              <a:t>MATH IDENTITY</a:t>
+              <a:t>THE IDENTITY, WITH NUMBERS</a:t>
             </a:r>
             <a:endParaRPr lang="en-US" sz="1100" dirty="0"/>
           </a:p>
@@ -24307,8 +26682,8 @@
         </p:nvSpPr>
         <p:spPr>
           <a:xfrm>
-            <a:off x="457200" y="4069080"/>
-            <a:ext cx="8275320" cy="182880"/>
+            <a:off x="457200" y="4023360"/>
+            <a:ext cx="8275320" cy="228600"/>
           </a:xfrm>
           <a:prstGeom prst="rect">
             <a:avLst/>
@@ -24335,7 +26710,7 @@
                 <a:ea typeface="Calibri" pitchFamily="34" charset="-122"/>
                 <a:cs typeface="Calibri" pitchFamily="34" charset="-120"/>
               </a:rPr>
-              <a:t>(1 + Z_n)ⁿ  =  Πᵢ (1 + iy1y)   —   spot is the geometric average of one-year forwards.</a:t>
+              <a:t>CFA: forwards of 1.88 / 2.77 / 3.54 / 4.12% compound to spots of 1.880 / 2.324 / 2.728 / 3.074% (pp. 220–221).</a:t>
             </a:r>
             <a:endParaRPr lang="en-US" sz="1200" dirty="0"/>
           </a:p>
@@ -24442,7 +26817,7 @@
                 <a:ea typeface="Trebuchet MS" pitchFamily="34" charset="-122"/>
                 <a:cs typeface="Trebuchet MS" pitchFamily="34" charset="-120"/>
               </a:rPr>
-              <a:t>Worked — bootstrap the full 3-year spot curve from par bonds at 2%, 2.5% and 3% coupons — Z = 2.00% / 2.51% / 3.02%</a:t>
+              <a:t>Worked — bootstrap a spot curve out of par bonds at 2%, 2.5% and 3%: Z₁ = 2.000%, Z₂ = 2.506%, Z₃ = 3.020%</a:t>
             </a:r>
             <a:endParaRPr lang="en-US" sz="1700" dirty="0"/>
           </a:p>
@@ -24546,7 +26921,7 @@
                 <a:ea typeface="Calibri" pitchFamily="34" charset="-122"/>
                 <a:cs typeface="Calibri" pitchFamily="34" charset="-120"/>
               </a:rPr>
-              <a:t>Source: CFA Institute, Curriculum Vol 6, LM 9, §3 bootstrapping synthesis, pp. 218–224.</a:t>
+              <a:t>Source: Worked exercise built on CFA Institute, Curriculum Vol 6, LM 9, §3, Equation 2, pp. 217–218 — the curriculum runs spot → par; here we run par → spot.</a:t>
             </a:r>
             <a:endParaRPr lang="en-US" sz="750" dirty="0"/>
           </a:p>
@@ -24588,7 +26963,7 @@
                 <a:ea typeface="Calibri" pitchFamily="34" charset="-122"/>
                 <a:cs typeface="Calibri" pitchFamily="34" charset="-120"/>
               </a:rPr>
-              <a:t>Bootstrap = solve sequentially. Z₁ from the 1-year par bond. Z₂ plugs in Z₁. Z₃ plugs in Z₁, Z₂. Builds the entire spot curve.</a:t>
+              <a:t>Bootstrapping is sequential substitution: solve Z₁, plug it into the two-year equation to get Z₂, plug both into the three-year equation to get Z₃.</a:t>
             </a:r>
             <a:endParaRPr lang="en-US" sz="1300" dirty="0"/>
           </a:p>
@@ -24603,7 +26978,7 @@
         <p:spPr>
           <a:xfrm>
             <a:off x="320040" y="1143000"/>
-            <a:ext cx="8503920" cy="3154680"/>
+            <a:ext cx="8503920" cy="2697480"/>
           </a:xfrm>
           <a:prstGeom prst="rect">
             <a:avLst/>
@@ -24655,7 +27030,7 @@
                 <a:ea typeface="Trebuchet MS" pitchFamily="34" charset="-122"/>
                 <a:cs typeface="Trebuchet MS" pitchFamily="34" charset="-120"/>
               </a:rPr>
-              <a:t>PAR BONDS (EACH PRICED AT 100, ANNUAL COUPONS)</a:t>
+              <a:t>THREE PAR BONDS AT 100, ANNUAL COUPONS — RECOVER THE SPOTS</a:t>
             </a:r>
             <a:endParaRPr lang="en-US" sz="1100" dirty="0"/>
           </a:p>
@@ -24697,7 +27072,7 @@
                 <a:ea typeface="Calibri" pitchFamily="34" charset="-122"/>
                 <a:cs typeface="Calibri" pitchFamily="34" charset="-120"/>
               </a:rPr>
-              <a:t>1-year 2% par bond. 2-year 2.5% par bond. 3-year 3% par bond. Recover the spot curve.</a:t>
+              <a:t>1-year 2.0% par bond · 2-year 2.5% par bond · 3-year 3.0% par bond. Each trades at exactly 100. Find Z₁, Z₂, Z₃.</a:t>
             </a:r>
             <a:endParaRPr lang="en-US" sz="1200" dirty="0"/>
           </a:p>
@@ -24712,7 +27087,7 @@
         <p:spPr>
           <a:xfrm>
             <a:off x="457200" y="1993392"/>
-            <a:ext cx="8229600" cy="1792224"/>
+            <a:ext cx="8229600" cy="1335024"/>
           </a:xfrm>
           <a:prstGeom prst="rect">
             <a:avLst/>
@@ -24759,7 +27134,7 @@
                 <a:ea typeface="Calibri" pitchFamily="34" charset="-122"/>
                 <a:cs typeface="Calibri" pitchFamily="34" charset="-120"/>
               </a:rPr>
-              <a:t>Z₁: 100 = 102 / (1 + Z₁)  →  Z₁ = 2.000%
+              <a:t>Z₁: 100 = 102 / (1 + Z₁)  →  1 + Z₁ = 1.02  →  Z₁ = 2.000%   (a one-period bond IS a zero)
 </a:t>
             </a:r>
             <a:pPr indent="0" marL="0">
@@ -24794,7 +27169,7 @@
                 <a:ea typeface="Calibri" pitchFamily="34" charset="-122"/>
                 <a:cs typeface="Calibri" pitchFamily="34" charset="-120"/>
               </a:rPr>
-              <a:t>Z₂: 100 = 2.5 / 1.02 + 102.5 / (1+Z₂)²  →  97.549 = 102.5 / (1+Z₂)²  →  Z₂ = 2.506%
+              <a:t>Z₂: 100 = 2.5/1.02 + 102.5/(1 + Z₂)²  →  100 − 2.451 = 97.549 = 102.5/(1 + Z₂)²  →  Z₂ = 2.506%
 </a:t>
             </a:r>
             <a:pPr indent="0" marL="0">
@@ -24829,7 +27204,7 @@
                 <a:ea typeface="Calibri" pitchFamily="34" charset="-122"/>
                 <a:cs typeface="Calibri" pitchFamily="34" charset="-120"/>
               </a:rPr>
-              <a:t>     Note Z₂ &gt; Z₁ (and &gt; 2y par coupon 2.5%) — upward-sloping curve
+              <a:t>Check: Z₂ exceeds both Z₁ and the 2.5% par coupon — the curve is upward-sloping
 </a:t>
             </a:r>
             <a:pPr indent="0" marL="0">
@@ -24864,7 +27239,7 @@
                 <a:ea typeface="Calibri" pitchFamily="34" charset="-122"/>
                 <a:cs typeface="Calibri" pitchFamily="34" charset="-120"/>
               </a:rPr>
-              <a:t>Z₃: 100 = 3 / 1.02 + 3 / 1.02506² + 103 / (1+Z₃)³
+              <a:t>Z₃: 100 = 3/1.02 + 3/(1.02506)² + 103/(1 + Z₃)³  →  100 − 2.941 − 2.855 = 94.204 = 103/(1 + Z₃)³
 </a:t>
             </a:r>
             <a:pPr indent="0" marL="0">
@@ -24899,7 +27274,7 @@
                 <a:ea typeface="Calibri" pitchFamily="34" charset="-122"/>
                 <a:cs typeface="Calibri" pitchFamily="34" charset="-120"/>
               </a:rPr>
-              <a:t>     = 2.941 + 2.855 + 103/(1+Z₃)³  →  94.204 = 103/(1+Z₃)³  →  Z₃ = 3.020%</a:t>
+              <a:t>Solve: (1 + Z₃)³ = 103 / 94.204 = 1.09337  →  Z₃ = 3.020%</a:t>
             </a:r>
             <a:endParaRPr lang="en-US" sz="1200" dirty="0"/>
           </a:p>
@@ -24913,7 +27288,7 @@
         </p:nvSpPr>
         <p:spPr>
           <a:xfrm>
-            <a:off x="411480" y="3858768"/>
+            <a:off x="411480" y="3401568"/>
             <a:ext cx="8321040" cy="365760"/>
           </a:xfrm>
           <a:prstGeom prst="rect">
@@ -24933,7 +27308,7 @@
         </p:nvSpPr>
         <p:spPr>
           <a:xfrm>
-            <a:off x="457200" y="3858768"/>
+            <a:off x="457200" y="3401568"/>
             <a:ext cx="8229600" cy="365760"/>
           </a:xfrm>
           <a:prstGeom prst="rect">
@@ -24961,7 +27336,7 @@
                 <a:ea typeface="Consolas" pitchFamily="34" charset="-122"/>
                 <a:cs typeface="Consolas" pitchFamily="34" charset="-120"/>
               </a:rPr>
-              <a:t>Spot curve: Z₁ = 2.00%  ·  Z₂ = 2.51%  ·  Z₃ = 3.02%   (each spot &gt; same-tenor par rate, confirming upward slope)</a:t>
+              <a:t>Spot curve  Z₁ 2.000%  ·  Z₂ 2.506%  ·  Z₃ 3.020%   —   every spot above its own par rate ✓</a:t>
             </a:r>
             <a:endParaRPr lang="en-US" sz="1150" dirty="0"/>
           </a:p>
@@ -25192,7 +27567,7 @@
                 <a:ea typeface="Calibri" pitchFamily="34" charset="-122"/>
                 <a:cs typeface="Calibri" pitchFamily="34" charset="-120"/>
               </a:rPr>
-              <a:t>Bond price = PV of coupons + PV of face at the market discount rate. Coupon vs YTM determines discount / par / premium; the Greece 5y 3.5% at 5% YTM prices at 93.50.</a:t>
+              <a:t>Price = PV of promised cash flows at the market rate. Coupon below the rate → discount, equal → par, above → premium; the gap is the PV of the coupon shortfall.</a:t>
             </a:r>
             <a:endParaRPr lang="en-US" sz="1150" dirty="0"/>
           </a:p>
@@ -25274,7 +27649,7 @@
                 <a:ea typeface="Calibri" pitchFamily="34" charset="-122"/>
                 <a:cs typeface="Calibri" pitchFamily="34" charset="-120"/>
               </a:rPr>
-              <a:t>Between coupon dates, full price = flat price + accrued interest; dealers quote flat (AI doesn't depend on yield).</a:t>
+              <a:t>You earn the quoted YTM only if you hold to maturity, the issuer pays in full and on time, and you reinvest every coupon AT the YTM.</a:t>
             </a:r>
             <a:endParaRPr lang="en-US" sz="1150" dirty="0"/>
           </a:p>
@@ -25356,7 +27731,7 @@
                 <a:ea typeface="Calibri" pitchFamily="34" charset="-122"/>
                 <a:cs typeface="Calibri" pitchFamily="34" charset="-120"/>
               </a:rPr>
-              <a:t>Matrix pricing interpolates comparable-bond YTMs to price illiquid or new issues — three-step process: identify, back out YTMs, interpolate.</a:t>
+              <a:t>Between coupon dates, full price = flat price + accrued interest. Dealers quote flat, and accrued interest depends on the calendar, never on the yield.</a:t>
             </a:r>
             <a:endParaRPr lang="en-US" sz="1150" dirty="0"/>
           </a:p>
@@ -25438,7 +27813,7 @@
                 <a:ea typeface="Calibri" pitchFamily="34" charset="-122"/>
                 <a:cs typeface="Calibri" pitchFamily="34" charset="-120"/>
               </a:rPr>
-              <a:t>Yield-to-worst = min of YTM and every yield-to-call — the conservative yield on a callable. VIVU worked example: YTW = 5.15%.</a:t>
+              <a:t>Matrix pricing, four steps: identify comparables, back out and average their yields, interpolate to the target tenor, discount the target's cash flows.</a:t>
             </a:r>
             <a:endParaRPr lang="en-US" sz="1150" dirty="0"/>
           </a:p>
@@ -25520,7 +27895,7 @@
                 <a:ea typeface="Calibri" pitchFamily="34" charset="-122"/>
                 <a:cs typeface="Calibri" pitchFamily="34" charset="-120"/>
               </a:rPr>
-              <a:t>G-spread = YTM − interpolated government YTM. Z-spread = constant add-on to every spot rate. OAS = Z-spread − option value.</a:t>
+              <a:t>Yield-to-worst is the lowest of the YTM and every yield-to-call — the VIVU callable notes work out at 5.15%, the yield to the first call.</a:t>
             </a:r>
             <a:endParaRPr lang="en-US" sz="1150" dirty="0"/>
           </a:p>
@@ -25602,7 +27977,7 @@
                 <a:ea typeface="Calibri" pitchFamily="34" charset="-122"/>
                 <a:cs typeface="Calibri" pitchFamily="34" charset="-120"/>
               </a:rPr>
-              <a:t>Money-market rates come in DR (T-bills, CP) and AOR (CDs, repos) flavours — always convert to a 365-day bond-equivalent yield before comparing.</a:t>
+              <a:t>G-spread differences two yields; Z-spread adds a constant to every spot; OAS strips out the option — below Z for a callable, above Z for a putable.</a:t>
             </a:r>
             <a:endParaRPr lang="en-US" sz="1150" dirty="0"/>
           </a:p>
@@ -25684,7 +28059,7 @@
                 <a:ea typeface="Calibri" pitchFamily="34" charset="-122"/>
                 <a:cs typeface="Calibri" pitchFamily="34" charset="-120"/>
               </a:rPr>
-              <a:t>FRN prices at par when quoted margin = discount margin; Antelas AG 4y FRN at 97 implies a DM of 329 bps against a QM of 250 bps → credit widened.</a:t>
+              <a:t>Money-market rates come as discount or add-on rates — convert both to a 365-day bond-equivalent yield. An FRN sits at par when required margin = quoted margin.</a:t>
             </a:r>
             <a:endParaRPr lang="en-US" sz="1150" dirty="0"/>
           </a:p>
@@ -25766,7 +28141,7 @@
                 <a:ea typeface="Calibri" pitchFamily="34" charset="-122"/>
                 <a:cs typeface="Calibri" pitchFamily="34" charset="-120"/>
               </a:rPr>
-              <a:t>Spot, par and forward curves carry the same information — bootstrap spots from par bonds, forwards from spots; upward curve ⇒ forwards &gt; spot &gt; par.</a:t>
+              <a:t>Spot, par and forward curves are one information set. Upward-sloping curve: forwards above spots, spots above par rates. Bootstrap sequentially.</a:t>
             </a:r>
             <a:endParaRPr lang="en-US" sz="1150" dirty="0"/>
           </a:p>
@@ -26247,7 +28622,7 @@
                 <a:ea typeface="Calibri" pitchFamily="34" charset="-122"/>
                 <a:cs typeface="Calibri" pitchFamily="34" charset="-120"/>
               </a:rPr>
-              <a:t>Source: CFA Institute, Curriculum Vol 6, Learning Module 6, §2 "Bond Pricing and the TVM", pp. 130–134.</a:t>
+              <a:t>Source: CFA Institute, Curriculum Vol 6, Learning Module 6, §2 "Bond Pricing and the Time Value of Money", Equations 1–2, pp. 129–132.</a:t>
             </a:r>
             <a:endParaRPr lang="en-US" sz="750" dirty="0"/>
           </a:p>
@@ -26289,7 +28664,7 @@
                 <a:ea typeface="Calibri" pitchFamily="34" charset="-122"/>
                 <a:cs typeface="Calibri" pitchFamily="34" charset="-120"/>
               </a:rPr>
-              <a:t>The market discount rate r is the rate of return investors demand for the bond's credit, liquidity and maturity risks — also called the required yield.</a:t>
+              <a:t>The market discount rate r is the return investors demand for the bond's credit, liquidity and maturity risks — also called the required yield.</a:t>
             </a:r>
             <a:endParaRPr lang="en-US" sz="1300" dirty="0"/>
           </a:p>
@@ -26351,7 +28726,24 @@
                 <a:ea typeface="Consolas" pitchFamily="34" charset="-122"/>
                 <a:cs typeface="Consolas" pitchFamily="34" charset="-120"/>
               </a:rPr>
-              <a:t>PV  =  PMT₁ / (1 + r)¹  +  PMT₂ / (1 + r)²  +  …  +  (PMTₙ + FVₙ) / (1 + r)ⁿ</a:t>
+              <a:t>PV  =  PMT₁ / (1 + r)¹  +  PMT₂ / (1 + r)²  +  …</a:t>
+            </a:r>
+            <a:endParaRPr lang="en-US" sz="1800" dirty="0"/>
+          </a:p>
+          <a:p>
+            <a:pPr algn="ctr" indent="0" marL="0">
+              <a:buNone/>
+            </a:pPr>
+            <a:r>
+              <a:rPr lang="en-US" sz="1800" b="1" dirty="0">
+                <a:solidFill>
+                  <a:srgbClr val="FFFFFF"/>
+                </a:solidFill>
+                <a:latin typeface="Consolas" pitchFamily="34" charset="0"/>
+                <a:ea typeface="Consolas" pitchFamily="34" charset="-122"/>
+                <a:cs typeface="Consolas" pitchFamily="34" charset="-120"/>
+              </a:rPr>
+              <a:t>+  (PMTₙ + FVₙ) / (1 + r)ⁿ</a:t>
             </a:r>
             <a:endParaRPr lang="en-US" sz="1800" dirty="0"/>
           </a:p>
@@ -26393,7 +28785,7 @@
                 <a:ea typeface="Calibri" pitchFamily="34" charset="-122"/>
                 <a:cs typeface="Calibri" pitchFamily="34" charset="-120"/>
               </a:rPr>
-              <a:t>where: PMTₜ = coupon at period t; FVₙ = face value at maturity; r = market discount rate per period; n = number of periods to maturity.</a:t>
+              <a:t>where: PMTₜ = coupon per period; FVₙ = face value at maturity; r = market discount rate PER PERIOD; n = number of periods to maturity.</a:t>
             </a:r>
             <a:endParaRPr lang="en-US" sz="1100" dirty="0"/>
           </a:p>
@@ -26517,7 +28909,7 @@
                 <a:ea typeface="Calibri" pitchFamily="34" charset="-122"/>
                 <a:cs typeface="Calibri" pitchFamily="34" charset="-120"/>
               </a:rPr>
-              <a:t>Discount factors (1+r)ᵗ grow with r; a higher rate shrinks every future cash flow by more.</a:t>
+              <a:t>Discount factors (1+r)ᵗ grow with r; a higher rate shrinks every future cash flow by more. The cash flows never move — only the denominators.</a:t>
             </a:r>
             <a:endParaRPr lang="en-US" sz="1200" dirty="0"/>
           </a:p>
@@ -26641,7 +29033,7 @@
                 <a:ea typeface="Calibri" pitchFamily="34" charset="-122"/>
                 <a:cs typeface="Calibri" pitchFamily="34" charset="-120"/>
               </a:rPr>
-              <a:t>The PV curve is convex in r — a 50-bp cut moves price by more than a 50-bp hike cuts it (second derivative positive).</a:t>
+              <a:t>The price–yield line is curved. An 80-bp fall raises the price by MORE than an 80-bp rise cuts it. Positive convexity — Deck 15.</a:t>
             </a:r>
             <a:endParaRPr lang="en-US" sz="1200" dirty="0"/>
           </a:p>
@@ -26723,7 +29115,7 @@
                 <a:ea typeface="Trebuchet MS" pitchFamily="34" charset="-122"/>
                 <a:cs typeface="Trebuchet MS" pitchFamily="34" charset="-120"/>
               </a:rPr>
-              <a:t>LONG BONDS MOVE MORE</a:t>
+              <a:t>MATURITY AND COUPON</a:t>
             </a:r>
             <a:endParaRPr lang="en-US" sz="1100" dirty="0"/>
           </a:p>
@@ -26765,7 +29157,7 @@
                 <a:ea typeface="Calibri" pitchFamily="34" charset="-122"/>
                 <a:cs typeface="Calibri" pitchFamily="34" charset="-120"/>
               </a:rPr>
-              <a:t>The longer the maturity and the lower the coupon, the larger the % price change for a given Δr — duration intuition (Deck 15).</a:t>
+              <a:t>The longer the maturity and the lower the coupon, the larger the % price change for a given Δr. That is the duration intuition, arriving early.</a:t>
             </a:r>
             <a:endParaRPr lang="en-US" sz="1200" dirty="0"/>
           </a:p>
@@ -26872,7 +29264,7 @@
                 <a:ea typeface="Trebuchet MS" pitchFamily="34" charset="-122"/>
                 <a:cs typeface="Trebuchet MS" pitchFamily="34" charset="-120"/>
               </a:rPr>
-              <a:t>When coupon &lt; YTM the bond trades at a discount; coupon = YTM → par; coupon &gt; YTM → premium — the three regimes summarised on one line</a:t>
+              <a:t>Coupon &lt; YTM → discount; coupon = YTM → par; coupon &gt; YTM → premium — three regimes, and the price gap is the PV of the coupon shortfall or excess</a:t>
             </a:r>
             <a:endParaRPr lang="en-US" sz="1600" dirty="0"/>
           </a:p>
@@ -26976,7 +29368,7 @@
                 <a:ea typeface="Calibri" pitchFamily="34" charset="-122"/>
                 <a:cs typeface="Calibri" pitchFamily="34" charset="-120"/>
               </a:rPr>
-              <a:t>Source: CFA Institute, Curriculum Vol 6, LM 6, §2 Example 1 (BRWA bond) and Exhibit 3, pp. 130–133.</a:t>
+              <a:t>Source: CFA Institute, Curriculum Vol 6, LM 6, §2, Example 1 (BRWA bond), Exhibits 1–3, pp. 130–132.</a:t>
             </a:r>
             <a:endParaRPr lang="en-US" sz="750" dirty="0"/>
           </a:p>
@@ -27018,7 +29410,7 @@
                 <a:ea typeface="Calibri" pitchFamily="34" charset="-122"/>
                 <a:cs typeface="Calibri" pitchFamily="34" charset="-120"/>
               </a:rPr>
-              <a:t>BRWA 5-year bond, semi-annual 1.6% periodic coupon (= 3.2% p.a.), priced at three different per-period YTMs.</a:t>
+              <a:t>BRWA five-year bond, 3.2% p.a. paid semiannually (1.6% per period), priced at three different per-period market discount rates.</a:t>
             </a:r>
             <a:endParaRPr lang="en-US" sz="1300" dirty="0"/>
           </a:p>
@@ -27039,7 +29431,7 @@
           </p:nvPr>
         </p:nvGraphicFramePr>
         <p:xfrm>
-          <a:off x="320040" y="1188720"/>
+          <a:off x="320040" y="1170432"/>
           <a:ext cx="8503920" cy="914400"/>
         </p:xfrm>
         <a:graphic>
@@ -27047,11 +29439,11 @@
             <a:tbl>
               <a:tblPr/>
               <a:tblGrid>
-                <a:gridCol w="1371600"/>
-                <a:gridCol w="1828800"/>
+                <a:gridCol w="1280160"/>
+                <a:gridCol w="1554480"/>
+                <a:gridCol w="1005840"/>
                 <a:gridCol w="1188720"/>
-                <a:gridCol w="1371600"/>
-                <a:gridCol w="2743200"/>
+                <a:gridCol w="3474720"/>
               </a:tblGrid>
               <a:tr h="274320">
                 <a:tc>
@@ -27271,7 +29663,7 @@
                           <a:ea typeface="Trebuchet MS" pitchFamily="34" charset="-122"/>
                           <a:cs typeface="Trebuchet MS" pitchFamily="34" charset="-120"/>
                         </a:rPr>
-                        <a:t>Intuition</a:t>
+                        <a:t>Where the gap comes from</a:t>
                       </a:r>
                       <a:endParaRPr lang="en-US" sz="1100" dirty="0">
                         <a:latin typeface="Trebuchet MS" charset="0"/>
@@ -27523,7 +29915,7 @@
                           <a:ea typeface="Consolas" pitchFamily="34" charset="-122"/>
                           <a:cs typeface="Consolas" pitchFamily="34" charset="-120"/>
                         </a:rPr>
-                        <a:t>Excess coupon of +0.4/period for 10 periods, discounted at 1.2%</a:t>
+                        <a:t>PV of ten +0.4 excess coupons = +3.75</a:t>
                       </a:r>
                       <a:endParaRPr lang="en-US" sz="1100" dirty="0">
                         <a:latin typeface="Consolas" charset="0"/>
@@ -27775,7 +30167,7 @@
                           <a:ea typeface="Consolas" pitchFamily="34" charset="-122"/>
                           <a:cs typeface="Consolas" pitchFamily="34" charset="-120"/>
                         </a:rPr>
-                        <a:t>Coupon exactly meets the market-demanded rate</a:t>
+                        <a:t>No excess, no shortfall — price = 100</a:t>
                       </a:r>
                       <a:endParaRPr lang="en-US" sz="1100" dirty="0">
                         <a:latin typeface="Consolas" charset="0"/>
@@ -28027,7 +30419,7 @@
                           <a:ea typeface="Consolas" pitchFamily="34" charset="-122"/>
                           <a:cs typeface="Consolas" pitchFamily="34" charset="-120"/>
                         </a:rPr>
-                        <a:t>Deficient coupon of −0.4/period for 10 periods, discounted at 2.0%</a:t>
+                        <a:t>PV of ten −0.4 shortfalls = −3.59</a:t>
                       </a:r>
                       <a:endParaRPr lang="en-US" sz="1100" dirty="0">
                         <a:latin typeface="Consolas" charset="0"/>
@@ -28073,8 +30465,8 @@
         </p:nvSpPr>
         <p:spPr>
           <a:xfrm>
-            <a:off x="320040" y="2606040"/>
-            <a:ext cx="8503920" cy="914400"/>
+            <a:off x="320040" y="2359152"/>
+            <a:ext cx="8503920" cy="731520"/>
           </a:xfrm>
           <a:prstGeom prst="rect">
             <a:avLst/>
@@ -28093,8 +30485,8 @@
         </p:nvSpPr>
         <p:spPr>
           <a:xfrm>
-            <a:off x="320040" y="2606040"/>
-            <a:ext cx="73152" cy="914400"/>
+            <a:off x="320040" y="2359152"/>
+            <a:ext cx="73152" cy="731520"/>
           </a:xfrm>
           <a:prstGeom prst="rect">
             <a:avLst/>
@@ -28113,7 +30505,7 @@
         </p:nvSpPr>
         <p:spPr>
           <a:xfrm>
-            <a:off x="457200" y="2651760"/>
+            <a:off x="457200" y="2404872"/>
             <a:ext cx="8275320" cy="256032"/>
           </a:xfrm>
           <a:prstGeom prst="rect">
@@ -28155,8 +30547,8 @@
         </p:nvSpPr>
         <p:spPr>
           <a:xfrm>
-            <a:off x="457200" y="2926080"/>
-            <a:ext cx="8275320" cy="548640"/>
+            <a:off x="457200" y="2679192"/>
+            <a:ext cx="8275320" cy="365760"/>
           </a:xfrm>
           <a:prstGeom prst="rect">
             <a:avLst/>
@@ -28183,7 +30575,7 @@
                 <a:ea typeface="Calibri" pitchFamily="34" charset="-122"/>
                 <a:cs typeface="Calibri" pitchFamily="34" charset="-120"/>
               </a:rPr>
-              <a:t>A discount (premium) bond's price drifts up (down) toward 100 as maturity approaches, even with the YTM held constant. Total return = coupon income + this predictable capital gain/loss.</a:t>
+              <a:t>Hold the YTM constant and a discount bond drifts UP toward 100, a premium bond drifts DOWN toward 100. Total return = coupon income + this predictable capital gain or loss.</a:t>
             </a:r>
             <a:endParaRPr lang="en-US" sz="1200" dirty="0"/>
           </a:p>
@@ -28197,14 +30589,14 @@
         </p:nvSpPr>
         <p:spPr>
           <a:xfrm>
-            <a:off x="320040" y="3657600"/>
-            <a:ext cx="8503920" cy="640080"/>
+            <a:off x="320040" y="3200400"/>
+            <a:ext cx="4160520" cy="1097280"/>
           </a:xfrm>
           <a:prstGeom prst="rect">
             <a:avLst/>
           </a:prstGeom>
           <a:solidFill>
-            <a:srgbClr val="F5F7FA"/>
+            <a:srgbClr val="FEF0E7"/>
           </a:solidFill>
           <a:ln/>
         </p:spPr>
@@ -28217,14 +30609,14 @@
         </p:nvSpPr>
         <p:spPr>
           <a:xfrm>
-            <a:off x="320040" y="3657600"/>
-            <a:ext cx="73152" cy="640080"/>
+            <a:off x="320040" y="3200400"/>
+            <a:ext cx="73152" cy="1097280"/>
           </a:xfrm>
           <a:prstGeom prst="rect">
             <a:avLst/>
           </a:prstGeom>
           <a:solidFill>
-            <a:srgbClr val="1B2A4A"/>
+            <a:srgbClr val="E8600A"/>
           </a:solidFill>
           <a:ln/>
         </p:spPr>
@@ -28237,8 +30629,8 @@
         </p:nvSpPr>
         <p:spPr>
           <a:xfrm>
-            <a:off x="457200" y="3703320"/>
-            <a:ext cx="8275320" cy="256032"/>
+            <a:off x="457200" y="3246120"/>
+            <a:ext cx="3931920" cy="256032"/>
           </a:xfrm>
           <a:prstGeom prst="rect">
             <a:avLst/>
@@ -28259,13 +30651,13 @@
             <a:r>
               <a:rPr lang="en-US" sz="1100" b="1" spc="400" kern="0" dirty="0">
                 <a:solidFill>
-                  <a:srgbClr val="1B2A4A"/>
+                  <a:srgbClr val="E8600A"/>
                 </a:solidFill>
                 <a:latin typeface="Trebuchet MS" pitchFamily="34" charset="0"/>
                 <a:ea typeface="Trebuchet MS" pitchFamily="34" charset="-122"/>
                 <a:cs typeface="Trebuchet MS" pitchFamily="34" charset="-120"/>
               </a:rPr>
-              <a:t>ANNUALIZED STATEMENT</a:t>
+              <a:t>YTM — THE THREE CONDITIONS</a:t>
             </a:r>
             <a:endParaRPr lang="en-US" sz="1100" dirty="0"/>
           </a:p>
@@ -28279,8 +30671,8 @@
         </p:nvSpPr>
         <p:spPr>
           <a:xfrm>
-            <a:off x="457200" y="3977640"/>
-            <a:ext cx="8275320" cy="274320"/>
+            <a:off x="457200" y="3520440"/>
+            <a:ext cx="3931920" cy="731520"/>
           </a:xfrm>
           <a:prstGeom prst="rect">
             <a:avLst/>
@@ -28307,7 +30699,131 @@
                 <a:ea typeface="Calibri" pitchFamily="34" charset="-122"/>
                 <a:cs typeface="Calibri" pitchFamily="34" charset="-120"/>
               </a:rPr>
-              <a:t>Equivalently: BRWA is at a premium when stated annual YTM 2.4% &lt; stated annual coupon 3.2%. Interest rates are annualized by multiplying periodic × m.</a:t>
+              <a:t>You earn the quoted YTM only if (1) you hold to maturity, (2) the issuer pays every coupon and the principal in full and on time, and (3) you reinvest every coupon AT the YTM.</a:t>
+            </a:r>
+            <a:endParaRPr lang="en-US" sz="1200" dirty="0"/>
+          </a:p>
+        </p:txBody>
+      </p:sp>
+      <p:sp>
+        <p:nvSpPr>
+          <p:cNvPr id="18" name="Shape 15"/>
+          <p:cNvSpPr/>
+          <p:nvPr/>
+        </p:nvSpPr>
+        <p:spPr>
+          <a:xfrm>
+            <a:off x="4663440" y="3200400"/>
+            <a:ext cx="4160520" cy="1097280"/>
+          </a:xfrm>
+          <a:prstGeom prst="rect">
+            <a:avLst/>
+          </a:prstGeom>
+          <a:solidFill>
+            <a:srgbClr val="F5F7FA"/>
+          </a:solidFill>
+          <a:ln/>
+        </p:spPr>
+      </p:sp>
+      <p:sp>
+        <p:nvSpPr>
+          <p:cNvPr id="19" name="Shape 16"/>
+          <p:cNvSpPr/>
+          <p:nvPr/>
+        </p:nvSpPr>
+        <p:spPr>
+          <a:xfrm>
+            <a:off x="4663440" y="3200400"/>
+            <a:ext cx="73152" cy="1097280"/>
+          </a:xfrm>
+          <a:prstGeom prst="rect">
+            <a:avLst/>
+          </a:prstGeom>
+          <a:solidFill>
+            <a:srgbClr val="1B2A4A"/>
+          </a:solidFill>
+          <a:ln/>
+        </p:spPr>
+      </p:sp>
+      <p:sp>
+        <p:nvSpPr>
+          <p:cNvPr id="20" name="Text 17"/>
+          <p:cNvSpPr txBox="1"/>
+          <p:nvPr/>
+        </p:nvSpPr>
+        <p:spPr>
+          <a:xfrm>
+            <a:off x="4800600" y="3246120"/>
+            <a:ext cx="3931920" cy="256032"/>
+          </a:xfrm>
+          <a:prstGeom prst="rect">
+            <a:avLst/>
+          </a:prstGeom>
+          <a:noFill/>
+          <a:ln/>
+        </p:spPr>
+        <p:txBody>
+          <a:bodyPr wrap="square" lIns="508" tIns="508" rIns="508" bIns="508" rtlCol="0" anchor="ctr">
+            <a:normAutofit/>
+            <a:spAutoFit/>
+          </a:bodyPr>
+          <a:lstStyle/>
+          <a:p>
+            <a:pPr algn="l" indent="0" marL="0">
+              <a:buNone/>
+            </a:pPr>
+            <a:r>
+              <a:rPr lang="en-US" sz="1100" b="1" spc="400" kern="0" dirty="0">
+                <a:solidFill>
+                  <a:srgbClr val="1B2A4A"/>
+                </a:solidFill>
+                <a:latin typeface="Trebuchet MS" pitchFamily="34" charset="0"/>
+                <a:ea typeface="Trebuchet MS" pitchFamily="34" charset="-122"/>
+                <a:cs typeface="Trebuchet MS" pitchFamily="34" charset="-120"/>
+              </a:rPr>
+              <a:t>ANNUALIZED STATEMENT</a:t>
+            </a:r>
+            <a:endParaRPr lang="en-US" sz="1100" dirty="0"/>
+          </a:p>
+        </p:txBody>
+      </p:sp>
+      <p:sp>
+        <p:nvSpPr>
+          <p:cNvPr id="21" name="Text 18"/>
+          <p:cNvSpPr txBox="1"/>
+          <p:nvPr/>
+        </p:nvSpPr>
+        <p:spPr>
+          <a:xfrm>
+            <a:off x="4800600" y="3520440"/>
+            <a:ext cx="3931920" cy="731520"/>
+          </a:xfrm>
+          <a:prstGeom prst="rect">
+            <a:avLst/>
+          </a:prstGeom>
+          <a:noFill/>
+          <a:ln/>
+        </p:spPr>
+        <p:txBody>
+          <a:bodyPr wrap="square" lIns="508" tIns="508" rIns="508" bIns="508" rtlCol="0" anchor="t">
+            <a:normAutofit/>
+            <a:spAutoFit/>
+          </a:bodyPr>
+          <a:lstStyle/>
+          <a:p>
+            <a:pPr algn="l" indent="0" marL="0">
+              <a:buNone/>
+            </a:pPr>
+            <a:r>
+              <a:rPr lang="en-US" sz="1200" dirty="0">
+                <a:solidFill>
+                  <a:srgbClr val="334155"/>
+                </a:solidFill>
+                <a:latin typeface="Calibri" pitchFamily="34" charset="0"/>
+                <a:ea typeface="Calibri" pitchFamily="34" charset="-122"/>
+                <a:cs typeface="Calibri" pitchFamily="34" charset="-120"/>
+              </a:rPr>
+              <a:t>Same fact stated per annum: BRWA is at a premium because its 3.2% stated coupon beats the 2.4% stated market discount rate. Periodic rate × m = stated annual rate.</a:t>
             </a:r>
             <a:endParaRPr lang="en-US" sz="1200" dirty="0"/>
           </a:p>
@@ -28406,7 +30922,7 @@
               <a:buNone/>
             </a:pPr>
             <a:r>
-              <a:rPr lang="en-US" sz="1700" b="1" dirty="0">
+              <a:rPr lang="en-US" sz="1600" b="1" dirty="0">
                 <a:solidFill>
                   <a:srgbClr val="FFFFFF"/>
                 </a:solidFill>
@@ -28414,9 +30930,9 @@
                 <a:ea typeface="Trebuchet MS" pitchFamily="34" charset="-122"/>
                 <a:cs typeface="Trebuchet MS" pitchFamily="34" charset="-120"/>
               </a:rPr>
-              <a:t>The Greece 5-year 3.5% coupon bond at a 5% YTM prices at EUR 93.50 per 100 — a worked proof of the discount-bond intuition</a:t>
-            </a:r>
-            <a:endParaRPr lang="en-US" sz="1700" dirty="0"/>
+              <a:t>Worked — a five-year 3.25% semiannual bond at a 4.0% market discount rate prices at 96.632, and the 3.368 discount is exactly the PV of the deficient coupons</a:t>
+            </a:r>
+            <a:endParaRPr lang="en-US" sz="1600" dirty="0"/>
           </a:p>
         </p:txBody>
       </p:sp>
@@ -28518,7 +31034,7 @@
                 <a:ea typeface="Calibri" pitchFamily="34" charset="-122"/>
                 <a:cs typeface="Calibri" pitchFamily="34" charset="-120"/>
               </a:rPr>
-              <a:t>Source: CFA Institute, Curriculum Vol 6, LM 6, §2 Bond pricing with discount rate, pp. 131–134.</a:t>
+              <a:t>Source: CFA Institute, Curriculum Vol 6, LM 6, Learning Module Self-Assessment Q1, pp. 126–127; cross-check against §2 Exhibit 1, p. 131.</a:t>
             </a:r>
             <a:endParaRPr lang="en-US" sz="750" dirty="0"/>
           </a:p>
@@ -28560,7 +31076,7 @@
                 <a:ea typeface="Calibri" pitchFamily="34" charset="-122"/>
                 <a:cs typeface="Calibri" pitchFamily="34" charset="-120"/>
               </a:rPr>
-              <a:t>Coupon 3.5% &lt; YTM 5.0% → the bond trades at a discount. Decompose the price into PV-of-coupons plus PV-of-face.</a:t>
+              <a:t>Coupon 3.25% &lt; discount rate 4.0% → the bond must trade below par. Convert to PERIODS before you touch the calculator.</a:t>
             </a:r>
             <a:endParaRPr lang="en-US" sz="1300" dirty="0"/>
           </a:p>
@@ -28574,7 +31090,7 @@
         </p:nvSpPr>
         <p:spPr>
           <a:xfrm>
-            <a:off x="320040" y="1207008"/>
+            <a:off x="320040" y="1152144"/>
             <a:ext cx="8503920" cy="658368"/>
           </a:xfrm>
           <a:prstGeom prst="rect">
@@ -28594,7 +31110,7 @@
         </p:nvSpPr>
         <p:spPr>
           <a:xfrm>
-            <a:off x="411480" y="1207008"/>
+            <a:off x="411480" y="1152144"/>
             <a:ext cx="8321040" cy="658368"/>
           </a:xfrm>
           <a:prstGeom prst="rect">
@@ -28622,7 +31138,7 @@
                 <a:ea typeface="Consolas" pitchFamily="34" charset="-122"/>
                 <a:cs typeface="Consolas" pitchFamily="34" charset="-120"/>
               </a:rPr>
-              <a:t>P  =  C · [ 1 − (1+r)⁻ⁿ ] / r   +   FV / (1 + r)ⁿ</a:t>
+              <a:t>P  =  PMT · [ 1 − (1+r)⁻ⁿ ] / r   +   FV / (1 + r)ⁿ</a:t>
             </a:r>
             <a:endParaRPr lang="en-US" sz="1800" dirty="0"/>
           </a:p>
@@ -28636,7 +31152,7 @@
         </p:nvSpPr>
         <p:spPr>
           <a:xfrm>
-            <a:off x="320040" y="1892808"/>
+            <a:off x="320040" y="1837944"/>
             <a:ext cx="8503920" cy="256032"/>
           </a:xfrm>
           <a:prstGeom prst="rect">
@@ -28664,7 +31180,7 @@
                 <a:ea typeface="Calibri" pitchFamily="34" charset="-122"/>
                 <a:cs typeface="Calibri" pitchFamily="34" charset="-120"/>
               </a:rPr>
-              <a:t>where: Annuity-form for level coupons + single PV of par. Equivalent to summing each cash flow individually.</a:t>
+              <a:t>where: Annuity form for level coupons plus a single PV of face. Identical to summing the cash flows one by one — just faster.</a:t>
             </a:r>
             <a:endParaRPr lang="en-US" sz="1100" dirty="0"/>
           </a:p>
@@ -28678,8 +31194,8 @@
         </p:nvSpPr>
         <p:spPr>
           <a:xfrm>
-            <a:off x="320040" y="2331720"/>
-            <a:ext cx="8503920" cy="1965960"/>
+            <a:off x="320040" y="2057400"/>
+            <a:ext cx="8503920" cy="2240280"/>
           </a:xfrm>
           <a:prstGeom prst="rect">
             <a:avLst/>
@@ -28703,7 +31219,7 @@
         </p:nvSpPr>
         <p:spPr>
           <a:xfrm>
-            <a:off x="457200" y="2377440"/>
+            <a:off x="457200" y="2103120"/>
             <a:ext cx="8229600" cy="256032"/>
           </a:xfrm>
           <a:prstGeom prst="rect">
@@ -28731,7 +31247,7 @@
                 <a:ea typeface="Trebuchet MS" pitchFamily="34" charset="-122"/>
                 <a:cs typeface="Trebuchet MS" pitchFamily="34" charset="-120"/>
               </a:rPr>
-              <a:t>CFA LM 6 — GREECE 5-YEAR SOVEREIGN · ANNUAL COUPONS</a:t>
+              <a:t>CFA LM 6 — 5-YEAR 3.25% SEMIANNUAL CORPORATE BOND · 30/360</a:t>
             </a:r>
             <a:endParaRPr lang="en-US" sz="1100" dirty="0"/>
           </a:p>
@@ -28745,7 +31261,7 @@
         </p:nvSpPr>
         <p:spPr>
           <a:xfrm>
-            <a:off x="457200" y="2670048"/>
+            <a:off x="457200" y="2395728"/>
             <a:ext cx="8229600" cy="457200"/>
           </a:xfrm>
           <a:prstGeom prst="rect">
@@ -28773,7 +31289,7 @@
                 <a:ea typeface="Calibri" pitchFamily="34" charset="-122"/>
                 <a:cs typeface="Calibri" pitchFamily="34" charset="-120"/>
               </a:rPr>
-              <a:t>Face EUR 100, annual coupon 3.5%, market YTM = 5.0%. Cash flows: 3.5, 3.5, 3.5, 3.5, 103.5. Compute price.</a:t>
+              <a:t>Face 100, coupon 3.25% p.a. paid semiannually, market discount rate 4.0% p.a. Compute the price.</a:t>
             </a:r>
             <a:endParaRPr lang="en-US" sz="1200" dirty="0"/>
           </a:p>
@@ -28787,8 +31303,8 @@
         </p:nvSpPr>
         <p:spPr>
           <a:xfrm>
-            <a:off x="457200" y="3182112"/>
-            <a:ext cx="8229600" cy="603504"/>
+            <a:off x="457200" y="2907792"/>
+            <a:ext cx="8229600" cy="877824"/>
           </a:xfrm>
           <a:prstGeom prst="rect">
             <a:avLst/>
@@ -28810,7 +31326,7 @@
               <a:buNone/>
             </a:pPr>
             <a:r>
-              <a:rPr lang="en-US" sz="1050" b="1" dirty="0">
+              <a:rPr lang="en-US" sz="1100" b="1" dirty="0">
                 <a:solidFill>
                   <a:srgbClr val="1B2A4A"/>
                 </a:solidFill>
@@ -28827,7 +31343,7 @@
               <a:buNone/>
             </a:pPr>
             <a:r>
-              <a:rPr lang="en-US" sz="1050" dirty="0">
+              <a:rPr lang="en-US" sz="1100" dirty="0">
                 <a:solidFill>
                   <a:srgbClr val="334155"/>
                 </a:solidFill>
@@ -28835,7 +31351,7 @@
                 <a:ea typeface="Calibri" pitchFamily="34" charset="-122"/>
                 <a:cs typeface="Calibri" pitchFamily="34" charset="-120"/>
               </a:rPr>
-              <a:t>PV of coupons: C × [1 − (1.05)⁻⁵] / 0.05 = 3.5 × [1 − 0.78353] / 0.05 = 3.5 × 4.3295 = EUR 15.15
+              <a:t>Convert first: n = 5 × 2 = 10 periods · PMT = 3.25 / 2 = 1.625 · r = 4.0% / 2 = 2.0% per period
 </a:t>
             </a:r>
             <a:pPr indent="0" marL="0">
@@ -28845,7 +31361,7 @@
               <a:buNone/>
             </a:pPr>
             <a:r>
-              <a:rPr lang="en-US" sz="1050" b="1" dirty="0">
+              <a:rPr lang="en-US" sz="1100" b="1" dirty="0">
                 <a:solidFill>
                   <a:srgbClr val="1B2A4A"/>
                 </a:solidFill>
@@ -28862,7 +31378,7 @@
               <a:buNone/>
             </a:pPr>
             <a:r>
-              <a:rPr lang="en-US" sz="1050" dirty="0">
+              <a:rPr lang="en-US" sz="1100" dirty="0">
                 <a:solidFill>
                   <a:srgbClr val="334155"/>
                 </a:solidFill>
@@ -28870,7 +31386,7 @@
                 <a:ea typeface="Calibri" pitchFamily="34" charset="-122"/>
                 <a:cs typeface="Calibri" pitchFamily="34" charset="-120"/>
               </a:rPr>
-              <a:t>PV of face:    100 / (1.05)⁵ = 100 / 1.27628 = EUR 78.35
+              <a:t>PV of coupons: 1.625 × [1 − (1.02)⁻¹⁰] / 0.02 = 1.625 × 8.98259 = 14.597
 </a:t>
             </a:r>
             <a:pPr indent="0" marL="0">
@@ -28880,7 +31396,7 @@
               <a:buNone/>
             </a:pPr>
             <a:r>
-              <a:rPr lang="en-US" sz="1050" b="1" dirty="0">
+              <a:rPr lang="en-US" sz="1100" b="1" dirty="0">
                 <a:solidFill>
                   <a:srgbClr val="1B2A4A"/>
                 </a:solidFill>
@@ -28897,7 +31413,7 @@
               <a:buNone/>
             </a:pPr>
             <a:r>
-              <a:rPr lang="en-US" sz="1050" dirty="0">
+              <a:rPr lang="en-US" sz="1100" dirty="0">
                 <a:solidFill>
                   <a:srgbClr val="334155"/>
                 </a:solidFill>
@@ -28905,7 +31421,7 @@
                 <a:ea typeface="Calibri" pitchFamily="34" charset="-122"/>
                 <a:cs typeface="Calibri" pitchFamily="34" charset="-120"/>
               </a:rPr>
-              <a:t>Price = PV(coupons) + PV(face) = 15.15 + 78.35 = EUR 93.50
+              <a:t>PV of face: 100 / (1.02)¹⁰ = 100 / 1.21899 = 82.035
 </a:t>
             </a:r>
             <a:pPr indent="0" marL="0">
@@ -28915,7 +31431,7 @@
               <a:buNone/>
             </a:pPr>
             <a:r>
-              <a:rPr lang="en-US" sz="1050" b="1" dirty="0">
+              <a:rPr lang="en-US" sz="1100" b="1" dirty="0">
                 <a:solidFill>
                   <a:srgbClr val="1B2A4A"/>
                 </a:solidFill>
@@ -28932,7 +31448,7 @@
               <a:buNone/>
             </a:pPr>
             <a:r>
-              <a:rPr lang="en-US" sz="1050" dirty="0">
+              <a:rPr lang="en-US" sz="1100" dirty="0">
                 <a:solidFill>
                   <a:srgbClr val="334155"/>
                 </a:solidFill>
@@ -28940,9 +31456,44 @@
                 <a:ea typeface="Calibri" pitchFamily="34" charset="-122"/>
                 <a:cs typeface="Calibri" pitchFamily="34" charset="-120"/>
               </a:rPr>
-              <a:t>Check: coupon 3.5% &lt; YTM 5.0% → price &lt; par → discount bond ✓</a:t>
-            </a:r>
-            <a:endParaRPr lang="en-US" sz="1050" dirty="0"/>
+              <a:t>Price = 14.597 + 82.035 = 96.632 per 100 of par value
+</a:t>
+            </a:r>
+            <a:pPr indent="0" marL="0">
+              <a:spcAft>
+                <a:spcPts val="200"/>
+              </a:spcAft>
+              <a:buNone/>
+            </a:pPr>
+            <a:r>
+              <a:rPr lang="en-US" sz="1100" b="1" dirty="0">
+                <a:solidFill>
+                  <a:srgbClr val="1B2A4A"/>
+                </a:solidFill>
+                <a:latin typeface="Calibri" pitchFamily="34" charset="0"/>
+                <a:ea typeface="Calibri" pitchFamily="34" charset="-122"/>
+                <a:cs typeface="Calibri" pitchFamily="34" charset="-120"/>
+              </a:rPr>
+              <a:t>5. </a:t>
+            </a:r>
+            <a:pPr indent="0" marL="0">
+              <a:spcAft>
+                <a:spcPts val="200"/>
+              </a:spcAft>
+              <a:buNone/>
+            </a:pPr>
+            <a:r>
+              <a:rPr lang="en-US" sz="1100" dirty="0">
+                <a:solidFill>
+                  <a:srgbClr val="334155"/>
+                </a:solidFill>
+                <a:latin typeface="Calibri" pitchFamily="34" charset="0"/>
+                <a:ea typeface="Calibri" pitchFamily="34" charset="-122"/>
+                <a:cs typeface="Calibri" pitchFamily="34" charset="-120"/>
+              </a:rPr>
+              <a:t>Cross-check: deficient coupon = (4.00 − 3.25)/2 = 0.375 per period → 0.375 × 8.98259 = 3.368 = 100 − 96.632 ✓</a:t>
+            </a:r>
+            <a:endParaRPr lang="en-US" sz="1100" dirty="0"/>
           </a:p>
         </p:txBody>
       </p:sp>
@@ -29002,7 +31553,7 @@
                 <a:ea typeface="Consolas" pitchFamily="34" charset="-122"/>
                 <a:cs typeface="Consolas" pitchFamily="34" charset="-120"/>
               </a:rPr>
-              <a:t>P  =  EUR 93.50  per 100 face (a 6.50% discount to par, pulled to par over 5 years)</a:t>
+              <a:t>P  =  96.632  per 100 face   ·   the 3.368 discount IS the PV of ten 0.375 coupon shortfalls</a:t>
             </a:r>
             <a:endParaRPr lang="en-US" sz="1150" dirty="0"/>
           </a:p>
@@ -29213,7 +31764,7 @@
                 <a:ea typeface="Calibri" pitchFamily="34" charset="-122"/>
                 <a:cs typeface="Calibri" pitchFamily="34" charset="-120"/>
               </a:rPr>
-              <a:t>Source: CFA Institute, Curriculum Vol 6, LM 6, §3 "Flat Price, Accrued Interest, Full Price", pp. 141–148.</a:t>
+              <a:t>Source: CFA Institute, Curriculum Vol 6, LM 6, §2 "Flat Price, Accrued Interest, and the Full Price", Equations 3–6 and Exhibit 5, pp. 134–136.</a:t>
             </a:r>
             <a:endParaRPr lang="en-US" sz="750" dirty="0"/>
           </a:p>
@@ -29255,7 +31806,7 @@
                 <a:ea typeface="Calibri" pitchFamily="34" charset="-122"/>
                 <a:cs typeface="Calibri" pitchFamily="34" charset="-120"/>
               </a:rPr>
-              <a:t>If full prices were quoted, investors would see a price jump down every coupon date — a quotation artefact. Flat price removes this sawtooth.</a:t>
+              <a:t>Quote full prices and the screen climbs every day, then gaps down on each coupon date — a sawtooth from the calendar.</a:t>
             </a:r>
             <a:endParaRPr lang="en-US" sz="1300" dirty="0"/>
           </a:p>
@@ -29269,8 +31820,8 @@
         </p:nvSpPr>
         <p:spPr>
           <a:xfrm>
-            <a:off x="320040" y="1207008"/>
-            <a:ext cx="8503920" cy="713232"/>
+            <a:off x="320040" y="1188720"/>
+            <a:ext cx="8503920" cy="777240"/>
           </a:xfrm>
           <a:prstGeom prst="rect">
             <a:avLst/>
@@ -29289,8 +31840,8 @@
         </p:nvSpPr>
         <p:spPr>
           <a:xfrm>
-            <a:off x="411480" y="1207008"/>
-            <a:ext cx="8321040" cy="713232"/>
+            <a:off x="411480" y="1188720"/>
+            <a:ext cx="8321040" cy="777240"/>
           </a:xfrm>
           <a:prstGeom prst="rect">
             <a:avLst/>
@@ -29321,6 +31872,23 @@
             </a:r>
             <a:endParaRPr lang="en-US" sz="1800" dirty="0"/>
           </a:p>
+          <a:p>
+            <a:pPr algn="ctr" indent="0" marL="0">
+              <a:buNone/>
+            </a:pPr>
+            <a:r>
+              <a:rPr lang="en-US" sz="1800" b="1" dirty="0">
+                <a:solidFill>
+                  <a:srgbClr val="FFFFFF"/>
+                </a:solidFill>
+                <a:latin typeface="Consolas" pitchFamily="34" charset="0"/>
+                <a:ea typeface="Consolas" pitchFamily="34" charset="-122"/>
+                <a:cs typeface="Consolas" pitchFamily="34" charset="-120"/>
+              </a:rPr>
+              <a:t>PV_Full  =  PV_last-coupon-date  ×  (1 + r)^(t/T)</a:t>
+            </a:r>
+            <a:endParaRPr lang="en-US" sz="1800" dirty="0"/>
+          </a:p>
         </p:txBody>
       </p:sp>
       <p:sp>
@@ -29331,7 +31899,7 @@
         </p:nvSpPr>
         <p:spPr>
           <a:xfrm>
-            <a:off x="320040" y="1947672"/>
+            <a:off x="320040" y="1993392"/>
             <a:ext cx="8503920" cy="256032"/>
           </a:xfrm>
           <a:prstGeom prst="rect">
@@ -29359,7 +31927,7 @@
                 <a:ea typeface="Calibri" pitchFamily="34" charset="-122"/>
                 <a:cs typeface="Calibri" pitchFamily="34" charset="-120"/>
               </a:rPr>
-              <a:t>where: t = days elapsed since last coupon; T = days in the full coupon period; PMT = coupon per period. Day count = Act/Act or 30/360.</a:t>
+              <a:t>where: t = days elapsed since the last coupon; T = days in the full coupon period; PMT = coupon per period. Day count is Act/Act or 30/360.</a:t>
             </a:r>
             <a:endParaRPr lang="en-US" sz="1100" dirty="0"/>
           </a:p>
@@ -29373,8 +31941,8 @@
         </p:nvSpPr>
         <p:spPr>
           <a:xfrm>
-            <a:off x="320040" y="2331720"/>
-            <a:ext cx="4160520" cy="1920240"/>
+            <a:off x="320040" y="2377440"/>
+            <a:ext cx="2743200" cy="1920240"/>
           </a:xfrm>
           <a:prstGeom prst="rect">
             <a:avLst/>
@@ -29393,7 +31961,7 @@
         </p:nvSpPr>
         <p:spPr>
           <a:xfrm>
-            <a:off x="320040" y="2331720"/>
+            <a:off x="320040" y="2377440"/>
             <a:ext cx="73152" cy="1920240"/>
           </a:xfrm>
           <a:prstGeom prst="rect">
@@ -29413,8 +31981,8 @@
         </p:nvSpPr>
         <p:spPr>
           <a:xfrm>
-            <a:off x="457200" y="2377440"/>
-            <a:ext cx="3931920" cy="256032"/>
+            <a:off x="457200" y="2423160"/>
+            <a:ext cx="2514600" cy="256032"/>
           </a:xfrm>
           <a:prstGeom prst="rect">
             <a:avLst/>
@@ -29441,7 +32009,7 @@
                 <a:ea typeface="Trebuchet MS" pitchFamily="34" charset="-122"/>
                 <a:cs typeface="Trebuchet MS" pitchFamily="34" charset="-120"/>
               </a:rPr>
-              <a:t>FLAT (CLEAN / QUOTED)</a:t>
+              <a:t>FLAT  (CLEAN)</a:t>
             </a:r>
             <a:endParaRPr lang="en-US" sz="1100" dirty="0"/>
           </a:p>
@@ -29455,8 +32023,8 @@
         </p:nvSpPr>
         <p:spPr>
           <a:xfrm>
-            <a:off x="457200" y="2651760"/>
-            <a:ext cx="3931920" cy="1554480"/>
+            <a:off x="457200" y="2697480"/>
+            <a:ext cx="2514600" cy="1554480"/>
           </a:xfrm>
           <a:prstGeom prst="rect">
             <a:avLst/>
@@ -29483,7 +32051,7 @@
                 <a:ea typeface="Calibri" pitchFamily="34" charset="-122"/>
                 <a:cs typeface="Calibri" pitchFamily="34" charset="-120"/>
               </a:rPr>
-              <a:t>What dealers show on the screen. Removes the mechanical intra-period accrual so price changes reflect only yield moves. Used for all quoted-price statistics and for computing spreads.</a:t>
+              <a:t>What dealers show on the screen, and what every price statistic and spread is computed from. Strips out the mechanical accrual, so a price move means a yield move.</a:t>
             </a:r>
             <a:endParaRPr lang="en-US" sz="1200" dirty="0"/>
           </a:p>
@@ -29497,8 +32065,8 @@
         </p:nvSpPr>
         <p:spPr>
           <a:xfrm>
-            <a:off x="4663440" y="2331720"/>
-            <a:ext cx="4160520" cy="1920240"/>
+            <a:off x="3200400" y="2377440"/>
+            <a:ext cx="2743200" cy="1920240"/>
           </a:xfrm>
           <a:prstGeom prst="rect">
             <a:avLst/>
@@ -29517,7 +32085,7 @@
         </p:nvSpPr>
         <p:spPr>
           <a:xfrm>
-            <a:off x="4663440" y="2331720"/>
+            <a:off x="3200400" y="2377440"/>
             <a:ext cx="73152" cy="1920240"/>
           </a:xfrm>
           <a:prstGeom prst="rect">
@@ -29537,8 +32105,8 @@
         </p:nvSpPr>
         <p:spPr>
           <a:xfrm>
-            <a:off x="4800600" y="2377440"/>
-            <a:ext cx="3931920" cy="256032"/>
+            <a:off x="3337560" y="2423160"/>
+            <a:ext cx="2514600" cy="256032"/>
           </a:xfrm>
           <a:prstGeom prst="rect">
             <a:avLst/>
@@ -29565,7 +32133,7 @@
                 <a:ea typeface="Trebuchet MS" pitchFamily="34" charset="-122"/>
                 <a:cs typeface="Trebuchet MS" pitchFamily="34" charset="-120"/>
               </a:rPr>
-              <a:t>FULL (DIRTY / INVOICE)</a:t>
+              <a:t>FULL  (DIRTY)</a:t>
             </a:r>
             <a:endParaRPr lang="en-US" sz="1100" dirty="0"/>
           </a:p>
@@ -29579,8 +32147,8 @@
         </p:nvSpPr>
         <p:spPr>
           <a:xfrm>
-            <a:off x="4800600" y="2651760"/>
-            <a:ext cx="3931920" cy="1554480"/>
+            <a:off x="3337560" y="2697480"/>
+            <a:ext cx="2514600" cy="1554480"/>
           </a:xfrm>
           <a:prstGeom prst="rect">
             <a:avLst/>
@@ -29607,7 +32175,131 @@
                 <a:ea typeface="Calibri" pitchFamily="34" charset="-122"/>
                 <a:cs typeface="Calibri" pitchFamily="34" charset="-120"/>
               </a:rPr>
-              <a:t>Actual cash paid by buyer on settlement. Includes the portion of the next coupon that accrued to the seller during their holding period. AI does NOT depend on yield — only on the calendar.</a:t>
+              <a:t>The cash the buyer actually wires at settlement. Includes the slice of the next coupon earned by the seller. Depends on the calendar only — never on the yield.</a:t>
+            </a:r>
+            <a:endParaRPr lang="en-US" sz="1200" dirty="0"/>
+          </a:p>
+        </p:txBody>
+      </p:sp>
+      <p:sp>
+        <p:nvSpPr>
+          <p:cNvPr id="20" name="Shape 18"/>
+          <p:cNvSpPr/>
+          <p:nvPr/>
+        </p:nvSpPr>
+        <p:spPr>
+          <a:xfrm>
+            <a:off x="6080760" y="2377440"/>
+            <a:ext cx="2743200" cy="1920240"/>
+          </a:xfrm>
+          <a:prstGeom prst="rect">
+            <a:avLst/>
+          </a:prstGeom>
+          <a:solidFill>
+            <a:srgbClr val="FEF0E7"/>
+          </a:solidFill>
+          <a:ln/>
+        </p:spPr>
+      </p:sp>
+      <p:sp>
+        <p:nvSpPr>
+          <p:cNvPr id="21" name="Shape 19"/>
+          <p:cNvSpPr/>
+          <p:nvPr/>
+        </p:nvSpPr>
+        <p:spPr>
+          <a:xfrm>
+            <a:off x="6080760" y="2377440"/>
+            <a:ext cx="73152" cy="1920240"/>
+          </a:xfrm>
+          <a:prstGeom prst="rect">
+            <a:avLst/>
+          </a:prstGeom>
+          <a:solidFill>
+            <a:srgbClr val="E8600A"/>
+          </a:solidFill>
+          <a:ln/>
+        </p:spPr>
+      </p:sp>
+      <p:sp>
+        <p:nvSpPr>
+          <p:cNvPr id="22" name="Text 20"/>
+          <p:cNvSpPr txBox="1"/>
+          <p:nvPr/>
+        </p:nvSpPr>
+        <p:spPr>
+          <a:xfrm>
+            <a:off x="6217920" y="2423160"/>
+            <a:ext cx="2514600" cy="256032"/>
+          </a:xfrm>
+          <a:prstGeom prst="rect">
+            <a:avLst/>
+          </a:prstGeom>
+          <a:noFill/>
+          <a:ln/>
+        </p:spPr>
+        <p:txBody>
+          <a:bodyPr wrap="square" lIns="508" tIns="508" rIns="508" bIns="508" rtlCol="0" anchor="ctr">
+            <a:normAutofit/>
+            <a:spAutoFit/>
+          </a:bodyPr>
+          <a:lstStyle/>
+          <a:p>
+            <a:pPr algn="l" indent="0" marL="0">
+              <a:buNone/>
+            </a:pPr>
+            <a:r>
+              <a:rPr lang="en-US" sz="1100" b="1" spc="400" kern="0" dirty="0">
+                <a:solidFill>
+                  <a:srgbClr val="E8600A"/>
+                </a:solidFill>
+                <a:latin typeface="Trebuchet MS" pitchFamily="34" charset="0"/>
+                <a:ea typeface="Trebuchet MS" pitchFamily="34" charset="-122"/>
+                <a:cs typeface="Trebuchet MS" pitchFamily="34" charset="-120"/>
+              </a:rPr>
+              <a:t>DAY COUNT SETS t / T</a:t>
+            </a:r>
+            <a:endParaRPr lang="en-US" sz="1100" dirty="0"/>
+          </a:p>
+        </p:txBody>
+      </p:sp>
+      <p:sp>
+        <p:nvSpPr>
+          <p:cNvPr id="23" name="Text 21"/>
+          <p:cNvSpPr txBox="1"/>
+          <p:nvPr/>
+        </p:nvSpPr>
+        <p:spPr>
+          <a:xfrm>
+            <a:off x="6217920" y="2697480"/>
+            <a:ext cx="2514600" cy="1554480"/>
+          </a:xfrm>
+          <a:prstGeom prst="rect">
+            <a:avLst/>
+          </a:prstGeom>
+          <a:noFill/>
+          <a:ln/>
+        </p:spPr>
+        <p:txBody>
+          <a:bodyPr wrap="square" lIns="508" tIns="508" rIns="508" bIns="508" rtlCol="0" anchor="t">
+            <a:normAutofit/>
+            <a:spAutoFit/>
+          </a:bodyPr>
+          <a:lstStyle/>
+          <a:p>
+            <a:pPr algn="l" indent="0" marL="0">
+              <a:buNone/>
+            </a:pPr>
+            <a:r>
+              <a:rPr lang="en-US" sz="1200" dirty="0">
+                <a:solidFill>
+                  <a:srgbClr val="334155"/>
+                </a:solidFill>
+                <a:latin typeface="Calibri" pitchFamily="34" charset="0"/>
+                <a:ea typeface="Calibri" pitchFamily="34" charset="-122"/>
+                <a:cs typeface="Calibri" pitchFamily="34" charset="-120"/>
+              </a:rPr>
+              <a:t>Act/Act uses real days and a real year (governments). 30/360 assumes 30-day months and a 360-day year (corporates). CFA Example 2: the same accrual is 43/184 on one and 42/180 on the other.</a:t>
             </a:r>
             <a:endParaRPr lang="en-US" sz="1200" dirty="0"/>
           </a:p>
@@ -29706,7 +32398,7 @@
               <a:buNone/>
             </a:pPr>
             <a:r>
-              <a:rPr lang="en-US" sz="1600" b="1" dirty="0">
+              <a:rPr lang="en-US" sz="1700" b="1" dirty="0">
                 <a:solidFill>
                   <a:srgbClr val="FFFFFF"/>
                 </a:solidFill>
@@ -29714,9 +32406,9 @@
                 <a:ea typeface="Trebuchet MS" pitchFamily="34" charset="-122"/>
                 <a:cs typeface="Trebuchet MS" pitchFamily="34" charset="-120"/>
               </a:rPr>
-              <a:t>Worked — Romania 4.625% annual EUR bond settling 15 Dec 2031 at YTM 3.50% prices at EUR 107.60 full, EUR 3.23 accrued, EUR 104.37 flat</a:t>
-            </a:r>
-            <a:endParaRPr lang="en-US" sz="1600" dirty="0"/>
+              <a:t>Worked — the Romania 4.625% EUR bond settling 15 Dec 2031 at a 3.50% YTM: full price 117.635, accrued 3.235, flat price 114.400</a:t>
+            </a:r>
+            <a:endParaRPr lang="en-US" sz="1700" dirty="0"/>
           </a:p>
         </p:txBody>
       </p:sp>
@@ -29818,7 +32510,7 @@
                 <a:ea typeface="Calibri" pitchFamily="34" charset="-122"/>
                 <a:cs typeface="Calibri" pitchFamily="34" charset="-120"/>
               </a:rPr>
-              <a:t>Source: CFA Institute, Curriculum Vol 6, LM 6, §3 Example (Romania eurobond), pp. 145–148.</a:t>
+              <a:t>Source: CFA Institute, Curriculum Vol 6, LM 6, §2 Example 4 (Romania eurobond), pp. 137–138.</a:t>
             </a:r>
             <a:endParaRPr lang="en-US" sz="750" dirty="0"/>
           </a:p>
@@ -29860,7 +32552,7 @@
                 <a:ea typeface="Calibri" pitchFamily="34" charset="-122"/>
                 <a:cs typeface="Calibri" pitchFamily="34" charset="-120"/>
               </a:rPr>
-              <a:t>Previous coupon was 3 April 2031; next coupon 3 April 2032. Settlement 15 Dec 2031 sits in the middle of the coupon period.</a:t>
+              <a:t>Annual coupons on 3 April. Settlement on 15 December sits 256 days into a 366-day coupon period — 2032 is a leap year.</a:t>
             </a:r>
             <a:endParaRPr lang="en-US" sz="1300" dirty="0"/>
           </a:p>
@@ -29874,8 +32566,8 @@
         </p:nvSpPr>
         <p:spPr>
           <a:xfrm>
-            <a:off x="320040" y="1170432"/>
-            <a:ext cx="8503920" cy="2011680"/>
+            <a:off x="320040" y="1143000"/>
+            <a:ext cx="8503920" cy="2240280"/>
           </a:xfrm>
           <a:prstGeom prst="rect">
             <a:avLst/>
@@ -29899,7 +32591,7 @@
         </p:nvSpPr>
         <p:spPr>
           <a:xfrm>
-            <a:off x="457200" y="1216152"/>
+            <a:off x="457200" y="1188720"/>
             <a:ext cx="8229600" cy="256032"/>
           </a:xfrm>
           <a:prstGeom prst="rect">
@@ -29927,7 +32619,7 @@
                 <a:ea typeface="Trebuchet MS" pitchFamily="34" charset="-122"/>
                 <a:cs typeface="Trebuchet MS" pitchFamily="34" charset="-120"/>
               </a:rPr>
-              <a:t>ROMANIA 4.625% EUR ANNUAL BOND · ACT/ACT DAY COUNT</a:t>
+              <a:t>ROMANIA 4.625% EUR · ANNUAL · ACT/ACT · MATURES 3 APRIL 2049</a:t>
             </a:r>
             <a:endParaRPr lang="en-US" sz="1100" dirty="0"/>
           </a:p>
@@ -29941,7 +32633,7 @@
         </p:nvSpPr>
         <p:spPr>
           <a:xfrm>
-            <a:off x="457200" y="1508760"/>
+            <a:off x="457200" y="1481328"/>
             <a:ext cx="8229600" cy="457200"/>
           </a:xfrm>
           <a:prstGeom prst="rect">
@@ -29969,7 +32661,7 @@
                 <a:ea typeface="Calibri" pitchFamily="34" charset="-122"/>
                 <a:cs typeface="Calibri" pitchFamily="34" charset="-120"/>
               </a:rPr>
-              <a:t>Maturity 3 Apr 2049. Settlement 15 Dec 2031. YTM on settlement = 3.50%. 17 full coupons remaining.</a:t>
+              <a:t>Settlement 15 Dec 2031, YTM on that date 3.50%. Eighteen full annual coupons remain (April 2032 through April 2049).</a:t>
             </a:r>
             <a:endParaRPr lang="en-US" sz="1200" dirty="0"/>
           </a:p>
@@ -29983,8 +32675,8 @@
         </p:nvSpPr>
         <p:spPr>
           <a:xfrm>
-            <a:off x="457200" y="2020824"/>
-            <a:ext cx="8229600" cy="649224"/>
+            <a:off x="457200" y="1993392"/>
+            <a:ext cx="8229600" cy="877824"/>
           </a:xfrm>
           <a:prstGeom prst="rect">
             <a:avLst/>
@@ -30006,7 +32698,7 @@
               <a:buNone/>
             </a:pPr>
             <a:r>
-              <a:rPr lang="en-US" sz="1050" b="1" dirty="0">
+              <a:rPr lang="en-US" sz="1100" b="1" dirty="0">
                 <a:solidFill>
                   <a:srgbClr val="1B2A4A"/>
                 </a:solidFill>
@@ -30023,7 +32715,7 @@
               <a:buNone/>
             </a:pPr>
             <a:r>
-              <a:rPr lang="en-US" sz="1050" dirty="0">
+              <a:rPr lang="en-US" sz="1100" dirty="0">
                 <a:solidFill>
                   <a:srgbClr val="334155"/>
                 </a:solidFill>
@@ -30031,7 +32723,7 @@
                 <a:ea typeface="Calibri" pitchFamily="34" charset="-122"/>
                 <a:cs typeface="Calibri" pitchFamily="34" charset="-120"/>
               </a:rPr>
-              <a:t>Days since last coupon: 3 Apr 2031 → 15 Dec 2031 = 256 days. Days in coupon period = 366 (Act/Act).
+              <a:t>Price it on the LAST coupon date, 3 Apr 2031: PV = −PV(0.035, 18, 4.625, 100) = 114.838
 </a:t>
             </a:r>
             <a:pPr indent="0" marL="0">
@@ -30041,7 +32733,7 @@
               <a:buNone/>
             </a:pPr>
             <a:r>
-              <a:rPr lang="en-US" sz="1050" b="1" dirty="0">
+              <a:rPr lang="en-US" sz="1100" b="1" dirty="0">
                 <a:solidFill>
                   <a:srgbClr val="1B2A4A"/>
                 </a:solidFill>
@@ -30058,7 +32750,7 @@
               <a:buNone/>
             </a:pPr>
             <a:r>
-              <a:rPr lang="en-US" sz="1050" dirty="0">
+              <a:rPr lang="en-US" sz="1100" dirty="0">
                 <a:solidFill>
                   <a:srgbClr val="334155"/>
                 </a:solidFill>
@@ -30066,7 +32758,7 @@
                 <a:ea typeface="Calibri" pitchFamily="34" charset="-122"/>
                 <a:cs typeface="Calibri" pitchFamily="34" charset="-120"/>
               </a:rPr>
-              <a:t>Accrual fraction t/T = 256 / 366 = 0.6995.
+              <a:t>Count days: 3 Apr → 15 Dec 2031 = 256 days; full period 3 Apr 2031 → 3 Apr 2032 = 366 days
 </a:t>
             </a:r>
             <a:pPr indent="0" marL="0">
@@ -30076,7 +32768,7 @@
               <a:buNone/>
             </a:pPr>
             <a:r>
-              <a:rPr lang="en-US" sz="1050" b="1" dirty="0">
+              <a:rPr lang="en-US" sz="1100" b="1" dirty="0">
                 <a:solidFill>
                   <a:srgbClr val="1B2A4A"/>
                 </a:solidFill>
@@ -30093,7 +32785,7 @@
               <a:buNone/>
             </a:pPr>
             <a:r>
-              <a:rPr lang="en-US" sz="1050" dirty="0">
+              <a:rPr lang="en-US" sz="1100" dirty="0">
                 <a:solidFill>
                   <a:srgbClr val="334155"/>
                 </a:solidFill>
@@ -30101,7 +32793,7 @@
                 <a:ea typeface="Calibri" pitchFamily="34" charset="-122"/>
                 <a:cs typeface="Calibri" pitchFamily="34" charset="-120"/>
               </a:rPr>
-              <a:t>PV as of 3 Apr 2031 (full coupon date): price on-date = Σ 4.625 / 1.035ᵗ + 100 / 1.035¹⁷ = 114.69.
+              <a:t>Roll forward: PV_Full = 114.838 × (1.035)^(256/366) = 114.838 × 1.02435 = 117.635
 </a:t>
             </a:r>
             <a:pPr indent="0" marL="0">
@@ -30111,7 +32803,7 @@
               <a:buNone/>
             </a:pPr>
             <a:r>
-              <a:rPr lang="en-US" sz="1050" b="1" dirty="0">
+              <a:rPr lang="en-US" sz="1100" b="1" dirty="0">
                 <a:solidFill>
                   <a:srgbClr val="1B2A4A"/>
                 </a:solidFill>
@@ -30128,7 +32820,7 @@
               <a:buNone/>
             </a:pPr>
             <a:r>
-              <a:rPr lang="en-US" sz="1050" dirty="0">
+              <a:rPr lang="en-US" sz="1100" dirty="0">
                 <a:solidFill>
                   <a:srgbClr val="334155"/>
                 </a:solidFill>
@@ -30136,9 +32828,44 @@
                 <a:ea typeface="Calibri" pitchFamily="34" charset="-122"/>
                 <a:cs typeface="Calibri" pitchFamily="34" charset="-120"/>
               </a:rPr>
-              <a:t>Full price at 15 Dec: PV_Full = PV_on_date × (1.035)^0.6995 = 114.69 × 1.0244 = EUR 107.60 (incl. AI).</a:t>
-            </a:r>
-            <a:endParaRPr lang="en-US" sz="1050" dirty="0"/>
+              <a:t>Accrued interest: AI = (256/366) × 4.625 = 0.69945 × 4.625 = 3.235
+</a:t>
+            </a:r>
+            <a:pPr indent="0" marL="0">
+              <a:spcAft>
+                <a:spcPts val="200"/>
+              </a:spcAft>
+              <a:buNone/>
+            </a:pPr>
+            <a:r>
+              <a:rPr lang="en-US" sz="1100" b="1" dirty="0">
+                <a:solidFill>
+                  <a:srgbClr val="1B2A4A"/>
+                </a:solidFill>
+                <a:latin typeface="Calibri" pitchFamily="34" charset="0"/>
+                <a:ea typeface="Calibri" pitchFamily="34" charset="-122"/>
+                <a:cs typeface="Calibri" pitchFamily="34" charset="-120"/>
+              </a:rPr>
+              <a:t>5. </a:t>
+            </a:r>
+            <a:pPr indent="0" marL="0">
+              <a:spcAft>
+                <a:spcPts val="200"/>
+              </a:spcAft>
+              <a:buNone/>
+            </a:pPr>
+            <a:r>
+              <a:rPr lang="en-US" sz="1100" dirty="0">
+                <a:solidFill>
+                  <a:srgbClr val="334155"/>
+                </a:solidFill>
+                <a:latin typeface="Calibri" pitchFamily="34" charset="0"/>
+                <a:ea typeface="Calibri" pitchFamily="34" charset="-122"/>
+                <a:cs typeface="Calibri" pitchFamily="34" charset="-120"/>
+              </a:rPr>
+              <a:t>Flat (quoted) price: PV_Flat = 117.635 − 3.235 = 114.400</a:t>
+            </a:r>
+            <a:endParaRPr lang="en-US" sz="1100" dirty="0"/>
           </a:p>
         </p:txBody>
       </p:sp>
@@ -30150,7 +32877,7 @@
         </p:nvSpPr>
         <p:spPr>
           <a:xfrm>
-            <a:off x="411480" y="2743200"/>
+            <a:off x="411480" y="2944368"/>
             <a:ext cx="8321040" cy="365760"/>
           </a:xfrm>
           <a:prstGeom prst="rect">
@@ -30170,7 +32897,7 @@
         </p:nvSpPr>
         <p:spPr>
           <a:xfrm>
-            <a:off x="457200" y="2743200"/>
+            <a:off x="457200" y="2944368"/>
             <a:ext cx="8229600" cy="365760"/>
           </a:xfrm>
           <a:prstGeom prst="rect">
@@ -30198,7 +32925,7 @@
                 <a:ea typeface="Consolas" pitchFamily="34" charset="-122"/>
                 <a:cs typeface="Consolas" pitchFamily="34" charset="-120"/>
               </a:rPr>
-              <a:t>PV_Full 107.60  ·  AI = (256/366) × 4.625 = 3.23  ·  PV_Flat = 107.60 − 3.23 = 104.37</a:t>
+              <a:t>PV_Full 117.635   ·   AI 3.235   ·   PV_Flat 114.400   —   the screen shows 114.400</a:t>
             </a:r>
             <a:endParaRPr lang="en-US" sz="1150" dirty="0"/>
           </a:p>
@@ -30212,8 +32939,8 @@
         </p:nvSpPr>
         <p:spPr>
           <a:xfrm>
-            <a:off x="320040" y="3337560"/>
-            <a:ext cx="8503920" cy="960120"/>
+            <a:off x="320040" y="3474720"/>
+            <a:ext cx="8503920" cy="822960"/>
           </a:xfrm>
           <a:prstGeom prst="rect">
             <a:avLst/>
@@ -30232,8 +32959,8 @@
         </p:nvSpPr>
         <p:spPr>
           <a:xfrm>
-            <a:off x="320040" y="3337560"/>
-            <a:ext cx="73152" cy="960120"/>
+            <a:off x="320040" y="3474720"/>
+            <a:ext cx="73152" cy="822960"/>
           </a:xfrm>
           <a:prstGeom prst="rect">
             <a:avLst/>
@@ -30252,7 +32979,7 @@
         </p:nvSpPr>
         <p:spPr>
           <a:xfrm>
-            <a:off x="457200" y="3383280"/>
+            <a:off x="457200" y="3520440"/>
             <a:ext cx="8275320" cy="256032"/>
           </a:xfrm>
           <a:prstGeom prst="rect">
@@ -30280,7 +33007,7 @@
                 <a:ea typeface="Trebuchet MS" pitchFamily="34" charset="-122"/>
                 <a:cs typeface="Trebuchet MS" pitchFamily="34" charset="-120"/>
               </a:rPr>
-              <a:t>WHY THE FLAT PRICE IS THE QUOTED PRICE</a:t>
+              <a:t>WHY THE QUOTED PRICE IS THE FLAT PRICE</a:t>
             </a:r>
             <a:endParaRPr lang="en-US" sz="1100" dirty="0"/>
           </a:p>
@@ -30294,8 +33021,8 @@
         </p:nvSpPr>
         <p:spPr>
           <a:xfrm>
-            <a:off x="457200" y="3657600"/>
-            <a:ext cx="8275320" cy="594360"/>
+            <a:off x="457200" y="3794760"/>
+            <a:ext cx="8275320" cy="457200"/>
           </a:xfrm>
           <a:prstGeom prst="rect">
             <a:avLst/>
@@ -30322,7 +33049,7 @@
                 <a:ea typeface="Calibri" pitchFamily="34" charset="-122"/>
                 <a:cs typeface="Calibri" pitchFamily="34" charset="-120"/>
               </a:rPr>
-              <a:t>On the day after each coupon the quoted price in a stable-yield world is unchanged — accrued interest resets to 0 and the seller's claim on the next coupon is gone. Without this convention, quoted prices would mechanically climb every day between coupons.</a:t>
+              <a:t>In a world with an unchanged yield, the flat price barely moves across the coupon date while the full price falls by the whole coupon. Quoting flat means a change in the number means something.</a:t>
             </a:r>
             <a:endParaRPr lang="en-US" sz="1200" dirty="0"/>
           </a:p>
